--- a/law-econ/downloads/slides/ch06_intellectual_property_innovation_and_information_goods.pptx
+++ b/law-econ/downloads/slides/ch06_intellectual_property_innovation_and_information_goods.pptx
@@ -2,36 +2,38 @@
 <file path=ppt/presentation.xml><?xml version="1.0" encoding="utf-8"?>
 <p:presentation xmlns:p="http://schemas.openxmlformats.org/presentationml/2006/main">
   <p:sldMasterIdLst>
-    <p:sldMasterId xmlns:r="http://schemas.openxmlformats.org/officeDocument/2006/relationships" id="2147483648" r:id="Rba44bb3be87348b5"/>
+    <p:sldMasterId xmlns:r="http://schemas.openxmlformats.org/officeDocument/2006/relationships" id="2147483648" r:id="Rfa4d488d8dce43fe"/>
   </p:sldMasterIdLst>
   <p:notesMasterIdLst>
-    <p:notesMasterId xmlns:r="http://schemas.openxmlformats.org/officeDocument/2006/relationships" r:id="R4de6164a38e44a62"/>
+    <p:notesMasterId xmlns:r="http://schemas.openxmlformats.org/officeDocument/2006/relationships" r:id="R6230d76769934ca7"/>
   </p:notesMasterIdLst>
   <p:sldIdLst>
-    <p:sldId xmlns:r="http://schemas.openxmlformats.org/officeDocument/2006/relationships" id="256" r:id="R8584c421225049d4"/>
-    <p:sldId xmlns:r="http://schemas.openxmlformats.org/officeDocument/2006/relationships" id="257" r:id="Rb1da8b722e804f40"/>
-    <p:sldId xmlns:r="http://schemas.openxmlformats.org/officeDocument/2006/relationships" id="258" r:id="Rf1e5e93502a544ae"/>
-    <p:sldId xmlns:r="http://schemas.openxmlformats.org/officeDocument/2006/relationships" id="259" r:id="Ra4fc0a2ac1fb4d99"/>
-    <p:sldId xmlns:r="http://schemas.openxmlformats.org/officeDocument/2006/relationships" id="260" r:id="Rfd38878238ab47b9"/>
-    <p:sldId xmlns:r="http://schemas.openxmlformats.org/officeDocument/2006/relationships" id="261" r:id="R5a7bac3e310542e2"/>
-    <p:sldId xmlns:r="http://schemas.openxmlformats.org/officeDocument/2006/relationships" id="262" r:id="Rdc24e0b212a74d68"/>
-    <p:sldId xmlns:r="http://schemas.openxmlformats.org/officeDocument/2006/relationships" id="263" r:id="R1ce72e984e33401f"/>
-    <p:sldId xmlns:r="http://schemas.openxmlformats.org/officeDocument/2006/relationships" id="264" r:id="R175e1a56d7c24b6b"/>
-    <p:sldId xmlns:r="http://schemas.openxmlformats.org/officeDocument/2006/relationships" id="265" r:id="Rc2a1a857879149ef"/>
-    <p:sldId xmlns:r="http://schemas.openxmlformats.org/officeDocument/2006/relationships" id="266" r:id="R7ba33ffc3cec432d"/>
-    <p:sldId xmlns:r="http://schemas.openxmlformats.org/officeDocument/2006/relationships" id="267" r:id="R5beccd2fe46d4a0f"/>
-    <p:sldId xmlns:r="http://schemas.openxmlformats.org/officeDocument/2006/relationships" id="268" r:id="Re5472fd9e1854680"/>
-    <p:sldId xmlns:r="http://schemas.openxmlformats.org/officeDocument/2006/relationships" id="269" r:id="R203d73691b9c4c85"/>
-    <p:sldId xmlns:r="http://schemas.openxmlformats.org/officeDocument/2006/relationships" id="270" r:id="R5f1bfa57b57a49d8"/>
-    <p:sldId xmlns:r="http://schemas.openxmlformats.org/officeDocument/2006/relationships" id="271" r:id="R28fbafae0b274760"/>
-    <p:sldId xmlns:r="http://schemas.openxmlformats.org/officeDocument/2006/relationships" id="272" r:id="R12f43183606d4aa3"/>
-    <p:sldId xmlns:r="http://schemas.openxmlformats.org/officeDocument/2006/relationships" id="273" r:id="Rc21dc3075aae4f45"/>
-    <p:sldId xmlns:r="http://schemas.openxmlformats.org/officeDocument/2006/relationships" id="274" r:id="Rab40f8ed47f14edd"/>
-    <p:sldId xmlns:r="http://schemas.openxmlformats.org/officeDocument/2006/relationships" id="275" r:id="Rd9a494fbe4f84b38"/>
-    <p:sldId xmlns:r="http://schemas.openxmlformats.org/officeDocument/2006/relationships" id="276" r:id="Rec7cb8befed64b76"/>
-    <p:sldId xmlns:r="http://schemas.openxmlformats.org/officeDocument/2006/relationships" id="277" r:id="Re2164d96126646b1"/>
-    <p:sldId xmlns:r="http://schemas.openxmlformats.org/officeDocument/2006/relationships" id="278" r:id="Ra13570a305214776"/>
-    <p:sldId xmlns:r="http://schemas.openxmlformats.org/officeDocument/2006/relationships" id="279" r:id="Rc909b3c31fe446d8"/>
+    <p:sldId xmlns:r="http://schemas.openxmlformats.org/officeDocument/2006/relationships" id="256" r:id="Rff66ca5f4cc9496f"/>
+    <p:sldId xmlns:r="http://schemas.openxmlformats.org/officeDocument/2006/relationships" id="257" r:id="Rcaac817837984ede"/>
+    <p:sldId xmlns:r="http://schemas.openxmlformats.org/officeDocument/2006/relationships" id="258" r:id="Rf5e3b92ba0e24949"/>
+    <p:sldId xmlns:r="http://schemas.openxmlformats.org/officeDocument/2006/relationships" id="259" r:id="R885e7f4b4bc6415b"/>
+    <p:sldId xmlns:r="http://schemas.openxmlformats.org/officeDocument/2006/relationships" id="260" r:id="R15066951bf4f40b5"/>
+    <p:sldId xmlns:r="http://schemas.openxmlformats.org/officeDocument/2006/relationships" id="261" r:id="R35585311c09343f4"/>
+    <p:sldId xmlns:r="http://schemas.openxmlformats.org/officeDocument/2006/relationships" id="262" r:id="Rc097cc9fd0594d28"/>
+    <p:sldId xmlns:r="http://schemas.openxmlformats.org/officeDocument/2006/relationships" id="263" r:id="R670d6b9ef40e45f8"/>
+    <p:sldId xmlns:r="http://schemas.openxmlformats.org/officeDocument/2006/relationships" id="264" r:id="R631bc281fde64a95"/>
+    <p:sldId xmlns:r="http://schemas.openxmlformats.org/officeDocument/2006/relationships" id="265" r:id="R180b2ca29207467e"/>
+    <p:sldId xmlns:r="http://schemas.openxmlformats.org/officeDocument/2006/relationships" id="266" r:id="Rd690a59463204e65"/>
+    <p:sldId xmlns:r="http://schemas.openxmlformats.org/officeDocument/2006/relationships" id="267" r:id="R9035529c11b74f1d"/>
+    <p:sldId xmlns:r="http://schemas.openxmlformats.org/officeDocument/2006/relationships" id="268" r:id="Rae96379d697c4837"/>
+    <p:sldId xmlns:r="http://schemas.openxmlformats.org/officeDocument/2006/relationships" id="269" r:id="Reed384a38a6c41c3"/>
+    <p:sldId xmlns:r="http://schemas.openxmlformats.org/officeDocument/2006/relationships" id="270" r:id="R812ad8707d244242"/>
+    <p:sldId xmlns:r="http://schemas.openxmlformats.org/officeDocument/2006/relationships" id="271" r:id="Re5c1bbc21bf84b5f"/>
+    <p:sldId xmlns:r="http://schemas.openxmlformats.org/officeDocument/2006/relationships" id="272" r:id="Rcedb91b7b5ea4b8c"/>
+    <p:sldId xmlns:r="http://schemas.openxmlformats.org/officeDocument/2006/relationships" id="273" r:id="Rc42def75b0824acd"/>
+    <p:sldId xmlns:r="http://schemas.openxmlformats.org/officeDocument/2006/relationships" id="274" r:id="Rd3fbd3bd02ef414a"/>
+    <p:sldId xmlns:r="http://schemas.openxmlformats.org/officeDocument/2006/relationships" id="275" r:id="Re9d88106afae41e2"/>
+    <p:sldId xmlns:r="http://schemas.openxmlformats.org/officeDocument/2006/relationships" id="276" r:id="R2c5fb5de7efb4bac"/>
+    <p:sldId xmlns:r="http://schemas.openxmlformats.org/officeDocument/2006/relationships" id="277" r:id="Rd8c1ed326ac34ce3"/>
+    <p:sldId xmlns:r="http://schemas.openxmlformats.org/officeDocument/2006/relationships" id="278" r:id="Reb95b1ea8bea465f"/>
+    <p:sldId xmlns:r="http://schemas.openxmlformats.org/officeDocument/2006/relationships" id="279" r:id="Rd7274bd482f047e3"/>
+    <p:sldId xmlns:r="http://schemas.openxmlformats.org/officeDocument/2006/relationships" id="280" r:id="R5ff5c4ac06d9464f"/>
+    <p:sldId xmlns:r="http://schemas.openxmlformats.org/officeDocument/2006/relationships" id="281" r:id="R7b4d00d0feb34206"/>
   </p:sldIdLst>
   <p:sldSz cx="12192000" cy="6858000"/>
   <p:notesSz cx="6858000" cy="9144000"/>
@@ -1700,7 +1702,7 @@
           <a:lstStyle xmlns:a="http://schemas.openxmlformats.org/drawingml/2006/main"/>
           <a:p xmlns:a="http://schemas.openxmlformats.org/drawingml/2006/main">
             <a:r>
-              <a:t>Use a generic style example rather than the earlier Ghibli reference. The point is to separate economic effect from current doctrinal categories and then analyze the consequences of changing the boundary.</a:t>
+              <a:t>Allow 3 minutes. These numbers are invented, and the need for 1,000 separate permissions is an assumption, not a statement that all AI training legally requires consent. Distinguish the $1,000 transfer from $20,000 of resources used to find owners, verify authority, and process agreements. Royalties still affect creator incentives and developer choices. Recall Chapter 5's redevelopment and oil-pool assembly problems. If several independently controlled permissions are needed together, separate vetoes can block a valuable combination. The arithmetic illustrates routine transaction costs, not strategic holdout by itself. Many replaceable works do not automatically constitute an anticommons. Ask whether removing the royalty would eliminate the clearance problem. It would not. Link back to Demsetz: greater value from combining resources need not call for stronger individual exclusion.</a:t>
             </a:r>
           </a:p>
           <a:p xmlns:a="http://schemas.openxmlformats.org/drawingml/2006/main">
@@ -1721,6 +1723,21 @@
           <a:p xmlns:a="http://schemas.openxmlformats.org/drawingml/2006/main">
             <a:r>
               <a:t>- Law and Economics project evidence ledger: evidence/ch06_intellectual_property_innovation_and_information_goods.md.</a:t>
+            </a:r>
+          </a:p>
+          <a:p xmlns:a="http://schemas.openxmlformats.org/drawingml/2006/main">
+            <a:r>
+              <a:t>- Chapter 5: Commons and Anticommons; Demsetz and Institutional Evolution.</a:t>
+            </a:r>
+          </a:p>
+          <a:p xmlns:a="http://schemas.openxmlformats.org/drawingml/2006/main">
+            <a:r>
+              <a:t>- Buchanan and Yoon (2000), Symmetric Tragedies: Commons and Anticommons, https://doi.org/10.1086/467445.</a:t>
+            </a:r>
+          </a:p>
+          <a:p xmlns:a="http://schemas.openxmlformats.org/drawingml/2006/main">
+            <a:r>
+              <a:t>- Project-authored hypothetical adapted from Mark Wilson, AI Training, Copyright, and the Costs of Exclusion, early draft dated 2026-09-27. No empirical cost estimates.</a:t>
             </a:r>
           </a:p>
           <a:p xmlns:a="http://schemas.openxmlformats.org/drawingml/2006/main">
@@ -1795,7 +1812,7 @@
           <a:lstStyle xmlns:a="http://schemas.openxmlformats.org/drawingml/2006/main"/>
           <a:p xmlns:a="http://schemas.openxmlformats.org/drawingml/2006/main">
             <a:r>
-              <a:t>Students should be able to move from the innovation problem to a bounded institution without saying merely ‘more protection’ or ‘information should be free.’</a:t>
+              <a:t>Allow 2-4 minutes. These are institutional alternatives, not four interchangeable descriptions of current AI law. Collective licensing is voluntary coordination among represented owners; outsiders' rights do not disappear. A proposed compensated-access rule would authorize a defined use subject to a payment obligation, replacing individual vetoes without eliminating compensation. A defined exception removes both requirements for the covered use. Merges emphasizes that owners can build institutions that reduce transaction costs, so do not jump from fragmented rights to mandatory licensing. Collective coverage can be incomplete; aggregation can create market power. Administered payments require rate-setting, records, and distribution. Payments to publishers or platforms need not reach creators in the same amounts. Ask which future activity is encouraged, who receives the money, and which arrangement has the lowest total cost. Quick discussion: if the hypothetical collective lowers administration from $20,000 to $2,000 while leaving royalties unchanged, it saves $18,000 in resources. Why might coverage or creator incentives still be a problem?</a:t>
             </a:r>
           </a:p>
           <a:p xmlns:a="http://schemas.openxmlformats.org/drawingml/2006/main">
@@ -1816,6 +1833,21 @@
           <a:p xmlns:a="http://schemas.openxmlformats.org/drawingml/2006/main">
             <a:r>
               <a:t>- Law and Economics project evidence ledger: evidence/ch06_intellectual_property_innovation_and_information_goods.md.</a:t>
+            </a:r>
+          </a:p>
+          <a:p xmlns:a="http://schemas.openxmlformats.org/drawingml/2006/main">
+            <a:r>
+              <a:t>- Merges (1996), Contracting into Liability Rules: Intellectual Property Rights and Collective Rights Organizations, https://doi.org/10.2307/3480996.</a:t>
+            </a:r>
+          </a:p>
+          <a:p xmlns:a="http://schemas.openxmlformats.org/drawingml/2006/main">
+            <a:r>
+              <a:t>- U.S. Copyright Office, Copyright and Artificial Intelligence, Part 3: Generative AI Training, pre-publication report, https://www.copyright.gov/ai/.</a:t>
+            </a:r>
+          </a:p>
+          <a:p xmlns:a="http://schemas.openxmlformats.org/drawingml/2006/main">
+            <a:r>
+              <a:t>- Mark Wilson, AI Training, Copyright, and the Costs of Exclusion, early draft dated 2026-09-27; institutional comparison adapted for undergraduate teaching.</a:t>
             </a:r>
           </a:p>
           <a:p xmlns:a="http://schemas.openxmlformats.org/drawingml/2006/main">
@@ -1890,7 +1922,7 @@
           <a:lstStyle xmlns:a="http://schemas.openxmlformats.org/drawingml/2006/main"/>
           <a:p xmlns:a="http://schemas.openxmlformats.org/drawingml/2006/main">
             <a:r>
-              <a:t>Use this as an invitation to students with economics backgrounds. The field rewards careful distinction among incentives, boundaries, business models, and institutional capacity.</a:t>
+              <a:t>Use a generic style example rather than the earlier Ghibli reference. The point is to separate economic effect from current doctrinal categories and then analyze the consequences of changing the boundary.</a:t>
             </a:r>
           </a:p>
           <a:p xmlns:a="http://schemas.openxmlformats.org/drawingml/2006/main">
@@ -1946,6 +1978,196 @@
 </file>
 
 <file path=ppt/notesSlides/notesSlide24.xml><?xml version="1.0" encoding="utf-8"?>
+<p:notes xmlns:p="http://schemas.openxmlformats.org/presentationml/2006/main">
+  <p:cSld>
+    <p:spTree>
+      <p:nvGrpSpPr>
+        <p:cNvPr id="1" name=""/>
+        <p:cNvGrpSpPr/>
+        <p:nvPr/>
+      </p:nvGrpSpPr>
+      <p:grpSpPr>
+        <a:xfrm xmlns:a="http://schemas.openxmlformats.org/drawingml/2006/main"/>
+      </p:grpSpPr>
+      <p:sp>
+        <p:nvSpPr>
+          <p:cNvPr id="2" name="Slide Image Placeholder 1"/>
+          <p:cNvSpPr>
+            <a:spLocks xmlns:a="http://schemas.openxmlformats.org/drawingml/2006/main" noGrp="1"/>
+          </p:cNvSpPr>
+          <p:nvPr>
+            <p:ph type="sldImg" idx="0"/>
+          </p:nvPr>
+        </p:nvSpPr>
+        <p:spPr/>
+      </p:sp>
+      <p:sp>
+        <p:nvSpPr>
+          <p:cNvPr id="3" name="Notes Placeholder 2"/>
+          <p:cNvSpPr>
+            <a:spLocks xmlns:a="http://schemas.openxmlformats.org/drawingml/2006/main" noGrp="1"/>
+          </p:cNvSpPr>
+          <p:nvPr>
+            <p:ph type="body" idx="1"/>
+          </p:nvPr>
+        </p:nvSpPr>
+        <p:spPr/>
+        <p:txBody>
+          <a:bodyPr xmlns:a="http://schemas.openxmlformats.org/drawingml/2006/main"/>
+          <a:lstStyle xmlns:a="http://schemas.openxmlformats.org/drawingml/2006/main"/>
+          <a:p xmlns:a="http://schemas.openxmlformats.org/drawingml/2006/main">
+            <a:r>
+              <a:t>Students should be able to move from the innovation problem to a bounded institution without saying merely ‘more protection’ or ‘information should be free.’</a:t>
+            </a:r>
+          </a:p>
+          <a:p xmlns:a="http://schemas.openxmlformats.org/drawingml/2006/main">
+            <a:r>
+              <a:t/>
+            </a:r>
+          </a:p>
+          <a:p xmlns:a="http://schemas.openxmlformats.org/drawingml/2006/main">
+            <a:r>
+              <a:t>[Sources]</a:t>
+            </a:r>
+          </a:p>
+          <a:p xmlns:a="http://schemas.openxmlformats.org/drawingml/2006/main">
+            <a:r>
+              <a:t>- Rules, Rights, and Runtimes, Chapter 6: Intellectual Property, Innovation, and Information Goods (canonical project draft).</a:t>
+            </a:r>
+          </a:p>
+          <a:p xmlns:a="http://schemas.openxmlformats.org/drawingml/2006/main">
+            <a:r>
+              <a:t>- Law and Economics project evidence ledger: evidence/ch06_intellectual_property_innovation_and_information_goods.md.</a:t>
+            </a:r>
+          </a:p>
+          <a:p xmlns:a="http://schemas.openxmlformats.org/drawingml/2006/main">
+            <a:r>
+              <a:t>[/Sources]</a:t>
+            </a:r>
+          </a:p>
+        </p:txBody>
+      </p:sp>
+      <p:sp>
+        <p:nvSpPr>
+          <p:cNvPr id="4" name="Slide Number Placeholder 3"/>
+          <p:cNvSpPr>
+            <a:spLocks xmlns:a="http://schemas.openxmlformats.org/drawingml/2006/main" noGrp="1"/>
+          </p:cNvSpPr>
+          <p:nvPr>
+            <p:ph type="sldNum" idx="5"/>
+          </p:nvPr>
+        </p:nvSpPr>
+        <p:spPr/>
+        <p:txBody>
+          <a:bodyPr xmlns:a="http://schemas.openxmlformats.org/drawingml/2006/main"/>
+          <a:lstStyle xmlns:a="http://schemas.openxmlformats.org/drawingml/2006/main"/>
+          <a:p xmlns:a="http://schemas.openxmlformats.org/drawingml/2006/main"/>
+        </p:txBody>
+      </p:sp>
+    </p:spTree>
+  </p:cSld>
+  <p:clrMapOvr>
+    <a:masterClrMapping xmlns:a="http://schemas.openxmlformats.org/drawingml/2006/main"/>
+  </p:clrMapOvr>
+</p:notes>
+</file>
+
+<file path=ppt/notesSlides/notesSlide25.xml><?xml version="1.0" encoding="utf-8"?>
+<p:notes xmlns:p="http://schemas.openxmlformats.org/presentationml/2006/main">
+  <p:cSld>
+    <p:spTree>
+      <p:nvGrpSpPr>
+        <p:cNvPr id="1" name=""/>
+        <p:cNvGrpSpPr/>
+        <p:nvPr/>
+      </p:nvGrpSpPr>
+      <p:grpSpPr>
+        <a:xfrm xmlns:a="http://schemas.openxmlformats.org/drawingml/2006/main"/>
+      </p:grpSpPr>
+      <p:sp>
+        <p:nvSpPr>
+          <p:cNvPr id="2" name="Slide Image Placeholder 1"/>
+          <p:cNvSpPr>
+            <a:spLocks xmlns:a="http://schemas.openxmlformats.org/drawingml/2006/main" noGrp="1"/>
+          </p:cNvSpPr>
+          <p:nvPr>
+            <p:ph type="sldImg" idx="0"/>
+          </p:nvPr>
+        </p:nvSpPr>
+        <p:spPr/>
+      </p:sp>
+      <p:sp>
+        <p:nvSpPr>
+          <p:cNvPr id="3" name="Notes Placeholder 2"/>
+          <p:cNvSpPr>
+            <a:spLocks xmlns:a="http://schemas.openxmlformats.org/drawingml/2006/main" noGrp="1"/>
+          </p:cNvSpPr>
+          <p:nvPr>
+            <p:ph type="body" idx="1"/>
+          </p:nvPr>
+        </p:nvSpPr>
+        <p:spPr/>
+        <p:txBody>
+          <a:bodyPr xmlns:a="http://schemas.openxmlformats.org/drawingml/2006/main"/>
+          <a:lstStyle xmlns:a="http://schemas.openxmlformats.org/drawingml/2006/main"/>
+          <a:p xmlns:a="http://schemas.openxmlformats.org/drawingml/2006/main">
+            <a:r>
+              <a:t>Use this as an invitation to students with economics backgrounds. The field rewards careful distinction among incentives, boundaries, business models, and institutional capacity.</a:t>
+            </a:r>
+          </a:p>
+          <a:p xmlns:a="http://schemas.openxmlformats.org/drawingml/2006/main">
+            <a:r>
+              <a:t/>
+            </a:r>
+          </a:p>
+          <a:p xmlns:a="http://schemas.openxmlformats.org/drawingml/2006/main">
+            <a:r>
+              <a:t>[Sources]</a:t>
+            </a:r>
+          </a:p>
+          <a:p xmlns:a="http://schemas.openxmlformats.org/drawingml/2006/main">
+            <a:r>
+              <a:t>- Rules, Rights, and Runtimes, Chapter 6: Intellectual Property, Innovation, and Information Goods (canonical project draft).</a:t>
+            </a:r>
+          </a:p>
+          <a:p xmlns:a="http://schemas.openxmlformats.org/drawingml/2006/main">
+            <a:r>
+              <a:t>- Law and Economics project evidence ledger: evidence/ch06_intellectual_property_innovation_and_information_goods.md.</a:t>
+            </a:r>
+          </a:p>
+          <a:p xmlns:a="http://schemas.openxmlformats.org/drawingml/2006/main">
+            <a:r>
+              <a:t>[/Sources]</a:t>
+            </a:r>
+          </a:p>
+        </p:txBody>
+      </p:sp>
+      <p:sp>
+        <p:nvSpPr>
+          <p:cNvPr id="4" name="Slide Number Placeholder 3"/>
+          <p:cNvSpPr>
+            <a:spLocks xmlns:a="http://schemas.openxmlformats.org/drawingml/2006/main" noGrp="1"/>
+          </p:cNvSpPr>
+          <p:nvPr>
+            <p:ph type="sldNum" idx="5"/>
+          </p:nvPr>
+        </p:nvSpPr>
+        <p:spPr/>
+        <p:txBody>
+          <a:bodyPr xmlns:a="http://schemas.openxmlformats.org/drawingml/2006/main"/>
+          <a:lstStyle xmlns:a="http://schemas.openxmlformats.org/drawingml/2006/main"/>
+          <a:p xmlns:a="http://schemas.openxmlformats.org/drawingml/2006/main"/>
+        </p:txBody>
+      </p:sp>
+    </p:spTree>
+  </p:cSld>
+  <p:clrMapOvr>
+    <a:masterClrMapping xmlns:a="http://schemas.openxmlformats.org/drawingml/2006/main"/>
+  </p:clrMapOvr>
+</p:notes>
+</file>
+
+<file path=ppt/notesSlides/notesSlide26.xml><?xml version="1.0" encoding="utf-8"?>
 <p:notes xmlns:p="http://schemas.openxmlformats.org/presentationml/2006/main">
   <p:cSld>
     <p:spTree>
@@ -2743,7 +2965,7 @@
   </p:cSld>
   <p:clrMap bg1="lt1" tx1="dk1" bg2="lt2" tx2="dk2" accent1="accent1" accent2="accent2" accent3="accent3" accent4="accent4" accent5="accent5" accent6="accent6" hlink="hlink" folHlink="folHlink"/>
   <p:sldLayoutIdLst>
-    <p:sldLayoutId xmlns:r="http://schemas.openxmlformats.org/officeDocument/2006/relationships" id="2147483649" r:id="R126c36dd1391425e"/>
+    <p:sldLayoutId xmlns:r="http://schemas.openxmlformats.org/officeDocument/2006/relationships" id="2147483649" r:id="R9e8e7e10a1c444f1"/>
   </p:sldLayoutIdLst>
   <p:txStyles>
     <p:titleStyle>
@@ -3294,7 +3516,7 @@
           <p:cNvPr id="12" name="">
             <a:extLst xmlns:a="http://schemas.openxmlformats.org/drawingml/2006/main">
               <a:ext uri="{FF2B5EF4-FFF2-40B4-BE49-F238E27FC236}">
-                <a16:creationId xmlns:a16="http://schemas.microsoft.com/office/drawing/2014/main" id="{F601194C-E1D4-4F1E-9E62-3075D9C5C62B}"/>
+                <a16:creationId xmlns:a16="http://schemas.microsoft.com/office/drawing/2014/main" id="{6E6FFF27-B193-458E-B33C-6A936B323309}"/>
               </a:ext>
             </a:extLst>
           </p:cNvPr>
@@ -3325,7 +3547,7 @@
           <p:cNvPr id="2" name="">
             <a:extLst xmlns:a="http://schemas.openxmlformats.org/drawingml/2006/main">
               <a:ext uri="{FF2B5EF4-FFF2-40B4-BE49-F238E27FC236}">
-                <a16:creationId xmlns:a16="http://schemas.microsoft.com/office/drawing/2014/main" id="{297E08E2-B4F9-461A-A43B-30D2CBBC7A52}"/>
+                <a16:creationId xmlns:a16="http://schemas.microsoft.com/office/drawing/2014/main" id="{ED39B1B7-622D-4964-8548-42F8939A62AB}"/>
               </a:ext>
             </a:extLst>
           </p:cNvPr>
@@ -3387,7 +3609,7 @@
           <p:cNvPr id="3" name="">
             <a:extLst xmlns:a="http://schemas.openxmlformats.org/drawingml/2006/main">
               <a:ext uri="{FF2B5EF4-FFF2-40B4-BE49-F238E27FC236}">
-                <a16:creationId xmlns:a16="http://schemas.microsoft.com/office/drawing/2014/main" id="{C92BD944-DA4A-496C-9792-AE8B34A88777}"/>
+                <a16:creationId xmlns:a16="http://schemas.microsoft.com/office/drawing/2014/main" id="{7585D7EB-A77B-42BD-AAE4-F1F090E94F8C}"/>
               </a:ext>
             </a:extLst>
           </p:cNvPr>
@@ -3449,7 +3671,7 @@
           <p:cNvPr id="4" name="">
             <a:extLst xmlns:a="http://schemas.openxmlformats.org/drawingml/2006/main">
               <a:ext uri="{FF2B5EF4-FFF2-40B4-BE49-F238E27FC236}">
-                <a16:creationId xmlns:a16="http://schemas.microsoft.com/office/drawing/2014/main" id="{9084AD2F-385A-403D-88BF-80032E13CC50}"/>
+                <a16:creationId xmlns:a16="http://schemas.microsoft.com/office/drawing/2014/main" id="{7FB54F18-F79D-410B-9FBD-797577969AEB}"/>
               </a:ext>
             </a:extLst>
           </p:cNvPr>
@@ -3511,7 +3733,7 @@
           <p:cNvPr id="5" name="">
             <a:extLst xmlns:a="http://schemas.openxmlformats.org/drawingml/2006/main">
               <a:ext uri="{FF2B5EF4-FFF2-40B4-BE49-F238E27FC236}">
-                <a16:creationId xmlns:a16="http://schemas.microsoft.com/office/drawing/2014/main" id="{BF2709E7-5EB6-4F69-A4C4-A0CF908453F6}"/>
+                <a16:creationId xmlns:a16="http://schemas.microsoft.com/office/drawing/2014/main" id="{64886446-869E-4F12-AFAD-8170DABA8285}"/>
               </a:ext>
             </a:extLst>
           </p:cNvPr>
@@ -3573,7 +3795,7 @@
           <p:cNvPr id="6" name="">
             <a:extLst xmlns:a="http://schemas.openxmlformats.org/drawingml/2006/main">
               <a:ext uri="{FF2B5EF4-FFF2-40B4-BE49-F238E27FC236}">
-                <a16:creationId xmlns:a16="http://schemas.microsoft.com/office/drawing/2014/main" id="{6E38ADE4-B4EA-462D-AA74-D3DBE4AFDE15}"/>
+                <a16:creationId xmlns:a16="http://schemas.microsoft.com/office/drawing/2014/main" id="{57161ABB-C199-4C52-8859-D462780F1687}"/>
               </a:ext>
             </a:extLst>
           </p:cNvPr>
@@ -3604,7 +3826,7 @@
           <p:cNvPr id="7" name="">
             <a:extLst xmlns:a="http://schemas.openxmlformats.org/drawingml/2006/main">
               <a:ext uri="{FF2B5EF4-FFF2-40B4-BE49-F238E27FC236}">
-                <a16:creationId xmlns:a16="http://schemas.microsoft.com/office/drawing/2014/main" id="{BA71D355-C167-4A63-8DF7-14D25D773E7A}"/>
+                <a16:creationId xmlns:a16="http://schemas.microsoft.com/office/drawing/2014/main" id="{BB636BC9-E3B1-400B-BA6B-29FB1BC1E1F0}"/>
               </a:ext>
             </a:extLst>
           </p:cNvPr>
@@ -3666,7 +3888,7 @@
           <p:cNvPr id="8" name="">
             <a:extLst xmlns:a="http://schemas.openxmlformats.org/drawingml/2006/main">
               <a:ext uri="{FF2B5EF4-FFF2-40B4-BE49-F238E27FC236}">
-                <a16:creationId xmlns:a16="http://schemas.microsoft.com/office/drawing/2014/main" id="{12158579-690F-4FC5-8D33-21A750DFDF6D}"/>
+                <a16:creationId xmlns:a16="http://schemas.microsoft.com/office/drawing/2014/main" id="{CDE663D8-9EED-47BD-BB13-722A1AE08FAC}"/>
               </a:ext>
             </a:extLst>
           </p:cNvPr>
@@ -3697,7 +3919,7 @@
           <p:cNvPr id="9" name="">
             <a:extLst xmlns:a="http://schemas.openxmlformats.org/drawingml/2006/main">
               <a:ext uri="{FF2B5EF4-FFF2-40B4-BE49-F238E27FC236}">
-                <a16:creationId xmlns:a16="http://schemas.microsoft.com/office/drawing/2014/main" id="{62DD8448-6CC9-4CED-A94C-3975A89CC395}"/>
+                <a16:creationId xmlns:a16="http://schemas.microsoft.com/office/drawing/2014/main" id="{0FD5CD0C-7612-4C77-9955-39CA37FE2FC2}"/>
               </a:ext>
             </a:extLst>
           </p:cNvPr>
@@ -3759,7 +3981,7 @@
           <p:cNvPr id="10" name="">
             <a:extLst xmlns:a="http://schemas.openxmlformats.org/drawingml/2006/main">
               <a:ext uri="{FF2B5EF4-FFF2-40B4-BE49-F238E27FC236}">
-                <a16:creationId xmlns:a16="http://schemas.microsoft.com/office/drawing/2014/main" id="{29CFFC61-220E-4864-BFD1-E1169C95B5D0}"/>
+                <a16:creationId xmlns:a16="http://schemas.microsoft.com/office/drawing/2014/main" id="{3933AD01-3BD9-4B7D-8EAD-E21A9A0F97D2}"/>
               </a:ext>
             </a:extLst>
           </p:cNvPr>
@@ -3790,7 +4012,7 @@
           <p:cNvPr id="11" name="">
             <a:extLst xmlns:a="http://schemas.openxmlformats.org/drawingml/2006/main">
               <a:ext uri="{FF2B5EF4-FFF2-40B4-BE49-F238E27FC236}">
-                <a16:creationId xmlns:a16="http://schemas.microsoft.com/office/drawing/2014/main" id="{90288D9D-9911-430C-A2CD-14FA6477D14E}"/>
+                <a16:creationId xmlns:a16="http://schemas.microsoft.com/office/drawing/2014/main" id="{FBAFFA4C-3FAF-4A82-BE73-94D14BE044F6}"/>
               </a:ext>
             </a:extLst>
           </p:cNvPr>
@@ -3850,7 +4072,7 @@
     </p:spTree>
     <p:extLst>
       <p:ext uri="{BB962C8B-B14F-4D97-AF65-F5344CB8AC3E}">
-        <p14:creationId xmlns:p14="http://schemas.microsoft.com/office/powerpoint/2010/main" val="1710074036"/>
+        <p14:creationId xmlns:p14="http://schemas.microsoft.com/office/powerpoint/2010/main" val="156882334"/>
       </p:ext>
     </p:extLst>
   </p:cSld>
@@ -3881,7 +4103,7 @@
           <p:cNvPr id="9" name="">
             <a:extLst xmlns:a="http://schemas.openxmlformats.org/drawingml/2006/main">
               <a:ext uri="{FF2B5EF4-FFF2-40B4-BE49-F238E27FC236}">
-                <a16:creationId xmlns:a16="http://schemas.microsoft.com/office/drawing/2014/main" id="{83024291-1552-4FBD-AD04-BBC29D131E4E}"/>
+                <a16:creationId xmlns:a16="http://schemas.microsoft.com/office/drawing/2014/main" id="{212F35CB-6CAD-479C-B0A1-EEE9E3AF3434}"/>
               </a:ext>
             </a:extLst>
           </p:cNvPr>
@@ -3912,7 +4134,7 @@
           <p:cNvPr id="2" name="">
             <a:extLst xmlns:a="http://schemas.openxmlformats.org/drawingml/2006/main">
               <a:ext uri="{FF2B5EF4-FFF2-40B4-BE49-F238E27FC236}">
-                <a16:creationId xmlns:a16="http://schemas.microsoft.com/office/drawing/2014/main" id="{800F54DB-D31C-48E6-84E9-945EA09A8DE4}"/>
+                <a16:creationId xmlns:a16="http://schemas.microsoft.com/office/drawing/2014/main" id="{FD01EA5E-A190-4072-9F0A-0F017CE8894A}"/>
               </a:ext>
             </a:extLst>
           </p:cNvPr>
@@ -3974,7 +4196,7 @@
           <p:cNvPr id="3" name="">
             <a:extLst xmlns:a="http://schemas.openxmlformats.org/drawingml/2006/main">
               <a:ext uri="{FF2B5EF4-FFF2-40B4-BE49-F238E27FC236}">
-                <a16:creationId xmlns:a16="http://schemas.microsoft.com/office/drawing/2014/main" id="{A14CA105-173E-4783-86CD-FE9648A59C08}"/>
+                <a16:creationId xmlns:a16="http://schemas.microsoft.com/office/drawing/2014/main" id="{71C79402-011C-4600-806D-22802D6DC15F}"/>
               </a:ext>
             </a:extLst>
           </p:cNvPr>
@@ -4036,7 +4258,7 @@
           <p:cNvPr id="4" name="">
             <a:extLst xmlns:a="http://schemas.openxmlformats.org/drawingml/2006/main">
               <a:ext uri="{FF2B5EF4-FFF2-40B4-BE49-F238E27FC236}">
-                <a16:creationId xmlns:a16="http://schemas.microsoft.com/office/drawing/2014/main" id="{DC2500DD-B1C4-4635-A712-ECB13D57AB68}"/>
+                <a16:creationId xmlns:a16="http://schemas.microsoft.com/office/drawing/2014/main" id="{9176D1B1-F336-4969-B702-BBA4DBFA8449}"/>
               </a:ext>
             </a:extLst>
           </p:cNvPr>
@@ -4067,7 +4289,7 @@
           <p:cNvPr id="5" name="">
             <a:extLst xmlns:a="http://schemas.openxmlformats.org/drawingml/2006/main">
               <a:ext uri="{FF2B5EF4-FFF2-40B4-BE49-F238E27FC236}">
-                <a16:creationId xmlns:a16="http://schemas.microsoft.com/office/drawing/2014/main" id="{3CAE080F-03DF-4776-9839-BEB60F7DCCCB}"/>
+                <a16:creationId xmlns:a16="http://schemas.microsoft.com/office/drawing/2014/main" id="{64491DA2-0E09-408E-8EB6-8C51FD9E096A}"/>
               </a:ext>
             </a:extLst>
           </p:cNvPr>
@@ -4129,7 +4351,7 @@
           <p:cNvPr id="6" name="">
             <a:extLst xmlns:a="http://schemas.openxmlformats.org/drawingml/2006/main">
               <a:ext uri="{FF2B5EF4-FFF2-40B4-BE49-F238E27FC236}">
-                <a16:creationId xmlns:a16="http://schemas.microsoft.com/office/drawing/2014/main" id="{22984257-BE9D-4559-81B7-9D76E863FAA5}"/>
+                <a16:creationId xmlns:a16="http://schemas.microsoft.com/office/drawing/2014/main" id="{794AB280-F78F-4209-94BA-E753C798CEA0}"/>
               </a:ext>
             </a:extLst>
           </p:cNvPr>
@@ -4191,7 +4413,7 @@
           <p:cNvPr id="7" name="">
             <a:extLst xmlns:a="http://schemas.openxmlformats.org/drawingml/2006/main">
               <a:ext uri="{FF2B5EF4-FFF2-40B4-BE49-F238E27FC236}">
-                <a16:creationId xmlns:a16="http://schemas.microsoft.com/office/drawing/2014/main" id="{B8B33C77-5F1F-4A59-B8C3-4C8797C0FD19}"/>
+                <a16:creationId xmlns:a16="http://schemas.microsoft.com/office/drawing/2014/main" id="{A8243F04-1C0C-43A5-9A76-FC2A447FF019}"/>
               </a:ext>
             </a:extLst>
           </p:cNvPr>
@@ -4253,7 +4475,7 @@
           <p:cNvPr id="8" name="">
             <a:extLst xmlns:a="http://schemas.openxmlformats.org/drawingml/2006/main">
               <a:ext uri="{FF2B5EF4-FFF2-40B4-BE49-F238E27FC236}">
-                <a16:creationId xmlns:a16="http://schemas.microsoft.com/office/drawing/2014/main" id="{243B3C4C-5E7A-460D-BBFB-32D030AC698F}"/>
+                <a16:creationId xmlns:a16="http://schemas.microsoft.com/office/drawing/2014/main" id="{5CC1557A-5D8E-45A2-8BA1-3685617EE37E}"/>
               </a:ext>
             </a:extLst>
           </p:cNvPr>
@@ -4313,7 +4535,7 @@
     </p:spTree>
     <p:extLst>
       <p:ext uri="{BB962C8B-B14F-4D97-AF65-F5344CB8AC3E}">
-        <p14:creationId xmlns:p14="http://schemas.microsoft.com/office/powerpoint/2010/main" val="1982257339"/>
+        <p14:creationId xmlns:p14="http://schemas.microsoft.com/office/powerpoint/2010/main" val="1539181008"/>
       </p:ext>
     </p:extLst>
   </p:cSld>
@@ -4344,7 +4566,7 @@
           <p:cNvPr id="17" name="">
             <a:extLst xmlns:a="http://schemas.openxmlformats.org/drawingml/2006/main">
               <a:ext uri="{FF2B5EF4-FFF2-40B4-BE49-F238E27FC236}">
-                <a16:creationId xmlns:a16="http://schemas.microsoft.com/office/drawing/2014/main" id="{C9377B30-66C4-4A87-952A-1C139E15D1C8}"/>
+                <a16:creationId xmlns:a16="http://schemas.microsoft.com/office/drawing/2014/main" id="{AA225944-7B9F-48B1-8C28-327B30405C7D}"/>
               </a:ext>
             </a:extLst>
           </p:cNvPr>
@@ -4375,7 +4597,7 @@
           <p:cNvPr id="2" name="">
             <a:extLst xmlns:a="http://schemas.openxmlformats.org/drawingml/2006/main">
               <a:ext uri="{FF2B5EF4-FFF2-40B4-BE49-F238E27FC236}">
-                <a16:creationId xmlns:a16="http://schemas.microsoft.com/office/drawing/2014/main" id="{AFA5748C-A33D-439E-A7CE-978FE3EB1C0C}"/>
+                <a16:creationId xmlns:a16="http://schemas.microsoft.com/office/drawing/2014/main" id="{FBE8065E-3721-4D02-A8AE-2EF814E8574E}"/>
               </a:ext>
             </a:extLst>
           </p:cNvPr>
@@ -4437,7 +4659,7 @@
           <p:cNvPr id="3" name="">
             <a:extLst xmlns:a="http://schemas.openxmlformats.org/drawingml/2006/main">
               <a:ext uri="{FF2B5EF4-FFF2-40B4-BE49-F238E27FC236}">
-                <a16:creationId xmlns:a16="http://schemas.microsoft.com/office/drawing/2014/main" id="{13997632-146A-44A8-9D13-EA331C388EC9}"/>
+                <a16:creationId xmlns:a16="http://schemas.microsoft.com/office/drawing/2014/main" id="{185C5573-DDF0-42A1-B922-47A85A23837B}"/>
               </a:ext>
             </a:extLst>
           </p:cNvPr>
@@ -4499,7 +4721,7 @@
           <p:cNvPr id="4" name="">
             <a:extLst xmlns:a="http://schemas.openxmlformats.org/drawingml/2006/main">
               <a:ext uri="{FF2B5EF4-FFF2-40B4-BE49-F238E27FC236}">
-                <a16:creationId xmlns:a16="http://schemas.microsoft.com/office/drawing/2014/main" id="{A157C63F-2246-40C6-9097-28D3CA63AAAE}"/>
+                <a16:creationId xmlns:a16="http://schemas.microsoft.com/office/drawing/2014/main" id="{C8057FE0-8062-49F1-9BE5-0FAEB12CA9D7}"/>
               </a:ext>
             </a:extLst>
           </p:cNvPr>
@@ -4530,7 +4752,7 @@
           <p:cNvPr id="5" name="">
             <a:extLst xmlns:a="http://schemas.openxmlformats.org/drawingml/2006/main">
               <a:ext uri="{FF2B5EF4-FFF2-40B4-BE49-F238E27FC236}">
-                <a16:creationId xmlns:a16="http://schemas.microsoft.com/office/drawing/2014/main" id="{A2E7F6B5-53AE-446F-A209-A21041129315}"/>
+                <a16:creationId xmlns:a16="http://schemas.microsoft.com/office/drawing/2014/main" id="{BBBF5E69-D44B-4C26-A588-EED8477042AC}"/>
               </a:ext>
             </a:extLst>
           </p:cNvPr>
@@ -4592,7 +4814,7 @@
           <p:cNvPr id="6" name="">
             <a:extLst xmlns:a="http://schemas.openxmlformats.org/drawingml/2006/main">
               <a:ext uri="{FF2B5EF4-FFF2-40B4-BE49-F238E27FC236}">
-                <a16:creationId xmlns:a16="http://schemas.microsoft.com/office/drawing/2014/main" id="{88C4A71F-C9FC-46EF-9BF1-E3D7535CDB3E}"/>
+                <a16:creationId xmlns:a16="http://schemas.microsoft.com/office/drawing/2014/main" id="{766B5240-B37D-4751-93BA-A6E6A84A0AF6}"/>
               </a:ext>
             </a:extLst>
           </p:cNvPr>
@@ -4654,7 +4876,7 @@
           <p:cNvPr id="7" name="">
             <a:extLst xmlns:a="http://schemas.openxmlformats.org/drawingml/2006/main">
               <a:ext uri="{FF2B5EF4-FFF2-40B4-BE49-F238E27FC236}">
-                <a16:creationId xmlns:a16="http://schemas.microsoft.com/office/drawing/2014/main" id="{995A13BE-02D6-47CC-AEB1-2035F69181C0}"/>
+                <a16:creationId xmlns:a16="http://schemas.microsoft.com/office/drawing/2014/main" id="{470B084D-1CBE-492A-AD9E-CA7C191C4490}"/>
               </a:ext>
             </a:extLst>
           </p:cNvPr>
@@ -4716,7 +4938,7 @@
           <p:cNvPr id="8" name="">
             <a:extLst xmlns:a="http://schemas.openxmlformats.org/drawingml/2006/main">
               <a:ext uri="{FF2B5EF4-FFF2-40B4-BE49-F238E27FC236}">
-                <a16:creationId xmlns:a16="http://schemas.microsoft.com/office/drawing/2014/main" id="{7FB22D28-F95C-442E-B764-E5B2527A4AB8}"/>
+                <a16:creationId xmlns:a16="http://schemas.microsoft.com/office/drawing/2014/main" id="{AA51FDD2-FB96-420E-B49F-B210C2EC6EE2}"/>
               </a:ext>
             </a:extLst>
           </p:cNvPr>
@@ -4749,7 +4971,7 @@
           <p:cNvPr id="9" name="">
             <a:extLst xmlns:a="http://schemas.openxmlformats.org/drawingml/2006/main">
               <a:ext uri="{FF2B5EF4-FFF2-40B4-BE49-F238E27FC236}">
-                <a16:creationId xmlns:a16="http://schemas.microsoft.com/office/drawing/2014/main" id="{147E5BA1-4D94-4A52-8073-CE8B0EFD8E2D}"/>
+                <a16:creationId xmlns:a16="http://schemas.microsoft.com/office/drawing/2014/main" id="{BC8381A8-B97D-47AA-B5D8-F103A32AFB89}"/>
               </a:ext>
             </a:extLst>
           </p:cNvPr>
@@ -4811,7 +5033,7 @@
           <p:cNvPr id="10" name="">
             <a:extLst xmlns:a="http://schemas.openxmlformats.org/drawingml/2006/main">
               <a:ext uri="{FF2B5EF4-FFF2-40B4-BE49-F238E27FC236}">
-                <a16:creationId xmlns:a16="http://schemas.microsoft.com/office/drawing/2014/main" id="{25F3E750-3FCF-470D-8DF8-6B2FC68C11DD}"/>
+                <a16:creationId xmlns:a16="http://schemas.microsoft.com/office/drawing/2014/main" id="{DAD30CF8-7A42-424E-BE4D-5C709A92E1A1}"/>
               </a:ext>
             </a:extLst>
           </p:cNvPr>
@@ -4873,7 +5095,7 @@
           <p:cNvPr id="11" name="">
             <a:extLst xmlns:a="http://schemas.openxmlformats.org/drawingml/2006/main">
               <a:ext uri="{FF2B5EF4-FFF2-40B4-BE49-F238E27FC236}">
-                <a16:creationId xmlns:a16="http://schemas.microsoft.com/office/drawing/2014/main" id="{8F420A3B-3B93-4049-9223-7FAEFB8DDF08}"/>
+                <a16:creationId xmlns:a16="http://schemas.microsoft.com/office/drawing/2014/main" id="{B39B970D-9461-4F63-BF96-BBFB46862397}"/>
               </a:ext>
             </a:extLst>
           </p:cNvPr>
@@ -4906,7 +5128,7 @@
           <p:cNvPr id="12" name="">
             <a:extLst xmlns:a="http://schemas.openxmlformats.org/drawingml/2006/main">
               <a:ext uri="{FF2B5EF4-FFF2-40B4-BE49-F238E27FC236}">
-                <a16:creationId xmlns:a16="http://schemas.microsoft.com/office/drawing/2014/main" id="{0F7E2D79-9161-4ADB-942F-F56AEFC5A11C}"/>
+                <a16:creationId xmlns:a16="http://schemas.microsoft.com/office/drawing/2014/main" id="{6777EA0F-5F77-435A-AF99-B94045F69CAC}"/>
               </a:ext>
             </a:extLst>
           </p:cNvPr>
@@ -4968,7 +5190,7 @@
           <p:cNvPr id="13" name="">
             <a:extLst xmlns:a="http://schemas.openxmlformats.org/drawingml/2006/main">
               <a:ext uri="{FF2B5EF4-FFF2-40B4-BE49-F238E27FC236}">
-                <a16:creationId xmlns:a16="http://schemas.microsoft.com/office/drawing/2014/main" id="{2318D3DB-5EFA-47E3-9333-72FAE1BA3112}"/>
+                <a16:creationId xmlns:a16="http://schemas.microsoft.com/office/drawing/2014/main" id="{A8FDAAC3-BF93-404D-BD02-D2E6C05990D1}"/>
               </a:ext>
             </a:extLst>
           </p:cNvPr>
@@ -5030,7 +5252,7 @@
           <p:cNvPr id="14" name="">
             <a:extLst xmlns:a="http://schemas.openxmlformats.org/drawingml/2006/main">
               <a:ext uri="{FF2B5EF4-FFF2-40B4-BE49-F238E27FC236}">
-                <a16:creationId xmlns:a16="http://schemas.microsoft.com/office/drawing/2014/main" id="{2823FCB0-BD8F-4C90-A849-DE5E38BD9CBA}"/>
+                <a16:creationId xmlns:a16="http://schemas.microsoft.com/office/drawing/2014/main" id="{F5CEC84F-1881-4EA8-A19A-DA9760943711}"/>
               </a:ext>
             </a:extLst>
           </p:cNvPr>
@@ -5063,7 +5285,7 @@
           <p:cNvPr id="15" name="">
             <a:extLst xmlns:a="http://schemas.openxmlformats.org/drawingml/2006/main">
               <a:ext uri="{FF2B5EF4-FFF2-40B4-BE49-F238E27FC236}">
-                <a16:creationId xmlns:a16="http://schemas.microsoft.com/office/drawing/2014/main" id="{0B59A8F8-D63F-49B0-B97D-C90DB649FC43}"/>
+                <a16:creationId xmlns:a16="http://schemas.microsoft.com/office/drawing/2014/main" id="{B4F83EC6-9A68-4984-AD2B-8264D7ABDCC8}"/>
               </a:ext>
             </a:extLst>
           </p:cNvPr>
@@ -5125,7 +5347,7 @@
           <p:cNvPr id="16" name="">
             <a:extLst xmlns:a="http://schemas.openxmlformats.org/drawingml/2006/main">
               <a:ext uri="{FF2B5EF4-FFF2-40B4-BE49-F238E27FC236}">
-                <a16:creationId xmlns:a16="http://schemas.microsoft.com/office/drawing/2014/main" id="{83A64699-B889-49BE-BA32-E0492F1F4846}"/>
+                <a16:creationId xmlns:a16="http://schemas.microsoft.com/office/drawing/2014/main" id="{411AEB2B-6B91-47C1-92AC-BD033799B6CB}"/>
               </a:ext>
             </a:extLst>
           </p:cNvPr>
@@ -5185,7 +5407,7 @@
     </p:spTree>
     <p:extLst>
       <p:ext uri="{BB962C8B-B14F-4D97-AF65-F5344CB8AC3E}">
-        <p14:creationId xmlns:p14="http://schemas.microsoft.com/office/powerpoint/2010/main" val="905541740"/>
+        <p14:creationId xmlns:p14="http://schemas.microsoft.com/office/powerpoint/2010/main" val="1878842774"/>
       </p:ext>
     </p:extLst>
   </p:cSld>
@@ -5216,7 +5438,7 @@
           <p:cNvPr id="9" name="">
             <a:extLst xmlns:a="http://schemas.openxmlformats.org/drawingml/2006/main">
               <a:ext uri="{FF2B5EF4-FFF2-40B4-BE49-F238E27FC236}">
-                <a16:creationId xmlns:a16="http://schemas.microsoft.com/office/drawing/2014/main" id="{00C163F3-8B2A-4554-89F3-BE5AFA2F8304}"/>
+                <a16:creationId xmlns:a16="http://schemas.microsoft.com/office/drawing/2014/main" id="{B98CFD96-1C0F-45C9-A360-00018BA6BB0A}"/>
               </a:ext>
             </a:extLst>
           </p:cNvPr>
@@ -5247,7 +5469,7 @@
           <p:cNvPr id="2" name="">
             <a:extLst xmlns:a="http://schemas.openxmlformats.org/drawingml/2006/main">
               <a:ext uri="{FF2B5EF4-FFF2-40B4-BE49-F238E27FC236}">
-                <a16:creationId xmlns:a16="http://schemas.microsoft.com/office/drawing/2014/main" id="{173BD5D9-E967-4F04-84B3-76E5F60071EF}"/>
+                <a16:creationId xmlns:a16="http://schemas.microsoft.com/office/drawing/2014/main" id="{91B1CC6A-8888-41B1-B576-407AEB4C4FA0}"/>
               </a:ext>
             </a:extLst>
           </p:cNvPr>
@@ -5309,7 +5531,7 @@
           <p:cNvPr id="3" name="">
             <a:extLst xmlns:a="http://schemas.openxmlformats.org/drawingml/2006/main">
               <a:ext uri="{FF2B5EF4-FFF2-40B4-BE49-F238E27FC236}">
-                <a16:creationId xmlns:a16="http://schemas.microsoft.com/office/drawing/2014/main" id="{F11FD9C3-B64A-47B2-9A0B-2352BE62E496}"/>
+                <a16:creationId xmlns:a16="http://schemas.microsoft.com/office/drawing/2014/main" id="{F8E75830-130D-4A71-B655-FE51CCD439AC}"/>
               </a:ext>
             </a:extLst>
           </p:cNvPr>
@@ -5371,7 +5593,7 @@
           <p:cNvPr id="4" name="">
             <a:extLst xmlns:a="http://schemas.openxmlformats.org/drawingml/2006/main">
               <a:ext uri="{FF2B5EF4-FFF2-40B4-BE49-F238E27FC236}">
-                <a16:creationId xmlns:a16="http://schemas.microsoft.com/office/drawing/2014/main" id="{BE1B98B3-B0AE-4CB6-80F5-1C7D03465C3B}"/>
+                <a16:creationId xmlns:a16="http://schemas.microsoft.com/office/drawing/2014/main" id="{94E4F5E3-D5B4-4BCB-AD19-C11F88366D2E}"/>
               </a:ext>
             </a:extLst>
           </p:cNvPr>
@@ -5402,7 +5624,7 @@
           <p:cNvPr id="5" name="">
             <a:extLst xmlns:a="http://schemas.openxmlformats.org/drawingml/2006/main">
               <a:ext uri="{FF2B5EF4-FFF2-40B4-BE49-F238E27FC236}">
-                <a16:creationId xmlns:a16="http://schemas.microsoft.com/office/drawing/2014/main" id="{4D0F7F62-7C4A-44C4-9A00-B9DD50D71ABE}"/>
+                <a16:creationId xmlns:a16="http://schemas.microsoft.com/office/drawing/2014/main" id="{820C4DB8-5FAA-49B1-AE1F-AD581BD1A930}"/>
               </a:ext>
             </a:extLst>
           </p:cNvPr>
@@ -5464,7 +5686,7 @@
           <p:cNvPr id="6" name="">
             <a:extLst xmlns:a="http://schemas.openxmlformats.org/drawingml/2006/main">
               <a:ext uri="{FF2B5EF4-FFF2-40B4-BE49-F238E27FC236}">
-                <a16:creationId xmlns:a16="http://schemas.microsoft.com/office/drawing/2014/main" id="{9B52DBBA-24A8-4FFB-B5D3-320179796C74}"/>
+                <a16:creationId xmlns:a16="http://schemas.microsoft.com/office/drawing/2014/main" id="{42EA86C8-4EA0-411B-9BCC-F2B72654C660}"/>
               </a:ext>
             </a:extLst>
           </p:cNvPr>
@@ -5526,7 +5748,7 @@
           <p:cNvPr id="7" name="">
             <a:extLst xmlns:a="http://schemas.openxmlformats.org/drawingml/2006/main">
               <a:ext uri="{FF2B5EF4-FFF2-40B4-BE49-F238E27FC236}">
-                <a16:creationId xmlns:a16="http://schemas.microsoft.com/office/drawing/2014/main" id="{6C37D92D-2B3B-4377-A163-DA8E37F0E683}"/>
+                <a16:creationId xmlns:a16="http://schemas.microsoft.com/office/drawing/2014/main" id="{FE0AC5E5-C09C-412C-9711-A5F0CFC3DDC1}"/>
               </a:ext>
             </a:extLst>
           </p:cNvPr>
@@ -5588,7 +5810,7 @@
           <p:cNvPr id="8" name="">
             <a:extLst xmlns:a="http://schemas.openxmlformats.org/drawingml/2006/main">
               <a:ext uri="{FF2B5EF4-FFF2-40B4-BE49-F238E27FC236}">
-                <a16:creationId xmlns:a16="http://schemas.microsoft.com/office/drawing/2014/main" id="{1ECCDD43-E4BD-4D7C-B09F-14892A70490D}"/>
+                <a16:creationId xmlns:a16="http://schemas.microsoft.com/office/drawing/2014/main" id="{0E14B55B-4186-4DB5-80D6-8621EC56D37C}"/>
               </a:ext>
             </a:extLst>
           </p:cNvPr>
@@ -5648,7 +5870,7 @@
     </p:spTree>
     <p:extLst>
       <p:ext uri="{BB962C8B-B14F-4D97-AF65-F5344CB8AC3E}">
-        <p14:creationId xmlns:p14="http://schemas.microsoft.com/office/powerpoint/2010/main" val="1306089499"/>
+        <p14:creationId xmlns:p14="http://schemas.microsoft.com/office/powerpoint/2010/main" val="1918038923"/>
       </p:ext>
     </p:extLst>
   </p:cSld>
@@ -5679,7 +5901,7 @@
           <p:cNvPr id="17" name="">
             <a:extLst xmlns:a="http://schemas.openxmlformats.org/drawingml/2006/main">
               <a:ext uri="{FF2B5EF4-FFF2-40B4-BE49-F238E27FC236}">
-                <a16:creationId xmlns:a16="http://schemas.microsoft.com/office/drawing/2014/main" id="{486E3A58-B605-40B6-A0FC-D76FAAB5103D}"/>
+                <a16:creationId xmlns:a16="http://schemas.microsoft.com/office/drawing/2014/main" id="{9E529771-DF2E-4061-A017-A03FE4C3E8C7}"/>
               </a:ext>
             </a:extLst>
           </p:cNvPr>
@@ -5710,7 +5932,7 @@
           <p:cNvPr id="2" name="">
             <a:extLst xmlns:a="http://schemas.openxmlformats.org/drawingml/2006/main">
               <a:ext uri="{FF2B5EF4-FFF2-40B4-BE49-F238E27FC236}">
-                <a16:creationId xmlns:a16="http://schemas.microsoft.com/office/drawing/2014/main" id="{E3F58710-BF6A-4AB2-B2DC-1BD115761A86}"/>
+                <a16:creationId xmlns:a16="http://schemas.microsoft.com/office/drawing/2014/main" id="{6F6D617E-8130-4ADF-B6A4-B6C0C593A6DB}"/>
               </a:ext>
             </a:extLst>
           </p:cNvPr>
@@ -5772,7 +5994,7 @@
           <p:cNvPr id="3" name="">
             <a:extLst xmlns:a="http://schemas.openxmlformats.org/drawingml/2006/main">
               <a:ext uri="{FF2B5EF4-FFF2-40B4-BE49-F238E27FC236}">
-                <a16:creationId xmlns:a16="http://schemas.microsoft.com/office/drawing/2014/main" id="{1374ED88-C004-4204-9D7F-673E40D63A9E}"/>
+                <a16:creationId xmlns:a16="http://schemas.microsoft.com/office/drawing/2014/main" id="{90C6CCAF-927C-423C-8AB9-0B6CC90B82B8}"/>
               </a:ext>
             </a:extLst>
           </p:cNvPr>
@@ -5834,7 +6056,7 @@
           <p:cNvPr id="4" name="">
             <a:extLst xmlns:a="http://schemas.openxmlformats.org/drawingml/2006/main">
               <a:ext uri="{FF2B5EF4-FFF2-40B4-BE49-F238E27FC236}">
-                <a16:creationId xmlns:a16="http://schemas.microsoft.com/office/drawing/2014/main" id="{CA0A0352-9BAD-4389-8997-C5C696EAF034}"/>
+                <a16:creationId xmlns:a16="http://schemas.microsoft.com/office/drawing/2014/main" id="{ADE5BC6E-DF5A-404C-8A80-5FEFB926F27C}"/>
               </a:ext>
             </a:extLst>
           </p:cNvPr>
@@ -5865,7 +6087,7 @@
           <p:cNvPr id="5" name="">
             <a:extLst xmlns:a="http://schemas.openxmlformats.org/drawingml/2006/main">
               <a:ext uri="{FF2B5EF4-FFF2-40B4-BE49-F238E27FC236}">
-                <a16:creationId xmlns:a16="http://schemas.microsoft.com/office/drawing/2014/main" id="{F15645C3-70BF-42E6-AC99-FE7BFD122E75}"/>
+                <a16:creationId xmlns:a16="http://schemas.microsoft.com/office/drawing/2014/main" id="{2309BAFE-1D62-4835-A390-302373D269C3}"/>
               </a:ext>
             </a:extLst>
           </p:cNvPr>
@@ -5927,7 +6149,7 @@
           <p:cNvPr id="6" name="">
             <a:extLst xmlns:a="http://schemas.openxmlformats.org/drawingml/2006/main">
               <a:ext uri="{FF2B5EF4-FFF2-40B4-BE49-F238E27FC236}">
-                <a16:creationId xmlns:a16="http://schemas.microsoft.com/office/drawing/2014/main" id="{21CD77C7-C106-402D-AA82-27E984603C3D}"/>
+                <a16:creationId xmlns:a16="http://schemas.microsoft.com/office/drawing/2014/main" id="{EB1031EA-7348-40D3-9D30-B24373736163}"/>
               </a:ext>
             </a:extLst>
           </p:cNvPr>
@@ -5989,7 +6211,7 @@
           <p:cNvPr id="7" name="">
             <a:extLst xmlns:a="http://schemas.openxmlformats.org/drawingml/2006/main">
               <a:ext uri="{FF2B5EF4-FFF2-40B4-BE49-F238E27FC236}">
-                <a16:creationId xmlns:a16="http://schemas.microsoft.com/office/drawing/2014/main" id="{CBEAAEEF-36CD-441B-A170-F277987744BF}"/>
+                <a16:creationId xmlns:a16="http://schemas.microsoft.com/office/drawing/2014/main" id="{83910703-5759-47A5-9F22-17B8E131E89C}"/>
               </a:ext>
             </a:extLst>
           </p:cNvPr>
@@ -6051,7 +6273,7 @@
           <p:cNvPr id="8" name="">
             <a:extLst xmlns:a="http://schemas.openxmlformats.org/drawingml/2006/main">
               <a:ext uri="{FF2B5EF4-FFF2-40B4-BE49-F238E27FC236}">
-                <a16:creationId xmlns:a16="http://schemas.microsoft.com/office/drawing/2014/main" id="{AA831AF0-476E-42E5-AA1C-721989803FF1}"/>
+                <a16:creationId xmlns:a16="http://schemas.microsoft.com/office/drawing/2014/main" id="{8BF437E0-EB26-44C0-BD1C-FB1DDD9BFFA8}"/>
               </a:ext>
             </a:extLst>
           </p:cNvPr>
@@ -6084,7 +6306,7 @@
           <p:cNvPr id="9" name="">
             <a:extLst xmlns:a="http://schemas.openxmlformats.org/drawingml/2006/main">
               <a:ext uri="{FF2B5EF4-FFF2-40B4-BE49-F238E27FC236}">
-                <a16:creationId xmlns:a16="http://schemas.microsoft.com/office/drawing/2014/main" id="{51221B2A-B157-47FB-A463-95B55598FDCE}"/>
+                <a16:creationId xmlns:a16="http://schemas.microsoft.com/office/drawing/2014/main" id="{9331DA87-BE95-4164-A34F-6AE438DB3178}"/>
               </a:ext>
             </a:extLst>
           </p:cNvPr>
@@ -6146,7 +6368,7 @@
           <p:cNvPr id="10" name="">
             <a:extLst xmlns:a="http://schemas.openxmlformats.org/drawingml/2006/main">
               <a:ext uri="{FF2B5EF4-FFF2-40B4-BE49-F238E27FC236}">
-                <a16:creationId xmlns:a16="http://schemas.microsoft.com/office/drawing/2014/main" id="{EF921182-30B3-4788-8721-8A7101856AAC}"/>
+                <a16:creationId xmlns:a16="http://schemas.microsoft.com/office/drawing/2014/main" id="{22DCFB11-37FC-41BB-BE28-D891599781C2}"/>
               </a:ext>
             </a:extLst>
           </p:cNvPr>
@@ -6208,7 +6430,7 @@
           <p:cNvPr id="11" name="">
             <a:extLst xmlns:a="http://schemas.openxmlformats.org/drawingml/2006/main">
               <a:ext uri="{FF2B5EF4-FFF2-40B4-BE49-F238E27FC236}">
-                <a16:creationId xmlns:a16="http://schemas.microsoft.com/office/drawing/2014/main" id="{EFA6DCF1-A175-40FD-9B3B-22F8D712399F}"/>
+                <a16:creationId xmlns:a16="http://schemas.microsoft.com/office/drawing/2014/main" id="{C01AD344-79F5-4D08-8A48-CFFBBC5440A0}"/>
               </a:ext>
             </a:extLst>
           </p:cNvPr>
@@ -6241,7 +6463,7 @@
           <p:cNvPr id="12" name="">
             <a:extLst xmlns:a="http://schemas.openxmlformats.org/drawingml/2006/main">
               <a:ext uri="{FF2B5EF4-FFF2-40B4-BE49-F238E27FC236}">
-                <a16:creationId xmlns:a16="http://schemas.microsoft.com/office/drawing/2014/main" id="{63B07ECA-3FCE-4789-B128-79A7E12B7DED}"/>
+                <a16:creationId xmlns:a16="http://schemas.microsoft.com/office/drawing/2014/main" id="{6EFCAE58-3F43-45E6-AB12-71CA1700403A}"/>
               </a:ext>
             </a:extLst>
           </p:cNvPr>
@@ -6303,7 +6525,7 @@
           <p:cNvPr id="13" name="">
             <a:extLst xmlns:a="http://schemas.openxmlformats.org/drawingml/2006/main">
               <a:ext uri="{FF2B5EF4-FFF2-40B4-BE49-F238E27FC236}">
-                <a16:creationId xmlns:a16="http://schemas.microsoft.com/office/drawing/2014/main" id="{8B516207-7666-4539-9D37-104AF0D8BC0B}"/>
+                <a16:creationId xmlns:a16="http://schemas.microsoft.com/office/drawing/2014/main" id="{B9192391-4D0B-4C6F-9E70-EB8371CCCF0F}"/>
               </a:ext>
             </a:extLst>
           </p:cNvPr>
@@ -6365,7 +6587,7 @@
           <p:cNvPr id="14" name="">
             <a:extLst xmlns:a="http://schemas.openxmlformats.org/drawingml/2006/main">
               <a:ext uri="{FF2B5EF4-FFF2-40B4-BE49-F238E27FC236}">
-                <a16:creationId xmlns:a16="http://schemas.microsoft.com/office/drawing/2014/main" id="{3ACE8FA6-A893-4F02-9077-5D9FFB2EFF8D}"/>
+                <a16:creationId xmlns:a16="http://schemas.microsoft.com/office/drawing/2014/main" id="{6FA61DED-4334-422E-80B7-DA31319F553E}"/>
               </a:ext>
             </a:extLst>
           </p:cNvPr>
@@ -6398,7 +6620,7 @@
           <p:cNvPr id="15" name="">
             <a:extLst xmlns:a="http://schemas.openxmlformats.org/drawingml/2006/main">
               <a:ext uri="{FF2B5EF4-FFF2-40B4-BE49-F238E27FC236}">
-                <a16:creationId xmlns:a16="http://schemas.microsoft.com/office/drawing/2014/main" id="{E41C790F-2FB4-4077-87A0-54C0F0A86E21}"/>
+                <a16:creationId xmlns:a16="http://schemas.microsoft.com/office/drawing/2014/main" id="{16BC9AC1-B5C3-4AA8-80F8-E23B566D8ECC}"/>
               </a:ext>
             </a:extLst>
           </p:cNvPr>
@@ -6460,7 +6682,7 @@
           <p:cNvPr id="16" name="">
             <a:extLst xmlns:a="http://schemas.openxmlformats.org/drawingml/2006/main">
               <a:ext uri="{FF2B5EF4-FFF2-40B4-BE49-F238E27FC236}">
-                <a16:creationId xmlns:a16="http://schemas.microsoft.com/office/drawing/2014/main" id="{E403DD74-D45E-4A0F-B866-E07576C9F05F}"/>
+                <a16:creationId xmlns:a16="http://schemas.microsoft.com/office/drawing/2014/main" id="{D4F58826-AF02-40DB-9B3D-858BE7638F71}"/>
               </a:ext>
             </a:extLst>
           </p:cNvPr>
@@ -6520,7 +6742,7 @@
     </p:spTree>
     <p:extLst>
       <p:ext uri="{BB962C8B-B14F-4D97-AF65-F5344CB8AC3E}">
-        <p14:creationId xmlns:p14="http://schemas.microsoft.com/office/powerpoint/2010/main" val="858039445"/>
+        <p14:creationId xmlns:p14="http://schemas.microsoft.com/office/powerpoint/2010/main" val="514300677"/>
       </p:ext>
     </p:extLst>
   </p:cSld>
@@ -6551,7 +6773,7 @@
           <p:cNvPr id="24" name="">
             <a:extLst xmlns:a="http://schemas.openxmlformats.org/drawingml/2006/main">
               <a:ext uri="{FF2B5EF4-FFF2-40B4-BE49-F238E27FC236}">
-                <a16:creationId xmlns:a16="http://schemas.microsoft.com/office/drawing/2014/main" id="{88057AAB-A04B-4A40-86AC-2C07BDA08B99}"/>
+                <a16:creationId xmlns:a16="http://schemas.microsoft.com/office/drawing/2014/main" id="{6AB47DA7-AE71-46C6-A4C8-A2E79B6FB4B4}"/>
               </a:ext>
             </a:extLst>
           </p:cNvPr>
@@ -6582,7 +6804,7 @@
           <p:cNvPr id="2" name="">
             <a:extLst xmlns:a="http://schemas.openxmlformats.org/drawingml/2006/main">
               <a:ext uri="{FF2B5EF4-FFF2-40B4-BE49-F238E27FC236}">
-                <a16:creationId xmlns:a16="http://schemas.microsoft.com/office/drawing/2014/main" id="{609C55F0-691D-4FD9-98B9-9F5DA3EED260}"/>
+                <a16:creationId xmlns:a16="http://schemas.microsoft.com/office/drawing/2014/main" id="{E6D3A572-CCD4-4645-A364-86ECDF1392C2}"/>
               </a:ext>
             </a:extLst>
           </p:cNvPr>
@@ -6644,7 +6866,7 @@
           <p:cNvPr id="3" name="">
             <a:extLst xmlns:a="http://schemas.openxmlformats.org/drawingml/2006/main">
               <a:ext uri="{FF2B5EF4-FFF2-40B4-BE49-F238E27FC236}">
-                <a16:creationId xmlns:a16="http://schemas.microsoft.com/office/drawing/2014/main" id="{BC32400F-A294-43F7-B17C-E21CB348D19F}"/>
+                <a16:creationId xmlns:a16="http://schemas.microsoft.com/office/drawing/2014/main" id="{EC1EF1EE-A8C9-4CA5-A836-086C36B04F1A}"/>
               </a:ext>
             </a:extLst>
           </p:cNvPr>
@@ -6706,7 +6928,7 @@
           <p:cNvPr id="4" name="">
             <a:extLst xmlns:a="http://schemas.openxmlformats.org/drawingml/2006/main">
               <a:ext uri="{FF2B5EF4-FFF2-40B4-BE49-F238E27FC236}">
-                <a16:creationId xmlns:a16="http://schemas.microsoft.com/office/drawing/2014/main" id="{94A489F7-446A-4C9A-BFAD-171A3339905F}"/>
+                <a16:creationId xmlns:a16="http://schemas.microsoft.com/office/drawing/2014/main" id="{82A4A794-EDF0-4851-8061-BAE816383B91}"/>
               </a:ext>
             </a:extLst>
           </p:cNvPr>
@@ -6737,7 +6959,7 @@
           <p:cNvPr id="5" name="">
             <a:extLst xmlns:a="http://schemas.openxmlformats.org/drawingml/2006/main">
               <a:ext uri="{FF2B5EF4-FFF2-40B4-BE49-F238E27FC236}">
-                <a16:creationId xmlns:a16="http://schemas.microsoft.com/office/drawing/2014/main" id="{7DA46145-96D1-4708-B7C0-4565500B946F}"/>
+                <a16:creationId xmlns:a16="http://schemas.microsoft.com/office/drawing/2014/main" id="{E59F34D2-BF58-45D2-B74E-2CBEE7E27F51}"/>
               </a:ext>
             </a:extLst>
           </p:cNvPr>
@@ -6799,7 +7021,7 @@
           <p:cNvPr id="6" name="">
             <a:extLst xmlns:a="http://schemas.openxmlformats.org/drawingml/2006/main">
               <a:ext uri="{FF2B5EF4-FFF2-40B4-BE49-F238E27FC236}">
-                <a16:creationId xmlns:a16="http://schemas.microsoft.com/office/drawing/2014/main" id="{A404AFD7-8687-47A2-AEE2-6194CC354D1C}"/>
+                <a16:creationId xmlns:a16="http://schemas.microsoft.com/office/drawing/2014/main" id="{E312D1F6-1352-419D-815A-A822C5A279E4}"/>
               </a:ext>
             </a:extLst>
           </p:cNvPr>
@@ -6861,7 +7083,7 @@
           <p:cNvPr id="7" name="">
             <a:extLst xmlns:a="http://schemas.openxmlformats.org/drawingml/2006/main">
               <a:ext uri="{FF2B5EF4-FFF2-40B4-BE49-F238E27FC236}">
-                <a16:creationId xmlns:a16="http://schemas.microsoft.com/office/drawing/2014/main" id="{2E5EB2CD-09F8-409C-937C-C152DAA7E702}"/>
+                <a16:creationId xmlns:a16="http://schemas.microsoft.com/office/drawing/2014/main" id="{584C4793-06AA-4605-B265-3513903790D5}"/>
               </a:ext>
             </a:extLst>
           </p:cNvPr>
@@ -6923,7 +7145,7 @@
           <p:cNvPr id="8" name="">
             <a:extLst xmlns:a="http://schemas.openxmlformats.org/drawingml/2006/main">
               <a:ext uri="{FF2B5EF4-FFF2-40B4-BE49-F238E27FC236}">
-                <a16:creationId xmlns:a16="http://schemas.microsoft.com/office/drawing/2014/main" id="{AB582315-BBE1-4089-853B-88038DD543FE}"/>
+                <a16:creationId xmlns:a16="http://schemas.microsoft.com/office/drawing/2014/main" id="{C25A4E38-CDD5-461D-84B5-F94B97249274}"/>
               </a:ext>
             </a:extLst>
           </p:cNvPr>
@@ -6985,7 +7207,7 @@
           <p:cNvPr id="9" name="">
             <a:extLst xmlns:a="http://schemas.openxmlformats.org/drawingml/2006/main">
               <a:ext uri="{FF2B5EF4-FFF2-40B4-BE49-F238E27FC236}">
-                <a16:creationId xmlns:a16="http://schemas.microsoft.com/office/drawing/2014/main" id="{FB48DF6B-693E-4FD8-8E28-FB1921CE4F2B}"/>
+                <a16:creationId xmlns:a16="http://schemas.microsoft.com/office/drawing/2014/main" id="{9B24771D-208D-4D72-A7D2-9F25EE230676}"/>
               </a:ext>
             </a:extLst>
           </p:cNvPr>
@@ -7047,7 +7269,7 @@
           <p:cNvPr id="10" name="">
             <a:extLst xmlns:a="http://schemas.openxmlformats.org/drawingml/2006/main">
               <a:ext uri="{FF2B5EF4-FFF2-40B4-BE49-F238E27FC236}">
-                <a16:creationId xmlns:a16="http://schemas.microsoft.com/office/drawing/2014/main" id="{14B3458C-E306-44DF-9A3F-70EF49D17EB0}"/>
+                <a16:creationId xmlns:a16="http://schemas.microsoft.com/office/drawing/2014/main" id="{3B4D0312-4C06-40C4-8FBE-6E54A769D310}"/>
               </a:ext>
             </a:extLst>
           </p:cNvPr>
@@ -7109,7 +7331,7 @@
           <p:cNvPr id="11" name="">
             <a:extLst xmlns:a="http://schemas.openxmlformats.org/drawingml/2006/main">
               <a:ext uri="{FF2B5EF4-FFF2-40B4-BE49-F238E27FC236}">
-                <a16:creationId xmlns:a16="http://schemas.microsoft.com/office/drawing/2014/main" id="{7CD29EBB-0817-4037-AF35-49224798266E}"/>
+                <a16:creationId xmlns:a16="http://schemas.microsoft.com/office/drawing/2014/main" id="{C9E973A3-51AC-4E87-9FB7-B62C2849E96C}"/>
               </a:ext>
             </a:extLst>
           </p:cNvPr>
@@ -7171,7 +7393,7 @@
           <p:cNvPr id="12" name="">
             <a:extLst xmlns:a="http://schemas.openxmlformats.org/drawingml/2006/main">
               <a:ext uri="{FF2B5EF4-FFF2-40B4-BE49-F238E27FC236}">
-                <a16:creationId xmlns:a16="http://schemas.microsoft.com/office/drawing/2014/main" id="{F0A2A54A-299A-492E-99AF-7E6304C641E3}"/>
+                <a16:creationId xmlns:a16="http://schemas.microsoft.com/office/drawing/2014/main" id="{31A5CD99-2AD2-4496-9BBB-1028C1489A49}"/>
               </a:ext>
             </a:extLst>
           </p:cNvPr>
@@ -7233,7 +7455,7 @@
           <p:cNvPr id="13" name="">
             <a:extLst xmlns:a="http://schemas.openxmlformats.org/drawingml/2006/main">
               <a:ext uri="{FF2B5EF4-FFF2-40B4-BE49-F238E27FC236}">
-                <a16:creationId xmlns:a16="http://schemas.microsoft.com/office/drawing/2014/main" id="{0F733BD5-D0A1-48EF-BA52-0CD5A21CCDFC}"/>
+                <a16:creationId xmlns:a16="http://schemas.microsoft.com/office/drawing/2014/main" id="{1AC01373-BDFE-4353-AAE6-31C3C94CBC4A}"/>
               </a:ext>
             </a:extLst>
           </p:cNvPr>
@@ -7295,7 +7517,7 @@
           <p:cNvPr id="14" name="">
             <a:extLst xmlns:a="http://schemas.openxmlformats.org/drawingml/2006/main">
               <a:ext uri="{FF2B5EF4-FFF2-40B4-BE49-F238E27FC236}">
-                <a16:creationId xmlns:a16="http://schemas.microsoft.com/office/drawing/2014/main" id="{80973B96-8F9D-4606-80A7-53A220EC9178}"/>
+                <a16:creationId xmlns:a16="http://schemas.microsoft.com/office/drawing/2014/main" id="{76A0E60F-50F2-4909-A208-F0E7997F1E88}"/>
               </a:ext>
             </a:extLst>
           </p:cNvPr>
@@ -7357,7 +7579,7 @@
           <p:cNvPr id="15" name="">
             <a:extLst xmlns:a="http://schemas.openxmlformats.org/drawingml/2006/main">
               <a:ext uri="{FF2B5EF4-FFF2-40B4-BE49-F238E27FC236}">
-                <a16:creationId xmlns:a16="http://schemas.microsoft.com/office/drawing/2014/main" id="{03777A7E-A889-4944-8E6B-368DDB2CBABB}"/>
+                <a16:creationId xmlns:a16="http://schemas.microsoft.com/office/drawing/2014/main" id="{F56156F8-A5A4-47B1-8F8E-7C5534DF5B85}"/>
               </a:ext>
             </a:extLst>
           </p:cNvPr>
@@ -7388,7 +7610,7 @@
           <p:cNvPr id="16" name="">
             <a:extLst xmlns:a="http://schemas.openxmlformats.org/drawingml/2006/main">
               <a:ext uri="{FF2B5EF4-FFF2-40B4-BE49-F238E27FC236}">
-                <a16:creationId xmlns:a16="http://schemas.microsoft.com/office/drawing/2014/main" id="{280A7DB1-DB21-4ABD-A297-83E54CFB9B2F}"/>
+                <a16:creationId xmlns:a16="http://schemas.microsoft.com/office/drawing/2014/main" id="{0F4D0016-1F49-4556-915C-4E99A5C56927}"/>
               </a:ext>
             </a:extLst>
           </p:cNvPr>
@@ -7450,7 +7672,7 @@
           <p:cNvPr id="17" name="">
             <a:extLst xmlns:a="http://schemas.openxmlformats.org/drawingml/2006/main">
               <a:ext uri="{FF2B5EF4-FFF2-40B4-BE49-F238E27FC236}">
-                <a16:creationId xmlns:a16="http://schemas.microsoft.com/office/drawing/2014/main" id="{E9AD63CC-3072-4A08-9B09-B8228157950E}"/>
+                <a16:creationId xmlns:a16="http://schemas.microsoft.com/office/drawing/2014/main" id="{3C4E441A-9DDA-4478-8188-1CE176BE24C7}"/>
               </a:ext>
             </a:extLst>
           </p:cNvPr>
@@ -7512,7 +7734,7 @@
           <p:cNvPr id="18" name="">
             <a:extLst xmlns:a="http://schemas.openxmlformats.org/drawingml/2006/main">
               <a:ext uri="{FF2B5EF4-FFF2-40B4-BE49-F238E27FC236}">
-                <a16:creationId xmlns:a16="http://schemas.microsoft.com/office/drawing/2014/main" id="{4804C512-E827-4EA2-BD9A-C192CC012778}"/>
+                <a16:creationId xmlns:a16="http://schemas.microsoft.com/office/drawing/2014/main" id="{4E3FF5BD-D35F-4FF7-B296-2BF893A9EAF5}"/>
               </a:ext>
             </a:extLst>
           </p:cNvPr>
@@ -7574,7 +7796,7 @@
           <p:cNvPr id="19" name="">
             <a:extLst xmlns:a="http://schemas.openxmlformats.org/drawingml/2006/main">
               <a:ext uri="{FF2B5EF4-FFF2-40B4-BE49-F238E27FC236}">
-                <a16:creationId xmlns:a16="http://schemas.microsoft.com/office/drawing/2014/main" id="{25F9714E-C23B-44A7-BD24-83CC8A70DEC0}"/>
+                <a16:creationId xmlns:a16="http://schemas.microsoft.com/office/drawing/2014/main" id="{54F3B250-A8E5-4C64-B13A-525C22CA90F8}"/>
               </a:ext>
             </a:extLst>
           </p:cNvPr>
@@ -7636,7 +7858,7 @@
           <p:cNvPr id="20" name="">
             <a:extLst xmlns:a="http://schemas.openxmlformats.org/drawingml/2006/main">
               <a:ext uri="{FF2B5EF4-FFF2-40B4-BE49-F238E27FC236}">
-                <a16:creationId xmlns:a16="http://schemas.microsoft.com/office/drawing/2014/main" id="{4AD8136F-00D8-4C4B-8A47-045C5052869A}"/>
+                <a16:creationId xmlns:a16="http://schemas.microsoft.com/office/drawing/2014/main" id="{BA864F50-A71E-43B5-B02B-531CDADA6F1E}"/>
               </a:ext>
             </a:extLst>
           </p:cNvPr>
@@ -7698,7 +7920,7 @@
           <p:cNvPr id="21" name="">
             <a:extLst xmlns:a="http://schemas.openxmlformats.org/drawingml/2006/main">
               <a:ext uri="{FF2B5EF4-FFF2-40B4-BE49-F238E27FC236}">
-                <a16:creationId xmlns:a16="http://schemas.microsoft.com/office/drawing/2014/main" id="{764F0C3A-7091-476D-851C-5D8C43318C12}"/>
+                <a16:creationId xmlns:a16="http://schemas.microsoft.com/office/drawing/2014/main" id="{F9A9DF5D-1EC8-48EE-9D05-B4AEED6A7699}"/>
               </a:ext>
             </a:extLst>
           </p:cNvPr>
@@ -7760,7 +7982,7 @@
           <p:cNvPr id="22" name="">
             <a:extLst xmlns:a="http://schemas.openxmlformats.org/drawingml/2006/main">
               <a:ext uri="{FF2B5EF4-FFF2-40B4-BE49-F238E27FC236}">
-                <a16:creationId xmlns:a16="http://schemas.microsoft.com/office/drawing/2014/main" id="{B5D07C76-0989-4102-A6E0-6E723001B8A7}"/>
+                <a16:creationId xmlns:a16="http://schemas.microsoft.com/office/drawing/2014/main" id="{88B62FCB-DCEF-49DC-BF16-6D2383D37F2C}"/>
               </a:ext>
             </a:extLst>
           </p:cNvPr>
@@ -7822,7 +8044,7 @@
           <p:cNvPr id="23" name="">
             <a:extLst xmlns:a="http://schemas.openxmlformats.org/drawingml/2006/main">
               <a:ext uri="{FF2B5EF4-FFF2-40B4-BE49-F238E27FC236}">
-                <a16:creationId xmlns:a16="http://schemas.microsoft.com/office/drawing/2014/main" id="{3AB783FC-AA1F-435F-9F83-035F6754BB36}"/>
+                <a16:creationId xmlns:a16="http://schemas.microsoft.com/office/drawing/2014/main" id="{D27E9DDA-3871-4C40-A46A-B4D867849BB8}"/>
               </a:ext>
             </a:extLst>
           </p:cNvPr>
@@ -7882,7 +8104,7 @@
     </p:spTree>
     <p:extLst>
       <p:ext uri="{BB962C8B-B14F-4D97-AF65-F5344CB8AC3E}">
-        <p14:creationId xmlns:p14="http://schemas.microsoft.com/office/powerpoint/2010/main" val="730663082"/>
+        <p14:creationId xmlns:p14="http://schemas.microsoft.com/office/powerpoint/2010/main" val="1387910779"/>
       </p:ext>
     </p:extLst>
   </p:cSld>
@@ -7913,7 +8135,7 @@
           <p:cNvPr id="23" name="">
             <a:extLst xmlns:a="http://schemas.openxmlformats.org/drawingml/2006/main">
               <a:ext uri="{FF2B5EF4-FFF2-40B4-BE49-F238E27FC236}">
-                <a16:creationId xmlns:a16="http://schemas.microsoft.com/office/drawing/2014/main" id="{98B8D603-1C45-4DC8-8AAF-966BEDC68965}"/>
+                <a16:creationId xmlns:a16="http://schemas.microsoft.com/office/drawing/2014/main" id="{CA47B478-6583-4D69-96A6-24BAA9247D87}"/>
               </a:ext>
             </a:extLst>
           </p:cNvPr>
@@ -7944,7 +8166,7 @@
           <p:cNvPr id="2" name="">
             <a:extLst xmlns:a="http://schemas.openxmlformats.org/drawingml/2006/main">
               <a:ext uri="{FF2B5EF4-FFF2-40B4-BE49-F238E27FC236}">
-                <a16:creationId xmlns:a16="http://schemas.microsoft.com/office/drawing/2014/main" id="{368760F0-8D2A-44FE-9C32-5F37ED115C6A}"/>
+                <a16:creationId xmlns:a16="http://schemas.microsoft.com/office/drawing/2014/main" id="{BD4AE661-F7A9-4390-92BE-DA91A60E5443}"/>
               </a:ext>
             </a:extLst>
           </p:cNvPr>
@@ -8006,7 +8228,7 @@
           <p:cNvPr id="3" name="">
             <a:extLst xmlns:a="http://schemas.openxmlformats.org/drawingml/2006/main">
               <a:ext uri="{FF2B5EF4-FFF2-40B4-BE49-F238E27FC236}">
-                <a16:creationId xmlns:a16="http://schemas.microsoft.com/office/drawing/2014/main" id="{EC4A0A44-ABCF-48AA-8E85-30E0E5163546}"/>
+                <a16:creationId xmlns:a16="http://schemas.microsoft.com/office/drawing/2014/main" id="{F6D0A3A1-A997-4757-BFD6-FA65B22794D7}"/>
               </a:ext>
             </a:extLst>
           </p:cNvPr>
@@ -8068,7 +8290,7 @@
           <p:cNvPr id="4" name="">
             <a:extLst xmlns:a="http://schemas.openxmlformats.org/drawingml/2006/main">
               <a:ext uri="{FF2B5EF4-FFF2-40B4-BE49-F238E27FC236}">
-                <a16:creationId xmlns:a16="http://schemas.microsoft.com/office/drawing/2014/main" id="{17E7A11D-B409-4AE4-8281-9ECE05406D79}"/>
+                <a16:creationId xmlns:a16="http://schemas.microsoft.com/office/drawing/2014/main" id="{BC2DD841-8C5C-47B3-8D7B-B25A05B7A769}"/>
               </a:ext>
             </a:extLst>
           </p:cNvPr>
@@ -8099,7 +8321,7 @@
           <p:cNvPr id="5" name="">
             <a:extLst xmlns:a="http://schemas.openxmlformats.org/drawingml/2006/main">
               <a:ext uri="{FF2B5EF4-FFF2-40B4-BE49-F238E27FC236}">
-                <a16:creationId xmlns:a16="http://schemas.microsoft.com/office/drawing/2014/main" id="{86C00176-4C58-4F86-81F1-F61D88CE654F}"/>
+                <a16:creationId xmlns:a16="http://schemas.microsoft.com/office/drawing/2014/main" id="{B8EE0D03-28DD-4654-9B36-673073AFA351}"/>
               </a:ext>
             </a:extLst>
           </p:cNvPr>
@@ -8161,7 +8383,7 @@
           <p:cNvPr id="6" name="">
             <a:extLst xmlns:a="http://schemas.openxmlformats.org/drawingml/2006/main">
               <a:ext uri="{FF2B5EF4-FFF2-40B4-BE49-F238E27FC236}">
-                <a16:creationId xmlns:a16="http://schemas.microsoft.com/office/drawing/2014/main" id="{F58FD8CD-9C52-4864-93D0-E15063814F47}"/>
+                <a16:creationId xmlns:a16="http://schemas.microsoft.com/office/drawing/2014/main" id="{FA80643A-D480-4628-A01C-193FDD76CF7F}"/>
               </a:ext>
             </a:extLst>
           </p:cNvPr>
@@ -8223,7 +8445,7 @@
           <p:cNvPr id="7" name="">
             <a:extLst xmlns:a="http://schemas.openxmlformats.org/drawingml/2006/main">
               <a:ext uri="{FF2B5EF4-FFF2-40B4-BE49-F238E27FC236}">
-                <a16:creationId xmlns:a16="http://schemas.microsoft.com/office/drawing/2014/main" id="{741A50B1-BC65-4829-91CB-84DF1718C051}"/>
+                <a16:creationId xmlns:a16="http://schemas.microsoft.com/office/drawing/2014/main" id="{6936865C-07EA-4F80-B18F-B78F894D4B97}"/>
               </a:ext>
             </a:extLst>
           </p:cNvPr>
@@ -8256,7 +8478,7 @@
           <p:cNvPr id="8" name="">
             <a:extLst xmlns:a="http://schemas.openxmlformats.org/drawingml/2006/main">
               <a:ext uri="{FF2B5EF4-FFF2-40B4-BE49-F238E27FC236}">
-                <a16:creationId xmlns:a16="http://schemas.microsoft.com/office/drawing/2014/main" id="{18DEBEA8-2B50-49E3-9180-252CA72AA9EC}"/>
+                <a16:creationId xmlns:a16="http://schemas.microsoft.com/office/drawing/2014/main" id="{01C710EA-9EF4-4E81-8C45-0AAC6BFA99B7}"/>
               </a:ext>
             </a:extLst>
           </p:cNvPr>
@@ -8318,7 +8540,7 @@
           <p:cNvPr id="9" name="">
             <a:extLst xmlns:a="http://schemas.openxmlformats.org/drawingml/2006/main">
               <a:ext uri="{FF2B5EF4-FFF2-40B4-BE49-F238E27FC236}">
-                <a16:creationId xmlns:a16="http://schemas.microsoft.com/office/drawing/2014/main" id="{36AF11D0-DBB9-40D2-B802-48796C57C38A}"/>
+                <a16:creationId xmlns:a16="http://schemas.microsoft.com/office/drawing/2014/main" id="{F251C12C-FA96-443C-9445-4EAB30832EE2}"/>
               </a:ext>
             </a:extLst>
           </p:cNvPr>
@@ -8380,7 +8602,7 @@
           <p:cNvPr id="10" name="">
             <a:extLst xmlns:a="http://schemas.openxmlformats.org/drawingml/2006/main">
               <a:ext uri="{FF2B5EF4-FFF2-40B4-BE49-F238E27FC236}">
-                <a16:creationId xmlns:a16="http://schemas.microsoft.com/office/drawing/2014/main" id="{82A0E2F2-AB87-4C2E-95E4-F0763F7B7527}"/>
+                <a16:creationId xmlns:a16="http://schemas.microsoft.com/office/drawing/2014/main" id="{1C71C222-2418-49E3-8580-6CBF8BCAFCAA}"/>
               </a:ext>
             </a:extLst>
           </p:cNvPr>
@@ -8442,7 +8664,7 @@
           <p:cNvPr id="11" name="">
             <a:extLst xmlns:a="http://schemas.openxmlformats.org/drawingml/2006/main">
               <a:ext uri="{FF2B5EF4-FFF2-40B4-BE49-F238E27FC236}">
-                <a16:creationId xmlns:a16="http://schemas.microsoft.com/office/drawing/2014/main" id="{50262C9E-39BD-404E-8E33-3E60910F6573}"/>
+                <a16:creationId xmlns:a16="http://schemas.microsoft.com/office/drawing/2014/main" id="{D71F7A63-F80C-47CD-A713-4F3BF35EEB45}"/>
               </a:ext>
             </a:extLst>
           </p:cNvPr>
@@ -8475,7 +8697,7 @@
           <p:cNvPr id="12" name="">
             <a:extLst xmlns:a="http://schemas.openxmlformats.org/drawingml/2006/main">
               <a:ext uri="{FF2B5EF4-FFF2-40B4-BE49-F238E27FC236}">
-                <a16:creationId xmlns:a16="http://schemas.microsoft.com/office/drawing/2014/main" id="{BF9AD7D1-EE84-429C-8BF7-9C1D604DAD9F}"/>
+                <a16:creationId xmlns:a16="http://schemas.microsoft.com/office/drawing/2014/main" id="{49C53B80-DB52-44DA-87CE-DB132E11B8B2}"/>
               </a:ext>
             </a:extLst>
           </p:cNvPr>
@@ -8537,7 +8759,7 @@
           <p:cNvPr id="13" name="">
             <a:extLst xmlns:a="http://schemas.openxmlformats.org/drawingml/2006/main">
               <a:ext uri="{FF2B5EF4-FFF2-40B4-BE49-F238E27FC236}">
-                <a16:creationId xmlns:a16="http://schemas.microsoft.com/office/drawing/2014/main" id="{E009827F-1B5E-4C93-98AB-2DD10EB15343}"/>
+                <a16:creationId xmlns:a16="http://schemas.microsoft.com/office/drawing/2014/main" id="{C6383535-7702-4D43-B326-C76550E5BA64}"/>
               </a:ext>
             </a:extLst>
           </p:cNvPr>
@@ -8599,7 +8821,7 @@
           <p:cNvPr id="14" name="">
             <a:extLst xmlns:a="http://schemas.openxmlformats.org/drawingml/2006/main">
               <a:ext uri="{FF2B5EF4-FFF2-40B4-BE49-F238E27FC236}">
-                <a16:creationId xmlns:a16="http://schemas.microsoft.com/office/drawing/2014/main" id="{EB333840-3F61-4303-8ED9-FCFD8BF6B7A4}"/>
+                <a16:creationId xmlns:a16="http://schemas.microsoft.com/office/drawing/2014/main" id="{96921C93-8A55-498F-8F80-BD05127E54DC}"/>
               </a:ext>
             </a:extLst>
           </p:cNvPr>
@@ -8661,7 +8883,7 @@
           <p:cNvPr id="15" name="">
             <a:extLst xmlns:a="http://schemas.openxmlformats.org/drawingml/2006/main">
               <a:ext uri="{FF2B5EF4-FFF2-40B4-BE49-F238E27FC236}">
-                <a16:creationId xmlns:a16="http://schemas.microsoft.com/office/drawing/2014/main" id="{DF65308C-9083-4AF2-8D7B-ECDF4EED265D}"/>
+                <a16:creationId xmlns:a16="http://schemas.microsoft.com/office/drawing/2014/main" id="{8AB33532-6972-467E-AE8F-90808BF7CE4B}"/>
               </a:ext>
             </a:extLst>
           </p:cNvPr>
@@ -8694,7 +8916,7 @@
           <p:cNvPr id="16" name="">
             <a:extLst xmlns:a="http://schemas.openxmlformats.org/drawingml/2006/main">
               <a:ext uri="{FF2B5EF4-FFF2-40B4-BE49-F238E27FC236}">
-                <a16:creationId xmlns:a16="http://schemas.microsoft.com/office/drawing/2014/main" id="{C8B90FBB-DB3E-4819-ADB0-EF0D57F7D2BF}"/>
+                <a16:creationId xmlns:a16="http://schemas.microsoft.com/office/drawing/2014/main" id="{6347CCA6-FCDB-4962-B447-D9CCB93D8322}"/>
               </a:ext>
             </a:extLst>
           </p:cNvPr>
@@ -8756,7 +8978,7 @@
           <p:cNvPr id="17" name="">
             <a:extLst xmlns:a="http://schemas.openxmlformats.org/drawingml/2006/main">
               <a:ext uri="{FF2B5EF4-FFF2-40B4-BE49-F238E27FC236}">
-                <a16:creationId xmlns:a16="http://schemas.microsoft.com/office/drawing/2014/main" id="{F62B1212-5962-406D-B5F1-3E5325012AB8}"/>
+                <a16:creationId xmlns:a16="http://schemas.microsoft.com/office/drawing/2014/main" id="{90B9ACEF-1345-4D88-8918-A49CBDD72D5D}"/>
               </a:ext>
             </a:extLst>
           </p:cNvPr>
@@ -8818,7 +9040,7 @@
           <p:cNvPr id="18" name="">
             <a:extLst xmlns:a="http://schemas.openxmlformats.org/drawingml/2006/main">
               <a:ext uri="{FF2B5EF4-FFF2-40B4-BE49-F238E27FC236}">
-                <a16:creationId xmlns:a16="http://schemas.microsoft.com/office/drawing/2014/main" id="{82CF1BEC-F80C-40BE-88C5-72110BDB4CBA}"/>
+                <a16:creationId xmlns:a16="http://schemas.microsoft.com/office/drawing/2014/main" id="{F009FAE7-BC81-4BBB-98C3-92968AB6E746}"/>
               </a:ext>
             </a:extLst>
           </p:cNvPr>
@@ -8880,7 +9102,7 @@
           <p:cNvPr id="19" name="">
             <a:extLst xmlns:a="http://schemas.openxmlformats.org/drawingml/2006/main">
               <a:ext uri="{FF2B5EF4-FFF2-40B4-BE49-F238E27FC236}">
-                <a16:creationId xmlns:a16="http://schemas.microsoft.com/office/drawing/2014/main" id="{3CF0F6F0-A731-40F8-9A4A-396FCCA67FD4}"/>
+                <a16:creationId xmlns:a16="http://schemas.microsoft.com/office/drawing/2014/main" id="{79C436E4-3A63-4F16-9B46-94A4BDC9B2CA}"/>
               </a:ext>
             </a:extLst>
           </p:cNvPr>
@@ -8913,7 +9135,7 @@
           <p:cNvPr id="20" name="">
             <a:extLst xmlns:a="http://schemas.openxmlformats.org/drawingml/2006/main">
               <a:ext uri="{FF2B5EF4-FFF2-40B4-BE49-F238E27FC236}">
-                <a16:creationId xmlns:a16="http://schemas.microsoft.com/office/drawing/2014/main" id="{A12ED708-9106-4F1F-A82B-8DD59D02AF4A}"/>
+                <a16:creationId xmlns:a16="http://schemas.microsoft.com/office/drawing/2014/main" id="{EA54A365-9213-477D-BD68-2A7FFCE92F69}"/>
               </a:ext>
             </a:extLst>
           </p:cNvPr>
@@ -8975,7 +9197,7 @@
           <p:cNvPr id="21" name="">
             <a:extLst xmlns:a="http://schemas.openxmlformats.org/drawingml/2006/main">
               <a:ext uri="{FF2B5EF4-FFF2-40B4-BE49-F238E27FC236}">
-                <a16:creationId xmlns:a16="http://schemas.microsoft.com/office/drawing/2014/main" id="{23DC60F4-6DD0-43C2-A69D-47CC57D110F2}"/>
+                <a16:creationId xmlns:a16="http://schemas.microsoft.com/office/drawing/2014/main" id="{D8E0711F-FBE6-47F1-ABDF-2B450C6C3D3B}"/>
               </a:ext>
             </a:extLst>
           </p:cNvPr>
@@ -9037,7 +9259,7 @@
           <p:cNvPr id="22" name="">
             <a:extLst xmlns:a="http://schemas.openxmlformats.org/drawingml/2006/main">
               <a:ext uri="{FF2B5EF4-FFF2-40B4-BE49-F238E27FC236}">
-                <a16:creationId xmlns:a16="http://schemas.microsoft.com/office/drawing/2014/main" id="{D44AA734-22BD-48C4-ABDA-F2EC306BAE93}"/>
+                <a16:creationId xmlns:a16="http://schemas.microsoft.com/office/drawing/2014/main" id="{EBA30908-DDAA-4DD6-959E-A089D886AB19}"/>
               </a:ext>
             </a:extLst>
           </p:cNvPr>
@@ -9097,7 +9319,7 @@
     </p:spTree>
     <p:extLst>
       <p:ext uri="{BB962C8B-B14F-4D97-AF65-F5344CB8AC3E}">
-        <p14:creationId xmlns:p14="http://schemas.microsoft.com/office/powerpoint/2010/main" val="599296629"/>
+        <p14:creationId xmlns:p14="http://schemas.microsoft.com/office/powerpoint/2010/main" val="394631863"/>
       </p:ext>
     </p:extLst>
   </p:cSld>
@@ -9128,7 +9350,7 @@
           <p:cNvPr id="23" name="">
             <a:extLst xmlns:a="http://schemas.openxmlformats.org/drawingml/2006/main">
               <a:ext uri="{FF2B5EF4-FFF2-40B4-BE49-F238E27FC236}">
-                <a16:creationId xmlns:a16="http://schemas.microsoft.com/office/drawing/2014/main" id="{736E85A4-C1ED-4FF3-8069-D5577FE920CE}"/>
+                <a16:creationId xmlns:a16="http://schemas.microsoft.com/office/drawing/2014/main" id="{50619FEE-F396-41F5-B7DF-A24F926E469A}"/>
               </a:ext>
             </a:extLst>
           </p:cNvPr>
@@ -9159,7 +9381,7 @@
           <p:cNvPr id="2" name="">
             <a:extLst xmlns:a="http://schemas.openxmlformats.org/drawingml/2006/main">
               <a:ext uri="{FF2B5EF4-FFF2-40B4-BE49-F238E27FC236}">
-                <a16:creationId xmlns:a16="http://schemas.microsoft.com/office/drawing/2014/main" id="{DE197AA1-3874-4D60-9046-DEB2E8BF3AC4}"/>
+                <a16:creationId xmlns:a16="http://schemas.microsoft.com/office/drawing/2014/main" id="{85D4F68C-59AE-4F39-8D97-9F41A30F4791}"/>
               </a:ext>
             </a:extLst>
           </p:cNvPr>
@@ -9221,7 +9443,7 @@
           <p:cNvPr id="3" name="">
             <a:extLst xmlns:a="http://schemas.openxmlformats.org/drawingml/2006/main">
               <a:ext uri="{FF2B5EF4-FFF2-40B4-BE49-F238E27FC236}">
-                <a16:creationId xmlns:a16="http://schemas.microsoft.com/office/drawing/2014/main" id="{E99C05BD-AA23-45A0-8E77-6A8D4ED940D0}"/>
+                <a16:creationId xmlns:a16="http://schemas.microsoft.com/office/drawing/2014/main" id="{509586E3-6DC8-4304-9F4F-F6210BCEFBD8}"/>
               </a:ext>
             </a:extLst>
           </p:cNvPr>
@@ -9283,7 +9505,7 @@
           <p:cNvPr id="4" name="">
             <a:extLst xmlns:a="http://schemas.openxmlformats.org/drawingml/2006/main">
               <a:ext uri="{FF2B5EF4-FFF2-40B4-BE49-F238E27FC236}">
-                <a16:creationId xmlns:a16="http://schemas.microsoft.com/office/drawing/2014/main" id="{536C1A01-37A9-44F3-960F-277608D54837}"/>
+                <a16:creationId xmlns:a16="http://schemas.microsoft.com/office/drawing/2014/main" id="{E150FE4B-51A8-49B2-8F50-17556825286F}"/>
               </a:ext>
             </a:extLst>
           </p:cNvPr>
@@ -9314,7 +9536,7 @@
           <p:cNvPr id="5" name="">
             <a:extLst xmlns:a="http://schemas.openxmlformats.org/drawingml/2006/main">
               <a:ext uri="{FF2B5EF4-FFF2-40B4-BE49-F238E27FC236}">
-                <a16:creationId xmlns:a16="http://schemas.microsoft.com/office/drawing/2014/main" id="{7E44FC1B-718B-4B61-855C-757D836459B9}"/>
+                <a16:creationId xmlns:a16="http://schemas.microsoft.com/office/drawing/2014/main" id="{BCFBA7D8-BE02-4A07-B308-411FE56D25AE}"/>
               </a:ext>
             </a:extLst>
           </p:cNvPr>
@@ -9376,7 +9598,7 @@
           <p:cNvPr id="6" name="">
             <a:extLst xmlns:a="http://schemas.openxmlformats.org/drawingml/2006/main">
               <a:ext uri="{FF2B5EF4-FFF2-40B4-BE49-F238E27FC236}">
-                <a16:creationId xmlns:a16="http://schemas.microsoft.com/office/drawing/2014/main" id="{FED8F39E-9CD9-49EE-9DE0-EDE4CD994496}"/>
+                <a16:creationId xmlns:a16="http://schemas.microsoft.com/office/drawing/2014/main" id="{1A450165-2963-4A4C-B83B-3308D914EA4F}"/>
               </a:ext>
             </a:extLst>
           </p:cNvPr>
@@ -9438,7 +9660,7 @@
           <p:cNvPr id="7" name="">
             <a:extLst xmlns:a="http://schemas.openxmlformats.org/drawingml/2006/main">
               <a:ext uri="{FF2B5EF4-FFF2-40B4-BE49-F238E27FC236}">
-                <a16:creationId xmlns:a16="http://schemas.microsoft.com/office/drawing/2014/main" id="{0AD05AB4-F78A-476E-A071-1EE9A06F93B7}"/>
+                <a16:creationId xmlns:a16="http://schemas.microsoft.com/office/drawing/2014/main" id="{608C117A-9248-47DF-AAA9-32B2BE194EFD}"/>
               </a:ext>
             </a:extLst>
           </p:cNvPr>
@@ -9500,7 +9722,7 @@
           <p:cNvPr id="8" name="">
             <a:extLst xmlns:a="http://schemas.openxmlformats.org/drawingml/2006/main">
               <a:ext uri="{FF2B5EF4-FFF2-40B4-BE49-F238E27FC236}">
-                <a16:creationId xmlns:a16="http://schemas.microsoft.com/office/drawing/2014/main" id="{D563AFFA-C965-46F5-A227-47EA6760AA14}"/>
+                <a16:creationId xmlns:a16="http://schemas.microsoft.com/office/drawing/2014/main" id="{B2B465FE-E75B-48D8-A113-F1B572B28A18}"/>
               </a:ext>
             </a:extLst>
           </p:cNvPr>
@@ -9562,7 +9784,7 @@
           <p:cNvPr id="9" name="">
             <a:extLst xmlns:a="http://schemas.openxmlformats.org/drawingml/2006/main">
               <a:ext uri="{FF2B5EF4-FFF2-40B4-BE49-F238E27FC236}">
-                <a16:creationId xmlns:a16="http://schemas.microsoft.com/office/drawing/2014/main" id="{806E39F3-9B7D-43D8-9F44-F13B26BDDFCD}"/>
+                <a16:creationId xmlns:a16="http://schemas.microsoft.com/office/drawing/2014/main" id="{4C34A81B-38D7-49E1-820C-2E5C4B22B56E}"/>
               </a:ext>
             </a:extLst>
           </p:cNvPr>
@@ -9624,7 +9846,7 @@
           <p:cNvPr id="10" name="">
             <a:extLst xmlns:a="http://schemas.openxmlformats.org/drawingml/2006/main">
               <a:ext uri="{FF2B5EF4-FFF2-40B4-BE49-F238E27FC236}">
-                <a16:creationId xmlns:a16="http://schemas.microsoft.com/office/drawing/2014/main" id="{47C7E6D4-1792-448B-ABB6-E758AF9FA8CE}"/>
+                <a16:creationId xmlns:a16="http://schemas.microsoft.com/office/drawing/2014/main" id="{C430E055-58D4-43AC-8EED-979A7AA0ACD1}"/>
               </a:ext>
             </a:extLst>
           </p:cNvPr>
@@ -9686,7 +9908,7 @@
           <p:cNvPr id="11" name="">
             <a:extLst xmlns:a="http://schemas.openxmlformats.org/drawingml/2006/main">
               <a:ext uri="{FF2B5EF4-FFF2-40B4-BE49-F238E27FC236}">
-                <a16:creationId xmlns:a16="http://schemas.microsoft.com/office/drawing/2014/main" id="{8EBE7190-BFD9-4F68-96D4-B17D923884DF}"/>
+                <a16:creationId xmlns:a16="http://schemas.microsoft.com/office/drawing/2014/main" id="{52298185-D61D-413D-A0E1-B0C9337CF4C2}"/>
               </a:ext>
             </a:extLst>
           </p:cNvPr>
@@ -9748,7 +9970,7 @@
           <p:cNvPr id="12" name="">
             <a:extLst xmlns:a="http://schemas.openxmlformats.org/drawingml/2006/main">
               <a:ext uri="{FF2B5EF4-FFF2-40B4-BE49-F238E27FC236}">
-                <a16:creationId xmlns:a16="http://schemas.microsoft.com/office/drawing/2014/main" id="{F5713912-B866-4E2B-80F4-D4BBD29EC8D8}"/>
+                <a16:creationId xmlns:a16="http://schemas.microsoft.com/office/drawing/2014/main" id="{FDD6BA8F-FFCA-4575-BC19-FED941B49BD6}"/>
               </a:ext>
             </a:extLst>
           </p:cNvPr>
@@ -9810,7 +10032,7 @@
           <p:cNvPr id="13" name="">
             <a:extLst xmlns:a="http://schemas.openxmlformats.org/drawingml/2006/main">
               <a:ext uri="{FF2B5EF4-FFF2-40B4-BE49-F238E27FC236}">
-                <a16:creationId xmlns:a16="http://schemas.microsoft.com/office/drawing/2014/main" id="{123EB1AB-5359-4783-814E-BE3E2D587A41}"/>
+                <a16:creationId xmlns:a16="http://schemas.microsoft.com/office/drawing/2014/main" id="{4C09F4FC-1E57-465B-AA54-CEF8B27DC25A}"/>
               </a:ext>
             </a:extLst>
           </p:cNvPr>
@@ -9872,7 +10094,7 @@
           <p:cNvPr id="14" name="">
             <a:extLst xmlns:a="http://schemas.openxmlformats.org/drawingml/2006/main">
               <a:ext uri="{FF2B5EF4-FFF2-40B4-BE49-F238E27FC236}">
-                <a16:creationId xmlns:a16="http://schemas.microsoft.com/office/drawing/2014/main" id="{3BCD4915-0A6B-4FB9-A6CF-B3D687884EF8}"/>
+                <a16:creationId xmlns:a16="http://schemas.microsoft.com/office/drawing/2014/main" id="{318E13C0-ECBC-4557-A3A8-4C42FB64712D}"/>
               </a:ext>
             </a:extLst>
           </p:cNvPr>
@@ -9903,7 +10125,7 @@
           <p:cNvPr id="15" name="">
             <a:extLst xmlns:a="http://schemas.openxmlformats.org/drawingml/2006/main">
               <a:ext uri="{FF2B5EF4-FFF2-40B4-BE49-F238E27FC236}">
-                <a16:creationId xmlns:a16="http://schemas.microsoft.com/office/drawing/2014/main" id="{CB81BF0C-2161-428F-8C39-FF32701A39EE}"/>
+                <a16:creationId xmlns:a16="http://schemas.microsoft.com/office/drawing/2014/main" id="{A5A6607E-020A-40A6-851D-FE7A253DB87B}"/>
               </a:ext>
             </a:extLst>
           </p:cNvPr>
@@ -9965,7 +10187,7 @@
           <p:cNvPr id="16" name="">
             <a:extLst xmlns:a="http://schemas.openxmlformats.org/drawingml/2006/main">
               <a:ext uri="{FF2B5EF4-FFF2-40B4-BE49-F238E27FC236}">
-                <a16:creationId xmlns:a16="http://schemas.microsoft.com/office/drawing/2014/main" id="{E904C6FF-13E4-4A86-8022-272B017FC89B}"/>
+                <a16:creationId xmlns:a16="http://schemas.microsoft.com/office/drawing/2014/main" id="{F756054B-40F3-452E-A976-E14178CC1DC8}"/>
               </a:ext>
             </a:extLst>
           </p:cNvPr>
@@ -10027,7 +10249,7 @@
           <p:cNvPr id="17" name="">
             <a:extLst xmlns:a="http://schemas.openxmlformats.org/drawingml/2006/main">
               <a:ext uri="{FF2B5EF4-FFF2-40B4-BE49-F238E27FC236}">
-                <a16:creationId xmlns:a16="http://schemas.microsoft.com/office/drawing/2014/main" id="{B973E435-18F1-4D31-A139-549FE81A54C3}"/>
+                <a16:creationId xmlns:a16="http://schemas.microsoft.com/office/drawing/2014/main" id="{BAEBF9ED-1F1E-4048-935C-B6E35674E1A0}"/>
               </a:ext>
             </a:extLst>
           </p:cNvPr>
@@ -10089,7 +10311,7 @@
           <p:cNvPr id="18" name="">
             <a:extLst xmlns:a="http://schemas.openxmlformats.org/drawingml/2006/main">
               <a:ext uri="{FF2B5EF4-FFF2-40B4-BE49-F238E27FC236}">
-                <a16:creationId xmlns:a16="http://schemas.microsoft.com/office/drawing/2014/main" id="{B8299EF4-8707-420C-86A6-1B3067AF6A24}"/>
+                <a16:creationId xmlns:a16="http://schemas.microsoft.com/office/drawing/2014/main" id="{E306C5CA-113C-463B-ADBD-FF6CADF1F66E}"/>
               </a:ext>
             </a:extLst>
           </p:cNvPr>
@@ -10151,7 +10373,7 @@
           <p:cNvPr id="19" name="">
             <a:extLst xmlns:a="http://schemas.openxmlformats.org/drawingml/2006/main">
               <a:ext uri="{FF2B5EF4-FFF2-40B4-BE49-F238E27FC236}">
-                <a16:creationId xmlns:a16="http://schemas.microsoft.com/office/drawing/2014/main" id="{F1372F53-245F-4035-BEA7-EA7028565995}"/>
+                <a16:creationId xmlns:a16="http://schemas.microsoft.com/office/drawing/2014/main" id="{1CA761F5-4367-42F3-BB64-6F486AB981E2}"/>
               </a:ext>
             </a:extLst>
           </p:cNvPr>
@@ -10213,7 +10435,7 @@
           <p:cNvPr id="20" name="">
             <a:extLst xmlns:a="http://schemas.openxmlformats.org/drawingml/2006/main">
               <a:ext uri="{FF2B5EF4-FFF2-40B4-BE49-F238E27FC236}">
-                <a16:creationId xmlns:a16="http://schemas.microsoft.com/office/drawing/2014/main" id="{664764DE-CD37-484B-A11C-E676034C77A4}"/>
+                <a16:creationId xmlns:a16="http://schemas.microsoft.com/office/drawing/2014/main" id="{51DD8772-4337-46DD-972C-0554D187A6BA}"/>
               </a:ext>
             </a:extLst>
           </p:cNvPr>
@@ -10275,7 +10497,7 @@
           <p:cNvPr id="21" name="">
             <a:extLst xmlns:a="http://schemas.openxmlformats.org/drawingml/2006/main">
               <a:ext uri="{FF2B5EF4-FFF2-40B4-BE49-F238E27FC236}">
-                <a16:creationId xmlns:a16="http://schemas.microsoft.com/office/drawing/2014/main" id="{7E3D17F3-52B5-47E9-BF59-39E10D041ED1}"/>
+                <a16:creationId xmlns:a16="http://schemas.microsoft.com/office/drawing/2014/main" id="{D56DA5E0-7E96-41AC-9BF5-231F9983695A}"/>
               </a:ext>
             </a:extLst>
           </p:cNvPr>
@@ -10337,7 +10559,7 @@
           <p:cNvPr id="22" name="">
             <a:extLst xmlns:a="http://schemas.openxmlformats.org/drawingml/2006/main">
               <a:ext uri="{FF2B5EF4-FFF2-40B4-BE49-F238E27FC236}">
-                <a16:creationId xmlns:a16="http://schemas.microsoft.com/office/drawing/2014/main" id="{18A30969-4C1E-4EAF-AA10-392CC515A827}"/>
+                <a16:creationId xmlns:a16="http://schemas.microsoft.com/office/drawing/2014/main" id="{0041E8EA-7463-4D1F-B68B-3B1B3BF0F2D4}"/>
               </a:ext>
             </a:extLst>
           </p:cNvPr>
@@ -10397,7 +10619,7 @@
     </p:spTree>
     <p:extLst>
       <p:ext uri="{BB962C8B-B14F-4D97-AF65-F5344CB8AC3E}">
-        <p14:creationId xmlns:p14="http://schemas.microsoft.com/office/powerpoint/2010/main" val="1300545400"/>
+        <p14:creationId xmlns:p14="http://schemas.microsoft.com/office/powerpoint/2010/main" val="1662791831"/>
       </p:ext>
     </p:extLst>
   </p:cSld>
@@ -10428,7 +10650,7 @@
           <p:cNvPr id="23" name="">
             <a:extLst xmlns:a="http://schemas.openxmlformats.org/drawingml/2006/main">
               <a:ext uri="{FF2B5EF4-FFF2-40B4-BE49-F238E27FC236}">
-                <a16:creationId xmlns:a16="http://schemas.microsoft.com/office/drawing/2014/main" id="{AEE95E78-890F-4664-870F-E10F29C2962A}"/>
+                <a16:creationId xmlns:a16="http://schemas.microsoft.com/office/drawing/2014/main" id="{0439F199-8929-412D-AD3E-7459445466EB}"/>
               </a:ext>
             </a:extLst>
           </p:cNvPr>
@@ -10459,7 +10681,7 @@
           <p:cNvPr id="2" name="">
             <a:extLst xmlns:a="http://schemas.openxmlformats.org/drawingml/2006/main">
               <a:ext uri="{FF2B5EF4-FFF2-40B4-BE49-F238E27FC236}">
-                <a16:creationId xmlns:a16="http://schemas.microsoft.com/office/drawing/2014/main" id="{F428917A-E783-450E-B094-D72607E1368E}"/>
+                <a16:creationId xmlns:a16="http://schemas.microsoft.com/office/drawing/2014/main" id="{A739B40E-7B06-4BFB-A4E6-4BD7B4FA84E4}"/>
               </a:ext>
             </a:extLst>
           </p:cNvPr>
@@ -10521,7 +10743,7 @@
           <p:cNvPr id="3" name="">
             <a:extLst xmlns:a="http://schemas.openxmlformats.org/drawingml/2006/main">
               <a:ext uri="{FF2B5EF4-FFF2-40B4-BE49-F238E27FC236}">
-                <a16:creationId xmlns:a16="http://schemas.microsoft.com/office/drawing/2014/main" id="{8107B064-9215-4F07-852C-2EBBEB1150E3}"/>
+                <a16:creationId xmlns:a16="http://schemas.microsoft.com/office/drawing/2014/main" id="{6F20235E-69CC-4B01-AD8F-97977B263BE0}"/>
               </a:ext>
             </a:extLst>
           </p:cNvPr>
@@ -10583,7 +10805,7 @@
           <p:cNvPr id="4" name="">
             <a:extLst xmlns:a="http://schemas.openxmlformats.org/drawingml/2006/main">
               <a:ext uri="{FF2B5EF4-FFF2-40B4-BE49-F238E27FC236}">
-                <a16:creationId xmlns:a16="http://schemas.microsoft.com/office/drawing/2014/main" id="{1DABD1D6-27C9-4446-962F-CDC7D6070A18}"/>
+                <a16:creationId xmlns:a16="http://schemas.microsoft.com/office/drawing/2014/main" id="{0EE87949-8010-45A7-B52D-DE9AA860E978}"/>
               </a:ext>
             </a:extLst>
           </p:cNvPr>
@@ -10614,7 +10836,7 @@
           <p:cNvPr id="5" name="">
             <a:extLst xmlns:a="http://schemas.openxmlformats.org/drawingml/2006/main">
               <a:ext uri="{FF2B5EF4-FFF2-40B4-BE49-F238E27FC236}">
-                <a16:creationId xmlns:a16="http://schemas.microsoft.com/office/drawing/2014/main" id="{0CDE69FF-E47F-4737-A3D8-5CEA77B6872F}"/>
+                <a16:creationId xmlns:a16="http://schemas.microsoft.com/office/drawing/2014/main" id="{D1716A90-9D70-47F8-A288-F6972177FBDF}"/>
               </a:ext>
             </a:extLst>
           </p:cNvPr>
@@ -10676,7 +10898,7 @@
           <p:cNvPr id="6" name="">
             <a:extLst xmlns:a="http://schemas.openxmlformats.org/drawingml/2006/main">
               <a:ext uri="{FF2B5EF4-FFF2-40B4-BE49-F238E27FC236}">
-                <a16:creationId xmlns:a16="http://schemas.microsoft.com/office/drawing/2014/main" id="{C1E435DA-880B-4812-8825-C33850EE7E55}"/>
+                <a16:creationId xmlns:a16="http://schemas.microsoft.com/office/drawing/2014/main" id="{A3D13571-F118-4440-987F-5654E97E7682}"/>
               </a:ext>
             </a:extLst>
           </p:cNvPr>
@@ -10738,7 +10960,7 @@
           <p:cNvPr id="7" name="">
             <a:extLst xmlns:a="http://schemas.openxmlformats.org/drawingml/2006/main">
               <a:ext uri="{FF2B5EF4-FFF2-40B4-BE49-F238E27FC236}">
-                <a16:creationId xmlns:a16="http://schemas.microsoft.com/office/drawing/2014/main" id="{C5AC7227-F227-403E-9077-5673F7C863CE}"/>
+                <a16:creationId xmlns:a16="http://schemas.microsoft.com/office/drawing/2014/main" id="{02200BAB-4E2B-4FEB-BD10-7A8E796E519F}"/>
               </a:ext>
             </a:extLst>
           </p:cNvPr>
@@ -10800,7 +11022,7 @@
           <p:cNvPr id="8" name="">
             <a:extLst xmlns:a="http://schemas.openxmlformats.org/drawingml/2006/main">
               <a:ext uri="{FF2B5EF4-FFF2-40B4-BE49-F238E27FC236}">
-                <a16:creationId xmlns:a16="http://schemas.microsoft.com/office/drawing/2014/main" id="{7FDA76D0-6C6B-4130-B9AA-11E7C6D37DAE}"/>
+                <a16:creationId xmlns:a16="http://schemas.microsoft.com/office/drawing/2014/main" id="{5D0B6EC1-DB97-448A-8D82-2FEAAFCF9FA6}"/>
               </a:ext>
             </a:extLst>
           </p:cNvPr>
@@ -10862,7 +11084,7 @@
           <p:cNvPr id="9" name="">
             <a:extLst xmlns:a="http://schemas.openxmlformats.org/drawingml/2006/main">
               <a:ext uri="{FF2B5EF4-FFF2-40B4-BE49-F238E27FC236}">
-                <a16:creationId xmlns:a16="http://schemas.microsoft.com/office/drawing/2014/main" id="{A5F8791C-38A0-4B23-8FEE-CE12ED84E0BF}"/>
+                <a16:creationId xmlns:a16="http://schemas.microsoft.com/office/drawing/2014/main" id="{964A70D6-43A7-407E-B2E0-6FA001AEA4EE}"/>
               </a:ext>
             </a:extLst>
           </p:cNvPr>
@@ -10924,7 +11146,7 @@
           <p:cNvPr id="10" name="">
             <a:extLst xmlns:a="http://schemas.openxmlformats.org/drawingml/2006/main">
               <a:ext uri="{FF2B5EF4-FFF2-40B4-BE49-F238E27FC236}">
-                <a16:creationId xmlns:a16="http://schemas.microsoft.com/office/drawing/2014/main" id="{663EA401-6E76-4AB4-B87D-496EDC11DC04}"/>
+                <a16:creationId xmlns:a16="http://schemas.microsoft.com/office/drawing/2014/main" id="{4A956775-10AB-4DAF-9588-6D69B04D2E55}"/>
               </a:ext>
             </a:extLst>
           </p:cNvPr>
@@ -10986,7 +11208,7 @@
           <p:cNvPr id="11" name="">
             <a:extLst xmlns:a="http://schemas.openxmlformats.org/drawingml/2006/main">
               <a:ext uri="{FF2B5EF4-FFF2-40B4-BE49-F238E27FC236}">
-                <a16:creationId xmlns:a16="http://schemas.microsoft.com/office/drawing/2014/main" id="{D3039F5B-E21E-404C-9E18-04D8CF4B1354}"/>
+                <a16:creationId xmlns:a16="http://schemas.microsoft.com/office/drawing/2014/main" id="{BAAA0310-D76A-4DC2-9FB3-B6DF81F9191E}"/>
               </a:ext>
             </a:extLst>
           </p:cNvPr>
@@ -11048,7 +11270,7 @@
           <p:cNvPr id="12" name="">
             <a:extLst xmlns:a="http://schemas.openxmlformats.org/drawingml/2006/main">
               <a:ext uri="{FF2B5EF4-FFF2-40B4-BE49-F238E27FC236}">
-                <a16:creationId xmlns:a16="http://schemas.microsoft.com/office/drawing/2014/main" id="{0735D2A7-293F-4BDA-9D0B-2918B414612C}"/>
+                <a16:creationId xmlns:a16="http://schemas.microsoft.com/office/drawing/2014/main" id="{F4914256-ED7F-4D69-9C8A-1D90B2F99982}"/>
               </a:ext>
             </a:extLst>
           </p:cNvPr>
@@ -11110,7 +11332,7 @@
           <p:cNvPr id="13" name="">
             <a:extLst xmlns:a="http://schemas.openxmlformats.org/drawingml/2006/main">
               <a:ext uri="{FF2B5EF4-FFF2-40B4-BE49-F238E27FC236}">
-                <a16:creationId xmlns:a16="http://schemas.microsoft.com/office/drawing/2014/main" id="{85761242-F656-4735-9C38-506596C4C887}"/>
+                <a16:creationId xmlns:a16="http://schemas.microsoft.com/office/drawing/2014/main" id="{639D10DC-0895-4238-A37A-805022EA81FC}"/>
               </a:ext>
             </a:extLst>
           </p:cNvPr>
@@ -11172,7 +11394,7 @@
           <p:cNvPr id="14" name="">
             <a:extLst xmlns:a="http://schemas.openxmlformats.org/drawingml/2006/main">
               <a:ext uri="{FF2B5EF4-FFF2-40B4-BE49-F238E27FC236}">
-                <a16:creationId xmlns:a16="http://schemas.microsoft.com/office/drawing/2014/main" id="{70897864-31AE-40A4-9B4E-CAC77AD8B343}"/>
+                <a16:creationId xmlns:a16="http://schemas.microsoft.com/office/drawing/2014/main" id="{7D12BF2E-ED2E-4C77-B2B5-44DEC28A31B0}"/>
               </a:ext>
             </a:extLst>
           </p:cNvPr>
@@ -11203,7 +11425,7 @@
           <p:cNvPr id="15" name="">
             <a:extLst xmlns:a="http://schemas.openxmlformats.org/drawingml/2006/main">
               <a:ext uri="{FF2B5EF4-FFF2-40B4-BE49-F238E27FC236}">
-                <a16:creationId xmlns:a16="http://schemas.microsoft.com/office/drawing/2014/main" id="{9224A07B-0C57-48EC-923B-096B75CE7063}"/>
+                <a16:creationId xmlns:a16="http://schemas.microsoft.com/office/drawing/2014/main" id="{B0CF062C-8192-492B-8B46-EFD979E7A6C5}"/>
               </a:ext>
             </a:extLst>
           </p:cNvPr>
@@ -11265,7 +11487,7 @@
           <p:cNvPr id="16" name="">
             <a:extLst xmlns:a="http://schemas.openxmlformats.org/drawingml/2006/main">
               <a:ext uri="{FF2B5EF4-FFF2-40B4-BE49-F238E27FC236}">
-                <a16:creationId xmlns:a16="http://schemas.microsoft.com/office/drawing/2014/main" id="{E248CF5F-A3DF-4FD7-BD54-16C10FA60289}"/>
+                <a16:creationId xmlns:a16="http://schemas.microsoft.com/office/drawing/2014/main" id="{B46A0752-91DD-481A-9F2D-AC6DFCE08DCD}"/>
               </a:ext>
             </a:extLst>
           </p:cNvPr>
@@ -11327,7 +11549,7 @@
           <p:cNvPr id="17" name="">
             <a:extLst xmlns:a="http://schemas.openxmlformats.org/drawingml/2006/main">
               <a:ext uri="{FF2B5EF4-FFF2-40B4-BE49-F238E27FC236}">
-                <a16:creationId xmlns:a16="http://schemas.microsoft.com/office/drawing/2014/main" id="{52C5C359-B6B8-4944-A5C9-7AE9443FC075}"/>
+                <a16:creationId xmlns:a16="http://schemas.microsoft.com/office/drawing/2014/main" id="{AD4E9781-EC1E-446B-9745-E4774C0B0BD6}"/>
               </a:ext>
             </a:extLst>
           </p:cNvPr>
@@ -11389,7 +11611,7 @@
           <p:cNvPr id="18" name="">
             <a:extLst xmlns:a="http://schemas.openxmlformats.org/drawingml/2006/main">
               <a:ext uri="{FF2B5EF4-FFF2-40B4-BE49-F238E27FC236}">
-                <a16:creationId xmlns:a16="http://schemas.microsoft.com/office/drawing/2014/main" id="{2F620F44-5526-4C76-8267-8391E0CAD34F}"/>
+                <a16:creationId xmlns:a16="http://schemas.microsoft.com/office/drawing/2014/main" id="{B0FDEE50-F199-425B-BD81-E4ACB1D7E1D6}"/>
               </a:ext>
             </a:extLst>
           </p:cNvPr>
@@ -11451,7 +11673,7 @@
           <p:cNvPr id="19" name="">
             <a:extLst xmlns:a="http://schemas.openxmlformats.org/drawingml/2006/main">
               <a:ext uri="{FF2B5EF4-FFF2-40B4-BE49-F238E27FC236}">
-                <a16:creationId xmlns:a16="http://schemas.microsoft.com/office/drawing/2014/main" id="{2D5041B1-1F0B-493E-A165-D3D6EC771691}"/>
+                <a16:creationId xmlns:a16="http://schemas.microsoft.com/office/drawing/2014/main" id="{0FD187A8-F028-433C-88EC-D4BE1E2838B5}"/>
               </a:ext>
             </a:extLst>
           </p:cNvPr>
@@ -11513,7 +11735,7 @@
           <p:cNvPr id="20" name="">
             <a:extLst xmlns:a="http://schemas.openxmlformats.org/drawingml/2006/main">
               <a:ext uri="{FF2B5EF4-FFF2-40B4-BE49-F238E27FC236}">
-                <a16:creationId xmlns:a16="http://schemas.microsoft.com/office/drawing/2014/main" id="{890B6680-4C93-49E9-A9F4-E824206B6A49}"/>
+                <a16:creationId xmlns:a16="http://schemas.microsoft.com/office/drawing/2014/main" id="{A968BB4C-6C44-40F6-B31B-3A3165FD8F33}"/>
               </a:ext>
             </a:extLst>
           </p:cNvPr>
@@ -11575,7 +11797,7 @@
           <p:cNvPr id="21" name="">
             <a:extLst xmlns:a="http://schemas.openxmlformats.org/drawingml/2006/main">
               <a:ext uri="{FF2B5EF4-FFF2-40B4-BE49-F238E27FC236}">
-                <a16:creationId xmlns:a16="http://schemas.microsoft.com/office/drawing/2014/main" id="{21FF6946-9112-49DD-9D0F-8125F5A63F76}"/>
+                <a16:creationId xmlns:a16="http://schemas.microsoft.com/office/drawing/2014/main" id="{5A11F10A-6E34-436A-8CC0-39A093BF429F}"/>
               </a:ext>
             </a:extLst>
           </p:cNvPr>
@@ -11637,7 +11859,7 @@
           <p:cNvPr id="22" name="">
             <a:extLst xmlns:a="http://schemas.openxmlformats.org/drawingml/2006/main">
               <a:ext uri="{FF2B5EF4-FFF2-40B4-BE49-F238E27FC236}">
-                <a16:creationId xmlns:a16="http://schemas.microsoft.com/office/drawing/2014/main" id="{C4F6230E-1267-48A3-8249-E7B4B8D2654C}"/>
+                <a16:creationId xmlns:a16="http://schemas.microsoft.com/office/drawing/2014/main" id="{B903F543-5D4D-41DE-99B2-8BDE97EA4F2D}"/>
               </a:ext>
             </a:extLst>
           </p:cNvPr>
@@ -11697,7 +11919,7 @@
     </p:spTree>
     <p:extLst>
       <p:ext uri="{BB962C8B-B14F-4D97-AF65-F5344CB8AC3E}">
-        <p14:creationId xmlns:p14="http://schemas.microsoft.com/office/powerpoint/2010/main" val="1809085936"/>
+        <p14:creationId xmlns:p14="http://schemas.microsoft.com/office/powerpoint/2010/main" val="1341868168"/>
       </p:ext>
     </p:extLst>
   </p:cSld>
@@ -11728,7 +11950,7 @@
           <p:cNvPr id="17" name="">
             <a:extLst xmlns:a="http://schemas.openxmlformats.org/drawingml/2006/main">
               <a:ext uri="{FF2B5EF4-FFF2-40B4-BE49-F238E27FC236}">
-                <a16:creationId xmlns:a16="http://schemas.microsoft.com/office/drawing/2014/main" id="{E6761C86-4725-4B4C-BEA3-6475ABA1B12A}"/>
+                <a16:creationId xmlns:a16="http://schemas.microsoft.com/office/drawing/2014/main" id="{4ABCD85B-D665-4616-B03B-2F784A485CF1}"/>
               </a:ext>
             </a:extLst>
           </p:cNvPr>
@@ -11759,7 +11981,7 @@
           <p:cNvPr id="2" name="">
             <a:extLst xmlns:a="http://schemas.openxmlformats.org/drawingml/2006/main">
               <a:ext uri="{FF2B5EF4-FFF2-40B4-BE49-F238E27FC236}">
-                <a16:creationId xmlns:a16="http://schemas.microsoft.com/office/drawing/2014/main" id="{652EF331-7F5E-40DC-A36D-7CF3F2C3F7B7}"/>
+                <a16:creationId xmlns:a16="http://schemas.microsoft.com/office/drawing/2014/main" id="{75A74B53-5B6D-424D-B9B8-D377904D7F48}"/>
               </a:ext>
             </a:extLst>
           </p:cNvPr>
@@ -11821,7 +12043,7 @@
           <p:cNvPr id="3" name="">
             <a:extLst xmlns:a="http://schemas.openxmlformats.org/drawingml/2006/main">
               <a:ext uri="{FF2B5EF4-FFF2-40B4-BE49-F238E27FC236}">
-                <a16:creationId xmlns:a16="http://schemas.microsoft.com/office/drawing/2014/main" id="{3A844529-7017-4ABE-91B8-610A53A72FDF}"/>
+                <a16:creationId xmlns:a16="http://schemas.microsoft.com/office/drawing/2014/main" id="{566FC7CE-3982-4D31-AFA3-B7BAF74EC8BD}"/>
               </a:ext>
             </a:extLst>
           </p:cNvPr>
@@ -11883,7 +12105,7 @@
           <p:cNvPr id="4" name="">
             <a:extLst xmlns:a="http://schemas.openxmlformats.org/drawingml/2006/main">
               <a:ext uri="{FF2B5EF4-FFF2-40B4-BE49-F238E27FC236}">
-                <a16:creationId xmlns:a16="http://schemas.microsoft.com/office/drawing/2014/main" id="{F670B5E2-8A88-4507-9DCD-B5E160F4B03F}"/>
+                <a16:creationId xmlns:a16="http://schemas.microsoft.com/office/drawing/2014/main" id="{82CD3E84-C579-4A67-B831-D11DB152469E}"/>
               </a:ext>
             </a:extLst>
           </p:cNvPr>
@@ -11914,7 +12136,7 @@
           <p:cNvPr id="5" name="">
             <a:extLst xmlns:a="http://schemas.openxmlformats.org/drawingml/2006/main">
               <a:ext uri="{FF2B5EF4-FFF2-40B4-BE49-F238E27FC236}">
-                <a16:creationId xmlns:a16="http://schemas.microsoft.com/office/drawing/2014/main" id="{398BE268-43E4-4E3B-873E-C2C227BEF9B7}"/>
+                <a16:creationId xmlns:a16="http://schemas.microsoft.com/office/drawing/2014/main" id="{5CD7854F-CF53-44DA-BF38-4396B016CB6B}"/>
               </a:ext>
             </a:extLst>
           </p:cNvPr>
@@ -11976,7 +12198,7 @@
           <p:cNvPr id="6" name="">
             <a:extLst xmlns:a="http://schemas.openxmlformats.org/drawingml/2006/main">
               <a:ext uri="{FF2B5EF4-FFF2-40B4-BE49-F238E27FC236}">
-                <a16:creationId xmlns:a16="http://schemas.microsoft.com/office/drawing/2014/main" id="{BE08F0EF-74E2-450A-859A-4B62120BB4E0}"/>
+                <a16:creationId xmlns:a16="http://schemas.microsoft.com/office/drawing/2014/main" id="{A23A5989-C3D7-447D-8A16-201DDC4E9460}"/>
               </a:ext>
             </a:extLst>
           </p:cNvPr>
@@ -12038,7 +12260,7 @@
           <p:cNvPr id="7" name="">
             <a:extLst xmlns:a="http://schemas.openxmlformats.org/drawingml/2006/main">
               <a:ext uri="{FF2B5EF4-FFF2-40B4-BE49-F238E27FC236}">
-                <a16:creationId xmlns:a16="http://schemas.microsoft.com/office/drawing/2014/main" id="{52B3DAF1-E963-4CFE-9A9C-28A564092A07}"/>
+                <a16:creationId xmlns:a16="http://schemas.microsoft.com/office/drawing/2014/main" id="{19F1ADCD-B990-4058-AB4D-C2908BA92DDA}"/>
               </a:ext>
             </a:extLst>
           </p:cNvPr>
@@ -12100,7 +12322,7 @@
           <p:cNvPr id="8" name="">
             <a:extLst xmlns:a="http://schemas.openxmlformats.org/drawingml/2006/main">
               <a:ext uri="{FF2B5EF4-FFF2-40B4-BE49-F238E27FC236}">
-                <a16:creationId xmlns:a16="http://schemas.microsoft.com/office/drawing/2014/main" id="{0B32A09F-DF7C-4256-BAB6-AF1338E45CBA}"/>
+                <a16:creationId xmlns:a16="http://schemas.microsoft.com/office/drawing/2014/main" id="{17FC13B2-F004-43B6-BD76-8F842A1BE376}"/>
               </a:ext>
             </a:extLst>
           </p:cNvPr>
@@ -12133,7 +12355,7 @@
           <p:cNvPr id="9" name="">
             <a:extLst xmlns:a="http://schemas.openxmlformats.org/drawingml/2006/main">
               <a:ext uri="{FF2B5EF4-FFF2-40B4-BE49-F238E27FC236}">
-                <a16:creationId xmlns:a16="http://schemas.microsoft.com/office/drawing/2014/main" id="{AC566C93-D3FC-4C17-9CE5-32C20AC03E81}"/>
+                <a16:creationId xmlns:a16="http://schemas.microsoft.com/office/drawing/2014/main" id="{55A211AE-136D-498E-A62C-C6AA073CB1BE}"/>
               </a:ext>
             </a:extLst>
           </p:cNvPr>
@@ -12195,7 +12417,7 @@
           <p:cNvPr id="10" name="">
             <a:extLst xmlns:a="http://schemas.openxmlformats.org/drawingml/2006/main">
               <a:ext uri="{FF2B5EF4-FFF2-40B4-BE49-F238E27FC236}">
-                <a16:creationId xmlns:a16="http://schemas.microsoft.com/office/drawing/2014/main" id="{FFC96329-8E92-4F9B-ACB3-0C3A3C9EA130}"/>
+                <a16:creationId xmlns:a16="http://schemas.microsoft.com/office/drawing/2014/main" id="{42974E0E-A8EE-4BFA-9C17-18E6F61C766E}"/>
               </a:ext>
             </a:extLst>
           </p:cNvPr>
@@ -12257,7 +12479,7 @@
           <p:cNvPr id="11" name="">
             <a:extLst xmlns:a="http://schemas.openxmlformats.org/drawingml/2006/main">
               <a:ext uri="{FF2B5EF4-FFF2-40B4-BE49-F238E27FC236}">
-                <a16:creationId xmlns:a16="http://schemas.microsoft.com/office/drawing/2014/main" id="{95222B32-5A58-423C-8AA8-FD54B36FA1F6}"/>
+                <a16:creationId xmlns:a16="http://schemas.microsoft.com/office/drawing/2014/main" id="{C6FC710D-8748-4CDA-B301-2DAE7F40A65B}"/>
               </a:ext>
             </a:extLst>
           </p:cNvPr>
@@ -12290,7 +12512,7 @@
           <p:cNvPr id="12" name="">
             <a:extLst xmlns:a="http://schemas.openxmlformats.org/drawingml/2006/main">
               <a:ext uri="{FF2B5EF4-FFF2-40B4-BE49-F238E27FC236}">
-                <a16:creationId xmlns:a16="http://schemas.microsoft.com/office/drawing/2014/main" id="{44E5127B-E55F-43CE-AB73-84F1E4EDF33A}"/>
+                <a16:creationId xmlns:a16="http://schemas.microsoft.com/office/drawing/2014/main" id="{6B43A4C1-AA62-46C0-8A2A-E98DE47D6066}"/>
               </a:ext>
             </a:extLst>
           </p:cNvPr>
@@ -12352,7 +12574,7 @@
           <p:cNvPr id="13" name="">
             <a:extLst xmlns:a="http://schemas.openxmlformats.org/drawingml/2006/main">
               <a:ext uri="{FF2B5EF4-FFF2-40B4-BE49-F238E27FC236}">
-                <a16:creationId xmlns:a16="http://schemas.microsoft.com/office/drawing/2014/main" id="{78ACF77C-4191-4A5D-8898-FA655F67E5A7}"/>
+                <a16:creationId xmlns:a16="http://schemas.microsoft.com/office/drawing/2014/main" id="{D6F41C02-8681-4FDD-BBD0-126A15A8C7E2}"/>
               </a:ext>
             </a:extLst>
           </p:cNvPr>
@@ -12414,7 +12636,7 @@
           <p:cNvPr id="14" name="">
             <a:extLst xmlns:a="http://schemas.openxmlformats.org/drawingml/2006/main">
               <a:ext uri="{FF2B5EF4-FFF2-40B4-BE49-F238E27FC236}">
-                <a16:creationId xmlns:a16="http://schemas.microsoft.com/office/drawing/2014/main" id="{B6B6211D-CE3C-4CCC-9EDC-0C8743C71285}"/>
+                <a16:creationId xmlns:a16="http://schemas.microsoft.com/office/drawing/2014/main" id="{4DC5CEBC-16DF-49E0-9474-90D5BDAE7872}"/>
               </a:ext>
             </a:extLst>
           </p:cNvPr>
@@ -12447,7 +12669,7 @@
           <p:cNvPr id="15" name="">
             <a:extLst xmlns:a="http://schemas.openxmlformats.org/drawingml/2006/main">
               <a:ext uri="{FF2B5EF4-FFF2-40B4-BE49-F238E27FC236}">
-                <a16:creationId xmlns:a16="http://schemas.microsoft.com/office/drawing/2014/main" id="{BA2A0910-6E1B-4125-BC77-8A9DF1B4F146}"/>
+                <a16:creationId xmlns:a16="http://schemas.microsoft.com/office/drawing/2014/main" id="{24889CEE-8544-4625-9B56-48CC5AFD05AB}"/>
               </a:ext>
             </a:extLst>
           </p:cNvPr>
@@ -12509,7 +12731,7 @@
           <p:cNvPr id="16" name="">
             <a:extLst xmlns:a="http://schemas.openxmlformats.org/drawingml/2006/main">
               <a:ext uri="{FF2B5EF4-FFF2-40B4-BE49-F238E27FC236}">
-                <a16:creationId xmlns:a16="http://schemas.microsoft.com/office/drawing/2014/main" id="{8A133E60-E2A0-4578-A2D3-CC1190F1D1A4}"/>
+                <a16:creationId xmlns:a16="http://schemas.microsoft.com/office/drawing/2014/main" id="{E87D3420-53F8-4C40-AC9B-7921A97F52A4}"/>
               </a:ext>
             </a:extLst>
           </p:cNvPr>
@@ -12569,7 +12791,7 @@
     </p:spTree>
     <p:extLst>
       <p:ext uri="{BB962C8B-B14F-4D97-AF65-F5344CB8AC3E}">
-        <p14:creationId xmlns:p14="http://schemas.microsoft.com/office/powerpoint/2010/main" val="437251704"/>
+        <p14:creationId xmlns:p14="http://schemas.microsoft.com/office/powerpoint/2010/main" val="897336114"/>
       </p:ext>
     </p:extLst>
   </p:cSld>
@@ -12600,7 +12822,7 @@
           <p:cNvPr id="9" name="">
             <a:extLst xmlns:a="http://schemas.openxmlformats.org/drawingml/2006/main">
               <a:ext uri="{FF2B5EF4-FFF2-40B4-BE49-F238E27FC236}">
-                <a16:creationId xmlns:a16="http://schemas.microsoft.com/office/drawing/2014/main" id="{A1BAE03F-E6FA-4621-9080-921EDB965AA2}"/>
+                <a16:creationId xmlns:a16="http://schemas.microsoft.com/office/drawing/2014/main" id="{CDE2AE25-330E-421F-9B35-996893D7F0DB}"/>
               </a:ext>
             </a:extLst>
           </p:cNvPr>
@@ -12631,7 +12853,7 @@
           <p:cNvPr id="2" name="">
             <a:extLst xmlns:a="http://schemas.openxmlformats.org/drawingml/2006/main">
               <a:ext uri="{FF2B5EF4-FFF2-40B4-BE49-F238E27FC236}">
-                <a16:creationId xmlns:a16="http://schemas.microsoft.com/office/drawing/2014/main" id="{8195F4FB-9D3D-4774-872F-D7CCAC018D8B}"/>
+                <a16:creationId xmlns:a16="http://schemas.microsoft.com/office/drawing/2014/main" id="{9F46828B-4DF0-4E42-8FEE-CB16A8267595}"/>
               </a:ext>
             </a:extLst>
           </p:cNvPr>
@@ -12693,7 +12915,7 @@
           <p:cNvPr id="3" name="">
             <a:extLst xmlns:a="http://schemas.openxmlformats.org/drawingml/2006/main">
               <a:ext uri="{FF2B5EF4-FFF2-40B4-BE49-F238E27FC236}">
-                <a16:creationId xmlns:a16="http://schemas.microsoft.com/office/drawing/2014/main" id="{CB7FA90C-F4E0-4670-AA31-25DAAD01226B}"/>
+                <a16:creationId xmlns:a16="http://schemas.microsoft.com/office/drawing/2014/main" id="{4E032A71-2C4E-491D-99D4-F465514338BB}"/>
               </a:ext>
             </a:extLst>
           </p:cNvPr>
@@ -12755,7 +12977,7 @@
           <p:cNvPr id="4" name="">
             <a:extLst xmlns:a="http://schemas.openxmlformats.org/drawingml/2006/main">
               <a:ext uri="{FF2B5EF4-FFF2-40B4-BE49-F238E27FC236}">
-                <a16:creationId xmlns:a16="http://schemas.microsoft.com/office/drawing/2014/main" id="{58469746-7314-4273-9587-41B5713E8933}"/>
+                <a16:creationId xmlns:a16="http://schemas.microsoft.com/office/drawing/2014/main" id="{1BF95717-4330-4FC2-A2DE-FEA3B3B323D2}"/>
               </a:ext>
             </a:extLst>
           </p:cNvPr>
@@ -12786,7 +13008,7 @@
           <p:cNvPr id="5" name="">
             <a:extLst xmlns:a="http://schemas.openxmlformats.org/drawingml/2006/main">
               <a:ext uri="{FF2B5EF4-FFF2-40B4-BE49-F238E27FC236}">
-                <a16:creationId xmlns:a16="http://schemas.microsoft.com/office/drawing/2014/main" id="{0CF84756-488F-42E5-919C-1F7928995F4B}"/>
+                <a16:creationId xmlns:a16="http://schemas.microsoft.com/office/drawing/2014/main" id="{AB20050C-EC50-469B-8D00-F5E9E62AED57}"/>
               </a:ext>
             </a:extLst>
           </p:cNvPr>
@@ -12848,7 +13070,7 @@
           <p:cNvPr id="6" name="">
             <a:extLst xmlns:a="http://schemas.openxmlformats.org/drawingml/2006/main">
               <a:ext uri="{FF2B5EF4-FFF2-40B4-BE49-F238E27FC236}">
-                <a16:creationId xmlns:a16="http://schemas.microsoft.com/office/drawing/2014/main" id="{12B25CAB-9BCA-4B7D-B2A5-4922CE4C55BE}"/>
+                <a16:creationId xmlns:a16="http://schemas.microsoft.com/office/drawing/2014/main" id="{0A4D1DE6-75A9-438F-A6F6-9E56BCC76C2D}"/>
               </a:ext>
             </a:extLst>
           </p:cNvPr>
@@ -12910,7 +13132,7 @@
           <p:cNvPr id="7" name="">
             <a:extLst xmlns:a="http://schemas.openxmlformats.org/drawingml/2006/main">
               <a:ext uri="{FF2B5EF4-FFF2-40B4-BE49-F238E27FC236}">
-                <a16:creationId xmlns:a16="http://schemas.microsoft.com/office/drawing/2014/main" id="{B731202B-1525-4027-9A04-0CA764E74DA2}"/>
+                <a16:creationId xmlns:a16="http://schemas.microsoft.com/office/drawing/2014/main" id="{E60FB885-6195-4678-97A1-3F8CFAE6C4FF}"/>
               </a:ext>
             </a:extLst>
           </p:cNvPr>
@@ -12972,7 +13194,7 @@
           <p:cNvPr id="8" name="">
             <a:extLst xmlns:a="http://schemas.openxmlformats.org/drawingml/2006/main">
               <a:ext uri="{FF2B5EF4-FFF2-40B4-BE49-F238E27FC236}">
-                <a16:creationId xmlns:a16="http://schemas.microsoft.com/office/drawing/2014/main" id="{AAF9B01B-F429-4F42-9FA6-561E4752CB3B}"/>
+                <a16:creationId xmlns:a16="http://schemas.microsoft.com/office/drawing/2014/main" id="{82E75B7E-5B07-4C7D-BABB-BCD50F3EC254}"/>
               </a:ext>
             </a:extLst>
           </p:cNvPr>
@@ -13032,7 +13254,7 @@
     </p:spTree>
     <p:extLst>
       <p:ext uri="{BB962C8B-B14F-4D97-AF65-F5344CB8AC3E}">
-        <p14:creationId xmlns:p14="http://schemas.microsoft.com/office/powerpoint/2010/main" val="1430407240"/>
+        <p14:creationId xmlns:p14="http://schemas.microsoft.com/office/powerpoint/2010/main" val="1372693590"/>
       </p:ext>
     </p:extLst>
   </p:cSld>
@@ -13063,7 +13285,7 @@
           <p:cNvPr id="24" name="">
             <a:extLst xmlns:a="http://schemas.openxmlformats.org/drawingml/2006/main">
               <a:ext uri="{FF2B5EF4-FFF2-40B4-BE49-F238E27FC236}">
-                <a16:creationId xmlns:a16="http://schemas.microsoft.com/office/drawing/2014/main" id="{069112C0-B5F4-48CE-9F09-B1FED9297071}"/>
+                <a16:creationId xmlns:a16="http://schemas.microsoft.com/office/drawing/2014/main" id="{88E53B36-8EE5-46DA-BBC0-1402CCD9C30B}"/>
               </a:ext>
             </a:extLst>
           </p:cNvPr>
@@ -13094,7 +13316,7 @@
           <p:cNvPr id="2" name="">
             <a:extLst xmlns:a="http://schemas.openxmlformats.org/drawingml/2006/main">
               <a:ext uri="{FF2B5EF4-FFF2-40B4-BE49-F238E27FC236}">
-                <a16:creationId xmlns:a16="http://schemas.microsoft.com/office/drawing/2014/main" id="{FA43FC37-38AA-4838-B578-3ABA079FCC48}"/>
+                <a16:creationId xmlns:a16="http://schemas.microsoft.com/office/drawing/2014/main" id="{19CCB40B-D34B-4376-B6C7-88A747FAE534}"/>
               </a:ext>
             </a:extLst>
           </p:cNvPr>
@@ -13156,7 +13378,7 @@
           <p:cNvPr id="3" name="">
             <a:extLst xmlns:a="http://schemas.openxmlformats.org/drawingml/2006/main">
               <a:ext uri="{FF2B5EF4-FFF2-40B4-BE49-F238E27FC236}">
-                <a16:creationId xmlns:a16="http://schemas.microsoft.com/office/drawing/2014/main" id="{53360988-4D6A-4B69-A29C-8F727B5196CF}"/>
+                <a16:creationId xmlns:a16="http://schemas.microsoft.com/office/drawing/2014/main" id="{6718550F-B323-4F20-B107-1B90DE563B55}"/>
               </a:ext>
             </a:extLst>
           </p:cNvPr>
@@ -13218,7 +13440,7 @@
           <p:cNvPr id="4" name="">
             <a:extLst xmlns:a="http://schemas.openxmlformats.org/drawingml/2006/main">
               <a:ext uri="{FF2B5EF4-FFF2-40B4-BE49-F238E27FC236}">
-                <a16:creationId xmlns:a16="http://schemas.microsoft.com/office/drawing/2014/main" id="{8B6C5CB5-925D-4C73-A383-E169EAAEE605}"/>
+                <a16:creationId xmlns:a16="http://schemas.microsoft.com/office/drawing/2014/main" id="{0B68108A-7C3E-4379-8AA6-413015831F6B}"/>
               </a:ext>
             </a:extLst>
           </p:cNvPr>
@@ -13249,7 +13471,7 @@
           <p:cNvPr id="5" name="">
             <a:extLst xmlns:a="http://schemas.openxmlformats.org/drawingml/2006/main">
               <a:ext uri="{FF2B5EF4-FFF2-40B4-BE49-F238E27FC236}">
-                <a16:creationId xmlns:a16="http://schemas.microsoft.com/office/drawing/2014/main" id="{FD44C734-B807-4250-B3EB-899F431B7427}"/>
+                <a16:creationId xmlns:a16="http://schemas.microsoft.com/office/drawing/2014/main" id="{D14A36F9-6E35-4906-A5F3-93AAABA90507}"/>
               </a:ext>
             </a:extLst>
           </p:cNvPr>
@@ -13311,7 +13533,7 @@
           <p:cNvPr id="6" name="">
             <a:extLst xmlns:a="http://schemas.openxmlformats.org/drawingml/2006/main">
               <a:ext uri="{FF2B5EF4-FFF2-40B4-BE49-F238E27FC236}">
-                <a16:creationId xmlns:a16="http://schemas.microsoft.com/office/drawing/2014/main" id="{33E73E9E-60F1-4D7C-9C1E-3E2D66864F54}"/>
+                <a16:creationId xmlns:a16="http://schemas.microsoft.com/office/drawing/2014/main" id="{8DBF54D3-266D-41A5-BDBA-D14DC8B898A1}"/>
               </a:ext>
             </a:extLst>
           </p:cNvPr>
@@ -13373,7 +13595,7 @@
           <p:cNvPr id="7" name="">
             <a:extLst xmlns:a="http://schemas.openxmlformats.org/drawingml/2006/main">
               <a:ext uri="{FF2B5EF4-FFF2-40B4-BE49-F238E27FC236}">
-                <a16:creationId xmlns:a16="http://schemas.microsoft.com/office/drawing/2014/main" id="{2DF079C3-BEF9-4BAB-B208-2BB6D272ADDD}"/>
+                <a16:creationId xmlns:a16="http://schemas.microsoft.com/office/drawing/2014/main" id="{937C696E-879C-4C40-93CB-677DEC6918BC}"/>
               </a:ext>
             </a:extLst>
           </p:cNvPr>
@@ -13435,7 +13657,7 @@
           <p:cNvPr id="8" name="">
             <a:extLst xmlns:a="http://schemas.openxmlformats.org/drawingml/2006/main">
               <a:ext uri="{FF2B5EF4-FFF2-40B4-BE49-F238E27FC236}">
-                <a16:creationId xmlns:a16="http://schemas.microsoft.com/office/drawing/2014/main" id="{44DE43A7-79B8-4C24-AED5-C7A096BFB693}"/>
+                <a16:creationId xmlns:a16="http://schemas.microsoft.com/office/drawing/2014/main" id="{0C6E835B-C0B2-45F1-AA73-A5F2D6288212}"/>
               </a:ext>
             </a:extLst>
           </p:cNvPr>
@@ -13497,7 +13719,7 @@
           <p:cNvPr id="9" name="">
             <a:extLst xmlns:a="http://schemas.openxmlformats.org/drawingml/2006/main">
               <a:ext uri="{FF2B5EF4-FFF2-40B4-BE49-F238E27FC236}">
-                <a16:creationId xmlns:a16="http://schemas.microsoft.com/office/drawing/2014/main" id="{236B1BAA-D6E5-4E0F-8ABB-E4253298A603}"/>
+                <a16:creationId xmlns:a16="http://schemas.microsoft.com/office/drawing/2014/main" id="{CAE10BA2-DF4D-49CE-821D-3993B0C641CE}"/>
               </a:ext>
             </a:extLst>
           </p:cNvPr>
@@ -13559,7 +13781,7 @@
           <p:cNvPr id="10" name="">
             <a:extLst xmlns:a="http://schemas.openxmlformats.org/drawingml/2006/main">
               <a:ext uri="{FF2B5EF4-FFF2-40B4-BE49-F238E27FC236}">
-                <a16:creationId xmlns:a16="http://schemas.microsoft.com/office/drawing/2014/main" id="{ACC45638-2A00-4C60-A93D-5D4567418DDD}"/>
+                <a16:creationId xmlns:a16="http://schemas.microsoft.com/office/drawing/2014/main" id="{B75531CB-9D15-4190-98AC-23200DA47CE1}"/>
               </a:ext>
             </a:extLst>
           </p:cNvPr>
@@ -13621,7 +13843,7 @@
           <p:cNvPr id="11" name="">
             <a:extLst xmlns:a="http://schemas.openxmlformats.org/drawingml/2006/main">
               <a:ext uri="{FF2B5EF4-FFF2-40B4-BE49-F238E27FC236}">
-                <a16:creationId xmlns:a16="http://schemas.microsoft.com/office/drawing/2014/main" id="{C92F9DEA-204A-4654-9128-BAFD04DACCFB}"/>
+                <a16:creationId xmlns:a16="http://schemas.microsoft.com/office/drawing/2014/main" id="{B54C97CC-8553-48F8-B6E4-FC2D36AFDE04}"/>
               </a:ext>
             </a:extLst>
           </p:cNvPr>
@@ -13683,7 +13905,7 @@
           <p:cNvPr id="12" name="">
             <a:extLst xmlns:a="http://schemas.openxmlformats.org/drawingml/2006/main">
               <a:ext uri="{FF2B5EF4-FFF2-40B4-BE49-F238E27FC236}">
-                <a16:creationId xmlns:a16="http://schemas.microsoft.com/office/drawing/2014/main" id="{5B66DD37-4A00-4558-8CF7-E5C1517F627D}"/>
+                <a16:creationId xmlns:a16="http://schemas.microsoft.com/office/drawing/2014/main" id="{F72E5834-1EB3-4637-B6BE-65DA3FDE2EB5}"/>
               </a:ext>
             </a:extLst>
           </p:cNvPr>
@@ -13745,7 +13967,7 @@
           <p:cNvPr id="13" name="">
             <a:extLst xmlns:a="http://schemas.openxmlformats.org/drawingml/2006/main">
               <a:ext uri="{FF2B5EF4-FFF2-40B4-BE49-F238E27FC236}">
-                <a16:creationId xmlns:a16="http://schemas.microsoft.com/office/drawing/2014/main" id="{37C94E45-A116-4619-9A0E-8D927B6D68E3}"/>
+                <a16:creationId xmlns:a16="http://schemas.microsoft.com/office/drawing/2014/main" id="{E934D9BE-61E4-4382-8616-5FC84ECB65FD}"/>
               </a:ext>
             </a:extLst>
           </p:cNvPr>
@@ -13807,7 +14029,7 @@
           <p:cNvPr id="14" name="">
             <a:extLst xmlns:a="http://schemas.openxmlformats.org/drawingml/2006/main">
               <a:ext uri="{FF2B5EF4-FFF2-40B4-BE49-F238E27FC236}">
-                <a16:creationId xmlns:a16="http://schemas.microsoft.com/office/drawing/2014/main" id="{3D0E84EF-0E45-4CBC-9F9F-65E693086D3F}"/>
+                <a16:creationId xmlns:a16="http://schemas.microsoft.com/office/drawing/2014/main" id="{C06E2193-CFA7-45E4-966A-74D3C07C11F8}"/>
               </a:ext>
             </a:extLst>
           </p:cNvPr>
@@ -13869,7 +14091,7 @@
           <p:cNvPr id="15" name="">
             <a:extLst xmlns:a="http://schemas.openxmlformats.org/drawingml/2006/main">
               <a:ext uri="{FF2B5EF4-FFF2-40B4-BE49-F238E27FC236}">
-                <a16:creationId xmlns:a16="http://schemas.microsoft.com/office/drawing/2014/main" id="{44457B1A-9E21-47BB-AEF3-A401B3342140}"/>
+                <a16:creationId xmlns:a16="http://schemas.microsoft.com/office/drawing/2014/main" id="{1046F2C9-0D11-46FB-829E-9E73724C1306}"/>
               </a:ext>
             </a:extLst>
           </p:cNvPr>
@@ -13900,7 +14122,7 @@
           <p:cNvPr id="16" name="">
             <a:extLst xmlns:a="http://schemas.openxmlformats.org/drawingml/2006/main">
               <a:ext uri="{FF2B5EF4-FFF2-40B4-BE49-F238E27FC236}">
-                <a16:creationId xmlns:a16="http://schemas.microsoft.com/office/drawing/2014/main" id="{3A428628-EAD5-46C5-9F48-CE9C3B9577E3}"/>
+                <a16:creationId xmlns:a16="http://schemas.microsoft.com/office/drawing/2014/main" id="{8891B7A1-2FF5-440C-8F66-6B104646AB87}"/>
               </a:ext>
             </a:extLst>
           </p:cNvPr>
@@ -13962,7 +14184,7 @@
           <p:cNvPr id="17" name="">
             <a:extLst xmlns:a="http://schemas.openxmlformats.org/drawingml/2006/main">
               <a:ext uri="{FF2B5EF4-FFF2-40B4-BE49-F238E27FC236}">
-                <a16:creationId xmlns:a16="http://schemas.microsoft.com/office/drawing/2014/main" id="{820A9C06-F92E-46DE-BEE5-8E907E07C2E1}"/>
+                <a16:creationId xmlns:a16="http://schemas.microsoft.com/office/drawing/2014/main" id="{70208AF9-DD29-464A-8A5A-6AF6538CAE87}"/>
               </a:ext>
             </a:extLst>
           </p:cNvPr>
@@ -14024,7 +14246,7 @@
           <p:cNvPr id="18" name="">
             <a:extLst xmlns:a="http://schemas.openxmlformats.org/drawingml/2006/main">
               <a:ext uri="{FF2B5EF4-FFF2-40B4-BE49-F238E27FC236}">
-                <a16:creationId xmlns:a16="http://schemas.microsoft.com/office/drawing/2014/main" id="{579BBD89-FF00-4377-AB18-45958F46879E}"/>
+                <a16:creationId xmlns:a16="http://schemas.microsoft.com/office/drawing/2014/main" id="{E8970A2D-15C0-4B36-9864-2A7E8F485315}"/>
               </a:ext>
             </a:extLst>
           </p:cNvPr>
@@ -14086,7 +14308,7 @@
           <p:cNvPr id="19" name="">
             <a:extLst xmlns:a="http://schemas.openxmlformats.org/drawingml/2006/main">
               <a:ext uri="{FF2B5EF4-FFF2-40B4-BE49-F238E27FC236}">
-                <a16:creationId xmlns:a16="http://schemas.microsoft.com/office/drawing/2014/main" id="{48AC2EF0-7C46-4DFC-A451-66757224003F}"/>
+                <a16:creationId xmlns:a16="http://schemas.microsoft.com/office/drawing/2014/main" id="{6BB0AA6A-3103-4864-8E95-90F90AAA886F}"/>
               </a:ext>
             </a:extLst>
           </p:cNvPr>
@@ -14148,7 +14370,7 @@
           <p:cNvPr id="20" name="">
             <a:extLst xmlns:a="http://schemas.openxmlformats.org/drawingml/2006/main">
               <a:ext uri="{FF2B5EF4-FFF2-40B4-BE49-F238E27FC236}">
-                <a16:creationId xmlns:a16="http://schemas.microsoft.com/office/drawing/2014/main" id="{3E7903FD-23A2-4B0B-A23F-F5640DB7D6A1}"/>
+                <a16:creationId xmlns:a16="http://schemas.microsoft.com/office/drawing/2014/main" id="{041F3B3D-A570-4532-969B-00D1C6F7C1A9}"/>
               </a:ext>
             </a:extLst>
           </p:cNvPr>
@@ -14210,7 +14432,7 @@
           <p:cNvPr id="21" name="">
             <a:extLst xmlns:a="http://schemas.openxmlformats.org/drawingml/2006/main">
               <a:ext uri="{FF2B5EF4-FFF2-40B4-BE49-F238E27FC236}">
-                <a16:creationId xmlns:a16="http://schemas.microsoft.com/office/drawing/2014/main" id="{B17D39FB-C864-499E-AC53-D8ABF5DE0919}"/>
+                <a16:creationId xmlns:a16="http://schemas.microsoft.com/office/drawing/2014/main" id="{68DF9030-2F5D-43F5-BB71-C5C215C5AE33}"/>
               </a:ext>
             </a:extLst>
           </p:cNvPr>
@@ -14272,7 +14494,7 @@
           <p:cNvPr id="22" name="">
             <a:extLst xmlns:a="http://schemas.openxmlformats.org/drawingml/2006/main">
               <a:ext uri="{FF2B5EF4-FFF2-40B4-BE49-F238E27FC236}">
-                <a16:creationId xmlns:a16="http://schemas.microsoft.com/office/drawing/2014/main" id="{E73F37DB-294F-4D91-88AC-7472A69940FA}"/>
+                <a16:creationId xmlns:a16="http://schemas.microsoft.com/office/drawing/2014/main" id="{925957A1-FE5D-46CE-B1EC-8FA245599057}"/>
               </a:ext>
             </a:extLst>
           </p:cNvPr>
@@ -14334,7 +14556,7 @@
           <p:cNvPr id="23" name="">
             <a:extLst xmlns:a="http://schemas.openxmlformats.org/drawingml/2006/main">
               <a:ext uri="{FF2B5EF4-FFF2-40B4-BE49-F238E27FC236}">
-                <a16:creationId xmlns:a16="http://schemas.microsoft.com/office/drawing/2014/main" id="{0EF32CCE-E61A-4484-BC7D-76238BF6BF86}"/>
+                <a16:creationId xmlns:a16="http://schemas.microsoft.com/office/drawing/2014/main" id="{18676743-8361-42D9-8ACC-0EB8EE0248DA}"/>
               </a:ext>
             </a:extLst>
           </p:cNvPr>
@@ -14394,7 +14616,7 @@
     </p:spTree>
     <p:extLst>
       <p:ext uri="{BB962C8B-B14F-4D97-AF65-F5344CB8AC3E}">
-        <p14:creationId xmlns:p14="http://schemas.microsoft.com/office/powerpoint/2010/main" val="214633794"/>
+        <p14:creationId xmlns:p14="http://schemas.microsoft.com/office/powerpoint/2010/main" val="2094483555"/>
       </p:ext>
     </p:extLst>
   </p:cSld>
@@ -14425,7 +14647,7 @@
           <p:cNvPr id="24" name="">
             <a:extLst xmlns:a="http://schemas.openxmlformats.org/drawingml/2006/main">
               <a:ext uri="{FF2B5EF4-FFF2-40B4-BE49-F238E27FC236}">
-                <a16:creationId xmlns:a16="http://schemas.microsoft.com/office/drawing/2014/main" id="{D9230FB0-F1AD-4C57-97F0-93DC370E3721}"/>
+                <a16:creationId xmlns:a16="http://schemas.microsoft.com/office/drawing/2014/main" id="{EEB867A8-088D-436C-8879-2947C6EA2D0B}"/>
               </a:ext>
             </a:extLst>
           </p:cNvPr>
@@ -14456,7 +14678,7 @@
           <p:cNvPr id="2" name="">
             <a:extLst xmlns:a="http://schemas.openxmlformats.org/drawingml/2006/main">
               <a:ext uri="{FF2B5EF4-FFF2-40B4-BE49-F238E27FC236}">
-                <a16:creationId xmlns:a16="http://schemas.microsoft.com/office/drawing/2014/main" id="{A97E33AF-E706-4067-BE79-090E6B77EAB4}"/>
+                <a16:creationId xmlns:a16="http://schemas.microsoft.com/office/drawing/2014/main" id="{8E4F7B5E-8895-4D25-9AA9-64686EDC323A}"/>
               </a:ext>
             </a:extLst>
           </p:cNvPr>
@@ -14518,7 +14740,7 @@
           <p:cNvPr id="3" name="">
             <a:extLst xmlns:a="http://schemas.openxmlformats.org/drawingml/2006/main">
               <a:ext uri="{FF2B5EF4-FFF2-40B4-BE49-F238E27FC236}">
-                <a16:creationId xmlns:a16="http://schemas.microsoft.com/office/drawing/2014/main" id="{03D3B454-6107-4FAB-99C8-106A615F56FD}"/>
+                <a16:creationId xmlns:a16="http://schemas.microsoft.com/office/drawing/2014/main" id="{043F315C-33A5-45A8-8BC8-314CA0D181C5}"/>
               </a:ext>
             </a:extLst>
           </p:cNvPr>
@@ -14580,7 +14802,7 @@
           <p:cNvPr id="4" name="">
             <a:extLst xmlns:a="http://schemas.openxmlformats.org/drawingml/2006/main">
               <a:ext uri="{FF2B5EF4-FFF2-40B4-BE49-F238E27FC236}">
-                <a16:creationId xmlns:a16="http://schemas.microsoft.com/office/drawing/2014/main" id="{B982B0EA-D4DF-4CDC-90FF-8760EA3AC678}"/>
+                <a16:creationId xmlns:a16="http://schemas.microsoft.com/office/drawing/2014/main" id="{3EDBBD87-9B32-4F6B-9AC0-12FD03EAE9C7}"/>
               </a:ext>
             </a:extLst>
           </p:cNvPr>
@@ -14611,7 +14833,7 @@
           <p:cNvPr id="5" name="">
             <a:extLst xmlns:a="http://schemas.openxmlformats.org/drawingml/2006/main">
               <a:ext uri="{FF2B5EF4-FFF2-40B4-BE49-F238E27FC236}">
-                <a16:creationId xmlns:a16="http://schemas.microsoft.com/office/drawing/2014/main" id="{7AD7460A-0707-49BB-B52D-9D850E5FBA94}"/>
+                <a16:creationId xmlns:a16="http://schemas.microsoft.com/office/drawing/2014/main" id="{A3FD867D-A034-42F7-A881-3AEB5B52B5FC}"/>
               </a:ext>
             </a:extLst>
           </p:cNvPr>
@@ -14673,7 +14895,7 @@
           <p:cNvPr id="6" name="">
             <a:extLst xmlns:a="http://schemas.openxmlformats.org/drawingml/2006/main">
               <a:ext uri="{FF2B5EF4-FFF2-40B4-BE49-F238E27FC236}">
-                <a16:creationId xmlns:a16="http://schemas.microsoft.com/office/drawing/2014/main" id="{5BD39F03-1B2C-48B1-A7B7-0C0AA5BFB4BC}"/>
+                <a16:creationId xmlns:a16="http://schemas.microsoft.com/office/drawing/2014/main" id="{A413E56B-4DB6-4DCA-8A78-BC41ECC086E3}"/>
               </a:ext>
             </a:extLst>
           </p:cNvPr>
@@ -14735,7 +14957,7 @@
           <p:cNvPr id="7" name="">
             <a:extLst xmlns:a="http://schemas.openxmlformats.org/drawingml/2006/main">
               <a:ext uri="{FF2B5EF4-FFF2-40B4-BE49-F238E27FC236}">
-                <a16:creationId xmlns:a16="http://schemas.microsoft.com/office/drawing/2014/main" id="{B44C3D6F-0494-45CE-99ED-136C1DD3A207}"/>
+                <a16:creationId xmlns:a16="http://schemas.microsoft.com/office/drawing/2014/main" id="{0444945C-C32A-4B51-9F4B-D6458278D161}"/>
               </a:ext>
             </a:extLst>
           </p:cNvPr>
@@ -14797,7 +15019,7 @@
           <p:cNvPr id="8" name="">
             <a:extLst xmlns:a="http://schemas.openxmlformats.org/drawingml/2006/main">
               <a:ext uri="{FF2B5EF4-FFF2-40B4-BE49-F238E27FC236}">
-                <a16:creationId xmlns:a16="http://schemas.microsoft.com/office/drawing/2014/main" id="{BE66A4D3-AD47-46F3-924E-567F49266E41}"/>
+                <a16:creationId xmlns:a16="http://schemas.microsoft.com/office/drawing/2014/main" id="{C4B7B66E-C2A0-4294-8289-1BD162FB367B}"/>
               </a:ext>
             </a:extLst>
           </p:cNvPr>
@@ -14859,7 +15081,7 @@
           <p:cNvPr id="9" name="">
             <a:extLst xmlns:a="http://schemas.openxmlformats.org/drawingml/2006/main">
               <a:ext uri="{FF2B5EF4-FFF2-40B4-BE49-F238E27FC236}">
-                <a16:creationId xmlns:a16="http://schemas.microsoft.com/office/drawing/2014/main" id="{AC9E1434-F0F2-4521-9D1F-F3481BCD7D83}"/>
+                <a16:creationId xmlns:a16="http://schemas.microsoft.com/office/drawing/2014/main" id="{89887CB1-C367-4C5C-A380-4B1CA9C936CC}"/>
               </a:ext>
             </a:extLst>
           </p:cNvPr>
@@ -14921,7 +15143,7 @@
           <p:cNvPr id="10" name="">
             <a:extLst xmlns:a="http://schemas.openxmlformats.org/drawingml/2006/main">
               <a:ext uri="{FF2B5EF4-FFF2-40B4-BE49-F238E27FC236}">
-                <a16:creationId xmlns:a16="http://schemas.microsoft.com/office/drawing/2014/main" id="{0FC53DDE-AF9A-4902-9E2C-753F13F10196}"/>
+                <a16:creationId xmlns:a16="http://schemas.microsoft.com/office/drawing/2014/main" id="{4BB4D0B1-6D0B-492A-B816-C46EA01A23AF}"/>
               </a:ext>
             </a:extLst>
           </p:cNvPr>
@@ -14983,7 +15205,7 @@
           <p:cNvPr id="11" name="">
             <a:extLst xmlns:a="http://schemas.openxmlformats.org/drawingml/2006/main">
               <a:ext uri="{FF2B5EF4-FFF2-40B4-BE49-F238E27FC236}">
-                <a16:creationId xmlns:a16="http://schemas.microsoft.com/office/drawing/2014/main" id="{EFC64E61-A816-4D84-B26D-96FECA66ED2F}"/>
+                <a16:creationId xmlns:a16="http://schemas.microsoft.com/office/drawing/2014/main" id="{7ED3DA03-4E01-4EB7-B109-FAAD7AF19D9E}"/>
               </a:ext>
             </a:extLst>
           </p:cNvPr>
@@ -15045,7 +15267,7 @@
           <p:cNvPr id="12" name="">
             <a:extLst xmlns:a="http://schemas.openxmlformats.org/drawingml/2006/main">
               <a:ext uri="{FF2B5EF4-FFF2-40B4-BE49-F238E27FC236}">
-                <a16:creationId xmlns:a16="http://schemas.microsoft.com/office/drawing/2014/main" id="{46854E81-D950-41E4-A7D2-CCE97F8824BA}"/>
+                <a16:creationId xmlns:a16="http://schemas.microsoft.com/office/drawing/2014/main" id="{CAD2BF24-D0A0-40EA-9043-6A6E2C4472E9}"/>
               </a:ext>
             </a:extLst>
           </p:cNvPr>
@@ -15107,7 +15329,7 @@
           <p:cNvPr id="13" name="">
             <a:extLst xmlns:a="http://schemas.openxmlformats.org/drawingml/2006/main">
               <a:ext uri="{FF2B5EF4-FFF2-40B4-BE49-F238E27FC236}">
-                <a16:creationId xmlns:a16="http://schemas.microsoft.com/office/drawing/2014/main" id="{E02427B2-C47B-4EF9-BC40-54FA86DE7CDB}"/>
+                <a16:creationId xmlns:a16="http://schemas.microsoft.com/office/drawing/2014/main" id="{C53C1262-325A-4274-8785-C1636DCF76C0}"/>
               </a:ext>
             </a:extLst>
           </p:cNvPr>
@@ -15169,7 +15391,7 @@
           <p:cNvPr id="14" name="">
             <a:extLst xmlns:a="http://schemas.openxmlformats.org/drawingml/2006/main">
               <a:ext uri="{FF2B5EF4-FFF2-40B4-BE49-F238E27FC236}">
-                <a16:creationId xmlns:a16="http://schemas.microsoft.com/office/drawing/2014/main" id="{52637203-F4DB-412A-9417-2259BEC1446B}"/>
+                <a16:creationId xmlns:a16="http://schemas.microsoft.com/office/drawing/2014/main" id="{5BF2883C-0C00-4624-8F19-5B4C33D5F099}"/>
               </a:ext>
             </a:extLst>
           </p:cNvPr>
@@ -15231,7 +15453,7 @@
           <p:cNvPr id="15" name="">
             <a:extLst xmlns:a="http://schemas.openxmlformats.org/drawingml/2006/main">
               <a:ext uri="{FF2B5EF4-FFF2-40B4-BE49-F238E27FC236}">
-                <a16:creationId xmlns:a16="http://schemas.microsoft.com/office/drawing/2014/main" id="{FCCF8C66-C9B4-43D8-984B-3FD06E1EC0A7}"/>
+                <a16:creationId xmlns:a16="http://schemas.microsoft.com/office/drawing/2014/main" id="{F5A5A509-B052-4AC2-8E95-C909DDE3D2A9}"/>
               </a:ext>
             </a:extLst>
           </p:cNvPr>
@@ -15262,7 +15484,7 @@
           <p:cNvPr id="16" name="">
             <a:extLst xmlns:a="http://schemas.openxmlformats.org/drawingml/2006/main">
               <a:ext uri="{FF2B5EF4-FFF2-40B4-BE49-F238E27FC236}">
-                <a16:creationId xmlns:a16="http://schemas.microsoft.com/office/drawing/2014/main" id="{FB6F6E66-D0EB-4256-A0B2-BA4D9AABA790}"/>
+                <a16:creationId xmlns:a16="http://schemas.microsoft.com/office/drawing/2014/main" id="{F3B7167E-306F-47B9-9D81-127EEDD420D9}"/>
               </a:ext>
             </a:extLst>
           </p:cNvPr>
@@ -15324,7 +15546,7 @@
           <p:cNvPr id="17" name="">
             <a:extLst xmlns:a="http://schemas.openxmlformats.org/drawingml/2006/main">
               <a:ext uri="{FF2B5EF4-FFF2-40B4-BE49-F238E27FC236}">
-                <a16:creationId xmlns:a16="http://schemas.microsoft.com/office/drawing/2014/main" id="{B1CE70C9-CD48-42C4-B4EB-9FD214A8BB4E}"/>
+                <a16:creationId xmlns:a16="http://schemas.microsoft.com/office/drawing/2014/main" id="{38271809-2817-4B78-A44F-8C20171AD5C5}"/>
               </a:ext>
             </a:extLst>
           </p:cNvPr>
@@ -15386,7 +15608,7 @@
           <p:cNvPr id="18" name="">
             <a:extLst xmlns:a="http://schemas.openxmlformats.org/drawingml/2006/main">
               <a:ext uri="{FF2B5EF4-FFF2-40B4-BE49-F238E27FC236}">
-                <a16:creationId xmlns:a16="http://schemas.microsoft.com/office/drawing/2014/main" id="{7E276A52-1804-415D-8E25-AF65396B98EE}"/>
+                <a16:creationId xmlns:a16="http://schemas.microsoft.com/office/drawing/2014/main" id="{F5427C17-44ED-49FE-AD36-798D4F69460B}"/>
               </a:ext>
             </a:extLst>
           </p:cNvPr>
@@ -15448,7 +15670,7 @@
           <p:cNvPr id="19" name="">
             <a:extLst xmlns:a="http://schemas.openxmlformats.org/drawingml/2006/main">
               <a:ext uri="{FF2B5EF4-FFF2-40B4-BE49-F238E27FC236}">
-                <a16:creationId xmlns:a16="http://schemas.microsoft.com/office/drawing/2014/main" id="{9C582C75-A3A1-4640-AF85-020079637B02}"/>
+                <a16:creationId xmlns:a16="http://schemas.microsoft.com/office/drawing/2014/main" id="{5E8B6A8E-00B5-489C-BE73-5725345560E6}"/>
               </a:ext>
             </a:extLst>
           </p:cNvPr>
@@ -15510,7 +15732,7 @@
           <p:cNvPr id="20" name="">
             <a:extLst xmlns:a="http://schemas.openxmlformats.org/drawingml/2006/main">
               <a:ext uri="{FF2B5EF4-FFF2-40B4-BE49-F238E27FC236}">
-                <a16:creationId xmlns:a16="http://schemas.microsoft.com/office/drawing/2014/main" id="{F5689493-BB85-4077-8DA0-68BAA61BBF2D}"/>
+                <a16:creationId xmlns:a16="http://schemas.microsoft.com/office/drawing/2014/main" id="{A75D2B51-7938-4F38-98E0-4533A9712C95}"/>
               </a:ext>
             </a:extLst>
           </p:cNvPr>
@@ -15572,7 +15794,7 @@
           <p:cNvPr id="21" name="">
             <a:extLst xmlns:a="http://schemas.openxmlformats.org/drawingml/2006/main">
               <a:ext uri="{FF2B5EF4-FFF2-40B4-BE49-F238E27FC236}">
-                <a16:creationId xmlns:a16="http://schemas.microsoft.com/office/drawing/2014/main" id="{E55376F0-AE70-4427-A1F8-E1ED4821E2B8}"/>
+                <a16:creationId xmlns:a16="http://schemas.microsoft.com/office/drawing/2014/main" id="{729B6395-8781-4B7C-8796-195300607239}"/>
               </a:ext>
             </a:extLst>
           </p:cNvPr>
@@ -15634,7 +15856,7 @@
           <p:cNvPr id="22" name="">
             <a:extLst xmlns:a="http://schemas.openxmlformats.org/drawingml/2006/main">
               <a:ext uri="{FF2B5EF4-FFF2-40B4-BE49-F238E27FC236}">
-                <a16:creationId xmlns:a16="http://schemas.microsoft.com/office/drawing/2014/main" id="{28098415-11AC-412A-9F23-2B40CCD36E20}"/>
+                <a16:creationId xmlns:a16="http://schemas.microsoft.com/office/drawing/2014/main" id="{CC98C5A3-AC45-4549-8E53-187F674DCB7F}"/>
               </a:ext>
             </a:extLst>
           </p:cNvPr>
@@ -15696,7 +15918,7 @@
           <p:cNvPr id="23" name="">
             <a:extLst xmlns:a="http://schemas.openxmlformats.org/drawingml/2006/main">
               <a:ext uri="{FF2B5EF4-FFF2-40B4-BE49-F238E27FC236}">
-                <a16:creationId xmlns:a16="http://schemas.microsoft.com/office/drawing/2014/main" id="{BB78C546-1AA4-4BED-94AE-6C0BA1271492}"/>
+                <a16:creationId xmlns:a16="http://schemas.microsoft.com/office/drawing/2014/main" id="{A5C0216D-09F3-45BA-9CF8-3B665CBB1062}"/>
               </a:ext>
             </a:extLst>
           </p:cNvPr>
@@ -15756,7 +15978,7 @@
     </p:spTree>
     <p:extLst>
       <p:ext uri="{BB962C8B-B14F-4D97-AF65-F5344CB8AC3E}">
-        <p14:creationId xmlns:p14="http://schemas.microsoft.com/office/powerpoint/2010/main" val="1027642595"/>
+        <p14:creationId xmlns:p14="http://schemas.microsoft.com/office/powerpoint/2010/main" val="581064587"/>
       </p:ext>
     </p:extLst>
   </p:cSld>
@@ -15784,10 +16006,10 @@
       </p:grpSpPr>
       <p:sp>
         <p:nvSpPr>
-          <p:cNvPr id="9" name="">
-            <a:extLst xmlns:a="http://schemas.openxmlformats.org/drawingml/2006/main">
-              <a:ext uri="{FF2B5EF4-FFF2-40B4-BE49-F238E27FC236}">
-                <a16:creationId xmlns:a16="http://schemas.microsoft.com/office/drawing/2014/main" id="{DE6B08BB-AA64-4E6E-8B5D-1382986F727A}"/>
+          <p:cNvPr id="23" name="">
+            <a:extLst xmlns:a="http://schemas.openxmlformats.org/drawingml/2006/main">
+              <a:ext uri="{FF2B5EF4-FFF2-40B4-BE49-F238E27FC236}">
+                <a16:creationId xmlns:a16="http://schemas.microsoft.com/office/drawing/2014/main" id="{FFC0C97F-E92E-45E5-ACAE-65F06E55C85E}"/>
               </a:ext>
             </a:extLst>
           </p:cNvPr>
@@ -15818,7 +16040,7 @@
           <p:cNvPr id="2" name="">
             <a:extLst xmlns:a="http://schemas.openxmlformats.org/drawingml/2006/main">
               <a:ext uri="{FF2B5EF4-FFF2-40B4-BE49-F238E27FC236}">
-                <a16:creationId xmlns:a16="http://schemas.microsoft.com/office/drawing/2014/main" id="{7577BE16-5CA8-4CDA-B339-E4ADC8F00795}"/>
+                <a16:creationId xmlns:a16="http://schemas.microsoft.com/office/drawing/2014/main" id="{0512DCAB-3CA4-4E52-AE8C-0D7800C91B89}"/>
               </a:ext>
             </a:extLst>
           </p:cNvPr>
@@ -15880,7 +16102,7 @@
           <p:cNvPr id="3" name="">
             <a:extLst xmlns:a="http://schemas.openxmlformats.org/drawingml/2006/main">
               <a:ext uri="{FF2B5EF4-FFF2-40B4-BE49-F238E27FC236}">
-                <a16:creationId xmlns:a16="http://schemas.microsoft.com/office/drawing/2014/main" id="{6BFB50D7-D462-47D2-BC48-8055BF18BCE4}"/>
+                <a16:creationId xmlns:a16="http://schemas.microsoft.com/office/drawing/2014/main" id="{F45314AB-0069-487C-B73C-0E29C1BB6E76}"/>
               </a:ext>
             </a:extLst>
           </p:cNvPr>
@@ -15932,7 +16154,7 @@
                 <a:ea typeface="Georgia"/>
                 <a:cs typeface="Georgia"/>
               </a:rPr>
-              <a:t>Style illustrates the limits of ownership categories</a:t>
+              <a:t>AI training: payments and permission costs</a:t>
             </a:r>
           </a:p>
         </p:txBody>
@@ -15942,7 +16164,7 @@
           <p:cNvPr id="4" name="">
             <a:extLst xmlns:a="http://schemas.openxmlformats.org/drawingml/2006/main">
               <a:ext uri="{FF2B5EF4-FFF2-40B4-BE49-F238E27FC236}">
-                <a16:creationId xmlns:a16="http://schemas.microsoft.com/office/drawing/2014/main" id="{48446CDC-4855-4DE1-A88C-07F9218D9E9E}"/>
+                <a16:creationId xmlns:a16="http://schemas.microsoft.com/office/drawing/2014/main" id="{6315FCC9-C023-44D0-BB52-7486FA037D16}"/>
               </a:ext>
             </a:extLst>
           </p:cNvPr>
@@ -15973,7 +16195,7 @@
           <p:cNvPr id="5" name="">
             <a:extLst xmlns:a="http://schemas.openxmlformats.org/drawingml/2006/main">
               <a:ext uri="{FF2B5EF4-FFF2-40B4-BE49-F238E27FC236}">
-                <a16:creationId xmlns:a16="http://schemas.microsoft.com/office/drawing/2014/main" id="{189793EF-6C3E-490C-8D90-2B1813C637B4}"/>
+                <a16:creationId xmlns:a16="http://schemas.microsoft.com/office/drawing/2014/main" id="{564A9E2E-2FCA-4C4F-8E56-208B30027634}"/>
               </a:ext>
             </a:extLst>
           </p:cNvPr>
@@ -16035,7 +16257,7 @@
           <p:cNvPr id="6" name="">
             <a:extLst xmlns:a="http://schemas.openxmlformats.org/drawingml/2006/main">
               <a:ext uri="{FF2B5EF4-FFF2-40B4-BE49-F238E27FC236}">
-                <a16:creationId xmlns:a16="http://schemas.microsoft.com/office/drawing/2014/main" id="{8E225744-1A04-43B6-B41D-A28D4A2C2C46}"/>
+                <a16:creationId xmlns:a16="http://schemas.microsoft.com/office/drawing/2014/main" id="{8B67509D-152D-4CE0-A34D-96E1E1234557}"/>
               </a:ext>
             </a:extLst>
           </p:cNvPr>
@@ -16097,19 +16319,918 @@
           <p:cNvPr id="7" name="">
             <a:extLst xmlns:a="http://schemas.openxmlformats.org/drawingml/2006/main">
               <a:ext uri="{FF2B5EF4-FFF2-40B4-BE49-F238E27FC236}">
-                <a16:creationId xmlns:a16="http://schemas.microsoft.com/office/drawing/2014/main" id="{9459D871-26AF-4A77-9238-A2BBF87A5C35}"/>
-              </a:ext>
-            </a:extLst>
-          </p:cNvPr>
-          <p:cNvSpPr>
-            <a:spLocks xmlns:a="http://schemas.openxmlformats.org/drawingml/2006/main" noGrp="1"/>
-          </p:cNvSpPr>
-          <p:nvPr/>
-        </p:nvSpPr>
-        <p:spPr>
-          <a:xfrm xmlns:a="http://schemas.openxmlformats.org/drawingml/2006/main">
-            <a:off x="1200150" y="2152650"/>
-            <a:ext cx="9791700" cy="2133600"/>
+                <a16:creationId xmlns:a16="http://schemas.microsoft.com/office/drawing/2014/main" id="{244D8954-7D01-4DDC-A340-B6DC48ACC07C}"/>
+              </a:ext>
+            </a:extLst>
+          </p:cNvPr>
+          <p:cNvSpPr>
+            <a:spLocks xmlns:a="http://schemas.openxmlformats.org/drawingml/2006/main" noGrp="1"/>
+          </p:cNvSpPr>
+          <p:nvPr/>
+        </p:nvSpPr>
+        <p:spPr>
+          <a:xfrm xmlns:a="http://schemas.openxmlformats.org/drawingml/2006/main">
+            <a:off x="952500" y="1657350"/>
+            <a:ext cx="4572000" cy="228600"/>
+          </a:xfrm>
+          <a:prstGeom xmlns:a="http://schemas.openxmlformats.org/drawingml/2006/main" prst="rect">
+            <a:avLst/>
+          </a:prstGeom>
+          <a:noFill xmlns:a="http://schemas.openxmlformats.org/drawingml/2006/main"/>
+          <a:ln xmlns:a="http://schemas.openxmlformats.org/drawingml/2006/main" w="0">
+            <a:noFill/>
+            <a:prstDash val="solid"/>
+          </a:ln>
+        </p:spPr>
+        <p:txBody>
+          <a:bodyPr xmlns:a="http://schemas.openxmlformats.org/drawingml/2006/main" lIns="0" tIns="0" rIns="0" bIns="0" anchor="t">
+            <a:normAutofit fontScale="100000"/>
+          </a:bodyPr>
+          <a:lstStyle xmlns:a="http://schemas.openxmlformats.org/drawingml/2006/main"/>
+          <a:p xmlns:a="http://schemas.openxmlformats.org/drawingml/2006/main">
+            <a:pPr algn="l">
+              <a:lnSpc>
+                <a:spcPct val="105000"/>
+              </a:lnSpc>
+              <a:buNone/>
+              <a:defRPr sz="1050" b="1" i="0">
+                <a:solidFill>
+                  <a:srgbClr val="24594E"/>
+                </a:solidFill>
+                <a:latin typeface="Aptos"/>
+                <a:ea typeface="Aptos"/>
+                <a:cs typeface="Aptos"/>
+              </a:defRPr>
+            </a:pPr>
+            <a:r>
+              <a:rPr sz="1050" b="1" i="0">
+                <a:solidFill>
+                  <a:srgbClr val="24594E"/>
+                </a:solidFill>
+                <a:latin typeface="Aptos"/>
+                <a:ea typeface="Aptos"/>
+                <a:cs typeface="Aptos"/>
+              </a:rPr>
+              <a:t>HYPOTHETICAL: 1,000 PERMISSIONS</a:t>
+            </a:r>
+          </a:p>
+        </p:txBody>
+      </p:sp>
+      <p:sp>
+        <p:nvSpPr>
+          <p:cNvPr id="8" name="">
+            <a:extLst xmlns:a="http://schemas.openxmlformats.org/drawingml/2006/main">
+              <a:ext uri="{FF2B5EF4-FFF2-40B4-BE49-F238E27FC236}">
+                <a16:creationId xmlns:a16="http://schemas.microsoft.com/office/drawing/2014/main" id="{BE27BEFD-C9DA-4F22-BA84-DB1AF133E6EA}"/>
+              </a:ext>
+            </a:extLst>
+          </p:cNvPr>
+          <p:cNvSpPr>
+            <a:spLocks xmlns:a="http://schemas.openxmlformats.org/drawingml/2006/main" noGrp="1"/>
+          </p:cNvSpPr>
+          <p:nvPr/>
+        </p:nvSpPr>
+        <p:spPr>
+          <a:xfrm xmlns:a="http://schemas.openxmlformats.org/drawingml/2006/main">
+            <a:off x="952500" y="2105025"/>
+            <a:ext cx="228600" cy="438150"/>
+          </a:xfrm>
+          <a:prstGeom xmlns:a="http://schemas.openxmlformats.org/drawingml/2006/main" prst="rect">
+            <a:avLst/>
+          </a:prstGeom>
+          <a:noFill xmlns:a="http://schemas.openxmlformats.org/drawingml/2006/main"/>
+          <a:ln xmlns:a="http://schemas.openxmlformats.org/drawingml/2006/main" w="0">
+            <a:noFill/>
+            <a:prstDash val="solid"/>
+          </a:ln>
+        </p:spPr>
+        <p:txBody>
+          <a:bodyPr xmlns:a="http://schemas.openxmlformats.org/drawingml/2006/main" lIns="0" tIns="0" rIns="0" bIns="0" anchor="t">
+            <a:normAutofit fontScale="100000"/>
+          </a:bodyPr>
+          <a:lstStyle xmlns:a="http://schemas.openxmlformats.org/drawingml/2006/main"/>
+          <a:p xmlns:a="http://schemas.openxmlformats.org/drawingml/2006/main">
+            <a:pPr algn="l">
+              <a:lnSpc>
+                <a:spcPct val="105000"/>
+              </a:lnSpc>
+              <a:buNone/>
+              <a:defRPr sz="1725" b="1" i="0">
+                <a:solidFill>
+                  <a:srgbClr val="9A462F"/>
+                </a:solidFill>
+                <a:latin typeface="Aptos"/>
+                <a:ea typeface="Aptos"/>
+                <a:cs typeface="Aptos"/>
+              </a:defRPr>
+            </a:pPr>
+            <a:r>
+              <a:rPr sz="1725" b="1" i="0">
+                <a:solidFill>
+                  <a:srgbClr val="9A462F"/>
+                </a:solidFill>
+                <a:latin typeface="Aptos"/>
+                <a:ea typeface="Aptos"/>
+                <a:cs typeface="Aptos"/>
+              </a:rPr>
+              <a:t>•</a:t>
+            </a:r>
+          </a:p>
+        </p:txBody>
+      </p:sp>
+      <p:sp>
+        <p:nvSpPr>
+          <p:cNvPr id="9" name="">
+            <a:extLst xmlns:a="http://schemas.openxmlformats.org/drawingml/2006/main">
+              <a:ext uri="{FF2B5EF4-FFF2-40B4-BE49-F238E27FC236}">
+                <a16:creationId xmlns:a16="http://schemas.microsoft.com/office/drawing/2014/main" id="{FA85EF77-DE38-41DD-8327-78D03211509E}"/>
+              </a:ext>
+            </a:extLst>
+          </p:cNvPr>
+          <p:cNvSpPr>
+            <a:spLocks xmlns:a="http://schemas.openxmlformats.org/drawingml/2006/main" noGrp="1"/>
+          </p:cNvSpPr>
+          <p:nvPr/>
+        </p:nvSpPr>
+        <p:spPr>
+          <a:xfrm xmlns:a="http://schemas.openxmlformats.org/drawingml/2006/main">
+            <a:off x="1276350" y="2114550"/>
+            <a:ext cx="4248150" cy="438150"/>
+          </a:xfrm>
+          <a:prstGeom xmlns:a="http://schemas.openxmlformats.org/drawingml/2006/main" prst="rect">
+            <a:avLst/>
+          </a:prstGeom>
+          <a:noFill xmlns:a="http://schemas.openxmlformats.org/drawingml/2006/main"/>
+          <a:ln xmlns:a="http://schemas.openxmlformats.org/drawingml/2006/main" w="0">
+            <a:noFill/>
+            <a:prstDash val="solid"/>
+          </a:ln>
+        </p:spPr>
+        <p:txBody>
+          <a:bodyPr xmlns:a="http://schemas.openxmlformats.org/drawingml/2006/main" lIns="0" tIns="0" rIns="0" bIns="0" anchor="t">
+            <a:normAutofit fontScale="100000"/>
+          </a:bodyPr>
+          <a:lstStyle xmlns:a="http://schemas.openxmlformats.org/drawingml/2006/main"/>
+          <a:p xmlns:a="http://schemas.openxmlformats.org/drawingml/2006/main">
+            <a:pPr algn="l">
+              <a:lnSpc>
+                <a:spcPct val="105000"/>
+              </a:lnSpc>
+              <a:buNone/>
+              <a:defRPr sz="1725" b="0" i="0">
+                <a:solidFill>
+                  <a:srgbClr val="17242D"/>
+                </a:solidFill>
+                <a:latin typeface="Aptos"/>
+                <a:ea typeface="Aptos"/>
+                <a:cs typeface="Aptos"/>
+              </a:defRPr>
+            </a:pPr>
+            <a:r>
+              <a:rPr sz="1725" b="0" i="0">
+                <a:solidFill>
+                  <a:srgbClr val="17242D"/>
+                </a:solidFill>
+                <a:latin typeface="Aptos"/>
+                <a:ea typeface="Aptos"/>
+                <a:cs typeface="Aptos"/>
+              </a:rPr>
+              <a:t>$1 paid to each rights holder</a:t>
+            </a:r>
+          </a:p>
+        </p:txBody>
+      </p:sp>
+      <p:sp>
+        <p:nvSpPr>
+          <p:cNvPr id="10" name="">
+            <a:extLst xmlns:a="http://schemas.openxmlformats.org/drawingml/2006/main">
+              <a:ext uri="{FF2B5EF4-FFF2-40B4-BE49-F238E27FC236}">
+                <a16:creationId xmlns:a16="http://schemas.microsoft.com/office/drawing/2014/main" id="{7741CAA8-9227-4E54-BF62-E360371FE8BD}"/>
+              </a:ext>
+            </a:extLst>
+          </p:cNvPr>
+          <p:cNvSpPr>
+            <a:spLocks xmlns:a="http://schemas.openxmlformats.org/drawingml/2006/main" noGrp="1"/>
+          </p:cNvSpPr>
+          <p:nvPr/>
+        </p:nvSpPr>
+        <p:spPr>
+          <a:xfrm xmlns:a="http://schemas.openxmlformats.org/drawingml/2006/main">
+            <a:off x="952500" y="2638425"/>
+            <a:ext cx="228600" cy="438150"/>
+          </a:xfrm>
+          <a:prstGeom xmlns:a="http://schemas.openxmlformats.org/drawingml/2006/main" prst="rect">
+            <a:avLst/>
+          </a:prstGeom>
+          <a:noFill xmlns:a="http://schemas.openxmlformats.org/drawingml/2006/main"/>
+          <a:ln xmlns:a="http://schemas.openxmlformats.org/drawingml/2006/main" w="0">
+            <a:noFill/>
+            <a:prstDash val="solid"/>
+          </a:ln>
+        </p:spPr>
+        <p:txBody>
+          <a:bodyPr xmlns:a="http://schemas.openxmlformats.org/drawingml/2006/main" lIns="0" tIns="0" rIns="0" bIns="0" anchor="t">
+            <a:normAutofit fontScale="100000"/>
+          </a:bodyPr>
+          <a:lstStyle xmlns:a="http://schemas.openxmlformats.org/drawingml/2006/main"/>
+          <a:p xmlns:a="http://schemas.openxmlformats.org/drawingml/2006/main">
+            <a:pPr algn="l">
+              <a:lnSpc>
+                <a:spcPct val="105000"/>
+              </a:lnSpc>
+              <a:buNone/>
+              <a:defRPr sz="1725" b="1" i="0">
+                <a:solidFill>
+                  <a:srgbClr val="9A462F"/>
+                </a:solidFill>
+                <a:latin typeface="Aptos"/>
+                <a:ea typeface="Aptos"/>
+                <a:cs typeface="Aptos"/>
+              </a:defRPr>
+            </a:pPr>
+            <a:r>
+              <a:rPr sz="1725" b="1" i="0">
+                <a:solidFill>
+                  <a:srgbClr val="9A462F"/>
+                </a:solidFill>
+                <a:latin typeface="Aptos"/>
+                <a:ea typeface="Aptos"/>
+                <a:cs typeface="Aptos"/>
+              </a:rPr>
+              <a:t>•</a:t>
+            </a:r>
+          </a:p>
+        </p:txBody>
+      </p:sp>
+      <p:sp>
+        <p:nvSpPr>
+          <p:cNvPr id="11" name="">
+            <a:extLst xmlns:a="http://schemas.openxmlformats.org/drawingml/2006/main">
+              <a:ext uri="{FF2B5EF4-FFF2-40B4-BE49-F238E27FC236}">
+                <a16:creationId xmlns:a16="http://schemas.microsoft.com/office/drawing/2014/main" id="{D86BD973-8119-4C11-BCE2-DCB71F413910}"/>
+              </a:ext>
+            </a:extLst>
+          </p:cNvPr>
+          <p:cNvSpPr>
+            <a:spLocks xmlns:a="http://schemas.openxmlformats.org/drawingml/2006/main" noGrp="1"/>
+          </p:cNvSpPr>
+          <p:nvPr/>
+        </p:nvSpPr>
+        <p:spPr>
+          <a:xfrm xmlns:a="http://schemas.openxmlformats.org/drawingml/2006/main">
+            <a:off x="1276350" y="2647950"/>
+            <a:ext cx="4248150" cy="438150"/>
+          </a:xfrm>
+          <a:prstGeom xmlns:a="http://schemas.openxmlformats.org/drawingml/2006/main" prst="rect">
+            <a:avLst/>
+          </a:prstGeom>
+          <a:noFill xmlns:a="http://schemas.openxmlformats.org/drawingml/2006/main"/>
+          <a:ln xmlns:a="http://schemas.openxmlformats.org/drawingml/2006/main" w="0">
+            <a:noFill/>
+            <a:prstDash val="solid"/>
+          </a:ln>
+        </p:spPr>
+        <p:txBody>
+          <a:bodyPr xmlns:a="http://schemas.openxmlformats.org/drawingml/2006/main" lIns="0" tIns="0" rIns="0" bIns="0" anchor="t">
+            <a:normAutofit fontScale="100000"/>
+          </a:bodyPr>
+          <a:lstStyle xmlns:a="http://schemas.openxmlformats.org/drawingml/2006/main"/>
+          <a:p xmlns:a="http://schemas.openxmlformats.org/drawingml/2006/main">
+            <a:pPr algn="l">
+              <a:lnSpc>
+                <a:spcPct val="105000"/>
+              </a:lnSpc>
+              <a:buNone/>
+              <a:defRPr sz="1725" b="0" i="0">
+                <a:solidFill>
+                  <a:srgbClr val="17242D"/>
+                </a:solidFill>
+                <a:latin typeface="Aptos"/>
+                <a:ea typeface="Aptos"/>
+                <a:cs typeface="Aptos"/>
+              </a:defRPr>
+            </a:pPr>
+            <a:r>
+              <a:rPr sz="1725" b="0" i="0">
+                <a:solidFill>
+                  <a:srgbClr val="17242D"/>
+                </a:solidFill>
+                <a:latin typeface="Aptos"/>
+                <a:ea typeface="Aptos"/>
+                <a:cs typeface="Aptos"/>
+              </a:rPr>
+              <a:t>$1,000 in total payments</a:t>
+            </a:r>
+          </a:p>
+        </p:txBody>
+      </p:sp>
+      <p:sp>
+        <p:nvSpPr>
+          <p:cNvPr id="12" name="">
+            <a:extLst xmlns:a="http://schemas.openxmlformats.org/drawingml/2006/main">
+              <a:ext uri="{FF2B5EF4-FFF2-40B4-BE49-F238E27FC236}">
+                <a16:creationId xmlns:a16="http://schemas.microsoft.com/office/drawing/2014/main" id="{37B78D19-12F9-4843-B8C2-3405CAA9EE60}"/>
+              </a:ext>
+            </a:extLst>
+          </p:cNvPr>
+          <p:cNvSpPr>
+            <a:spLocks xmlns:a="http://schemas.openxmlformats.org/drawingml/2006/main" noGrp="1"/>
+          </p:cNvSpPr>
+          <p:nvPr/>
+        </p:nvSpPr>
+        <p:spPr>
+          <a:xfrm xmlns:a="http://schemas.openxmlformats.org/drawingml/2006/main">
+            <a:off x="952500" y="3171825"/>
+            <a:ext cx="228600" cy="438150"/>
+          </a:xfrm>
+          <a:prstGeom xmlns:a="http://schemas.openxmlformats.org/drawingml/2006/main" prst="rect">
+            <a:avLst/>
+          </a:prstGeom>
+          <a:noFill xmlns:a="http://schemas.openxmlformats.org/drawingml/2006/main"/>
+          <a:ln xmlns:a="http://schemas.openxmlformats.org/drawingml/2006/main" w="0">
+            <a:noFill/>
+            <a:prstDash val="solid"/>
+          </a:ln>
+        </p:spPr>
+        <p:txBody>
+          <a:bodyPr xmlns:a="http://schemas.openxmlformats.org/drawingml/2006/main" lIns="0" tIns="0" rIns="0" bIns="0" anchor="t">
+            <a:normAutofit fontScale="100000"/>
+          </a:bodyPr>
+          <a:lstStyle xmlns:a="http://schemas.openxmlformats.org/drawingml/2006/main"/>
+          <a:p xmlns:a="http://schemas.openxmlformats.org/drawingml/2006/main">
+            <a:pPr algn="l">
+              <a:lnSpc>
+                <a:spcPct val="105000"/>
+              </a:lnSpc>
+              <a:buNone/>
+              <a:defRPr sz="1725" b="1" i="0">
+                <a:solidFill>
+                  <a:srgbClr val="9A462F"/>
+                </a:solidFill>
+                <a:latin typeface="Aptos"/>
+                <a:ea typeface="Aptos"/>
+                <a:cs typeface="Aptos"/>
+              </a:defRPr>
+            </a:pPr>
+            <a:r>
+              <a:rPr sz="1725" b="1" i="0">
+                <a:solidFill>
+                  <a:srgbClr val="9A462F"/>
+                </a:solidFill>
+                <a:latin typeface="Aptos"/>
+                <a:ea typeface="Aptos"/>
+                <a:cs typeface="Aptos"/>
+              </a:rPr>
+              <a:t>•</a:t>
+            </a:r>
+          </a:p>
+        </p:txBody>
+      </p:sp>
+      <p:sp>
+        <p:nvSpPr>
+          <p:cNvPr id="13" name="">
+            <a:extLst xmlns:a="http://schemas.openxmlformats.org/drawingml/2006/main">
+              <a:ext uri="{FF2B5EF4-FFF2-40B4-BE49-F238E27FC236}">
+                <a16:creationId xmlns:a16="http://schemas.microsoft.com/office/drawing/2014/main" id="{D9C5C2E5-A242-4F42-9AEE-572E59DD7D66}"/>
+              </a:ext>
+            </a:extLst>
+          </p:cNvPr>
+          <p:cNvSpPr>
+            <a:spLocks xmlns:a="http://schemas.openxmlformats.org/drawingml/2006/main" noGrp="1"/>
+          </p:cNvSpPr>
+          <p:nvPr/>
+        </p:nvSpPr>
+        <p:spPr>
+          <a:xfrm xmlns:a="http://schemas.openxmlformats.org/drawingml/2006/main">
+            <a:off x="1276350" y="3181350"/>
+            <a:ext cx="4248150" cy="438150"/>
+          </a:xfrm>
+          <a:prstGeom xmlns:a="http://schemas.openxmlformats.org/drawingml/2006/main" prst="rect">
+            <a:avLst/>
+          </a:prstGeom>
+          <a:noFill xmlns:a="http://schemas.openxmlformats.org/drawingml/2006/main"/>
+          <a:ln xmlns:a="http://schemas.openxmlformats.org/drawingml/2006/main" w="0">
+            <a:noFill/>
+            <a:prstDash val="solid"/>
+          </a:ln>
+        </p:spPr>
+        <p:txBody>
+          <a:bodyPr xmlns:a="http://schemas.openxmlformats.org/drawingml/2006/main" lIns="0" tIns="0" rIns="0" bIns="0" anchor="t">
+            <a:normAutofit fontScale="100000"/>
+          </a:bodyPr>
+          <a:lstStyle xmlns:a="http://schemas.openxmlformats.org/drawingml/2006/main"/>
+          <a:p xmlns:a="http://schemas.openxmlformats.org/drawingml/2006/main">
+            <a:pPr algn="l">
+              <a:lnSpc>
+                <a:spcPct val="105000"/>
+              </a:lnSpc>
+              <a:buNone/>
+              <a:defRPr sz="1725" b="0" i="0">
+                <a:solidFill>
+                  <a:srgbClr val="17242D"/>
+                </a:solidFill>
+                <a:latin typeface="Aptos"/>
+                <a:ea typeface="Aptos"/>
+                <a:cs typeface="Aptos"/>
+              </a:defRPr>
+            </a:pPr>
+            <a:r>
+              <a:rPr sz="1725" b="0" i="0">
+                <a:solidFill>
+                  <a:srgbClr val="17242D"/>
+                </a:solidFill>
+                <a:latin typeface="Aptos"/>
+                <a:ea typeface="Aptos"/>
+                <a:cs typeface="Aptos"/>
+              </a:rPr>
+              <a:t>Income changes hands</a:t>
+            </a:r>
+          </a:p>
+        </p:txBody>
+      </p:sp>
+      <p:sp>
+        <p:nvSpPr>
+          <p:cNvPr id="14" name="">
+            <a:extLst xmlns:a="http://schemas.openxmlformats.org/drawingml/2006/main">
+              <a:ext uri="{FF2B5EF4-FFF2-40B4-BE49-F238E27FC236}">
+                <a16:creationId xmlns:a16="http://schemas.microsoft.com/office/drawing/2014/main" id="{4EC60838-DBB8-44CD-AB15-67DA1C71AAFB}"/>
+              </a:ext>
+            </a:extLst>
+          </p:cNvPr>
+          <p:cNvSpPr>
+            <a:spLocks xmlns:a="http://schemas.openxmlformats.org/drawingml/2006/main" noGrp="1"/>
+          </p:cNvSpPr>
+          <p:nvPr/>
+        </p:nvSpPr>
+        <p:spPr>
+          <a:xfrm xmlns:a="http://schemas.openxmlformats.org/drawingml/2006/main">
+            <a:off x="6096000" y="1676400"/>
+            <a:ext cx="9525" cy="3409950"/>
+          </a:xfrm>
+          <a:prstGeom xmlns:a="http://schemas.openxmlformats.org/drawingml/2006/main" prst="rect">
+            <a:avLst/>
+          </a:prstGeom>
+          <a:solidFill xmlns:a="http://schemas.openxmlformats.org/drawingml/2006/main">
+            <a:srgbClr val="CCD5D2"/>
+          </a:solidFill>
+          <a:ln xmlns:a="http://schemas.openxmlformats.org/drawingml/2006/main" w="0">
+            <a:noFill/>
+            <a:prstDash val="solid"/>
+          </a:ln>
+        </p:spPr>
+      </p:sp>
+      <p:sp>
+        <p:nvSpPr>
+          <p:cNvPr id="15" name="">
+            <a:extLst xmlns:a="http://schemas.openxmlformats.org/drawingml/2006/main">
+              <a:ext uri="{FF2B5EF4-FFF2-40B4-BE49-F238E27FC236}">
+                <a16:creationId xmlns:a16="http://schemas.microsoft.com/office/drawing/2014/main" id="{C50F8FBE-B524-4C2C-A78E-94299F823EF6}"/>
+              </a:ext>
+            </a:extLst>
+          </p:cNvPr>
+          <p:cNvSpPr>
+            <a:spLocks xmlns:a="http://schemas.openxmlformats.org/drawingml/2006/main" noGrp="1"/>
+          </p:cNvSpPr>
+          <p:nvPr/>
+        </p:nvSpPr>
+        <p:spPr>
+          <a:xfrm xmlns:a="http://schemas.openxmlformats.org/drawingml/2006/main">
+            <a:off x="6667500" y="1657350"/>
+            <a:ext cx="4572000" cy="228600"/>
+          </a:xfrm>
+          <a:prstGeom xmlns:a="http://schemas.openxmlformats.org/drawingml/2006/main" prst="rect">
+            <a:avLst/>
+          </a:prstGeom>
+          <a:noFill xmlns:a="http://schemas.openxmlformats.org/drawingml/2006/main"/>
+          <a:ln xmlns:a="http://schemas.openxmlformats.org/drawingml/2006/main" w="0">
+            <a:noFill/>
+            <a:prstDash val="solid"/>
+          </a:ln>
+        </p:spPr>
+        <p:txBody>
+          <a:bodyPr xmlns:a="http://schemas.openxmlformats.org/drawingml/2006/main" lIns="0" tIns="0" rIns="0" bIns="0" anchor="t">
+            <a:normAutofit fontScale="100000"/>
+          </a:bodyPr>
+          <a:lstStyle xmlns:a="http://schemas.openxmlformats.org/drawingml/2006/main"/>
+          <a:p xmlns:a="http://schemas.openxmlformats.org/drawingml/2006/main">
+            <a:pPr algn="l">
+              <a:lnSpc>
+                <a:spcPct val="105000"/>
+              </a:lnSpc>
+              <a:buNone/>
+              <a:defRPr sz="1050" b="1" i="0">
+                <a:solidFill>
+                  <a:srgbClr val="9A462F"/>
+                </a:solidFill>
+                <a:latin typeface="Aptos"/>
+                <a:ea typeface="Aptos"/>
+                <a:cs typeface="Aptos"/>
+              </a:defRPr>
+            </a:pPr>
+            <a:r>
+              <a:rPr sz="1050" b="1" i="0">
+                <a:solidFill>
+                  <a:srgbClr val="9A462F"/>
+                </a:solidFill>
+                <a:latin typeface="Aptos"/>
+                <a:ea typeface="Aptos"/>
+                <a:cs typeface="Aptos"/>
+              </a:rPr>
+              <a:t>RIGHTS CLEARANCE</a:t>
+            </a:r>
+          </a:p>
+        </p:txBody>
+      </p:sp>
+      <p:sp>
+        <p:nvSpPr>
+          <p:cNvPr id="16" name="">
+            <a:extLst xmlns:a="http://schemas.openxmlformats.org/drawingml/2006/main">
+              <a:ext uri="{FF2B5EF4-FFF2-40B4-BE49-F238E27FC236}">
+                <a16:creationId xmlns:a16="http://schemas.microsoft.com/office/drawing/2014/main" id="{FF48F1E2-9F34-47F1-9EDB-5418976CAA55}"/>
+              </a:ext>
+            </a:extLst>
+          </p:cNvPr>
+          <p:cNvSpPr>
+            <a:spLocks xmlns:a="http://schemas.openxmlformats.org/drawingml/2006/main" noGrp="1"/>
+          </p:cNvSpPr>
+          <p:nvPr/>
+        </p:nvSpPr>
+        <p:spPr>
+          <a:xfrm xmlns:a="http://schemas.openxmlformats.org/drawingml/2006/main">
+            <a:off x="6667500" y="2105025"/>
+            <a:ext cx="228600" cy="438150"/>
+          </a:xfrm>
+          <a:prstGeom xmlns:a="http://schemas.openxmlformats.org/drawingml/2006/main" prst="rect">
+            <a:avLst/>
+          </a:prstGeom>
+          <a:noFill xmlns:a="http://schemas.openxmlformats.org/drawingml/2006/main"/>
+          <a:ln xmlns:a="http://schemas.openxmlformats.org/drawingml/2006/main" w="0">
+            <a:noFill/>
+            <a:prstDash val="solid"/>
+          </a:ln>
+        </p:spPr>
+        <p:txBody>
+          <a:bodyPr xmlns:a="http://schemas.openxmlformats.org/drawingml/2006/main" lIns="0" tIns="0" rIns="0" bIns="0" anchor="t">
+            <a:normAutofit fontScale="100000"/>
+          </a:bodyPr>
+          <a:lstStyle xmlns:a="http://schemas.openxmlformats.org/drawingml/2006/main"/>
+          <a:p xmlns:a="http://schemas.openxmlformats.org/drawingml/2006/main">
+            <a:pPr algn="l">
+              <a:lnSpc>
+                <a:spcPct val="105000"/>
+              </a:lnSpc>
+              <a:buNone/>
+              <a:defRPr sz="1725" b="1" i="0">
+                <a:solidFill>
+                  <a:srgbClr val="B88424"/>
+                </a:solidFill>
+                <a:latin typeface="Aptos"/>
+                <a:ea typeface="Aptos"/>
+                <a:cs typeface="Aptos"/>
+              </a:defRPr>
+            </a:pPr>
+            <a:r>
+              <a:rPr sz="1725" b="1" i="0">
+                <a:solidFill>
+                  <a:srgbClr val="B88424"/>
+                </a:solidFill>
+                <a:latin typeface="Aptos"/>
+                <a:ea typeface="Aptos"/>
+                <a:cs typeface="Aptos"/>
+              </a:rPr>
+              <a:t>•</a:t>
+            </a:r>
+          </a:p>
+        </p:txBody>
+      </p:sp>
+      <p:sp>
+        <p:nvSpPr>
+          <p:cNvPr id="17" name="">
+            <a:extLst xmlns:a="http://schemas.openxmlformats.org/drawingml/2006/main">
+              <a:ext uri="{FF2B5EF4-FFF2-40B4-BE49-F238E27FC236}">
+                <a16:creationId xmlns:a16="http://schemas.microsoft.com/office/drawing/2014/main" id="{92E79852-9043-428E-BDE5-E485CEF28467}"/>
+              </a:ext>
+            </a:extLst>
+          </p:cNvPr>
+          <p:cNvSpPr>
+            <a:spLocks xmlns:a="http://schemas.openxmlformats.org/drawingml/2006/main" noGrp="1"/>
+          </p:cNvSpPr>
+          <p:nvPr/>
+        </p:nvSpPr>
+        <p:spPr>
+          <a:xfrm xmlns:a="http://schemas.openxmlformats.org/drawingml/2006/main">
+            <a:off x="6991350" y="2114550"/>
+            <a:ext cx="4248150" cy="438150"/>
+          </a:xfrm>
+          <a:prstGeom xmlns:a="http://schemas.openxmlformats.org/drawingml/2006/main" prst="rect">
+            <a:avLst/>
+          </a:prstGeom>
+          <a:noFill xmlns:a="http://schemas.openxmlformats.org/drawingml/2006/main"/>
+          <a:ln xmlns:a="http://schemas.openxmlformats.org/drawingml/2006/main" w="0">
+            <a:noFill/>
+            <a:prstDash val="solid"/>
+          </a:ln>
+        </p:spPr>
+        <p:txBody>
+          <a:bodyPr xmlns:a="http://schemas.openxmlformats.org/drawingml/2006/main" lIns="0" tIns="0" rIns="0" bIns="0" anchor="t">
+            <a:normAutofit fontScale="100000"/>
+          </a:bodyPr>
+          <a:lstStyle xmlns:a="http://schemas.openxmlformats.org/drawingml/2006/main"/>
+          <a:p xmlns:a="http://schemas.openxmlformats.org/drawingml/2006/main">
+            <a:pPr algn="l">
+              <a:lnSpc>
+                <a:spcPct val="105000"/>
+              </a:lnSpc>
+              <a:buNone/>
+              <a:defRPr sz="1725" b="0" i="0">
+                <a:solidFill>
+                  <a:srgbClr val="17242D"/>
+                </a:solidFill>
+                <a:latin typeface="Aptos"/>
+                <a:ea typeface="Aptos"/>
+                <a:cs typeface="Aptos"/>
+              </a:defRPr>
+            </a:pPr>
+            <a:r>
+              <a:rPr sz="1725" b="0" i="0">
+                <a:solidFill>
+                  <a:srgbClr val="17242D"/>
+                </a:solidFill>
+                <a:latin typeface="Aptos"/>
+                <a:ea typeface="Aptos"/>
+                <a:cs typeface="Aptos"/>
+              </a:rPr>
+              <a:t>$20 per separate permission</a:t>
+            </a:r>
+          </a:p>
+        </p:txBody>
+      </p:sp>
+      <p:sp>
+        <p:nvSpPr>
+          <p:cNvPr id="18" name="">
+            <a:extLst xmlns:a="http://schemas.openxmlformats.org/drawingml/2006/main">
+              <a:ext uri="{FF2B5EF4-FFF2-40B4-BE49-F238E27FC236}">
+                <a16:creationId xmlns:a16="http://schemas.microsoft.com/office/drawing/2014/main" id="{22A89801-009F-4447-9539-12EE3118D1D2}"/>
+              </a:ext>
+            </a:extLst>
+          </p:cNvPr>
+          <p:cNvSpPr>
+            <a:spLocks xmlns:a="http://schemas.openxmlformats.org/drawingml/2006/main" noGrp="1"/>
+          </p:cNvSpPr>
+          <p:nvPr/>
+        </p:nvSpPr>
+        <p:spPr>
+          <a:xfrm xmlns:a="http://schemas.openxmlformats.org/drawingml/2006/main">
+            <a:off x="6667500" y="2638425"/>
+            <a:ext cx="228600" cy="438150"/>
+          </a:xfrm>
+          <a:prstGeom xmlns:a="http://schemas.openxmlformats.org/drawingml/2006/main" prst="rect">
+            <a:avLst/>
+          </a:prstGeom>
+          <a:noFill xmlns:a="http://schemas.openxmlformats.org/drawingml/2006/main"/>
+          <a:ln xmlns:a="http://schemas.openxmlformats.org/drawingml/2006/main" w="0">
+            <a:noFill/>
+            <a:prstDash val="solid"/>
+          </a:ln>
+        </p:spPr>
+        <p:txBody>
+          <a:bodyPr xmlns:a="http://schemas.openxmlformats.org/drawingml/2006/main" lIns="0" tIns="0" rIns="0" bIns="0" anchor="t">
+            <a:normAutofit fontScale="100000"/>
+          </a:bodyPr>
+          <a:lstStyle xmlns:a="http://schemas.openxmlformats.org/drawingml/2006/main"/>
+          <a:p xmlns:a="http://schemas.openxmlformats.org/drawingml/2006/main">
+            <a:pPr algn="l">
+              <a:lnSpc>
+                <a:spcPct val="105000"/>
+              </a:lnSpc>
+              <a:buNone/>
+              <a:defRPr sz="1725" b="1" i="0">
+                <a:solidFill>
+                  <a:srgbClr val="B88424"/>
+                </a:solidFill>
+                <a:latin typeface="Aptos"/>
+                <a:ea typeface="Aptos"/>
+                <a:cs typeface="Aptos"/>
+              </a:defRPr>
+            </a:pPr>
+            <a:r>
+              <a:rPr sz="1725" b="1" i="0">
+                <a:solidFill>
+                  <a:srgbClr val="B88424"/>
+                </a:solidFill>
+                <a:latin typeface="Aptos"/>
+                <a:ea typeface="Aptos"/>
+                <a:cs typeface="Aptos"/>
+              </a:rPr>
+              <a:t>•</a:t>
+            </a:r>
+          </a:p>
+        </p:txBody>
+      </p:sp>
+      <p:sp>
+        <p:nvSpPr>
+          <p:cNvPr id="19" name="">
+            <a:extLst xmlns:a="http://schemas.openxmlformats.org/drawingml/2006/main">
+              <a:ext uri="{FF2B5EF4-FFF2-40B4-BE49-F238E27FC236}">
+                <a16:creationId xmlns:a16="http://schemas.microsoft.com/office/drawing/2014/main" id="{1EA16785-4AB1-4A30-9E94-02D92219C448}"/>
+              </a:ext>
+            </a:extLst>
+          </p:cNvPr>
+          <p:cNvSpPr>
+            <a:spLocks xmlns:a="http://schemas.openxmlformats.org/drawingml/2006/main" noGrp="1"/>
+          </p:cNvSpPr>
+          <p:nvPr/>
+        </p:nvSpPr>
+        <p:spPr>
+          <a:xfrm xmlns:a="http://schemas.openxmlformats.org/drawingml/2006/main">
+            <a:off x="6991350" y="2647950"/>
+            <a:ext cx="4248150" cy="438150"/>
+          </a:xfrm>
+          <a:prstGeom xmlns:a="http://schemas.openxmlformats.org/drawingml/2006/main" prst="rect">
+            <a:avLst/>
+          </a:prstGeom>
+          <a:noFill xmlns:a="http://schemas.openxmlformats.org/drawingml/2006/main"/>
+          <a:ln xmlns:a="http://schemas.openxmlformats.org/drawingml/2006/main" w="0">
+            <a:noFill/>
+            <a:prstDash val="solid"/>
+          </a:ln>
+        </p:spPr>
+        <p:txBody>
+          <a:bodyPr xmlns:a="http://schemas.openxmlformats.org/drawingml/2006/main" lIns="0" tIns="0" rIns="0" bIns="0" anchor="t">
+            <a:normAutofit fontScale="100000"/>
+          </a:bodyPr>
+          <a:lstStyle xmlns:a="http://schemas.openxmlformats.org/drawingml/2006/main"/>
+          <a:p xmlns:a="http://schemas.openxmlformats.org/drawingml/2006/main">
+            <a:pPr algn="l">
+              <a:lnSpc>
+                <a:spcPct val="105000"/>
+              </a:lnSpc>
+              <a:buNone/>
+              <a:defRPr sz="1725" b="0" i="0">
+                <a:solidFill>
+                  <a:srgbClr val="17242D"/>
+                </a:solidFill>
+                <a:latin typeface="Aptos"/>
+                <a:ea typeface="Aptos"/>
+                <a:cs typeface="Aptos"/>
+              </a:defRPr>
+            </a:pPr>
+            <a:r>
+              <a:rPr sz="1725" b="0" i="0">
+                <a:solidFill>
+                  <a:srgbClr val="17242D"/>
+                </a:solidFill>
+                <a:latin typeface="Aptos"/>
+                <a:ea typeface="Aptos"/>
+                <a:cs typeface="Aptos"/>
+              </a:rPr>
+              <a:t>$20,000 in real resource costs</a:t>
+            </a:r>
+          </a:p>
+        </p:txBody>
+      </p:sp>
+      <p:sp>
+        <p:nvSpPr>
+          <p:cNvPr id="20" name="">
+            <a:extLst xmlns:a="http://schemas.openxmlformats.org/drawingml/2006/main">
+              <a:ext uri="{FF2B5EF4-FFF2-40B4-BE49-F238E27FC236}">
+                <a16:creationId xmlns:a16="http://schemas.microsoft.com/office/drawing/2014/main" id="{60A25D88-4AEC-4375-895B-E4B886620828}"/>
+              </a:ext>
+            </a:extLst>
+          </p:cNvPr>
+          <p:cNvSpPr>
+            <a:spLocks xmlns:a="http://schemas.openxmlformats.org/drawingml/2006/main" noGrp="1"/>
+          </p:cNvSpPr>
+          <p:nvPr/>
+        </p:nvSpPr>
+        <p:spPr>
+          <a:xfrm xmlns:a="http://schemas.openxmlformats.org/drawingml/2006/main">
+            <a:off x="6667500" y="3171825"/>
+            <a:ext cx="228600" cy="438150"/>
+          </a:xfrm>
+          <a:prstGeom xmlns:a="http://schemas.openxmlformats.org/drawingml/2006/main" prst="rect">
+            <a:avLst/>
+          </a:prstGeom>
+          <a:noFill xmlns:a="http://schemas.openxmlformats.org/drawingml/2006/main"/>
+          <a:ln xmlns:a="http://schemas.openxmlformats.org/drawingml/2006/main" w="0">
+            <a:noFill/>
+            <a:prstDash val="solid"/>
+          </a:ln>
+        </p:spPr>
+        <p:txBody>
+          <a:bodyPr xmlns:a="http://schemas.openxmlformats.org/drawingml/2006/main" lIns="0" tIns="0" rIns="0" bIns="0" anchor="t">
+            <a:normAutofit fontScale="100000"/>
+          </a:bodyPr>
+          <a:lstStyle xmlns:a="http://schemas.openxmlformats.org/drawingml/2006/main"/>
+          <a:p xmlns:a="http://schemas.openxmlformats.org/drawingml/2006/main">
+            <a:pPr algn="l">
+              <a:lnSpc>
+                <a:spcPct val="105000"/>
+              </a:lnSpc>
+              <a:buNone/>
+              <a:defRPr sz="1725" b="1" i="0">
+                <a:solidFill>
+                  <a:srgbClr val="B88424"/>
+                </a:solidFill>
+                <a:latin typeface="Aptos"/>
+                <a:ea typeface="Aptos"/>
+                <a:cs typeface="Aptos"/>
+              </a:defRPr>
+            </a:pPr>
+            <a:r>
+              <a:rPr sz="1725" b="1" i="0">
+                <a:solidFill>
+                  <a:srgbClr val="B88424"/>
+                </a:solidFill>
+                <a:latin typeface="Aptos"/>
+                <a:ea typeface="Aptos"/>
+                <a:cs typeface="Aptos"/>
+              </a:rPr>
+              <a:t>•</a:t>
+            </a:r>
+          </a:p>
+        </p:txBody>
+      </p:sp>
+      <p:sp>
+        <p:nvSpPr>
+          <p:cNvPr id="21" name="">
+            <a:extLst xmlns:a="http://schemas.openxmlformats.org/drawingml/2006/main">
+              <a:ext uri="{FF2B5EF4-FFF2-40B4-BE49-F238E27FC236}">
+                <a16:creationId xmlns:a16="http://schemas.microsoft.com/office/drawing/2014/main" id="{C03D27FA-B036-4AAA-95CE-0B3EE8A143DD}"/>
+              </a:ext>
+            </a:extLst>
+          </p:cNvPr>
+          <p:cNvSpPr>
+            <a:spLocks xmlns:a="http://schemas.openxmlformats.org/drawingml/2006/main" noGrp="1"/>
+          </p:cNvSpPr>
+          <p:nvPr/>
+        </p:nvSpPr>
+        <p:spPr>
+          <a:xfrm xmlns:a="http://schemas.openxmlformats.org/drawingml/2006/main">
+            <a:off x="6991350" y="3181350"/>
+            <a:ext cx="4248150" cy="438150"/>
+          </a:xfrm>
+          <a:prstGeom xmlns:a="http://schemas.openxmlformats.org/drawingml/2006/main" prst="rect">
+            <a:avLst/>
+          </a:prstGeom>
+          <a:noFill xmlns:a="http://schemas.openxmlformats.org/drawingml/2006/main"/>
+          <a:ln xmlns:a="http://schemas.openxmlformats.org/drawingml/2006/main" w="0">
+            <a:noFill/>
+            <a:prstDash val="solid"/>
+          </a:ln>
+        </p:spPr>
+        <p:txBody>
+          <a:bodyPr xmlns:a="http://schemas.openxmlformats.org/drawingml/2006/main" lIns="0" tIns="0" rIns="0" bIns="0" anchor="t">
+            <a:normAutofit fontScale="100000"/>
+          </a:bodyPr>
+          <a:lstStyle xmlns:a="http://schemas.openxmlformats.org/drawingml/2006/main"/>
+          <a:p xmlns:a="http://schemas.openxmlformats.org/drawingml/2006/main">
+            <a:pPr algn="l">
+              <a:lnSpc>
+                <a:spcPct val="105000"/>
+              </a:lnSpc>
+              <a:buNone/>
+              <a:defRPr sz="1725" b="0" i="0">
+                <a:solidFill>
+                  <a:srgbClr val="17242D"/>
+                </a:solidFill>
+                <a:latin typeface="Aptos"/>
+                <a:ea typeface="Aptos"/>
+                <a:cs typeface="Aptos"/>
+              </a:defRPr>
+            </a:pPr>
+            <a:r>
+              <a:rPr sz="1725" b="0" i="0">
+                <a:solidFill>
+                  <a:srgbClr val="17242D"/>
+                </a:solidFill>
+                <a:latin typeface="Aptos"/>
+                <a:ea typeface="Aptos"/>
+                <a:cs typeface="Aptos"/>
+              </a:rPr>
+              <a:t>Search, verification, administration</a:t>
+            </a:r>
+          </a:p>
+        </p:txBody>
+      </p:sp>
+      <p:sp>
+        <p:nvSpPr>
+          <p:cNvPr id="22" name="">
+            <a:extLst xmlns:a="http://schemas.openxmlformats.org/drawingml/2006/main">
+              <a:ext uri="{FF2B5EF4-FFF2-40B4-BE49-F238E27FC236}">
+                <a16:creationId xmlns:a16="http://schemas.microsoft.com/office/drawing/2014/main" id="{9607DABB-428A-4D40-9D5F-6DA485A5F899}"/>
+              </a:ext>
+            </a:extLst>
+          </p:cNvPr>
+          <p:cNvSpPr>
+            <a:spLocks xmlns:a="http://schemas.openxmlformats.org/drawingml/2006/main" noGrp="1"/>
+          </p:cNvSpPr>
+          <p:nvPr/>
+        </p:nvSpPr>
+        <p:spPr>
+          <a:xfrm xmlns:a="http://schemas.openxmlformats.org/drawingml/2006/main">
+            <a:off x="1200150" y="5410200"/>
+            <a:ext cx="9791700" cy="533400"/>
           </a:xfrm>
           <a:prstGeom xmlns:a="http://schemas.openxmlformats.org/drawingml/2006/main" prst="rect">
             <a:avLst/>
@@ -16131,7 +17252,7 @@
                 <a:spcPct val="105000"/>
               </a:lnSpc>
               <a:buNone/>
-              <a:defRPr sz="3150" b="1" i="0">
+              <a:defRPr sz="1950" b="1" i="0">
                 <a:solidFill>
                   <a:srgbClr val="173F38"/>
                 </a:solidFill>
@@ -16141,7 +17262,7 @@
               </a:defRPr>
             </a:pPr>
             <a:r>
-              <a:rPr sz="3150" b="1" i="0">
+              <a:rPr sz="1950" b="1" i="0">
                 <a:solidFill>
                   <a:srgbClr val="173F38"/>
                 </a:solidFill>
@@ -16149,69 +17270,7 @@
                 <a:ea typeface="Georgia"/>
                 <a:cs typeface="Georgia"/>
               </a:rPr>
-              <a:t>A recognizable visual or musical style can have economic value even when copyright does not ordinarily grant a broad right over style itself.</a:t>
-            </a:r>
-          </a:p>
-        </p:txBody>
-      </p:sp>
-      <p:sp>
-        <p:nvSpPr>
-          <p:cNvPr id="8" name="">
-            <a:extLst xmlns:a="http://schemas.openxmlformats.org/drawingml/2006/main">
-              <a:ext uri="{FF2B5EF4-FFF2-40B4-BE49-F238E27FC236}">
-                <a16:creationId xmlns:a16="http://schemas.microsoft.com/office/drawing/2014/main" id="{7A99CDFE-6C5C-49D4-B3F4-920FE8076832}"/>
-              </a:ext>
-            </a:extLst>
-          </p:cNvPr>
-          <p:cNvSpPr>
-            <a:spLocks xmlns:a="http://schemas.openxmlformats.org/drawingml/2006/main" noGrp="1"/>
-          </p:cNvSpPr>
-          <p:nvPr/>
-        </p:nvSpPr>
-        <p:spPr>
-          <a:xfrm xmlns:a="http://schemas.openxmlformats.org/drawingml/2006/main">
-            <a:off x="1562100" y="4629150"/>
-            <a:ext cx="9067800" cy="819150"/>
-          </a:xfrm>
-          <a:prstGeom xmlns:a="http://schemas.openxmlformats.org/drawingml/2006/main" prst="rect">
-            <a:avLst/>
-          </a:prstGeom>
-          <a:noFill xmlns:a="http://schemas.openxmlformats.org/drawingml/2006/main"/>
-          <a:ln xmlns:a="http://schemas.openxmlformats.org/drawingml/2006/main" w="0">
-            <a:noFill/>
-            <a:prstDash val="solid"/>
-          </a:ln>
-        </p:spPr>
-        <p:txBody>
-          <a:bodyPr xmlns:a="http://schemas.openxmlformats.org/drawingml/2006/main" lIns="0" tIns="0" rIns="0" bIns="0" anchor="ctr">
-            <a:normAutofit fontScale="100000"/>
-          </a:bodyPr>
-          <a:lstStyle xmlns:a="http://schemas.openxmlformats.org/drawingml/2006/main"/>
-          <a:p xmlns:a="http://schemas.openxmlformats.org/drawingml/2006/main">
-            <a:pPr algn="ctr">
-              <a:lnSpc>
-                <a:spcPct val="105000"/>
-              </a:lnSpc>
-              <a:buNone/>
-              <a:defRPr sz="1800" b="0" i="0">
-                <a:solidFill>
-                  <a:srgbClr val="586A73"/>
-                </a:solidFill>
-                <a:latin typeface="Aptos"/>
-                <a:ea typeface="Aptos"/>
-                <a:cs typeface="Aptos"/>
-              </a:defRPr>
-            </a:pPr>
-            <a:r>
-              <a:rPr sz="1800" b="0" i="0">
-                <a:solidFill>
-                  <a:srgbClr val="586A73"/>
-                </a:solidFill>
-                <a:latin typeface="Aptos"/>
-                <a:ea typeface="Aptos"/>
-                <a:cs typeface="Aptos"/>
-              </a:rPr>
-              <a:t>Extending control could protect creators and also fence off general artistic vocabularies and independent learning.</a:t>
+              <a:t>Necessary permissions can create Chapter 5's anticommons.</a:t>
             </a:r>
           </a:p>
         </p:txBody>
@@ -16219,7 +17278,7 @@
     </p:spTree>
     <p:extLst>
       <p:ext uri="{BB962C8B-B14F-4D97-AF65-F5344CB8AC3E}">
-        <p14:creationId xmlns:p14="http://schemas.microsoft.com/office/powerpoint/2010/main" val="819309745"/>
+        <p14:creationId xmlns:p14="http://schemas.microsoft.com/office/powerpoint/2010/main" val="1163471467"/>
       </p:ext>
     </p:extLst>
   </p:cSld>
@@ -16247,10 +17306,10 @@
       </p:grpSpPr>
       <p:sp>
         <p:nvSpPr>
-          <p:cNvPr id="23" name="">
-            <a:extLst xmlns:a="http://schemas.openxmlformats.org/drawingml/2006/main">
-              <a:ext uri="{FF2B5EF4-FFF2-40B4-BE49-F238E27FC236}">
-                <a16:creationId xmlns:a16="http://schemas.microsoft.com/office/drawing/2014/main" id="{E109662F-8E02-49E6-808B-89AB4D299D12}"/>
+          <p:cNvPr id="20" name="">
+            <a:extLst xmlns:a="http://schemas.openxmlformats.org/drawingml/2006/main">
+              <a:ext uri="{FF2B5EF4-FFF2-40B4-BE49-F238E27FC236}">
+                <a16:creationId xmlns:a16="http://schemas.microsoft.com/office/drawing/2014/main" id="{547E8D47-A010-48C6-BF06-178EBF76CA3B}"/>
               </a:ext>
             </a:extLst>
           </p:cNvPr>
@@ -16281,7 +17340,7 @@
           <p:cNvPr id="2" name="">
             <a:extLst xmlns:a="http://schemas.openxmlformats.org/drawingml/2006/main">
               <a:ext uri="{FF2B5EF4-FFF2-40B4-BE49-F238E27FC236}">
-                <a16:creationId xmlns:a16="http://schemas.microsoft.com/office/drawing/2014/main" id="{45CD831B-F041-40BB-9307-098DD48688AC}"/>
+                <a16:creationId xmlns:a16="http://schemas.microsoft.com/office/drawing/2014/main" id="{961323D0-7B2E-476B-A314-A2705DDE9D86}"/>
               </a:ext>
             </a:extLst>
           </p:cNvPr>
@@ -16343,7 +17402,7 @@
           <p:cNvPr id="3" name="">
             <a:extLst xmlns:a="http://schemas.openxmlformats.org/drawingml/2006/main">
               <a:ext uri="{FF2B5EF4-FFF2-40B4-BE49-F238E27FC236}">
-                <a16:creationId xmlns:a16="http://schemas.microsoft.com/office/drawing/2014/main" id="{29F8BA31-8913-4447-AF7E-1A1A0BF2F789}"/>
+                <a16:creationId xmlns:a16="http://schemas.microsoft.com/office/drawing/2014/main" id="{62BD6E25-1E91-4A66-A6C0-2C558B2B88C8}"/>
               </a:ext>
             </a:extLst>
           </p:cNvPr>
@@ -16395,7 +17454,7 @@
                 <a:ea typeface="Georgia"/>
                 <a:cs typeface="Georgia"/>
               </a:rPr>
-              <a:t>Design an intellectual-property regime as a system</a:t>
+              <a:t>Must compensation require an individual veto?</a:t>
             </a:r>
           </a:p>
         </p:txBody>
@@ -16405,7 +17464,7 @@
           <p:cNvPr id="4" name="">
             <a:extLst xmlns:a="http://schemas.openxmlformats.org/drawingml/2006/main">
               <a:ext uri="{FF2B5EF4-FFF2-40B4-BE49-F238E27FC236}">
-                <a16:creationId xmlns:a16="http://schemas.microsoft.com/office/drawing/2014/main" id="{7D40FA22-6984-4303-93A8-0345C0C5BAFD}"/>
+                <a16:creationId xmlns:a16="http://schemas.microsoft.com/office/drawing/2014/main" id="{A0586A5B-6BE7-4350-8268-CA596D8097FF}"/>
               </a:ext>
             </a:extLst>
           </p:cNvPr>
@@ -16436,7 +17495,7 @@
           <p:cNvPr id="5" name="">
             <a:extLst xmlns:a="http://schemas.openxmlformats.org/drawingml/2006/main">
               <a:ext uri="{FF2B5EF4-FFF2-40B4-BE49-F238E27FC236}">
-                <a16:creationId xmlns:a16="http://schemas.microsoft.com/office/drawing/2014/main" id="{D7302CAD-239F-428A-80C0-B9A0D5173415}"/>
+                <a16:creationId xmlns:a16="http://schemas.microsoft.com/office/drawing/2014/main" id="{CEC890F4-7FEB-4E15-A535-47F93622B26A}"/>
               </a:ext>
             </a:extLst>
           </p:cNvPr>
@@ -16498,7 +17557,7 @@
           <p:cNvPr id="6" name="">
             <a:extLst xmlns:a="http://schemas.openxmlformats.org/drawingml/2006/main">
               <a:ext uri="{FF2B5EF4-FFF2-40B4-BE49-F238E27FC236}">
-                <a16:creationId xmlns:a16="http://schemas.microsoft.com/office/drawing/2014/main" id="{BA33B91F-8F6B-4B27-96BD-1D9C6C6E10ED}"/>
+                <a16:creationId xmlns:a16="http://schemas.microsoft.com/office/drawing/2014/main" id="{9BB5E4FB-9540-4CE7-9C3F-67663E5C0F37}"/>
               </a:ext>
             </a:extLst>
           </p:cNvPr>
@@ -16560,19 +17619,81 @@
           <p:cNvPr id="7" name="">
             <a:extLst xmlns:a="http://schemas.openxmlformats.org/drawingml/2006/main">
               <a:ext uri="{FF2B5EF4-FFF2-40B4-BE49-F238E27FC236}">
-                <a16:creationId xmlns:a16="http://schemas.microsoft.com/office/drawing/2014/main" id="{47CA02F9-1DC7-4E34-B850-DAB469764272}"/>
-              </a:ext>
-            </a:extLst>
-          </p:cNvPr>
-          <p:cNvSpPr>
-            <a:spLocks xmlns:a="http://schemas.openxmlformats.org/drawingml/2006/main" noGrp="1"/>
-          </p:cNvSpPr>
-          <p:nvPr/>
-        </p:nvSpPr>
-        <p:spPr>
-          <a:xfrm xmlns:a="http://schemas.openxmlformats.org/drawingml/2006/main">
-            <a:off x="762000" y="2171700"/>
-            <a:ext cx="2352675" cy="1809750"/>
+                <a16:creationId xmlns:a16="http://schemas.microsoft.com/office/drawing/2014/main" id="{167E4D53-674F-44D6-B13B-81B1AA50BC2C}"/>
+              </a:ext>
+            </a:extLst>
+          </p:cNvPr>
+          <p:cNvSpPr>
+            <a:spLocks xmlns:a="http://schemas.openxmlformats.org/drawingml/2006/main" noGrp="1"/>
+          </p:cNvSpPr>
+          <p:nvPr/>
+        </p:nvSpPr>
+        <p:spPr>
+          <a:xfrm xmlns:a="http://schemas.openxmlformats.org/drawingml/2006/main">
+            <a:off x="666750" y="1790700"/>
+            <a:ext cx="2528888" cy="285750"/>
+          </a:xfrm>
+          <a:prstGeom xmlns:a="http://schemas.openxmlformats.org/drawingml/2006/main" prst="rect">
+            <a:avLst/>
+          </a:prstGeom>
+          <a:noFill xmlns:a="http://schemas.openxmlformats.org/drawingml/2006/main"/>
+          <a:ln xmlns:a="http://schemas.openxmlformats.org/drawingml/2006/main" w="0">
+            <a:noFill/>
+            <a:prstDash val="solid"/>
+          </a:ln>
+        </p:spPr>
+        <p:txBody>
+          <a:bodyPr xmlns:a="http://schemas.openxmlformats.org/drawingml/2006/main" lIns="0" tIns="0" rIns="0" bIns="0" anchor="t">
+            <a:normAutofit fontScale="100000"/>
+          </a:bodyPr>
+          <a:lstStyle xmlns:a="http://schemas.openxmlformats.org/drawingml/2006/main"/>
+          <a:p xmlns:a="http://schemas.openxmlformats.org/drawingml/2006/main">
+            <a:pPr algn="ctr">
+              <a:lnSpc>
+                <a:spcPct val="105000"/>
+              </a:lnSpc>
+              <a:buNone/>
+              <a:defRPr sz="1275" b="1" i="0">
+                <a:solidFill>
+                  <a:srgbClr val="24594E"/>
+                </a:solidFill>
+                <a:latin typeface="Aptos"/>
+                <a:ea typeface="Aptos"/>
+                <a:cs typeface="Aptos"/>
+              </a:defRPr>
+            </a:pPr>
+            <a:r>
+              <a:rPr sz="1275" b="1" i="0">
+                <a:solidFill>
+                  <a:srgbClr val="24594E"/>
+                </a:solidFill>
+                <a:latin typeface="Aptos"/>
+                <a:ea typeface="Aptos"/>
+                <a:cs typeface="Aptos"/>
+              </a:rPr>
+              <a:t>INDIVIDUAL LICENSE</a:t>
+            </a:r>
+          </a:p>
+        </p:txBody>
+      </p:sp>
+      <p:sp>
+        <p:nvSpPr>
+          <p:cNvPr id="8" name="">
+            <a:extLst xmlns:a="http://schemas.openxmlformats.org/drawingml/2006/main">
+              <a:ext uri="{FF2B5EF4-FFF2-40B4-BE49-F238E27FC236}">
+                <a16:creationId xmlns:a16="http://schemas.microsoft.com/office/drawing/2014/main" id="{203A626C-C7BC-43AF-B254-DD9E458D8DD0}"/>
+              </a:ext>
+            </a:extLst>
+          </p:cNvPr>
+          <p:cNvSpPr>
+            <a:spLocks xmlns:a="http://schemas.openxmlformats.org/drawingml/2006/main" noGrp="1"/>
+          </p:cNvSpPr>
+          <p:nvPr/>
+        </p:nvSpPr>
+        <p:spPr>
+          <a:xfrm xmlns:a="http://schemas.openxmlformats.org/drawingml/2006/main">
+            <a:off x="666750" y="2228850"/>
+            <a:ext cx="2528888" cy="2609850"/>
           </a:xfrm>
           <a:prstGeom xmlns:a="http://schemas.openxmlformats.org/drawingml/2006/main" prst="rect">
             <a:avLst/>
@@ -16590,22 +17711,84 @@
       </p:sp>
       <p:sp>
         <p:nvSpPr>
-          <p:cNvPr id="8" name="">
-            <a:extLst xmlns:a="http://schemas.openxmlformats.org/drawingml/2006/main">
-              <a:ext uri="{FF2B5EF4-FFF2-40B4-BE49-F238E27FC236}">
-                <a16:creationId xmlns:a16="http://schemas.microsoft.com/office/drawing/2014/main" id="{D9C57E26-26AC-404B-92B5-646326BE2650}"/>
-              </a:ext>
-            </a:extLst>
-          </p:cNvPr>
-          <p:cNvSpPr>
-            <a:spLocks xmlns:a="http://schemas.openxmlformats.org/drawingml/2006/main" noGrp="1"/>
-          </p:cNvSpPr>
-          <p:nvPr/>
-        </p:nvSpPr>
-        <p:spPr>
-          <a:xfrm xmlns:a="http://schemas.openxmlformats.org/drawingml/2006/main">
-            <a:off x="876300" y="2400300"/>
-            <a:ext cx="2124075" cy="304800"/>
+          <p:cNvPr id="9" name="">
+            <a:extLst xmlns:a="http://schemas.openxmlformats.org/drawingml/2006/main">
+              <a:ext uri="{FF2B5EF4-FFF2-40B4-BE49-F238E27FC236}">
+                <a16:creationId xmlns:a16="http://schemas.microsoft.com/office/drawing/2014/main" id="{984A8619-89BD-4B0F-86CC-B988EA4BABF2}"/>
+              </a:ext>
+            </a:extLst>
+          </p:cNvPr>
+          <p:cNvSpPr>
+            <a:spLocks xmlns:a="http://schemas.openxmlformats.org/drawingml/2006/main" noGrp="1"/>
+          </p:cNvSpPr>
+          <p:nvPr/>
+        </p:nvSpPr>
+        <p:spPr>
+          <a:xfrm xmlns:a="http://schemas.openxmlformats.org/drawingml/2006/main">
+            <a:off x="857250" y="2438400"/>
+            <a:ext cx="2147888" cy="2209800"/>
+          </a:xfrm>
+          <a:prstGeom xmlns:a="http://schemas.openxmlformats.org/drawingml/2006/main" prst="rect">
+            <a:avLst/>
+          </a:prstGeom>
+          <a:noFill xmlns:a="http://schemas.openxmlformats.org/drawingml/2006/main"/>
+          <a:ln xmlns:a="http://schemas.openxmlformats.org/drawingml/2006/main" w="0">
+            <a:noFill/>
+            <a:prstDash val="solid"/>
+          </a:ln>
+        </p:spPr>
+        <p:txBody>
+          <a:bodyPr xmlns:a="http://schemas.openxmlformats.org/drawingml/2006/main" lIns="0" tIns="0" rIns="0" bIns="0" anchor="ctr">
+            <a:normAutofit fontScale="100000"/>
+          </a:bodyPr>
+          <a:lstStyle xmlns:a="http://schemas.openxmlformats.org/drawingml/2006/main"/>
+          <a:p xmlns:a="http://schemas.openxmlformats.org/drawingml/2006/main">
+            <a:pPr algn="ctr">
+              <a:lnSpc>
+                <a:spcPct val="105000"/>
+              </a:lnSpc>
+              <a:buNone/>
+              <a:defRPr sz="1575" b="0" i="0">
+                <a:solidFill>
+                  <a:srgbClr val="17242D"/>
+                </a:solidFill>
+                <a:latin typeface="Aptos"/>
+                <a:ea typeface="Aptos"/>
+                <a:cs typeface="Aptos"/>
+              </a:defRPr>
+            </a:pPr>
+            <a:r>
+              <a:rPr sz="1575" b="0" i="0">
+                <a:solidFill>
+                  <a:srgbClr val="17242D"/>
+                </a:solidFill>
+                <a:latin typeface="Aptos"/>
+                <a:ea typeface="Aptos"/>
+                <a:cs typeface="Aptos"/>
+              </a:rPr>
+              <a:t>Owner chooses consent and price</a:t>
+            </a:r>
+          </a:p>
+        </p:txBody>
+      </p:sp>
+      <p:sp>
+        <p:nvSpPr>
+          <p:cNvPr id="10" name="">
+            <a:extLst xmlns:a="http://schemas.openxmlformats.org/drawingml/2006/main">
+              <a:ext uri="{FF2B5EF4-FFF2-40B4-BE49-F238E27FC236}">
+                <a16:creationId xmlns:a16="http://schemas.microsoft.com/office/drawing/2014/main" id="{501BD0D4-D19F-49D1-9420-C99751D9E7A5}"/>
+              </a:ext>
+            </a:extLst>
+          </p:cNvPr>
+          <p:cNvSpPr>
+            <a:spLocks xmlns:a="http://schemas.openxmlformats.org/drawingml/2006/main" noGrp="1"/>
+          </p:cNvSpPr>
+          <p:nvPr/>
+        </p:nvSpPr>
+        <p:spPr>
+          <a:xfrm xmlns:a="http://schemas.openxmlformats.org/drawingml/2006/main">
+            <a:off x="3443288" y="1790700"/>
+            <a:ext cx="2528888" cy="285750"/>
           </a:xfrm>
           <a:prstGeom xmlns:a="http://schemas.openxmlformats.org/drawingml/2006/main" prst="rect">
             <a:avLst/>
@@ -16627,47 +17810,80 @@
                 <a:spcPct val="105000"/>
               </a:lnSpc>
               <a:buNone/>
-              <a:defRPr sz="1200" b="1" i="0">
-                <a:solidFill>
-                  <a:srgbClr val="24594E"/>
-                </a:solidFill>
-                <a:latin typeface="Aptos"/>
-                <a:ea typeface="Aptos"/>
-                <a:cs typeface="Aptos"/>
-              </a:defRPr>
-            </a:pPr>
-            <a:r>
-              <a:rPr sz="1200" b="1" i="0">
-                <a:solidFill>
-                  <a:srgbClr val="24594E"/>
-                </a:solidFill>
-                <a:latin typeface="Aptos"/>
-                <a:ea typeface="Aptos"/>
-                <a:cs typeface="Aptos"/>
-              </a:rPr>
-              <a:t>INCENTIVE</a:t>
-            </a:r>
-          </a:p>
-        </p:txBody>
-      </p:sp>
-      <p:sp>
-        <p:nvSpPr>
-          <p:cNvPr id="9" name="">
-            <a:extLst xmlns:a="http://schemas.openxmlformats.org/drawingml/2006/main">
-              <a:ext uri="{FF2B5EF4-FFF2-40B4-BE49-F238E27FC236}">
-                <a16:creationId xmlns:a16="http://schemas.microsoft.com/office/drawing/2014/main" id="{781CB30B-8251-4E7C-8A64-206AB47CB3AC}"/>
-              </a:ext>
-            </a:extLst>
-          </p:cNvPr>
-          <p:cNvSpPr>
-            <a:spLocks xmlns:a="http://schemas.openxmlformats.org/drawingml/2006/main" noGrp="1"/>
-          </p:cNvSpPr>
-          <p:nvPr/>
-        </p:nvSpPr>
-        <p:spPr>
-          <a:xfrm xmlns:a="http://schemas.openxmlformats.org/drawingml/2006/main">
-            <a:off x="914400" y="2857500"/>
-            <a:ext cx="2047875" cy="971550"/>
+              <a:defRPr sz="1275" b="1" i="0">
+                <a:solidFill>
+                  <a:srgbClr val="315F75"/>
+                </a:solidFill>
+                <a:latin typeface="Aptos"/>
+                <a:ea typeface="Aptos"/>
+                <a:cs typeface="Aptos"/>
+              </a:defRPr>
+            </a:pPr>
+            <a:r>
+              <a:rPr sz="1275" b="1" i="0">
+                <a:solidFill>
+                  <a:srgbClr val="315F75"/>
+                </a:solidFill>
+                <a:latin typeface="Aptos"/>
+                <a:ea typeface="Aptos"/>
+                <a:cs typeface="Aptos"/>
+              </a:rPr>
+              <a:t>COLLECTIVE LICENSE</a:t>
+            </a:r>
+          </a:p>
+        </p:txBody>
+      </p:sp>
+      <p:sp>
+        <p:nvSpPr>
+          <p:cNvPr id="11" name="">
+            <a:extLst xmlns:a="http://schemas.openxmlformats.org/drawingml/2006/main">
+              <a:ext uri="{FF2B5EF4-FFF2-40B4-BE49-F238E27FC236}">
+                <a16:creationId xmlns:a16="http://schemas.microsoft.com/office/drawing/2014/main" id="{D4E108AC-AE3E-4789-915D-DFBE47AD2B37}"/>
+              </a:ext>
+            </a:extLst>
+          </p:cNvPr>
+          <p:cNvSpPr>
+            <a:spLocks xmlns:a="http://schemas.openxmlformats.org/drawingml/2006/main" noGrp="1"/>
+          </p:cNvSpPr>
+          <p:nvPr/>
+        </p:nvSpPr>
+        <p:spPr>
+          <a:xfrm xmlns:a="http://schemas.openxmlformats.org/drawingml/2006/main">
+            <a:off x="3443288" y="2228850"/>
+            <a:ext cx="2528888" cy="2609850"/>
+          </a:xfrm>
+          <a:prstGeom xmlns:a="http://schemas.openxmlformats.org/drawingml/2006/main" prst="rect">
+            <a:avLst/>
+          </a:prstGeom>
+          <a:solidFill xmlns:a="http://schemas.openxmlformats.org/drawingml/2006/main">
+            <a:srgbClr val="E9F1F5"/>
+          </a:solidFill>
+          <a:ln xmlns:a="http://schemas.openxmlformats.org/drawingml/2006/main" w="9525">
+            <a:solidFill>
+              <a:srgbClr val="CCD5D2"/>
+            </a:solidFill>
+            <a:prstDash val="solid"/>
+          </a:ln>
+        </p:spPr>
+      </p:sp>
+      <p:sp>
+        <p:nvSpPr>
+          <p:cNvPr id="12" name="">
+            <a:extLst xmlns:a="http://schemas.openxmlformats.org/drawingml/2006/main">
+              <a:ext uri="{FF2B5EF4-FFF2-40B4-BE49-F238E27FC236}">
+                <a16:creationId xmlns:a16="http://schemas.microsoft.com/office/drawing/2014/main" id="{948DD222-8A93-489D-A85B-A788989BF07B}"/>
+              </a:ext>
+            </a:extLst>
+          </p:cNvPr>
+          <p:cNvSpPr>
+            <a:spLocks xmlns:a="http://schemas.openxmlformats.org/drawingml/2006/main" noGrp="1"/>
+          </p:cNvSpPr>
+          <p:nvPr/>
+        </p:nvSpPr>
+        <p:spPr>
+          <a:xfrm xmlns:a="http://schemas.openxmlformats.org/drawingml/2006/main">
+            <a:off x="3633788" y="2438400"/>
+            <a:ext cx="2147888" cy="2209800"/>
           </a:xfrm>
           <a:prstGeom xmlns:a="http://schemas.openxmlformats.org/drawingml/2006/main" prst="rect">
             <a:avLst/>
@@ -16689,7 +17905,7 @@
                 <a:spcPct val="105000"/>
               </a:lnSpc>
               <a:buNone/>
-              <a:defRPr sz="1650" b="0" i="0">
+              <a:defRPr sz="1575" b="0" i="0">
                 <a:solidFill>
                   <a:srgbClr val="17242D"/>
                 </a:solidFill>
@@ -16699,7 +17915,7 @@
               </a:defRPr>
             </a:pPr>
             <a:r>
-              <a:rPr sz="1650" b="0" i="0">
+              <a:rPr sz="1575" b="0" i="0">
                 <a:solidFill>
                   <a:srgbClr val="17242D"/>
                 </a:solidFill>
@@ -16707,41 +17923,41 @@
                 <a:ea typeface="Aptos"/>
                 <a:cs typeface="Aptos"/>
               </a:rPr>
-              <a:t>What creation needs support?</a:t>
-            </a:r>
-          </a:p>
-        </p:txBody>
-      </p:sp>
-      <p:sp>
-        <p:nvSpPr>
-          <p:cNvPr id="10" name="">
-            <a:extLst xmlns:a="http://schemas.openxmlformats.org/drawingml/2006/main">
-              <a:ext uri="{FF2B5EF4-FFF2-40B4-BE49-F238E27FC236}">
-                <a16:creationId xmlns:a16="http://schemas.microsoft.com/office/drawing/2014/main" id="{1AE10358-779A-4349-A9A0-D6AC3EB5D500}"/>
-              </a:ext>
-            </a:extLst>
-          </p:cNvPr>
-          <p:cNvSpPr>
-            <a:spLocks xmlns:a="http://schemas.openxmlformats.org/drawingml/2006/main" noGrp="1"/>
-          </p:cNvSpPr>
-          <p:nvPr/>
-        </p:nvSpPr>
-        <p:spPr>
-          <a:xfrm xmlns:a="http://schemas.openxmlformats.org/drawingml/2006/main">
-            <a:off x="3114675" y="2857500"/>
-            <a:ext cx="419100" cy="457200"/>
-          </a:xfrm>
-          <a:prstGeom xmlns:a="http://schemas.openxmlformats.org/drawingml/2006/main" prst="rect">
-            <a:avLst/>
-          </a:prstGeom>
-          <a:noFill xmlns:a="http://schemas.openxmlformats.org/drawingml/2006/main"/>
-          <a:ln xmlns:a="http://schemas.openxmlformats.org/drawingml/2006/main" w="0">
-            <a:noFill/>
-            <a:prstDash val="solid"/>
-          </a:ln>
-        </p:spPr>
-        <p:txBody>
-          <a:bodyPr xmlns:a="http://schemas.openxmlformats.org/drawingml/2006/main" lIns="0" tIns="0" rIns="0" bIns="0" anchor="ctr">
+              <a:t>Owners delegate permission and payment</a:t>
+            </a:r>
+          </a:p>
+        </p:txBody>
+      </p:sp>
+      <p:sp>
+        <p:nvSpPr>
+          <p:cNvPr id="13" name="">
+            <a:extLst xmlns:a="http://schemas.openxmlformats.org/drawingml/2006/main">
+              <a:ext uri="{FF2B5EF4-FFF2-40B4-BE49-F238E27FC236}">
+                <a16:creationId xmlns:a16="http://schemas.microsoft.com/office/drawing/2014/main" id="{9386F983-7A86-41D8-BF31-A177B3536290}"/>
+              </a:ext>
+            </a:extLst>
+          </p:cNvPr>
+          <p:cNvSpPr>
+            <a:spLocks xmlns:a="http://schemas.openxmlformats.org/drawingml/2006/main" noGrp="1"/>
+          </p:cNvSpPr>
+          <p:nvPr/>
+        </p:nvSpPr>
+        <p:spPr>
+          <a:xfrm xmlns:a="http://schemas.openxmlformats.org/drawingml/2006/main">
+            <a:off x="6219825" y="1790700"/>
+            <a:ext cx="2528888" cy="285750"/>
+          </a:xfrm>
+          <a:prstGeom xmlns:a="http://schemas.openxmlformats.org/drawingml/2006/main" prst="rect">
+            <a:avLst/>
+          </a:prstGeom>
+          <a:noFill xmlns:a="http://schemas.openxmlformats.org/drawingml/2006/main"/>
+          <a:ln xmlns:a="http://schemas.openxmlformats.org/drawingml/2006/main" w="0">
+            <a:noFill/>
+            <a:prstDash val="solid"/>
+          </a:ln>
+        </p:spPr>
+        <p:txBody>
+          <a:bodyPr xmlns:a="http://schemas.openxmlformats.org/drawingml/2006/main" lIns="0" tIns="0" rIns="0" bIns="0" anchor="t">
             <a:normAutofit fontScale="100000"/>
           </a:bodyPr>
           <a:lstStyle xmlns:a="http://schemas.openxmlformats.org/drawingml/2006/main"/>
@@ -16751,47 +17967,47 @@
                 <a:spcPct val="105000"/>
               </a:lnSpc>
               <a:buNone/>
-              <a:defRPr sz="2550" b="1" i="0">
-                <a:solidFill>
-                  <a:srgbClr val="B88424"/>
-                </a:solidFill>
-                <a:latin typeface="Aptos"/>
-                <a:ea typeface="Aptos"/>
-                <a:cs typeface="Aptos"/>
-              </a:defRPr>
-            </a:pPr>
-            <a:r>
-              <a:rPr sz="2550" b="1" i="0">
-                <a:solidFill>
-                  <a:srgbClr val="B88424"/>
-                </a:solidFill>
-                <a:latin typeface="Aptos"/>
-                <a:ea typeface="Aptos"/>
-                <a:cs typeface="Aptos"/>
-              </a:rPr>
-              <a:t>→</a:t>
-            </a:r>
-          </a:p>
-        </p:txBody>
-      </p:sp>
-      <p:sp>
-        <p:nvSpPr>
-          <p:cNvPr id="11" name="">
-            <a:extLst xmlns:a="http://schemas.openxmlformats.org/drawingml/2006/main">
-              <a:ext uri="{FF2B5EF4-FFF2-40B4-BE49-F238E27FC236}">
-                <a16:creationId xmlns:a16="http://schemas.microsoft.com/office/drawing/2014/main" id="{F17A81B0-95BC-457C-BA1C-8731C134AF70}"/>
-              </a:ext>
-            </a:extLst>
-          </p:cNvPr>
-          <p:cNvSpPr>
-            <a:spLocks xmlns:a="http://schemas.openxmlformats.org/drawingml/2006/main" noGrp="1"/>
-          </p:cNvSpPr>
-          <p:nvPr/>
-        </p:nvSpPr>
-        <p:spPr>
-          <a:xfrm xmlns:a="http://schemas.openxmlformats.org/drawingml/2006/main">
-            <a:off x="3533775" y="2171700"/>
-            <a:ext cx="2352675" cy="1809750"/>
+              <a:defRPr sz="1275" b="1" i="0">
+                <a:solidFill>
+                  <a:srgbClr val="75530D"/>
+                </a:solidFill>
+                <a:latin typeface="Aptos"/>
+                <a:ea typeface="Aptos"/>
+                <a:cs typeface="Aptos"/>
+              </a:defRPr>
+            </a:pPr>
+            <a:r>
+              <a:rPr sz="1275" b="1" i="0">
+                <a:solidFill>
+                  <a:srgbClr val="75530D"/>
+                </a:solidFill>
+                <a:latin typeface="Aptos"/>
+                <a:ea typeface="Aptos"/>
+                <a:cs typeface="Aptos"/>
+              </a:rPr>
+              <a:t>COMPENSATED ACCESS</a:t>
+            </a:r>
+          </a:p>
+        </p:txBody>
+      </p:sp>
+      <p:sp>
+        <p:nvSpPr>
+          <p:cNvPr id="14" name="">
+            <a:extLst xmlns:a="http://schemas.openxmlformats.org/drawingml/2006/main">
+              <a:ext uri="{FF2B5EF4-FFF2-40B4-BE49-F238E27FC236}">
+                <a16:creationId xmlns:a16="http://schemas.microsoft.com/office/drawing/2014/main" id="{B6EFA215-8270-4F3B-86BF-2727D8DA1F25}"/>
+              </a:ext>
+            </a:extLst>
+          </p:cNvPr>
+          <p:cNvSpPr>
+            <a:spLocks xmlns:a="http://schemas.openxmlformats.org/drawingml/2006/main" noGrp="1"/>
+          </p:cNvSpPr>
+          <p:nvPr/>
+        </p:nvSpPr>
+        <p:spPr>
+          <a:xfrm xmlns:a="http://schemas.openxmlformats.org/drawingml/2006/main">
+            <a:off x="6219825" y="2228850"/>
+            <a:ext cx="2528888" cy="2609850"/>
           </a:xfrm>
           <a:prstGeom xmlns:a="http://schemas.openxmlformats.org/drawingml/2006/main" prst="rect">
             <a:avLst/>
@@ -16809,22 +18025,84 @@
       </p:sp>
       <p:sp>
         <p:nvSpPr>
-          <p:cNvPr id="12" name="">
-            <a:extLst xmlns:a="http://schemas.openxmlformats.org/drawingml/2006/main">
-              <a:ext uri="{FF2B5EF4-FFF2-40B4-BE49-F238E27FC236}">
-                <a16:creationId xmlns:a16="http://schemas.microsoft.com/office/drawing/2014/main" id="{F565A072-8E0F-4176-AF88-01E211B036A7}"/>
-              </a:ext>
-            </a:extLst>
-          </p:cNvPr>
-          <p:cNvSpPr>
-            <a:spLocks xmlns:a="http://schemas.openxmlformats.org/drawingml/2006/main" noGrp="1"/>
-          </p:cNvSpPr>
-          <p:nvPr/>
-        </p:nvSpPr>
-        <p:spPr>
-          <a:xfrm xmlns:a="http://schemas.openxmlformats.org/drawingml/2006/main">
-            <a:off x="3648075" y="2400300"/>
-            <a:ext cx="2124075" cy="304800"/>
+          <p:cNvPr id="15" name="">
+            <a:extLst xmlns:a="http://schemas.openxmlformats.org/drawingml/2006/main">
+              <a:ext uri="{FF2B5EF4-FFF2-40B4-BE49-F238E27FC236}">
+                <a16:creationId xmlns:a16="http://schemas.microsoft.com/office/drawing/2014/main" id="{AAB992F5-3AA8-43F9-8A12-81C0A919A35D}"/>
+              </a:ext>
+            </a:extLst>
+          </p:cNvPr>
+          <p:cNvSpPr>
+            <a:spLocks xmlns:a="http://schemas.openxmlformats.org/drawingml/2006/main" noGrp="1"/>
+          </p:cNvSpPr>
+          <p:nvPr/>
+        </p:nvSpPr>
+        <p:spPr>
+          <a:xfrm xmlns:a="http://schemas.openxmlformats.org/drawingml/2006/main">
+            <a:off x="6410325" y="2438400"/>
+            <a:ext cx="2147888" cy="2209800"/>
+          </a:xfrm>
+          <a:prstGeom xmlns:a="http://schemas.openxmlformats.org/drawingml/2006/main" prst="rect">
+            <a:avLst/>
+          </a:prstGeom>
+          <a:noFill xmlns:a="http://schemas.openxmlformats.org/drawingml/2006/main"/>
+          <a:ln xmlns:a="http://schemas.openxmlformats.org/drawingml/2006/main" w="0">
+            <a:noFill/>
+            <a:prstDash val="solid"/>
+          </a:ln>
+        </p:spPr>
+        <p:txBody>
+          <a:bodyPr xmlns:a="http://schemas.openxmlformats.org/drawingml/2006/main" lIns="0" tIns="0" rIns="0" bIns="0" anchor="ctr">
+            <a:normAutofit fontScale="100000"/>
+          </a:bodyPr>
+          <a:lstStyle xmlns:a="http://schemas.openxmlformats.org/drawingml/2006/main"/>
+          <a:p xmlns:a="http://schemas.openxmlformats.org/drawingml/2006/main">
+            <a:pPr algn="ctr">
+              <a:lnSpc>
+                <a:spcPct val="105000"/>
+              </a:lnSpc>
+              <a:buNone/>
+              <a:defRPr sz="1575" b="0" i="0">
+                <a:solidFill>
+                  <a:srgbClr val="17242D"/>
+                </a:solidFill>
+                <a:latin typeface="Aptos"/>
+                <a:ea typeface="Aptos"/>
+                <a:cs typeface="Aptos"/>
+              </a:defRPr>
+            </a:pPr>
+            <a:r>
+              <a:rPr sz="1575" b="0" i="0">
+                <a:solidFill>
+                  <a:srgbClr val="17242D"/>
+                </a:solidFill>
+                <a:latin typeface="Aptos"/>
+                <a:ea typeface="Aptos"/>
+                <a:cs typeface="Aptos"/>
+              </a:rPr>
+              <a:t>Proposed covered use with a payment duty</a:t>
+            </a:r>
+          </a:p>
+        </p:txBody>
+      </p:sp>
+      <p:sp>
+        <p:nvSpPr>
+          <p:cNvPr id="16" name="">
+            <a:extLst xmlns:a="http://schemas.openxmlformats.org/drawingml/2006/main">
+              <a:ext uri="{FF2B5EF4-FFF2-40B4-BE49-F238E27FC236}">
+                <a16:creationId xmlns:a16="http://schemas.microsoft.com/office/drawing/2014/main" id="{17C60181-8CEA-422A-B80E-00F486EA38D2}"/>
+              </a:ext>
+            </a:extLst>
+          </p:cNvPr>
+          <p:cNvSpPr>
+            <a:spLocks xmlns:a="http://schemas.openxmlformats.org/drawingml/2006/main" noGrp="1"/>
+          </p:cNvSpPr>
+          <p:nvPr/>
+        </p:nvSpPr>
+        <p:spPr>
+          <a:xfrm xmlns:a="http://schemas.openxmlformats.org/drawingml/2006/main">
+            <a:off x="8996363" y="1790700"/>
+            <a:ext cx="2528888" cy="285750"/>
           </a:xfrm>
           <a:prstGeom xmlns:a="http://schemas.openxmlformats.org/drawingml/2006/main" prst="rect">
             <a:avLst/>
@@ -16846,171 +18124,47 @@
                 <a:spcPct val="105000"/>
               </a:lnSpc>
               <a:buNone/>
-              <a:defRPr sz="1200" b="1" i="0">
-                <a:solidFill>
-                  <a:srgbClr val="75530D"/>
-                </a:solidFill>
-                <a:latin typeface="Aptos"/>
-                <a:ea typeface="Aptos"/>
-                <a:cs typeface="Aptos"/>
-              </a:defRPr>
-            </a:pPr>
-            <a:r>
-              <a:rPr sz="1200" b="1" i="0">
-                <a:solidFill>
-                  <a:srgbClr val="75530D"/>
-                </a:solidFill>
-                <a:latin typeface="Aptos"/>
-                <a:ea typeface="Aptos"/>
-                <a:cs typeface="Aptos"/>
-              </a:rPr>
-              <a:t>BOUNDARY</a:t>
-            </a:r>
-          </a:p>
-        </p:txBody>
-      </p:sp>
-      <p:sp>
-        <p:nvSpPr>
-          <p:cNvPr id="13" name="">
-            <a:extLst xmlns:a="http://schemas.openxmlformats.org/drawingml/2006/main">
-              <a:ext uri="{FF2B5EF4-FFF2-40B4-BE49-F238E27FC236}">
-                <a16:creationId xmlns:a16="http://schemas.microsoft.com/office/drawing/2014/main" id="{243D9EBF-7542-486A-9AEC-B3C6F6736935}"/>
-              </a:ext>
-            </a:extLst>
-          </p:cNvPr>
-          <p:cNvSpPr>
-            <a:spLocks xmlns:a="http://schemas.openxmlformats.org/drawingml/2006/main" noGrp="1"/>
-          </p:cNvSpPr>
-          <p:nvPr/>
-        </p:nvSpPr>
-        <p:spPr>
-          <a:xfrm xmlns:a="http://schemas.openxmlformats.org/drawingml/2006/main">
-            <a:off x="3686175" y="2857500"/>
-            <a:ext cx="2047875" cy="971550"/>
-          </a:xfrm>
-          <a:prstGeom xmlns:a="http://schemas.openxmlformats.org/drawingml/2006/main" prst="rect">
-            <a:avLst/>
-          </a:prstGeom>
-          <a:noFill xmlns:a="http://schemas.openxmlformats.org/drawingml/2006/main"/>
-          <a:ln xmlns:a="http://schemas.openxmlformats.org/drawingml/2006/main" w="0">
-            <a:noFill/>
-            <a:prstDash val="solid"/>
-          </a:ln>
-        </p:spPr>
-        <p:txBody>
-          <a:bodyPr xmlns:a="http://schemas.openxmlformats.org/drawingml/2006/main" lIns="0" tIns="0" rIns="0" bIns="0" anchor="ctr">
-            <a:normAutofit fontScale="100000"/>
-          </a:bodyPr>
-          <a:lstStyle xmlns:a="http://schemas.openxmlformats.org/drawingml/2006/main"/>
-          <a:p xmlns:a="http://schemas.openxmlformats.org/drawingml/2006/main">
-            <a:pPr algn="ctr">
-              <a:lnSpc>
-                <a:spcPct val="105000"/>
-              </a:lnSpc>
-              <a:buNone/>
-              <a:defRPr sz="1650" b="0" i="0">
-                <a:solidFill>
-                  <a:srgbClr val="17242D"/>
-                </a:solidFill>
-                <a:latin typeface="Aptos"/>
-                <a:ea typeface="Aptos"/>
-                <a:cs typeface="Aptos"/>
-              </a:defRPr>
-            </a:pPr>
-            <a:r>
-              <a:rPr sz="1650" b="0" i="0">
-                <a:solidFill>
-                  <a:srgbClr val="17242D"/>
-                </a:solidFill>
-                <a:latin typeface="Aptos"/>
-                <a:ea typeface="Aptos"/>
-                <a:cs typeface="Aptos"/>
-              </a:rPr>
-              <a:t>What conduct is controlled?</a:t>
-            </a:r>
-          </a:p>
-        </p:txBody>
-      </p:sp>
-      <p:sp>
-        <p:nvSpPr>
-          <p:cNvPr id="14" name="">
-            <a:extLst xmlns:a="http://schemas.openxmlformats.org/drawingml/2006/main">
-              <a:ext uri="{FF2B5EF4-FFF2-40B4-BE49-F238E27FC236}">
-                <a16:creationId xmlns:a16="http://schemas.microsoft.com/office/drawing/2014/main" id="{587D4A7A-59FF-40E9-9B63-6F88733F0172}"/>
-              </a:ext>
-            </a:extLst>
-          </p:cNvPr>
-          <p:cNvSpPr>
-            <a:spLocks xmlns:a="http://schemas.openxmlformats.org/drawingml/2006/main" noGrp="1"/>
-          </p:cNvSpPr>
-          <p:nvPr/>
-        </p:nvSpPr>
-        <p:spPr>
-          <a:xfrm xmlns:a="http://schemas.openxmlformats.org/drawingml/2006/main">
-            <a:off x="5886450" y="2857500"/>
-            <a:ext cx="419100" cy="457200"/>
-          </a:xfrm>
-          <a:prstGeom xmlns:a="http://schemas.openxmlformats.org/drawingml/2006/main" prst="rect">
-            <a:avLst/>
-          </a:prstGeom>
-          <a:noFill xmlns:a="http://schemas.openxmlformats.org/drawingml/2006/main"/>
-          <a:ln xmlns:a="http://schemas.openxmlformats.org/drawingml/2006/main" w="0">
-            <a:noFill/>
-            <a:prstDash val="solid"/>
-          </a:ln>
-        </p:spPr>
-        <p:txBody>
-          <a:bodyPr xmlns:a="http://schemas.openxmlformats.org/drawingml/2006/main" lIns="0" tIns="0" rIns="0" bIns="0" anchor="ctr">
-            <a:normAutofit fontScale="100000"/>
-          </a:bodyPr>
-          <a:lstStyle xmlns:a="http://schemas.openxmlformats.org/drawingml/2006/main"/>
-          <a:p xmlns:a="http://schemas.openxmlformats.org/drawingml/2006/main">
-            <a:pPr algn="ctr">
-              <a:lnSpc>
-                <a:spcPct val="105000"/>
-              </a:lnSpc>
-              <a:buNone/>
-              <a:defRPr sz="2550" b="1" i="0">
-                <a:solidFill>
-                  <a:srgbClr val="B88424"/>
-                </a:solidFill>
-                <a:latin typeface="Aptos"/>
-                <a:ea typeface="Aptos"/>
-                <a:cs typeface="Aptos"/>
-              </a:defRPr>
-            </a:pPr>
-            <a:r>
-              <a:rPr sz="2550" b="1" i="0">
-                <a:solidFill>
-                  <a:srgbClr val="B88424"/>
-                </a:solidFill>
-                <a:latin typeface="Aptos"/>
-                <a:ea typeface="Aptos"/>
-                <a:cs typeface="Aptos"/>
-              </a:rPr>
-              <a:t>→</a:t>
-            </a:r>
-          </a:p>
-        </p:txBody>
-      </p:sp>
-      <p:sp>
-        <p:nvSpPr>
-          <p:cNvPr id="15" name="">
-            <a:extLst xmlns:a="http://schemas.openxmlformats.org/drawingml/2006/main">
-              <a:ext uri="{FF2B5EF4-FFF2-40B4-BE49-F238E27FC236}">
-                <a16:creationId xmlns:a16="http://schemas.microsoft.com/office/drawing/2014/main" id="{A53CF869-9A88-4D86-91B8-E8A8F387F6A3}"/>
-              </a:ext>
-            </a:extLst>
-          </p:cNvPr>
-          <p:cNvSpPr>
-            <a:spLocks xmlns:a="http://schemas.openxmlformats.org/drawingml/2006/main" noGrp="1"/>
-          </p:cNvSpPr>
-          <p:nvPr/>
-        </p:nvSpPr>
-        <p:spPr>
-          <a:xfrm xmlns:a="http://schemas.openxmlformats.org/drawingml/2006/main">
-            <a:off x="6305550" y="2171700"/>
-            <a:ext cx="2352675" cy="1809750"/>
+              <a:defRPr sz="1275" b="1" i="0">
+                <a:solidFill>
+                  <a:srgbClr val="9A462F"/>
+                </a:solidFill>
+                <a:latin typeface="Aptos"/>
+                <a:ea typeface="Aptos"/>
+                <a:cs typeface="Aptos"/>
+              </a:defRPr>
+            </a:pPr>
+            <a:r>
+              <a:rPr sz="1275" b="1" i="0">
+                <a:solidFill>
+                  <a:srgbClr val="9A462F"/>
+                </a:solidFill>
+                <a:latin typeface="Aptos"/>
+                <a:ea typeface="Aptos"/>
+                <a:cs typeface="Aptos"/>
+              </a:rPr>
+              <a:t>DEFINED EXCEPTION</a:t>
+            </a:r>
+          </a:p>
+        </p:txBody>
+      </p:sp>
+      <p:sp>
+        <p:nvSpPr>
+          <p:cNvPr id="17" name="">
+            <a:extLst xmlns:a="http://schemas.openxmlformats.org/drawingml/2006/main">
+              <a:ext uri="{FF2B5EF4-FFF2-40B4-BE49-F238E27FC236}">
+                <a16:creationId xmlns:a16="http://schemas.microsoft.com/office/drawing/2014/main" id="{7D9548D4-A726-49F4-8581-931F260AC67B}"/>
+              </a:ext>
+            </a:extLst>
+          </p:cNvPr>
+          <p:cNvSpPr>
+            <a:spLocks xmlns:a="http://schemas.openxmlformats.org/drawingml/2006/main" noGrp="1"/>
+          </p:cNvSpPr>
+          <p:nvPr/>
+        </p:nvSpPr>
+        <p:spPr>
+          <a:xfrm xmlns:a="http://schemas.openxmlformats.org/drawingml/2006/main">
+            <a:off x="8996363" y="2228850"/>
+            <a:ext cx="2528888" cy="2609850"/>
           </a:xfrm>
           <a:prstGeom xmlns:a="http://schemas.openxmlformats.org/drawingml/2006/main" prst="rect">
             <a:avLst/>
@@ -17028,34 +18182,34 @@
       </p:sp>
       <p:sp>
         <p:nvSpPr>
-          <p:cNvPr id="16" name="">
-            <a:extLst xmlns:a="http://schemas.openxmlformats.org/drawingml/2006/main">
-              <a:ext uri="{FF2B5EF4-FFF2-40B4-BE49-F238E27FC236}">
-                <a16:creationId xmlns:a16="http://schemas.microsoft.com/office/drawing/2014/main" id="{537AF876-37F6-4B10-B1B3-5B611DB30606}"/>
-              </a:ext>
-            </a:extLst>
-          </p:cNvPr>
-          <p:cNvSpPr>
-            <a:spLocks xmlns:a="http://schemas.openxmlformats.org/drawingml/2006/main" noGrp="1"/>
-          </p:cNvSpPr>
-          <p:nvPr/>
-        </p:nvSpPr>
-        <p:spPr>
-          <a:xfrm xmlns:a="http://schemas.openxmlformats.org/drawingml/2006/main">
-            <a:off x="6419850" y="2400300"/>
-            <a:ext cx="2124075" cy="304800"/>
-          </a:xfrm>
-          <a:prstGeom xmlns:a="http://schemas.openxmlformats.org/drawingml/2006/main" prst="rect">
-            <a:avLst/>
-          </a:prstGeom>
-          <a:noFill xmlns:a="http://schemas.openxmlformats.org/drawingml/2006/main"/>
-          <a:ln xmlns:a="http://schemas.openxmlformats.org/drawingml/2006/main" w="0">
-            <a:noFill/>
-            <a:prstDash val="solid"/>
-          </a:ln>
-        </p:spPr>
-        <p:txBody>
-          <a:bodyPr xmlns:a="http://schemas.openxmlformats.org/drawingml/2006/main" lIns="0" tIns="0" rIns="0" bIns="0" anchor="t">
+          <p:cNvPr id="18" name="">
+            <a:extLst xmlns:a="http://schemas.openxmlformats.org/drawingml/2006/main">
+              <a:ext uri="{FF2B5EF4-FFF2-40B4-BE49-F238E27FC236}">
+                <a16:creationId xmlns:a16="http://schemas.microsoft.com/office/drawing/2014/main" id="{B4385006-A764-40E2-BA82-75931D74F27E}"/>
+              </a:ext>
+            </a:extLst>
+          </p:cNvPr>
+          <p:cNvSpPr>
+            <a:spLocks xmlns:a="http://schemas.openxmlformats.org/drawingml/2006/main" noGrp="1"/>
+          </p:cNvSpPr>
+          <p:nvPr/>
+        </p:nvSpPr>
+        <p:spPr>
+          <a:xfrm xmlns:a="http://schemas.openxmlformats.org/drawingml/2006/main">
+            <a:off x="9186863" y="2438400"/>
+            <a:ext cx="2147888" cy="2209800"/>
+          </a:xfrm>
+          <a:prstGeom xmlns:a="http://schemas.openxmlformats.org/drawingml/2006/main" prst="rect">
+            <a:avLst/>
+          </a:prstGeom>
+          <a:noFill xmlns:a="http://schemas.openxmlformats.org/drawingml/2006/main"/>
+          <a:ln xmlns:a="http://schemas.openxmlformats.org/drawingml/2006/main" w="0">
+            <a:noFill/>
+            <a:prstDash val="solid"/>
+          </a:ln>
+        </p:spPr>
+        <p:txBody>
+          <a:bodyPr xmlns:a="http://schemas.openxmlformats.org/drawingml/2006/main" lIns="0" tIns="0" rIns="0" bIns="0" anchor="ctr">
             <a:normAutofit fontScale="100000"/>
           </a:bodyPr>
           <a:lstStyle xmlns:a="http://schemas.openxmlformats.org/drawingml/2006/main"/>
@@ -17065,47 +18219,47 @@
                 <a:spcPct val="105000"/>
               </a:lnSpc>
               <a:buNone/>
-              <a:defRPr sz="1200" b="1" i="0">
-                <a:solidFill>
-                  <a:srgbClr val="9A462F"/>
-                </a:solidFill>
-                <a:latin typeface="Aptos"/>
-                <a:ea typeface="Aptos"/>
-                <a:cs typeface="Aptos"/>
-              </a:defRPr>
-            </a:pPr>
-            <a:r>
-              <a:rPr sz="1200" b="1" i="0">
-                <a:solidFill>
-                  <a:srgbClr val="9A462F"/>
-                </a:solidFill>
-                <a:latin typeface="Aptos"/>
-                <a:ea typeface="Aptos"/>
-                <a:cs typeface="Aptos"/>
-              </a:rPr>
-              <a:t>ACCESS</a:t>
-            </a:r>
-          </a:p>
-        </p:txBody>
-      </p:sp>
-      <p:sp>
-        <p:nvSpPr>
-          <p:cNvPr id="17" name="">
-            <a:extLst xmlns:a="http://schemas.openxmlformats.org/drawingml/2006/main">
-              <a:ext uri="{FF2B5EF4-FFF2-40B4-BE49-F238E27FC236}">
-                <a16:creationId xmlns:a16="http://schemas.microsoft.com/office/drawing/2014/main" id="{0DD6C9B3-74A9-474A-8F7C-F2B8C1677083}"/>
-              </a:ext>
-            </a:extLst>
-          </p:cNvPr>
-          <p:cNvSpPr>
-            <a:spLocks xmlns:a="http://schemas.openxmlformats.org/drawingml/2006/main" noGrp="1"/>
-          </p:cNvSpPr>
-          <p:nvPr/>
-        </p:nvSpPr>
-        <p:spPr>
-          <a:xfrm xmlns:a="http://schemas.openxmlformats.org/drawingml/2006/main">
-            <a:off x="6457950" y="2857500"/>
-            <a:ext cx="2047875" cy="971550"/>
+              <a:defRPr sz="1575" b="0" i="0">
+                <a:solidFill>
+                  <a:srgbClr val="17242D"/>
+                </a:solidFill>
+                <a:latin typeface="Aptos"/>
+                <a:ea typeface="Aptos"/>
+                <a:cs typeface="Aptos"/>
+              </a:defRPr>
+            </a:pPr>
+            <a:r>
+              <a:rPr sz="1575" b="0" i="0">
+                <a:solidFill>
+                  <a:srgbClr val="17242D"/>
+                </a:solidFill>
+                <a:latin typeface="Aptos"/>
+                <a:ea typeface="Aptos"/>
+                <a:cs typeface="Aptos"/>
+              </a:rPr>
+              <a:t>Covered use without permission or payment</a:t>
+            </a:r>
+          </a:p>
+        </p:txBody>
+      </p:sp>
+      <p:sp>
+        <p:nvSpPr>
+          <p:cNvPr id="19" name="">
+            <a:extLst xmlns:a="http://schemas.openxmlformats.org/drawingml/2006/main">
+              <a:ext uri="{FF2B5EF4-FFF2-40B4-BE49-F238E27FC236}">
+                <a16:creationId xmlns:a16="http://schemas.microsoft.com/office/drawing/2014/main" id="{C4CBBB8A-0B6E-4EF3-BF1D-3C57D4C38330}"/>
+              </a:ext>
+            </a:extLst>
+          </p:cNvPr>
+          <p:cNvSpPr>
+            <a:spLocks xmlns:a="http://schemas.openxmlformats.org/drawingml/2006/main" noGrp="1"/>
+          </p:cNvSpPr>
+          <p:nvPr/>
+        </p:nvSpPr>
+        <p:spPr>
+          <a:xfrm xmlns:a="http://schemas.openxmlformats.org/drawingml/2006/main">
+            <a:off x="1200150" y="5334000"/>
+            <a:ext cx="9791700" cy="533400"/>
           </a:xfrm>
           <a:prstGeom xmlns:a="http://schemas.openxmlformats.org/drawingml/2006/main" prst="rect">
             <a:avLst/>
@@ -17119,287 +18273,6 @@
         <p:txBody>
           <a:bodyPr xmlns:a="http://schemas.openxmlformats.org/drawingml/2006/main" lIns="0" tIns="0" rIns="0" bIns="0" anchor="ctr">
             <a:normAutofit fontScale="100000"/>
-          </a:bodyPr>
-          <a:lstStyle xmlns:a="http://schemas.openxmlformats.org/drawingml/2006/main"/>
-          <a:p xmlns:a="http://schemas.openxmlformats.org/drawingml/2006/main">
-            <a:pPr algn="ctr">
-              <a:lnSpc>
-                <a:spcPct val="105000"/>
-              </a:lnSpc>
-              <a:buNone/>
-              <a:defRPr sz="1650" b="0" i="0">
-                <a:solidFill>
-                  <a:srgbClr val="17242D"/>
-                </a:solidFill>
-                <a:latin typeface="Aptos"/>
-                <a:ea typeface="Aptos"/>
-                <a:cs typeface="Aptos"/>
-              </a:defRPr>
-            </a:pPr>
-            <a:r>
-              <a:rPr sz="1650" b="0" i="0">
-                <a:solidFill>
-                  <a:srgbClr val="17242D"/>
-                </a:solidFill>
-                <a:latin typeface="Aptos"/>
-                <a:ea typeface="Aptos"/>
-                <a:cs typeface="Aptos"/>
-              </a:rPr>
-              <a:t>Which reuse should remain cheap?</a:t>
-            </a:r>
-          </a:p>
-        </p:txBody>
-      </p:sp>
-      <p:sp>
-        <p:nvSpPr>
-          <p:cNvPr id="18" name="">
-            <a:extLst xmlns:a="http://schemas.openxmlformats.org/drawingml/2006/main">
-              <a:ext uri="{FF2B5EF4-FFF2-40B4-BE49-F238E27FC236}">
-                <a16:creationId xmlns:a16="http://schemas.microsoft.com/office/drawing/2014/main" id="{F4D72C7A-392B-49AC-B1ED-F30A2647069E}"/>
-              </a:ext>
-            </a:extLst>
-          </p:cNvPr>
-          <p:cNvSpPr>
-            <a:spLocks xmlns:a="http://schemas.openxmlformats.org/drawingml/2006/main" noGrp="1"/>
-          </p:cNvSpPr>
-          <p:nvPr/>
-        </p:nvSpPr>
-        <p:spPr>
-          <a:xfrm xmlns:a="http://schemas.openxmlformats.org/drawingml/2006/main">
-            <a:off x="8658225" y="2857500"/>
-            <a:ext cx="419100" cy="457200"/>
-          </a:xfrm>
-          <a:prstGeom xmlns:a="http://schemas.openxmlformats.org/drawingml/2006/main" prst="rect">
-            <a:avLst/>
-          </a:prstGeom>
-          <a:noFill xmlns:a="http://schemas.openxmlformats.org/drawingml/2006/main"/>
-          <a:ln xmlns:a="http://schemas.openxmlformats.org/drawingml/2006/main" w="0">
-            <a:noFill/>
-            <a:prstDash val="solid"/>
-          </a:ln>
-        </p:spPr>
-        <p:txBody>
-          <a:bodyPr xmlns:a="http://schemas.openxmlformats.org/drawingml/2006/main" lIns="0" tIns="0" rIns="0" bIns="0" anchor="ctr">
-            <a:normAutofit fontScale="100000"/>
-          </a:bodyPr>
-          <a:lstStyle xmlns:a="http://schemas.openxmlformats.org/drawingml/2006/main"/>
-          <a:p xmlns:a="http://schemas.openxmlformats.org/drawingml/2006/main">
-            <a:pPr algn="ctr">
-              <a:lnSpc>
-                <a:spcPct val="105000"/>
-              </a:lnSpc>
-              <a:buNone/>
-              <a:defRPr sz="2550" b="1" i="0">
-                <a:solidFill>
-                  <a:srgbClr val="B88424"/>
-                </a:solidFill>
-                <a:latin typeface="Aptos"/>
-                <a:ea typeface="Aptos"/>
-                <a:cs typeface="Aptos"/>
-              </a:defRPr>
-            </a:pPr>
-            <a:r>
-              <a:rPr sz="2550" b="1" i="0">
-                <a:solidFill>
-                  <a:srgbClr val="B88424"/>
-                </a:solidFill>
-                <a:latin typeface="Aptos"/>
-                <a:ea typeface="Aptos"/>
-                <a:cs typeface="Aptos"/>
-              </a:rPr>
-              <a:t>→</a:t>
-            </a:r>
-          </a:p>
-        </p:txBody>
-      </p:sp>
-      <p:sp>
-        <p:nvSpPr>
-          <p:cNvPr id="19" name="">
-            <a:extLst xmlns:a="http://schemas.openxmlformats.org/drawingml/2006/main">
-              <a:ext uri="{FF2B5EF4-FFF2-40B4-BE49-F238E27FC236}">
-                <a16:creationId xmlns:a16="http://schemas.microsoft.com/office/drawing/2014/main" id="{4BF18709-860E-4F83-9227-ED3DECEFF58C}"/>
-              </a:ext>
-            </a:extLst>
-          </p:cNvPr>
-          <p:cNvSpPr>
-            <a:spLocks xmlns:a="http://schemas.openxmlformats.org/drawingml/2006/main" noGrp="1"/>
-          </p:cNvSpPr>
-          <p:nvPr/>
-        </p:nvSpPr>
-        <p:spPr>
-          <a:xfrm xmlns:a="http://schemas.openxmlformats.org/drawingml/2006/main">
-            <a:off x="9077325" y="2171700"/>
-            <a:ext cx="2352675" cy="1809750"/>
-          </a:xfrm>
-          <a:prstGeom xmlns:a="http://schemas.openxmlformats.org/drawingml/2006/main" prst="rect">
-            <a:avLst/>
-          </a:prstGeom>
-          <a:solidFill xmlns:a="http://schemas.openxmlformats.org/drawingml/2006/main">
-            <a:srgbClr val="E9F1F5"/>
-          </a:solidFill>
-          <a:ln xmlns:a="http://schemas.openxmlformats.org/drawingml/2006/main" w="9525">
-            <a:solidFill>
-              <a:srgbClr val="CCD5D2"/>
-            </a:solidFill>
-            <a:prstDash val="solid"/>
-          </a:ln>
-        </p:spPr>
-      </p:sp>
-      <p:sp>
-        <p:nvSpPr>
-          <p:cNvPr id="20" name="">
-            <a:extLst xmlns:a="http://schemas.openxmlformats.org/drawingml/2006/main">
-              <a:ext uri="{FF2B5EF4-FFF2-40B4-BE49-F238E27FC236}">
-                <a16:creationId xmlns:a16="http://schemas.microsoft.com/office/drawing/2014/main" id="{979E1C67-B6D6-4429-ACAD-AB067DC307C4}"/>
-              </a:ext>
-            </a:extLst>
-          </p:cNvPr>
-          <p:cNvSpPr>
-            <a:spLocks xmlns:a="http://schemas.openxmlformats.org/drawingml/2006/main" noGrp="1"/>
-          </p:cNvSpPr>
-          <p:nvPr/>
-        </p:nvSpPr>
-        <p:spPr>
-          <a:xfrm xmlns:a="http://schemas.openxmlformats.org/drawingml/2006/main">
-            <a:off x="9191625" y="2400300"/>
-            <a:ext cx="2124075" cy="304800"/>
-          </a:xfrm>
-          <a:prstGeom xmlns:a="http://schemas.openxmlformats.org/drawingml/2006/main" prst="rect">
-            <a:avLst/>
-          </a:prstGeom>
-          <a:noFill xmlns:a="http://schemas.openxmlformats.org/drawingml/2006/main"/>
-          <a:ln xmlns:a="http://schemas.openxmlformats.org/drawingml/2006/main" w="0">
-            <a:noFill/>
-            <a:prstDash val="solid"/>
-          </a:ln>
-        </p:spPr>
-        <p:txBody>
-          <a:bodyPr xmlns:a="http://schemas.openxmlformats.org/drawingml/2006/main" lIns="0" tIns="0" rIns="0" bIns="0" anchor="t">
-            <a:normAutofit fontScale="100000"/>
-          </a:bodyPr>
-          <a:lstStyle xmlns:a="http://schemas.openxmlformats.org/drawingml/2006/main"/>
-          <a:p xmlns:a="http://schemas.openxmlformats.org/drawingml/2006/main">
-            <a:pPr algn="ctr">
-              <a:lnSpc>
-                <a:spcPct val="105000"/>
-              </a:lnSpc>
-              <a:buNone/>
-              <a:defRPr sz="1200" b="1" i="0">
-                <a:solidFill>
-                  <a:srgbClr val="315F75"/>
-                </a:solidFill>
-                <a:latin typeface="Aptos"/>
-                <a:ea typeface="Aptos"/>
-                <a:cs typeface="Aptos"/>
-              </a:defRPr>
-            </a:pPr>
-            <a:r>
-              <a:rPr sz="1200" b="1" i="0">
-                <a:solidFill>
-                  <a:srgbClr val="315F75"/>
-                </a:solidFill>
-                <a:latin typeface="Aptos"/>
-                <a:ea typeface="Aptos"/>
-                <a:cs typeface="Aptos"/>
-              </a:rPr>
-              <a:t>GOVERNANCE</a:t>
-            </a:r>
-          </a:p>
-        </p:txBody>
-      </p:sp>
-      <p:sp>
-        <p:nvSpPr>
-          <p:cNvPr id="21" name="">
-            <a:extLst xmlns:a="http://schemas.openxmlformats.org/drawingml/2006/main">
-              <a:ext uri="{FF2B5EF4-FFF2-40B4-BE49-F238E27FC236}">
-                <a16:creationId xmlns:a16="http://schemas.microsoft.com/office/drawing/2014/main" id="{F5F8A813-E599-4DDB-BA97-05DB19E2367C}"/>
-              </a:ext>
-            </a:extLst>
-          </p:cNvPr>
-          <p:cNvSpPr>
-            <a:spLocks xmlns:a="http://schemas.openxmlformats.org/drawingml/2006/main" noGrp="1"/>
-          </p:cNvSpPr>
-          <p:nvPr/>
-        </p:nvSpPr>
-        <p:spPr>
-          <a:xfrm xmlns:a="http://schemas.openxmlformats.org/drawingml/2006/main">
-            <a:off x="9229725" y="2857500"/>
-            <a:ext cx="2047875" cy="971550"/>
-          </a:xfrm>
-          <a:prstGeom xmlns:a="http://schemas.openxmlformats.org/drawingml/2006/main" prst="rect">
-            <a:avLst/>
-          </a:prstGeom>
-          <a:noFill xmlns:a="http://schemas.openxmlformats.org/drawingml/2006/main"/>
-          <a:ln xmlns:a="http://schemas.openxmlformats.org/drawingml/2006/main" w="0">
-            <a:noFill/>
-            <a:prstDash val="solid"/>
-          </a:ln>
-        </p:spPr>
-        <p:txBody>
-          <a:bodyPr xmlns:a="http://schemas.openxmlformats.org/drawingml/2006/main" lIns="0" tIns="0" rIns="0" bIns="0" anchor="ctr">
-            <a:normAutofit fontScale="100000"/>
-          </a:bodyPr>
-          <a:lstStyle xmlns:a="http://schemas.openxmlformats.org/drawingml/2006/main"/>
-          <a:p xmlns:a="http://schemas.openxmlformats.org/drawingml/2006/main">
-            <a:pPr algn="ctr">
-              <a:lnSpc>
-                <a:spcPct val="105000"/>
-              </a:lnSpc>
-              <a:buNone/>
-              <a:defRPr sz="1650" b="0" i="0">
-                <a:solidFill>
-                  <a:srgbClr val="17242D"/>
-                </a:solidFill>
-                <a:latin typeface="Aptos"/>
-                <a:ea typeface="Aptos"/>
-                <a:cs typeface="Aptos"/>
-              </a:defRPr>
-            </a:pPr>
-            <a:r>
-              <a:rPr sz="1650" b="0" i="0">
-                <a:solidFill>
-                  <a:srgbClr val="17242D"/>
-                </a:solidFill>
-                <a:latin typeface="Aptos"/>
-                <a:ea typeface="Aptos"/>
-                <a:cs typeface="Aptos"/>
-              </a:rPr>
-              <a:t>Who decides errors and remedies?</a:t>
-            </a:r>
-          </a:p>
-        </p:txBody>
-      </p:sp>
-      <p:sp>
-        <p:nvSpPr>
-          <p:cNvPr id="22" name="">
-            <a:extLst xmlns:a="http://schemas.openxmlformats.org/drawingml/2006/main">
-              <a:ext uri="{FF2B5EF4-FFF2-40B4-BE49-F238E27FC236}">
-                <a16:creationId xmlns:a16="http://schemas.microsoft.com/office/drawing/2014/main" id="{CB5EE0FB-39F2-4ECD-82C9-E4FB1F1E57DC}"/>
-              </a:ext>
-            </a:extLst>
-          </p:cNvPr>
-          <p:cNvSpPr>
-            <a:spLocks xmlns:a="http://schemas.openxmlformats.org/drawingml/2006/main" noGrp="1"/>
-          </p:cNvSpPr>
-          <p:nvPr/>
-        </p:nvSpPr>
-        <p:spPr>
-          <a:xfrm xmlns:a="http://schemas.openxmlformats.org/drawingml/2006/main">
-            <a:off x="1200150" y="4972050"/>
-            <a:ext cx="9791700" cy="533400"/>
-          </a:xfrm>
-          <a:prstGeom xmlns:a="http://schemas.openxmlformats.org/drawingml/2006/main" prst="rect">
-            <a:avLst/>
-          </a:prstGeom>
-          <a:noFill xmlns:a="http://schemas.openxmlformats.org/drawingml/2006/main"/>
-          <a:ln xmlns:a="http://schemas.openxmlformats.org/drawingml/2006/main" w="0">
-            <a:noFill/>
-            <a:prstDash val="solid"/>
-          </a:ln>
-        </p:spPr>
-        <p:txBody>
-          <a:bodyPr xmlns:a="http://schemas.openxmlformats.org/drawingml/2006/main" lIns="0" tIns="0" rIns="0" bIns="0" anchor="ctr">
-            <a:normAutofit fontScale="85879"/>
           </a:bodyPr>
           <a:lstStyle xmlns:a="http://schemas.openxmlformats.org/drawingml/2006/main"/>
           <a:p xmlns:a="http://schemas.openxmlformats.org/drawingml/2006/main">
@@ -17426,7 +18299,7 @@
                 <a:ea typeface="Georgia"/>
                 <a:cs typeface="Georgia"/>
               </a:rPr>
-              <a:t>Evaluate the full bundle, including licensing, notice, enforcement, and industry structure.</a:t>
+              <a:t>Compare access, future creation, and the cost of administration.</a:t>
             </a:r>
           </a:p>
         </p:txBody>
@@ -17434,7 +18307,7 @@
     </p:spTree>
     <p:extLst>
       <p:ext uri="{BB962C8B-B14F-4D97-AF65-F5344CB8AC3E}">
-        <p14:creationId xmlns:p14="http://schemas.microsoft.com/office/powerpoint/2010/main" val="1451425461"/>
+        <p14:creationId xmlns:p14="http://schemas.microsoft.com/office/powerpoint/2010/main" val="105548483"/>
       </p:ext>
     </p:extLst>
   </p:cSld>
@@ -17462,10 +18335,10 @@
       </p:grpSpPr>
       <p:sp>
         <p:nvSpPr>
-          <p:cNvPr id="16" name="">
-            <a:extLst xmlns:a="http://schemas.openxmlformats.org/drawingml/2006/main">
-              <a:ext uri="{FF2B5EF4-FFF2-40B4-BE49-F238E27FC236}">
-                <a16:creationId xmlns:a16="http://schemas.microsoft.com/office/drawing/2014/main" id="{3E2CDBC5-2262-4FE6-A8A8-4BB7EF370BF9}"/>
+          <p:cNvPr id="9" name="">
+            <a:extLst xmlns:a="http://schemas.openxmlformats.org/drawingml/2006/main">
+              <a:ext uri="{FF2B5EF4-FFF2-40B4-BE49-F238E27FC236}">
+                <a16:creationId xmlns:a16="http://schemas.microsoft.com/office/drawing/2014/main" id="{C83BF48B-77F7-4E11-B586-83C36208A5B2}"/>
               </a:ext>
             </a:extLst>
           </p:cNvPr>
@@ -17496,7 +18369,7 @@
           <p:cNvPr id="2" name="">
             <a:extLst xmlns:a="http://schemas.openxmlformats.org/drawingml/2006/main">
               <a:ext uri="{FF2B5EF4-FFF2-40B4-BE49-F238E27FC236}">
-                <a16:creationId xmlns:a16="http://schemas.microsoft.com/office/drawing/2014/main" id="{CB4E826C-40C5-4C51-9208-D029FD414544}"/>
+                <a16:creationId xmlns:a16="http://schemas.microsoft.com/office/drawing/2014/main" id="{C855218C-50CA-4390-AEC4-65CAC1DB4955}"/>
               </a:ext>
             </a:extLst>
           </p:cNvPr>
@@ -17558,7 +18431,7 @@
           <p:cNvPr id="3" name="">
             <a:extLst xmlns:a="http://schemas.openxmlformats.org/drawingml/2006/main">
               <a:ext uri="{FF2B5EF4-FFF2-40B4-BE49-F238E27FC236}">
-                <a16:creationId xmlns:a16="http://schemas.microsoft.com/office/drawing/2014/main" id="{2293EDC9-D923-4CDF-8791-C49EFF292316}"/>
+                <a16:creationId xmlns:a16="http://schemas.microsoft.com/office/drawing/2014/main" id="{871C344F-E5FA-41A8-970E-E6D1C708C7EC}"/>
               </a:ext>
             </a:extLst>
           </p:cNvPr>
@@ -17610,7 +18483,7 @@
                 <a:ea typeface="Georgia"/>
                 <a:cs typeface="Georgia"/>
               </a:rPr>
-              <a:t>Law and economics is unusually useful in this field</a:t>
+              <a:t>Style illustrates the limits of ownership categories</a:t>
             </a:r>
           </a:p>
         </p:txBody>
@@ -17620,7 +18493,7 @@
           <p:cNvPr id="4" name="">
             <a:extLst xmlns:a="http://schemas.openxmlformats.org/drawingml/2006/main">
               <a:ext uri="{FF2B5EF4-FFF2-40B4-BE49-F238E27FC236}">
-                <a16:creationId xmlns:a16="http://schemas.microsoft.com/office/drawing/2014/main" id="{CD833FF0-A951-47A0-AEFD-2F98596A3BB2}"/>
+                <a16:creationId xmlns:a16="http://schemas.microsoft.com/office/drawing/2014/main" id="{A30E0CCA-1269-4C38-969F-1383A72B619D}"/>
               </a:ext>
             </a:extLst>
           </p:cNvPr>
@@ -17651,7 +18524,7 @@
           <p:cNvPr id="5" name="">
             <a:extLst xmlns:a="http://schemas.openxmlformats.org/drawingml/2006/main">
               <a:ext uri="{FF2B5EF4-FFF2-40B4-BE49-F238E27FC236}">
-                <a16:creationId xmlns:a16="http://schemas.microsoft.com/office/drawing/2014/main" id="{F70F7FD9-3D68-4B2D-AC69-7EFFBD2D31DC}"/>
+                <a16:creationId xmlns:a16="http://schemas.microsoft.com/office/drawing/2014/main" id="{A60CC9FC-EDE5-4B19-AF86-3207E556319D}"/>
               </a:ext>
             </a:extLst>
           </p:cNvPr>
@@ -17713,7 +18586,7 @@
           <p:cNvPr id="6" name="">
             <a:extLst xmlns:a="http://schemas.openxmlformats.org/drawingml/2006/main">
               <a:ext uri="{FF2B5EF4-FFF2-40B4-BE49-F238E27FC236}">
-                <a16:creationId xmlns:a16="http://schemas.microsoft.com/office/drawing/2014/main" id="{89ACDEC6-AC3A-472A-A6DC-19ACE2DDF52E}"/>
+                <a16:creationId xmlns:a16="http://schemas.microsoft.com/office/drawing/2014/main" id="{C733B4F5-1AFC-4253-A0F1-499B3C078760}"/>
               </a:ext>
             </a:extLst>
           </p:cNvPr>
@@ -17775,515 +18648,19 @@
           <p:cNvPr id="7" name="">
             <a:extLst xmlns:a="http://schemas.openxmlformats.org/drawingml/2006/main">
               <a:ext uri="{FF2B5EF4-FFF2-40B4-BE49-F238E27FC236}">
-                <a16:creationId xmlns:a16="http://schemas.microsoft.com/office/drawing/2014/main" id="{19C60BFE-688C-4B94-9ABC-F02E4C9B3980}"/>
-              </a:ext>
-            </a:extLst>
-          </p:cNvPr>
-          <p:cNvSpPr>
-            <a:spLocks xmlns:a="http://schemas.openxmlformats.org/drawingml/2006/main" noGrp="1"/>
-          </p:cNvSpPr>
-          <p:nvPr/>
-        </p:nvSpPr>
-        <p:spPr>
-          <a:xfrm xmlns:a="http://schemas.openxmlformats.org/drawingml/2006/main">
-            <a:off x="1257300" y="1990725"/>
-            <a:ext cx="228600" cy="457200"/>
-          </a:xfrm>
-          <a:prstGeom xmlns:a="http://schemas.openxmlformats.org/drawingml/2006/main" prst="rect">
-            <a:avLst/>
-          </a:prstGeom>
-          <a:noFill xmlns:a="http://schemas.openxmlformats.org/drawingml/2006/main"/>
-          <a:ln xmlns:a="http://schemas.openxmlformats.org/drawingml/2006/main" w="0">
-            <a:noFill/>
-            <a:prstDash val="solid"/>
-          </a:ln>
-        </p:spPr>
-        <p:txBody>
-          <a:bodyPr xmlns:a="http://schemas.openxmlformats.org/drawingml/2006/main" lIns="0" tIns="0" rIns="0" bIns="0" anchor="t">
-            <a:normAutofit fontScale="100000"/>
-          </a:bodyPr>
-          <a:lstStyle xmlns:a="http://schemas.openxmlformats.org/drawingml/2006/main"/>
-          <a:p xmlns:a="http://schemas.openxmlformats.org/drawingml/2006/main">
-            <a:pPr algn="l">
-              <a:lnSpc>
-                <a:spcPct val="105000"/>
-              </a:lnSpc>
-              <a:buNone/>
-              <a:defRPr sz="1875" b="1" i="0">
-                <a:solidFill>
-                  <a:srgbClr val="9A462F"/>
-                </a:solidFill>
-                <a:latin typeface="Aptos"/>
-                <a:ea typeface="Aptos"/>
-                <a:cs typeface="Aptos"/>
-              </a:defRPr>
-            </a:pPr>
-            <a:r>
-              <a:rPr sz="1875" b="1" i="0">
-                <a:solidFill>
-                  <a:srgbClr val="9A462F"/>
-                </a:solidFill>
-                <a:latin typeface="Aptos"/>
-                <a:ea typeface="Aptos"/>
-                <a:cs typeface="Aptos"/>
-              </a:rPr>
-              <a:t>•</a:t>
-            </a:r>
-          </a:p>
-        </p:txBody>
-      </p:sp>
-      <p:sp>
-        <p:nvSpPr>
-          <p:cNvPr id="8" name="">
-            <a:extLst xmlns:a="http://schemas.openxmlformats.org/drawingml/2006/main">
-              <a:ext uri="{FF2B5EF4-FFF2-40B4-BE49-F238E27FC236}">
-                <a16:creationId xmlns:a16="http://schemas.microsoft.com/office/drawing/2014/main" id="{440B53F8-9DBF-4EE2-BDDA-444BE6CD197F}"/>
-              </a:ext>
-            </a:extLst>
-          </p:cNvPr>
-          <p:cNvSpPr>
-            <a:spLocks xmlns:a="http://schemas.openxmlformats.org/drawingml/2006/main" noGrp="1"/>
-          </p:cNvSpPr>
-          <p:nvPr/>
-        </p:nvSpPr>
-        <p:spPr>
-          <a:xfrm xmlns:a="http://schemas.openxmlformats.org/drawingml/2006/main">
-            <a:off x="1581150" y="2000250"/>
-            <a:ext cx="9353550" cy="457200"/>
-          </a:xfrm>
-          <a:prstGeom xmlns:a="http://schemas.openxmlformats.org/drawingml/2006/main" prst="rect">
-            <a:avLst/>
-          </a:prstGeom>
-          <a:noFill xmlns:a="http://schemas.openxmlformats.org/drawingml/2006/main"/>
-          <a:ln xmlns:a="http://schemas.openxmlformats.org/drawingml/2006/main" w="0">
-            <a:noFill/>
-            <a:prstDash val="solid"/>
-          </a:ln>
-        </p:spPr>
-        <p:txBody>
-          <a:bodyPr xmlns:a="http://schemas.openxmlformats.org/drawingml/2006/main" lIns="0" tIns="0" rIns="0" bIns="0" anchor="t">
-            <a:normAutofit fontScale="100000"/>
-          </a:bodyPr>
-          <a:lstStyle xmlns:a="http://schemas.openxmlformats.org/drawingml/2006/main"/>
-          <a:p xmlns:a="http://schemas.openxmlformats.org/drawingml/2006/main">
-            <a:pPr algn="l">
-              <a:lnSpc>
-                <a:spcPct val="105000"/>
-              </a:lnSpc>
-              <a:buNone/>
-              <a:defRPr sz="1875" b="0" i="0">
-                <a:solidFill>
-                  <a:srgbClr val="17242D"/>
-                </a:solidFill>
-                <a:latin typeface="Aptos"/>
-                <a:ea typeface="Aptos"/>
-                <a:cs typeface="Aptos"/>
-              </a:defRPr>
-            </a:pPr>
-            <a:r>
-              <a:rPr sz="1875" b="0" i="0">
-                <a:solidFill>
-                  <a:srgbClr val="17242D"/>
-                </a:solidFill>
-                <a:latin typeface="Aptos"/>
-                <a:ea typeface="Aptos"/>
-                <a:cs typeface="Aptos"/>
-              </a:rPr>
-              <a:t>Technology changes copying, search, verification, and bargaining costs.</a:t>
-            </a:r>
-          </a:p>
-        </p:txBody>
-      </p:sp>
-      <p:sp>
-        <p:nvSpPr>
-          <p:cNvPr id="9" name="">
-            <a:extLst xmlns:a="http://schemas.openxmlformats.org/drawingml/2006/main">
-              <a:ext uri="{FF2B5EF4-FFF2-40B4-BE49-F238E27FC236}">
-                <a16:creationId xmlns:a16="http://schemas.microsoft.com/office/drawing/2014/main" id="{5B92B358-45FD-442D-89F6-34DB505DCCEB}"/>
-              </a:ext>
-            </a:extLst>
-          </p:cNvPr>
-          <p:cNvSpPr>
-            <a:spLocks xmlns:a="http://schemas.openxmlformats.org/drawingml/2006/main" noGrp="1"/>
-          </p:cNvSpPr>
-          <p:nvPr/>
-        </p:nvSpPr>
-        <p:spPr>
-          <a:xfrm xmlns:a="http://schemas.openxmlformats.org/drawingml/2006/main">
-            <a:off x="1257300" y="2562225"/>
-            <a:ext cx="228600" cy="457200"/>
-          </a:xfrm>
-          <a:prstGeom xmlns:a="http://schemas.openxmlformats.org/drawingml/2006/main" prst="rect">
-            <a:avLst/>
-          </a:prstGeom>
-          <a:noFill xmlns:a="http://schemas.openxmlformats.org/drawingml/2006/main"/>
-          <a:ln xmlns:a="http://schemas.openxmlformats.org/drawingml/2006/main" w="0">
-            <a:noFill/>
-            <a:prstDash val="solid"/>
-          </a:ln>
-        </p:spPr>
-        <p:txBody>
-          <a:bodyPr xmlns:a="http://schemas.openxmlformats.org/drawingml/2006/main" lIns="0" tIns="0" rIns="0" bIns="0" anchor="t">
-            <a:normAutofit fontScale="100000"/>
-          </a:bodyPr>
-          <a:lstStyle xmlns:a="http://schemas.openxmlformats.org/drawingml/2006/main"/>
-          <a:p xmlns:a="http://schemas.openxmlformats.org/drawingml/2006/main">
-            <a:pPr algn="l">
-              <a:lnSpc>
-                <a:spcPct val="105000"/>
-              </a:lnSpc>
-              <a:buNone/>
-              <a:defRPr sz="1875" b="1" i="0">
-                <a:solidFill>
-                  <a:srgbClr val="9A462F"/>
-                </a:solidFill>
-                <a:latin typeface="Aptos"/>
-                <a:ea typeface="Aptos"/>
-                <a:cs typeface="Aptos"/>
-              </a:defRPr>
-            </a:pPr>
-            <a:r>
-              <a:rPr sz="1875" b="1" i="0">
-                <a:solidFill>
-                  <a:srgbClr val="9A462F"/>
-                </a:solidFill>
-                <a:latin typeface="Aptos"/>
-                <a:ea typeface="Aptos"/>
-                <a:cs typeface="Aptos"/>
-              </a:rPr>
-              <a:t>•</a:t>
-            </a:r>
-          </a:p>
-        </p:txBody>
-      </p:sp>
-      <p:sp>
-        <p:nvSpPr>
-          <p:cNvPr id="10" name="">
-            <a:extLst xmlns:a="http://schemas.openxmlformats.org/drawingml/2006/main">
-              <a:ext uri="{FF2B5EF4-FFF2-40B4-BE49-F238E27FC236}">
-                <a16:creationId xmlns:a16="http://schemas.microsoft.com/office/drawing/2014/main" id="{90747468-D196-43D8-BB66-91FA3785AD70}"/>
-              </a:ext>
-            </a:extLst>
-          </p:cNvPr>
-          <p:cNvSpPr>
-            <a:spLocks xmlns:a="http://schemas.openxmlformats.org/drawingml/2006/main" noGrp="1"/>
-          </p:cNvSpPr>
-          <p:nvPr/>
-        </p:nvSpPr>
-        <p:spPr>
-          <a:xfrm xmlns:a="http://schemas.openxmlformats.org/drawingml/2006/main">
-            <a:off x="1581150" y="2571750"/>
-            <a:ext cx="9353550" cy="457200"/>
-          </a:xfrm>
-          <a:prstGeom xmlns:a="http://schemas.openxmlformats.org/drawingml/2006/main" prst="rect">
-            <a:avLst/>
-          </a:prstGeom>
-          <a:noFill xmlns:a="http://schemas.openxmlformats.org/drawingml/2006/main"/>
-          <a:ln xmlns:a="http://schemas.openxmlformats.org/drawingml/2006/main" w="0">
-            <a:noFill/>
-            <a:prstDash val="solid"/>
-          </a:ln>
-        </p:spPr>
-        <p:txBody>
-          <a:bodyPr xmlns:a="http://schemas.openxmlformats.org/drawingml/2006/main" lIns="0" tIns="0" rIns="0" bIns="0" anchor="t">
-            <a:normAutofit fontScale="100000"/>
-          </a:bodyPr>
-          <a:lstStyle xmlns:a="http://schemas.openxmlformats.org/drawingml/2006/main"/>
-          <a:p xmlns:a="http://schemas.openxmlformats.org/drawingml/2006/main">
-            <a:pPr algn="l">
-              <a:lnSpc>
-                <a:spcPct val="105000"/>
-              </a:lnSpc>
-              <a:buNone/>
-              <a:defRPr sz="1875" b="0" i="0">
-                <a:solidFill>
-                  <a:srgbClr val="17242D"/>
-                </a:solidFill>
-                <a:latin typeface="Aptos"/>
-                <a:ea typeface="Aptos"/>
-                <a:cs typeface="Aptos"/>
-              </a:defRPr>
-            </a:pPr>
-            <a:r>
-              <a:rPr sz="1875" b="0" i="0">
-                <a:solidFill>
-                  <a:srgbClr val="17242D"/>
-                </a:solidFill>
-                <a:latin typeface="Aptos"/>
-                <a:ea typeface="Aptos"/>
-                <a:cs typeface="Aptos"/>
-              </a:rPr>
-              <a:t>Rights affect invention, access, entry, competition, and cumulative reuse.</a:t>
-            </a:r>
-          </a:p>
-        </p:txBody>
-      </p:sp>
-      <p:sp>
-        <p:nvSpPr>
-          <p:cNvPr id="11" name="">
-            <a:extLst xmlns:a="http://schemas.openxmlformats.org/drawingml/2006/main">
-              <a:ext uri="{FF2B5EF4-FFF2-40B4-BE49-F238E27FC236}">
-                <a16:creationId xmlns:a16="http://schemas.microsoft.com/office/drawing/2014/main" id="{415C507D-CCA0-4B10-9F5C-36B37B8212B0}"/>
-              </a:ext>
-            </a:extLst>
-          </p:cNvPr>
-          <p:cNvSpPr>
-            <a:spLocks xmlns:a="http://schemas.openxmlformats.org/drawingml/2006/main" noGrp="1"/>
-          </p:cNvSpPr>
-          <p:nvPr/>
-        </p:nvSpPr>
-        <p:spPr>
-          <a:xfrm xmlns:a="http://schemas.openxmlformats.org/drawingml/2006/main">
-            <a:off x="1257300" y="3133725"/>
-            <a:ext cx="228600" cy="457200"/>
-          </a:xfrm>
-          <a:prstGeom xmlns:a="http://schemas.openxmlformats.org/drawingml/2006/main" prst="rect">
-            <a:avLst/>
-          </a:prstGeom>
-          <a:noFill xmlns:a="http://schemas.openxmlformats.org/drawingml/2006/main"/>
-          <a:ln xmlns:a="http://schemas.openxmlformats.org/drawingml/2006/main" w="0">
-            <a:noFill/>
-            <a:prstDash val="solid"/>
-          </a:ln>
-        </p:spPr>
-        <p:txBody>
-          <a:bodyPr xmlns:a="http://schemas.openxmlformats.org/drawingml/2006/main" lIns="0" tIns="0" rIns="0" bIns="0" anchor="t">
-            <a:normAutofit fontScale="100000"/>
-          </a:bodyPr>
-          <a:lstStyle xmlns:a="http://schemas.openxmlformats.org/drawingml/2006/main"/>
-          <a:p xmlns:a="http://schemas.openxmlformats.org/drawingml/2006/main">
-            <a:pPr algn="l">
-              <a:lnSpc>
-                <a:spcPct val="105000"/>
-              </a:lnSpc>
-              <a:buNone/>
-              <a:defRPr sz="1875" b="1" i="0">
-                <a:solidFill>
-                  <a:srgbClr val="9A462F"/>
-                </a:solidFill>
-                <a:latin typeface="Aptos"/>
-                <a:ea typeface="Aptos"/>
-                <a:cs typeface="Aptos"/>
-              </a:defRPr>
-            </a:pPr>
-            <a:r>
-              <a:rPr sz="1875" b="1" i="0">
-                <a:solidFill>
-                  <a:srgbClr val="9A462F"/>
-                </a:solidFill>
-                <a:latin typeface="Aptos"/>
-                <a:ea typeface="Aptos"/>
-                <a:cs typeface="Aptos"/>
-              </a:rPr>
-              <a:t>•</a:t>
-            </a:r>
-          </a:p>
-        </p:txBody>
-      </p:sp>
-      <p:sp>
-        <p:nvSpPr>
-          <p:cNvPr id="12" name="">
-            <a:extLst xmlns:a="http://schemas.openxmlformats.org/drawingml/2006/main">
-              <a:ext uri="{FF2B5EF4-FFF2-40B4-BE49-F238E27FC236}">
-                <a16:creationId xmlns:a16="http://schemas.microsoft.com/office/drawing/2014/main" id="{B7303EF6-1E46-4CFB-BE79-0D15330881C4}"/>
-              </a:ext>
-            </a:extLst>
-          </p:cNvPr>
-          <p:cNvSpPr>
-            <a:spLocks xmlns:a="http://schemas.openxmlformats.org/drawingml/2006/main" noGrp="1"/>
-          </p:cNvSpPr>
-          <p:nvPr/>
-        </p:nvSpPr>
-        <p:spPr>
-          <a:xfrm xmlns:a="http://schemas.openxmlformats.org/drawingml/2006/main">
-            <a:off x="1581150" y="3143250"/>
-            <a:ext cx="9353550" cy="457200"/>
-          </a:xfrm>
-          <a:prstGeom xmlns:a="http://schemas.openxmlformats.org/drawingml/2006/main" prst="rect">
-            <a:avLst/>
-          </a:prstGeom>
-          <a:noFill xmlns:a="http://schemas.openxmlformats.org/drawingml/2006/main"/>
-          <a:ln xmlns:a="http://schemas.openxmlformats.org/drawingml/2006/main" w="0">
-            <a:noFill/>
-            <a:prstDash val="solid"/>
-          </a:ln>
-        </p:spPr>
-        <p:txBody>
-          <a:bodyPr xmlns:a="http://schemas.openxmlformats.org/drawingml/2006/main" lIns="0" tIns="0" rIns="0" bIns="0" anchor="t">
-            <a:normAutofit fontScale="100000"/>
-          </a:bodyPr>
-          <a:lstStyle xmlns:a="http://schemas.openxmlformats.org/drawingml/2006/main"/>
-          <a:p xmlns:a="http://schemas.openxmlformats.org/drawingml/2006/main">
-            <a:pPr algn="l">
-              <a:lnSpc>
-                <a:spcPct val="105000"/>
-              </a:lnSpc>
-              <a:buNone/>
-              <a:defRPr sz="1875" b="0" i="0">
-                <a:solidFill>
-                  <a:srgbClr val="17242D"/>
-                </a:solidFill>
-                <a:latin typeface="Aptos"/>
-                <a:ea typeface="Aptos"/>
-                <a:cs typeface="Aptos"/>
-              </a:defRPr>
-            </a:pPr>
-            <a:r>
-              <a:rPr sz="1875" b="0" i="0">
-                <a:solidFill>
-                  <a:srgbClr val="17242D"/>
-                </a:solidFill>
-                <a:latin typeface="Aptos"/>
-                <a:ea typeface="Aptos"/>
-                <a:cs typeface="Aptos"/>
-              </a:rPr>
-              <a:t>Formal categories may lag the economic mechanisms they govern.</a:t>
-            </a:r>
-          </a:p>
-        </p:txBody>
-      </p:sp>
-      <p:sp>
-        <p:nvSpPr>
-          <p:cNvPr id="13" name="">
-            <a:extLst xmlns:a="http://schemas.openxmlformats.org/drawingml/2006/main">
-              <a:ext uri="{FF2B5EF4-FFF2-40B4-BE49-F238E27FC236}">
-                <a16:creationId xmlns:a16="http://schemas.microsoft.com/office/drawing/2014/main" id="{A2E97C4D-3EB1-4EFF-B0C3-FEE485D04369}"/>
-              </a:ext>
-            </a:extLst>
-          </p:cNvPr>
-          <p:cNvSpPr>
-            <a:spLocks xmlns:a="http://schemas.openxmlformats.org/drawingml/2006/main" noGrp="1"/>
-          </p:cNvSpPr>
-          <p:nvPr/>
-        </p:nvSpPr>
-        <p:spPr>
-          <a:xfrm xmlns:a="http://schemas.openxmlformats.org/drawingml/2006/main">
-            <a:off x="1257300" y="3705225"/>
-            <a:ext cx="228600" cy="457200"/>
-          </a:xfrm>
-          <a:prstGeom xmlns:a="http://schemas.openxmlformats.org/drawingml/2006/main" prst="rect">
-            <a:avLst/>
-          </a:prstGeom>
-          <a:noFill xmlns:a="http://schemas.openxmlformats.org/drawingml/2006/main"/>
-          <a:ln xmlns:a="http://schemas.openxmlformats.org/drawingml/2006/main" w="0">
-            <a:noFill/>
-            <a:prstDash val="solid"/>
-          </a:ln>
-        </p:spPr>
-        <p:txBody>
-          <a:bodyPr xmlns:a="http://schemas.openxmlformats.org/drawingml/2006/main" lIns="0" tIns="0" rIns="0" bIns="0" anchor="t">
-            <a:normAutofit fontScale="100000"/>
-          </a:bodyPr>
-          <a:lstStyle xmlns:a="http://schemas.openxmlformats.org/drawingml/2006/main"/>
-          <a:p xmlns:a="http://schemas.openxmlformats.org/drawingml/2006/main">
-            <a:pPr algn="l">
-              <a:lnSpc>
-                <a:spcPct val="105000"/>
-              </a:lnSpc>
-              <a:buNone/>
-              <a:defRPr sz="1875" b="1" i="0">
-                <a:solidFill>
-                  <a:srgbClr val="9A462F"/>
-                </a:solidFill>
-                <a:latin typeface="Aptos"/>
-                <a:ea typeface="Aptos"/>
-                <a:cs typeface="Aptos"/>
-              </a:defRPr>
-            </a:pPr>
-            <a:r>
-              <a:rPr sz="1875" b="1" i="0">
-                <a:solidFill>
-                  <a:srgbClr val="9A462F"/>
-                </a:solidFill>
-                <a:latin typeface="Aptos"/>
-                <a:ea typeface="Aptos"/>
-                <a:cs typeface="Aptos"/>
-              </a:rPr>
-              <a:t>•</a:t>
-            </a:r>
-          </a:p>
-        </p:txBody>
-      </p:sp>
-      <p:sp>
-        <p:nvSpPr>
-          <p:cNvPr id="14" name="">
-            <a:extLst xmlns:a="http://schemas.openxmlformats.org/drawingml/2006/main">
-              <a:ext uri="{FF2B5EF4-FFF2-40B4-BE49-F238E27FC236}">
-                <a16:creationId xmlns:a16="http://schemas.microsoft.com/office/drawing/2014/main" id="{FE48FBF1-4C24-4162-83E8-249175F75BDA}"/>
-              </a:ext>
-            </a:extLst>
-          </p:cNvPr>
-          <p:cNvSpPr>
-            <a:spLocks xmlns:a="http://schemas.openxmlformats.org/drawingml/2006/main" noGrp="1"/>
-          </p:cNvSpPr>
-          <p:nvPr/>
-        </p:nvSpPr>
-        <p:spPr>
-          <a:xfrm xmlns:a="http://schemas.openxmlformats.org/drawingml/2006/main">
-            <a:off x="1581150" y="3714750"/>
-            <a:ext cx="9353550" cy="457200"/>
-          </a:xfrm>
-          <a:prstGeom xmlns:a="http://schemas.openxmlformats.org/drawingml/2006/main" prst="rect">
-            <a:avLst/>
-          </a:prstGeom>
-          <a:noFill xmlns:a="http://schemas.openxmlformats.org/drawingml/2006/main"/>
-          <a:ln xmlns:a="http://schemas.openxmlformats.org/drawingml/2006/main" w="0">
-            <a:noFill/>
-            <a:prstDash val="solid"/>
-          </a:ln>
-        </p:spPr>
-        <p:txBody>
-          <a:bodyPr xmlns:a="http://schemas.openxmlformats.org/drawingml/2006/main" lIns="0" tIns="0" rIns="0" bIns="0" anchor="t">
-            <a:normAutofit fontScale="98866"/>
-          </a:bodyPr>
-          <a:lstStyle xmlns:a="http://schemas.openxmlformats.org/drawingml/2006/main"/>
-          <a:p xmlns:a="http://schemas.openxmlformats.org/drawingml/2006/main">
-            <a:pPr algn="l">
-              <a:lnSpc>
-                <a:spcPct val="105000"/>
-              </a:lnSpc>
-              <a:buNone/>
-              <a:defRPr sz="1875" b="0" i="0">
-                <a:solidFill>
-                  <a:srgbClr val="17242D"/>
-                </a:solidFill>
-                <a:latin typeface="Aptos"/>
-                <a:ea typeface="Aptos"/>
-                <a:cs typeface="Aptos"/>
-              </a:defRPr>
-            </a:pPr>
-            <a:r>
-              <a:rPr sz="1875" b="0" i="0">
-                <a:solidFill>
-                  <a:srgbClr val="17242D"/>
-                </a:solidFill>
-                <a:latin typeface="Aptos"/>
-                <a:ea typeface="Aptos"/>
-                <a:cs typeface="Aptos"/>
-              </a:rPr>
-              <a:t>Institutional alternatives can combine law, contract, code, markets, and open production.</a:t>
-            </a:r>
-          </a:p>
-        </p:txBody>
-      </p:sp>
-      <p:sp>
-        <p:nvSpPr>
-          <p:cNvPr id="15" name="">
-            <a:extLst xmlns:a="http://schemas.openxmlformats.org/drawingml/2006/main">
-              <a:ext uri="{FF2B5EF4-FFF2-40B4-BE49-F238E27FC236}">
-                <a16:creationId xmlns:a16="http://schemas.microsoft.com/office/drawing/2014/main" id="{5515C537-C706-490F-985C-90F3AD25B450}"/>
-              </a:ext>
-            </a:extLst>
-          </p:cNvPr>
-          <p:cNvSpPr>
-            <a:spLocks xmlns:a="http://schemas.openxmlformats.org/drawingml/2006/main" noGrp="1"/>
-          </p:cNvSpPr>
-          <p:nvPr/>
-        </p:nvSpPr>
-        <p:spPr>
-          <a:xfrm xmlns:a="http://schemas.openxmlformats.org/drawingml/2006/main">
-            <a:off x="1200150" y="5562600"/>
-            <a:ext cx="9791700" cy="533400"/>
+                <a16:creationId xmlns:a16="http://schemas.microsoft.com/office/drawing/2014/main" id="{E99DFBAB-A06A-4827-BF4D-92C90D00BFF3}"/>
+              </a:ext>
+            </a:extLst>
+          </p:cNvPr>
+          <p:cNvSpPr>
+            <a:spLocks xmlns:a="http://schemas.openxmlformats.org/drawingml/2006/main" noGrp="1"/>
+          </p:cNvSpPr>
+          <p:nvPr/>
+        </p:nvSpPr>
+        <p:spPr>
+          <a:xfrm xmlns:a="http://schemas.openxmlformats.org/drawingml/2006/main">
+            <a:off x="1200150" y="2152650"/>
+            <a:ext cx="9791700" cy="2133600"/>
           </a:xfrm>
           <a:prstGeom xmlns:a="http://schemas.openxmlformats.org/drawingml/2006/main" prst="rect">
             <a:avLst/>
@@ -18296,7 +18673,7 @@
         </p:spPr>
         <p:txBody>
           <a:bodyPr xmlns:a="http://schemas.openxmlformats.org/drawingml/2006/main" lIns="0" tIns="0" rIns="0" bIns="0" anchor="ctr">
-            <a:normAutofit fontScale="97175"/>
+            <a:normAutofit fontScale="100000"/>
           </a:bodyPr>
           <a:lstStyle xmlns:a="http://schemas.openxmlformats.org/drawingml/2006/main"/>
           <a:p xmlns:a="http://schemas.openxmlformats.org/drawingml/2006/main">
@@ -18305,7 +18682,7 @@
                 <a:spcPct val="105000"/>
               </a:lnSpc>
               <a:buNone/>
-              <a:defRPr sz="1950" b="1" i="0">
+              <a:defRPr sz="3150" b="1" i="0">
                 <a:solidFill>
                   <a:srgbClr val="173F38"/>
                 </a:solidFill>
@@ -18315,7 +18692,7 @@
               </a:defRPr>
             </a:pPr>
             <a:r>
-              <a:rPr sz="1950" b="1" i="0">
+              <a:rPr sz="3150" b="1" i="0">
                 <a:solidFill>
                   <a:srgbClr val="173F38"/>
                 </a:solidFill>
@@ -18323,7 +18700,69 @@
                 <a:ea typeface="Georgia"/>
                 <a:cs typeface="Georgia"/>
               </a:rPr>
-              <a:t>Future lawyers need economic reasoning precisely where doctrine is unsettled.</a:t>
+              <a:t>A recognizable visual or musical style can have economic value even when copyright does not ordinarily grant a broad right over style itself.</a:t>
+            </a:r>
+          </a:p>
+        </p:txBody>
+      </p:sp>
+      <p:sp>
+        <p:nvSpPr>
+          <p:cNvPr id="8" name="">
+            <a:extLst xmlns:a="http://schemas.openxmlformats.org/drawingml/2006/main">
+              <a:ext uri="{FF2B5EF4-FFF2-40B4-BE49-F238E27FC236}">
+                <a16:creationId xmlns:a16="http://schemas.microsoft.com/office/drawing/2014/main" id="{F9FB559E-1CDC-4AE7-BC5B-E83677963EA0}"/>
+              </a:ext>
+            </a:extLst>
+          </p:cNvPr>
+          <p:cNvSpPr>
+            <a:spLocks xmlns:a="http://schemas.openxmlformats.org/drawingml/2006/main" noGrp="1"/>
+          </p:cNvSpPr>
+          <p:nvPr/>
+        </p:nvSpPr>
+        <p:spPr>
+          <a:xfrm xmlns:a="http://schemas.openxmlformats.org/drawingml/2006/main">
+            <a:off x="1562100" y="4629150"/>
+            <a:ext cx="9067800" cy="819150"/>
+          </a:xfrm>
+          <a:prstGeom xmlns:a="http://schemas.openxmlformats.org/drawingml/2006/main" prst="rect">
+            <a:avLst/>
+          </a:prstGeom>
+          <a:noFill xmlns:a="http://schemas.openxmlformats.org/drawingml/2006/main"/>
+          <a:ln xmlns:a="http://schemas.openxmlformats.org/drawingml/2006/main" w="0">
+            <a:noFill/>
+            <a:prstDash val="solid"/>
+          </a:ln>
+        </p:spPr>
+        <p:txBody>
+          <a:bodyPr xmlns:a="http://schemas.openxmlformats.org/drawingml/2006/main" lIns="0" tIns="0" rIns="0" bIns="0" anchor="ctr">
+            <a:normAutofit fontScale="100000"/>
+          </a:bodyPr>
+          <a:lstStyle xmlns:a="http://schemas.openxmlformats.org/drawingml/2006/main"/>
+          <a:p xmlns:a="http://schemas.openxmlformats.org/drawingml/2006/main">
+            <a:pPr algn="ctr">
+              <a:lnSpc>
+                <a:spcPct val="105000"/>
+              </a:lnSpc>
+              <a:buNone/>
+              <a:defRPr sz="1800" b="0" i="0">
+                <a:solidFill>
+                  <a:srgbClr val="586A73"/>
+                </a:solidFill>
+                <a:latin typeface="Aptos"/>
+                <a:ea typeface="Aptos"/>
+                <a:cs typeface="Aptos"/>
+              </a:defRPr>
+            </a:pPr>
+            <a:r>
+              <a:rPr sz="1800" b="0" i="0">
+                <a:solidFill>
+                  <a:srgbClr val="586A73"/>
+                </a:solidFill>
+                <a:latin typeface="Aptos"/>
+                <a:ea typeface="Aptos"/>
+                <a:cs typeface="Aptos"/>
+              </a:rPr>
+              <a:t>Extending control could protect creators and also fence off general artistic vocabularies and independent learning.</a:t>
             </a:r>
           </a:p>
         </p:txBody>
@@ -18331,7 +18770,7 @@
     </p:spTree>
     <p:extLst>
       <p:ext uri="{BB962C8B-B14F-4D97-AF65-F5344CB8AC3E}">
-        <p14:creationId xmlns:p14="http://schemas.microsoft.com/office/powerpoint/2010/main" val="940668092"/>
+        <p14:creationId xmlns:p14="http://schemas.microsoft.com/office/powerpoint/2010/main" val="1948368237"/>
       </p:ext>
     </p:extLst>
   </p:cSld>
@@ -18339,6 +18778,2118 @@
 </file>
 
 <file path=ppt/slides/slide24.xml><?xml version="1.0" encoding="utf-8"?>
+<p:sld xmlns:p="http://schemas.openxmlformats.org/presentationml/2006/main">
+  <p:cSld>
+    <p:bg>
+      <p:bgPr>
+        <a:solidFill xmlns:a="http://schemas.openxmlformats.org/drawingml/2006/main">
+          <a:srgbClr val="FBFCFA"/>
+        </a:solidFill>
+      </p:bgPr>
+    </p:bg>
+    <p:spTree>
+      <p:nvGrpSpPr>
+        <p:cNvPr id="1" name=""/>
+        <p:cNvGrpSpPr/>
+        <p:nvPr/>
+      </p:nvGrpSpPr>
+      <p:grpSpPr>
+        <a:xfrm xmlns:a="http://schemas.openxmlformats.org/drawingml/2006/main"/>
+      </p:grpSpPr>
+      <p:sp>
+        <p:nvSpPr>
+          <p:cNvPr id="23" name="">
+            <a:extLst xmlns:a="http://schemas.openxmlformats.org/drawingml/2006/main">
+              <a:ext uri="{FF2B5EF4-FFF2-40B4-BE49-F238E27FC236}">
+                <a16:creationId xmlns:a16="http://schemas.microsoft.com/office/drawing/2014/main" id="{1A1BD7CF-528F-44B1-BD68-D990A2827C9A}"/>
+              </a:ext>
+            </a:extLst>
+          </p:cNvPr>
+          <p:cNvSpPr>
+            <a:spLocks xmlns:a="http://schemas.openxmlformats.org/drawingml/2006/main" noGrp="1"/>
+          </p:cNvSpPr>
+          <p:nvPr/>
+        </p:nvSpPr>
+        <p:spPr>
+          <a:xfrm xmlns:a="http://schemas.openxmlformats.org/drawingml/2006/main">
+            <a:off x="514350" y="400050"/>
+            <a:ext cx="685800" cy="57150"/>
+          </a:xfrm>
+          <a:prstGeom xmlns:a="http://schemas.openxmlformats.org/drawingml/2006/main" prst="rect">
+            <a:avLst/>
+          </a:prstGeom>
+          <a:solidFill xmlns:a="http://schemas.openxmlformats.org/drawingml/2006/main">
+            <a:srgbClr val="9A462F"/>
+          </a:solidFill>
+          <a:ln xmlns:a="http://schemas.openxmlformats.org/drawingml/2006/main" w="0">
+            <a:noFill/>
+            <a:prstDash val="solid"/>
+          </a:ln>
+        </p:spPr>
+      </p:sp>
+      <p:sp>
+        <p:nvSpPr>
+          <p:cNvPr id="2" name="">
+            <a:extLst xmlns:a="http://schemas.openxmlformats.org/drawingml/2006/main">
+              <a:ext uri="{FF2B5EF4-FFF2-40B4-BE49-F238E27FC236}">
+                <a16:creationId xmlns:a16="http://schemas.microsoft.com/office/drawing/2014/main" id="{F33F174A-AA81-4EF7-B105-938F032F9FD0}"/>
+              </a:ext>
+            </a:extLst>
+          </p:cNvPr>
+          <p:cNvSpPr>
+            <a:spLocks xmlns:a="http://schemas.openxmlformats.org/drawingml/2006/main" noGrp="1"/>
+          </p:cNvSpPr>
+          <p:nvPr/>
+        </p:nvSpPr>
+        <p:spPr>
+          <a:xfrm xmlns:a="http://schemas.openxmlformats.org/drawingml/2006/main">
+            <a:off x="1390650" y="304800"/>
+            <a:ext cx="1619250" cy="228600"/>
+          </a:xfrm>
+          <a:prstGeom xmlns:a="http://schemas.openxmlformats.org/drawingml/2006/main" prst="rect">
+            <a:avLst/>
+          </a:prstGeom>
+          <a:noFill xmlns:a="http://schemas.openxmlformats.org/drawingml/2006/main"/>
+          <a:ln xmlns:a="http://schemas.openxmlformats.org/drawingml/2006/main" w="0">
+            <a:noFill/>
+            <a:prstDash val="solid"/>
+          </a:ln>
+        </p:spPr>
+        <p:txBody>
+          <a:bodyPr xmlns:a="http://schemas.openxmlformats.org/drawingml/2006/main" lIns="0" tIns="0" rIns="0" bIns="0" anchor="t">
+            <a:normAutofit fontScale="100000"/>
+          </a:bodyPr>
+          <a:lstStyle xmlns:a="http://schemas.openxmlformats.org/drawingml/2006/main"/>
+          <a:p xmlns:a="http://schemas.openxmlformats.org/drawingml/2006/main">
+            <a:pPr algn="l">
+              <a:lnSpc>
+                <a:spcPct val="105000"/>
+              </a:lnSpc>
+              <a:buNone/>
+              <a:defRPr sz="1050" b="1" i="0">
+                <a:solidFill>
+                  <a:srgbClr val="9A462F"/>
+                </a:solidFill>
+                <a:latin typeface="Aptos"/>
+                <a:ea typeface="Aptos"/>
+                <a:cs typeface="Aptos"/>
+              </a:defRPr>
+            </a:pPr>
+            <a:r>
+              <a:rPr sz="1050" b="1" i="0">
+                <a:solidFill>
+                  <a:srgbClr val="9A462F"/>
+                </a:solidFill>
+                <a:latin typeface="Aptos"/>
+                <a:ea typeface="Aptos"/>
+                <a:cs typeface="Aptos"/>
+              </a:rPr>
+              <a:t>CHAPTER 6</a:t>
+            </a:r>
+          </a:p>
+        </p:txBody>
+      </p:sp>
+      <p:sp>
+        <p:nvSpPr>
+          <p:cNvPr id="3" name="">
+            <a:extLst xmlns:a="http://schemas.openxmlformats.org/drawingml/2006/main">
+              <a:ext uri="{FF2B5EF4-FFF2-40B4-BE49-F238E27FC236}">
+                <a16:creationId xmlns:a16="http://schemas.microsoft.com/office/drawing/2014/main" id="{6A0C7E7D-7866-4655-9D24-D8CC62870263}"/>
+              </a:ext>
+            </a:extLst>
+          </p:cNvPr>
+          <p:cNvSpPr>
+            <a:spLocks xmlns:a="http://schemas.openxmlformats.org/drawingml/2006/main" noGrp="1"/>
+          </p:cNvSpPr>
+          <p:nvPr/>
+        </p:nvSpPr>
+        <p:spPr>
+          <a:xfrm xmlns:a="http://schemas.openxmlformats.org/drawingml/2006/main">
+            <a:off x="609600" y="685800"/>
+            <a:ext cx="10972800" cy="628650"/>
+          </a:xfrm>
+          <a:prstGeom xmlns:a="http://schemas.openxmlformats.org/drawingml/2006/main" prst="rect">
+            <a:avLst/>
+          </a:prstGeom>
+          <a:noFill xmlns:a="http://schemas.openxmlformats.org/drawingml/2006/main"/>
+          <a:ln xmlns:a="http://schemas.openxmlformats.org/drawingml/2006/main" w="0">
+            <a:noFill/>
+            <a:prstDash val="solid"/>
+          </a:ln>
+        </p:spPr>
+        <p:txBody>
+          <a:bodyPr xmlns:a="http://schemas.openxmlformats.org/drawingml/2006/main" lIns="0" tIns="0" rIns="0" bIns="0" anchor="t">
+            <a:normAutofit fontScale="100000"/>
+          </a:bodyPr>
+          <a:lstStyle xmlns:a="http://schemas.openxmlformats.org/drawingml/2006/main"/>
+          <a:p xmlns:a="http://schemas.openxmlformats.org/drawingml/2006/main">
+            <a:pPr algn="l">
+              <a:lnSpc>
+                <a:spcPct val="105000"/>
+              </a:lnSpc>
+              <a:buNone/>
+              <a:defRPr sz="3000" b="1" i="0">
+                <a:solidFill>
+                  <a:srgbClr val="17242D"/>
+                </a:solidFill>
+                <a:latin typeface="Georgia"/>
+                <a:ea typeface="Georgia"/>
+                <a:cs typeface="Georgia"/>
+              </a:defRPr>
+            </a:pPr>
+            <a:r>
+              <a:rPr sz="3000" b="1" i="0">
+                <a:solidFill>
+                  <a:srgbClr val="17242D"/>
+                </a:solidFill>
+                <a:latin typeface="Georgia"/>
+                <a:ea typeface="Georgia"/>
+                <a:cs typeface="Georgia"/>
+              </a:rPr>
+              <a:t>Design an intellectual-property regime as a system</a:t>
+            </a:r>
+          </a:p>
+        </p:txBody>
+      </p:sp>
+      <p:sp>
+        <p:nvSpPr>
+          <p:cNvPr id="4" name="">
+            <a:extLst xmlns:a="http://schemas.openxmlformats.org/drawingml/2006/main">
+              <a:ext uri="{FF2B5EF4-FFF2-40B4-BE49-F238E27FC236}">
+                <a16:creationId xmlns:a16="http://schemas.microsoft.com/office/drawing/2014/main" id="{535EE928-4B55-4AF5-BB22-A0EF202A0311}"/>
+              </a:ext>
+            </a:extLst>
+          </p:cNvPr>
+          <p:cNvSpPr>
+            <a:spLocks xmlns:a="http://schemas.openxmlformats.org/drawingml/2006/main" noGrp="1"/>
+          </p:cNvSpPr>
+          <p:nvPr/>
+        </p:nvSpPr>
+        <p:spPr>
+          <a:xfrm xmlns:a="http://schemas.openxmlformats.org/drawingml/2006/main">
+            <a:off x="609600" y="6419850"/>
+            <a:ext cx="10972800" cy="9525"/>
+          </a:xfrm>
+          <a:prstGeom xmlns:a="http://schemas.openxmlformats.org/drawingml/2006/main" prst="rect">
+            <a:avLst/>
+          </a:prstGeom>
+          <a:solidFill xmlns:a="http://schemas.openxmlformats.org/drawingml/2006/main">
+            <a:srgbClr val="CCD5D2"/>
+          </a:solidFill>
+          <a:ln xmlns:a="http://schemas.openxmlformats.org/drawingml/2006/main" w="0">
+            <a:noFill/>
+            <a:prstDash val="solid"/>
+          </a:ln>
+        </p:spPr>
+      </p:sp>
+      <p:sp>
+        <p:nvSpPr>
+          <p:cNvPr id="5" name="">
+            <a:extLst xmlns:a="http://schemas.openxmlformats.org/drawingml/2006/main">
+              <a:ext uri="{FF2B5EF4-FFF2-40B4-BE49-F238E27FC236}">
+                <a16:creationId xmlns:a16="http://schemas.microsoft.com/office/drawing/2014/main" id="{F7820ADD-0965-400D-B446-AC3E72979890}"/>
+              </a:ext>
+            </a:extLst>
+          </p:cNvPr>
+          <p:cNvSpPr>
+            <a:spLocks xmlns:a="http://schemas.openxmlformats.org/drawingml/2006/main" noGrp="1"/>
+          </p:cNvSpPr>
+          <p:nvPr/>
+        </p:nvSpPr>
+        <p:spPr>
+          <a:xfrm xmlns:a="http://schemas.openxmlformats.org/drawingml/2006/main">
+            <a:off x="609600" y="6515100"/>
+            <a:ext cx="2857500" cy="171450"/>
+          </a:xfrm>
+          <a:prstGeom xmlns:a="http://schemas.openxmlformats.org/drawingml/2006/main" prst="rect">
+            <a:avLst/>
+          </a:prstGeom>
+          <a:noFill xmlns:a="http://schemas.openxmlformats.org/drawingml/2006/main"/>
+          <a:ln xmlns:a="http://schemas.openxmlformats.org/drawingml/2006/main" w="0">
+            <a:noFill/>
+            <a:prstDash val="solid"/>
+          </a:ln>
+        </p:spPr>
+        <p:txBody>
+          <a:bodyPr xmlns:a="http://schemas.openxmlformats.org/drawingml/2006/main" lIns="0" tIns="0" rIns="0" bIns="0" anchor="t">
+            <a:normAutofit fontScale="100000"/>
+          </a:bodyPr>
+          <a:lstStyle xmlns:a="http://schemas.openxmlformats.org/drawingml/2006/main"/>
+          <a:p xmlns:a="http://schemas.openxmlformats.org/drawingml/2006/main">
+            <a:pPr algn="l">
+              <a:lnSpc>
+                <a:spcPct val="105000"/>
+              </a:lnSpc>
+              <a:buNone/>
+              <a:defRPr sz="825" b="1" i="0">
+                <a:solidFill>
+                  <a:srgbClr val="586A73"/>
+                </a:solidFill>
+                <a:latin typeface="Aptos"/>
+                <a:ea typeface="Aptos"/>
+                <a:cs typeface="Aptos"/>
+              </a:defRPr>
+            </a:pPr>
+            <a:r>
+              <a:rPr sz="825" b="1" i="0">
+                <a:solidFill>
+                  <a:srgbClr val="586A73"/>
+                </a:solidFill>
+                <a:latin typeface="Aptos"/>
+                <a:ea typeface="Aptos"/>
+                <a:cs typeface="Aptos"/>
+              </a:rPr>
+              <a:t>RULES, RIGHTS, AND RUNTIMES</a:t>
+            </a:r>
+          </a:p>
+        </p:txBody>
+      </p:sp>
+      <p:sp>
+        <p:nvSpPr>
+          <p:cNvPr id="6" name="">
+            <a:extLst xmlns:a="http://schemas.openxmlformats.org/drawingml/2006/main">
+              <a:ext uri="{FF2B5EF4-FFF2-40B4-BE49-F238E27FC236}">
+                <a16:creationId xmlns:a16="http://schemas.microsoft.com/office/drawing/2014/main" id="{A87E1193-C2F2-413F-A7F8-572AEEB8E6DA}"/>
+              </a:ext>
+            </a:extLst>
+          </p:cNvPr>
+          <p:cNvSpPr>
+            <a:spLocks xmlns:a="http://schemas.openxmlformats.org/drawingml/2006/main" noGrp="1"/>
+          </p:cNvSpPr>
+          <p:nvPr/>
+        </p:nvSpPr>
+        <p:spPr>
+          <a:xfrm xmlns:a="http://schemas.openxmlformats.org/drawingml/2006/main">
+            <a:off x="11049000" y="6496050"/>
+            <a:ext cx="533400" cy="171450"/>
+          </a:xfrm>
+          <a:prstGeom xmlns:a="http://schemas.openxmlformats.org/drawingml/2006/main" prst="rect">
+            <a:avLst/>
+          </a:prstGeom>
+          <a:noFill xmlns:a="http://schemas.openxmlformats.org/drawingml/2006/main"/>
+          <a:ln xmlns:a="http://schemas.openxmlformats.org/drawingml/2006/main" w="0">
+            <a:noFill/>
+            <a:prstDash val="solid"/>
+          </a:ln>
+        </p:spPr>
+        <p:txBody>
+          <a:bodyPr xmlns:a="http://schemas.openxmlformats.org/drawingml/2006/main" lIns="0" tIns="0" rIns="0" bIns="0" anchor="t">
+            <a:normAutofit fontScale="100000"/>
+          </a:bodyPr>
+          <a:lstStyle xmlns:a="http://schemas.openxmlformats.org/drawingml/2006/main"/>
+          <a:p xmlns:a="http://schemas.openxmlformats.org/drawingml/2006/main">
+            <a:pPr algn="r">
+              <a:lnSpc>
+                <a:spcPct val="105000"/>
+              </a:lnSpc>
+              <a:buNone/>
+              <a:defRPr sz="825" b="0" i="0">
+                <a:solidFill>
+                  <a:srgbClr val="586A73"/>
+                </a:solidFill>
+                <a:latin typeface="Aptos"/>
+                <a:ea typeface="Aptos"/>
+                <a:cs typeface="Aptos"/>
+              </a:defRPr>
+            </a:pPr>
+            <a:r>
+              <a:rPr sz="825" b="0" i="0">
+                <a:solidFill>
+                  <a:srgbClr val="586A73"/>
+                </a:solidFill>
+                <a:latin typeface="Aptos"/>
+                <a:ea typeface="Aptos"/>
+                <a:cs typeface="Aptos"/>
+              </a:rPr>
+              <a:t>24</a:t>
+            </a:r>
+          </a:p>
+        </p:txBody>
+      </p:sp>
+      <p:sp>
+        <p:nvSpPr>
+          <p:cNvPr id="7" name="">
+            <a:extLst xmlns:a="http://schemas.openxmlformats.org/drawingml/2006/main">
+              <a:ext uri="{FF2B5EF4-FFF2-40B4-BE49-F238E27FC236}">
+                <a16:creationId xmlns:a16="http://schemas.microsoft.com/office/drawing/2014/main" id="{DB2602BB-59D0-4F71-A472-82DC6F97DE65}"/>
+              </a:ext>
+            </a:extLst>
+          </p:cNvPr>
+          <p:cNvSpPr>
+            <a:spLocks xmlns:a="http://schemas.openxmlformats.org/drawingml/2006/main" noGrp="1"/>
+          </p:cNvSpPr>
+          <p:nvPr/>
+        </p:nvSpPr>
+        <p:spPr>
+          <a:xfrm xmlns:a="http://schemas.openxmlformats.org/drawingml/2006/main">
+            <a:off x="762000" y="2171700"/>
+            <a:ext cx="2352675" cy="1809750"/>
+          </a:xfrm>
+          <a:prstGeom xmlns:a="http://schemas.openxmlformats.org/drawingml/2006/main" prst="rect">
+            <a:avLst/>
+          </a:prstGeom>
+          <a:solidFill xmlns:a="http://schemas.openxmlformats.org/drawingml/2006/main">
+            <a:srgbClr val="E8F1ED"/>
+          </a:solidFill>
+          <a:ln xmlns:a="http://schemas.openxmlformats.org/drawingml/2006/main" w="9525">
+            <a:solidFill>
+              <a:srgbClr val="CCD5D2"/>
+            </a:solidFill>
+            <a:prstDash val="solid"/>
+          </a:ln>
+        </p:spPr>
+      </p:sp>
+      <p:sp>
+        <p:nvSpPr>
+          <p:cNvPr id="8" name="">
+            <a:extLst xmlns:a="http://schemas.openxmlformats.org/drawingml/2006/main">
+              <a:ext uri="{FF2B5EF4-FFF2-40B4-BE49-F238E27FC236}">
+                <a16:creationId xmlns:a16="http://schemas.microsoft.com/office/drawing/2014/main" id="{83469227-ED28-41A7-AB31-6630F5C7DBBF}"/>
+              </a:ext>
+            </a:extLst>
+          </p:cNvPr>
+          <p:cNvSpPr>
+            <a:spLocks xmlns:a="http://schemas.openxmlformats.org/drawingml/2006/main" noGrp="1"/>
+          </p:cNvSpPr>
+          <p:nvPr/>
+        </p:nvSpPr>
+        <p:spPr>
+          <a:xfrm xmlns:a="http://schemas.openxmlformats.org/drawingml/2006/main">
+            <a:off x="876300" y="2400300"/>
+            <a:ext cx="2124075" cy="304800"/>
+          </a:xfrm>
+          <a:prstGeom xmlns:a="http://schemas.openxmlformats.org/drawingml/2006/main" prst="rect">
+            <a:avLst/>
+          </a:prstGeom>
+          <a:noFill xmlns:a="http://schemas.openxmlformats.org/drawingml/2006/main"/>
+          <a:ln xmlns:a="http://schemas.openxmlformats.org/drawingml/2006/main" w="0">
+            <a:noFill/>
+            <a:prstDash val="solid"/>
+          </a:ln>
+        </p:spPr>
+        <p:txBody>
+          <a:bodyPr xmlns:a="http://schemas.openxmlformats.org/drawingml/2006/main" lIns="0" tIns="0" rIns="0" bIns="0" anchor="t">
+            <a:normAutofit fontScale="100000"/>
+          </a:bodyPr>
+          <a:lstStyle xmlns:a="http://schemas.openxmlformats.org/drawingml/2006/main"/>
+          <a:p xmlns:a="http://schemas.openxmlformats.org/drawingml/2006/main">
+            <a:pPr algn="ctr">
+              <a:lnSpc>
+                <a:spcPct val="105000"/>
+              </a:lnSpc>
+              <a:buNone/>
+              <a:defRPr sz="1200" b="1" i="0">
+                <a:solidFill>
+                  <a:srgbClr val="24594E"/>
+                </a:solidFill>
+                <a:latin typeface="Aptos"/>
+                <a:ea typeface="Aptos"/>
+                <a:cs typeface="Aptos"/>
+              </a:defRPr>
+            </a:pPr>
+            <a:r>
+              <a:rPr sz="1200" b="1" i="0">
+                <a:solidFill>
+                  <a:srgbClr val="24594E"/>
+                </a:solidFill>
+                <a:latin typeface="Aptos"/>
+                <a:ea typeface="Aptos"/>
+                <a:cs typeface="Aptos"/>
+              </a:rPr>
+              <a:t>INCENTIVE</a:t>
+            </a:r>
+          </a:p>
+        </p:txBody>
+      </p:sp>
+      <p:sp>
+        <p:nvSpPr>
+          <p:cNvPr id="9" name="">
+            <a:extLst xmlns:a="http://schemas.openxmlformats.org/drawingml/2006/main">
+              <a:ext uri="{FF2B5EF4-FFF2-40B4-BE49-F238E27FC236}">
+                <a16:creationId xmlns:a16="http://schemas.microsoft.com/office/drawing/2014/main" id="{6FAD6778-230C-492B-9180-E70A33602306}"/>
+              </a:ext>
+            </a:extLst>
+          </p:cNvPr>
+          <p:cNvSpPr>
+            <a:spLocks xmlns:a="http://schemas.openxmlformats.org/drawingml/2006/main" noGrp="1"/>
+          </p:cNvSpPr>
+          <p:nvPr/>
+        </p:nvSpPr>
+        <p:spPr>
+          <a:xfrm xmlns:a="http://schemas.openxmlformats.org/drawingml/2006/main">
+            <a:off x="914400" y="2857500"/>
+            <a:ext cx="2047875" cy="971550"/>
+          </a:xfrm>
+          <a:prstGeom xmlns:a="http://schemas.openxmlformats.org/drawingml/2006/main" prst="rect">
+            <a:avLst/>
+          </a:prstGeom>
+          <a:noFill xmlns:a="http://schemas.openxmlformats.org/drawingml/2006/main"/>
+          <a:ln xmlns:a="http://schemas.openxmlformats.org/drawingml/2006/main" w="0">
+            <a:noFill/>
+            <a:prstDash val="solid"/>
+          </a:ln>
+        </p:spPr>
+        <p:txBody>
+          <a:bodyPr xmlns:a="http://schemas.openxmlformats.org/drawingml/2006/main" lIns="0" tIns="0" rIns="0" bIns="0" anchor="ctr">
+            <a:normAutofit fontScale="100000"/>
+          </a:bodyPr>
+          <a:lstStyle xmlns:a="http://schemas.openxmlformats.org/drawingml/2006/main"/>
+          <a:p xmlns:a="http://schemas.openxmlformats.org/drawingml/2006/main">
+            <a:pPr algn="ctr">
+              <a:lnSpc>
+                <a:spcPct val="105000"/>
+              </a:lnSpc>
+              <a:buNone/>
+              <a:defRPr sz="1650" b="0" i="0">
+                <a:solidFill>
+                  <a:srgbClr val="17242D"/>
+                </a:solidFill>
+                <a:latin typeface="Aptos"/>
+                <a:ea typeface="Aptos"/>
+                <a:cs typeface="Aptos"/>
+              </a:defRPr>
+            </a:pPr>
+            <a:r>
+              <a:rPr sz="1650" b="0" i="0">
+                <a:solidFill>
+                  <a:srgbClr val="17242D"/>
+                </a:solidFill>
+                <a:latin typeface="Aptos"/>
+                <a:ea typeface="Aptos"/>
+                <a:cs typeface="Aptos"/>
+              </a:rPr>
+              <a:t>What creation needs support?</a:t>
+            </a:r>
+          </a:p>
+        </p:txBody>
+      </p:sp>
+      <p:sp>
+        <p:nvSpPr>
+          <p:cNvPr id="10" name="">
+            <a:extLst xmlns:a="http://schemas.openxmlformats.org/drawingml/2006/main">
+              <a:ext uri="{FF2B5EF4-FFF2-40B4-BE49-F238E27FC236}">
+                <a16:creationId xmlns:a16="http://schemas.microsoft.com/office/drawing/2014/main" id="{68A45739-1309-41CF-8B30-FF8C188ECD13}"/>
+              </a:ext>
+            </a:extLst>
+          </p:cNvPr>
+          <p:cNvSpPr>
+            <a:spLocks xmlns:a="http://schemas.openxmlformats.org/drawingml/2006/main" noGrp="1"/>
+          </p:cNvSpPr>
+          <p:nvPr/>
+        </p:nvSpPr>
+        <p:spPr>
+          <a:xfrm xmlns:a="http://schemas.openxmlformats.org/drawingml/2006/main">
+            <a:off x="3114675" y="2857500"/>
+            <a:ext cx="419100" cy="457200"/>
+          </a:xfrm>
+          <a:prstGeom xmlns:a="http://schemas.openxmlformats.org/drawingml/2006/main" prst="rect">
+            <a:avLst/>
+          </a:prstGeom>
+          <a:noFill xmlns:a="http://schemas.openxmlformats.org/drawingml/2006/main"/>
+          <a:ln xmlns:a="http://schemas.openxmlformats.org/drawingml/2006/main" w="0">
+            <a:noFill/>
+            <a:prstDash val="solid"/>
+          </a:ln>
+        </p:spPr>
+        <p:txBody>
+          <a:bodyPr xmlns:a="http://schemas.openxmlformats.org/drawingml/2006/main" lIns="0" tIns="0" rIns="0" bIns="0" anchor="ctr">
+            <a:normAutofit fontScale="100000"/>
+          </a:bodyPr>
+          <a:lstStyle xmlns:a="http://schemas.openxmlformats.org/drawingml/2006/main"/>
+          <a:p xmlns:a="http://schemas.openxmlformats.org/drawingml/2006/main">
+            <a:pPr algn="ctr">
+              <a:lnSpc>
+                <a:spcPct val="105000"/>
+              </a:lnSpc>
+              <a:buNone/>
+              <a:defRPr sz="2550" b="1" i="0">
+                <a:solidFill>
+                  <a:srgbClr val="B88424"/>
+                </a:solidFill>
+                <a:latin typeface="Aptos"/>
+                <a:ea typeface="Aptos"/>
+                <a:cs typeface="Aptos"/>
+              </a:defRPr>
+            </a:pPr>
+            <a:r>
+              <a:rPr sz="2550" b="1" i="0">
+                <a:solidFill>
+                  <a:srgbClr val="B88424"/>
+                </a:solidFill>
+                <a:latin typeface="Aptos"/>
+                <a:ea typeface="Aptos"/>
+                <a:cs typeface="Aptos"/>
+              </a:rPr>
+              <a:t>→</a:t>
+            </a:r>
+          </a:p>
+        </p:txBody>
+      </p:sp>
+      <p:sp>
+        <p:nvSpPr>
+          <p:cNvPr id="11" name="">
+            <a:extLst xmlns:a="http://schemas.openxmlformats.org/drawingml/2006/main">
+              <a:ext uri="{FF2B5EF4-FFF2-40B4-BE49-F238E27FC236}">
+                <a16:creationId xmlns:a16="http://schemas.microsoft.com/office/drawing/2014/main" id="{97E7F350-93C7-4E84-B319-D9ACAE02F3A0}"/>
+              </a:ext>
+            </a:extLst>
+          </p:cNvPr>
+          <p:cNvSpPr>
+            <a:spLocks xmlns:a="http://schemas.openxmlformats.org/drawingml/2006/main" noGrp="1"/>
+          </p:cNvSpPr>
+          <p:nvPr/>
+        </p:nvSpPr>
+        <p:spPr>
+          <a:xfrm xmlns:a="http://schemas.openxmlformats.org/drawingml/2006/main">
+            <a:off x="3533775" y="2171700"/>
+            <a:ext cx="2352675" cy="1809750"/>
+          </a:xfrm>
+          <a:prstGeom xmlns:a="http://schemas.openxmlformats.org/drawingml/2006/main" prst="rect">
+            <a:avLst/>
+          </a:prstGeom>
+          <a:solidFill xmlns:a="http://schemas.openxmlformats.org/drawingml/2006/main">
+            <a:srgbClr val="F6F0DF"/>
+          </a:solidFill>
+          <a:ln xmlns:a="http://schemas.openxmlformats.org/drawingml/2006/main" w="9525">
+            <a:solidFill>
+              <a:srgbClr val="CCD5D2"/>
+            </a:solidFill>
+            <a:prstDash val="solid"/>
+          </a:ln>
+        </p:spPr>
+      </p:sp>
+      <p:sp>
+        <p:nvSpPr>
+          <p:cNvPr id="12" name="">
+            <a:extLst xmlns:a="http://schemas.openxmlformats.org/drawingml/2006/main">
+              <a:ext uri="{FF2B5EF4-FFF2-40B4-BE49-F238E27FC236}">
+                <a16:creationId xmlns:a16="http://schemas.microsoft.com/office/drawing/2014/main" id="{C2865EA7-6876-49E8-8DD2-F478CD4D2CDD}"/>
+              </a:ext>
+            </a:extLst>
+          </p:cNvPr>
+          <p:cNvSpPr>
+            <a:spLocks xmlns:a="http://schemas.openxmlformats.org/drawingml/2006/main" noGrp="1"/>
+          </p:cNvSpPr>
+          <p:nvPr/>
+        </p:nvSpPr>
+        <p:spPr>
+          <a:xfrm xmlns:a="http://schemas.openxmlformats.org/drawingml/2006/main">
+            <a:off x="3648075" y="2400300"/>
+            <a:ext cx="2124075" cy="304800"/>
+          </a:xfrm>
+          <a:prstGeom xmlns:a="http://schemas.openxmlformats.org/drawingml/2006/main" prst="rect">
+            <a:avLst/>
+          </a:prstGeom>
+          <a:noFill xmlns:a="http://schemas.openxmlformats.org/drawingml/2006/main"/>
+          <a:ln xmlns:a="http://schemas.openxmlformats.org/drawingml/2006/main" w="0">
+            <a:noFill/>
+            <a:prstDash val="solid"/>
+          </a:ln>
+        </p:spPr>
+        <p:txBody>
+          <a:bodyPr xmlns:a="http://schemas.openxmlformats.org/drawingml/2006/main" lIns="0" tIns="0" rIns="0" bIns="0" anchor="t">
+            <a:normAutofit fontScale="100000"/>
+          </a:bodyPr>
+          <a:lstStyle xmlns:a="http://schemas.openxmlformats.org/drawingml/2006/main"/>
+          <a:p xmlns:a="http://schemas.openxmlformats.org/drawingml/2006/main">
+            <a:pPr algn="ctr">
+              <a:lnSpc>
+                <a:spcPct val="105000"/>
+              </a:lnSpc>
+              <a:buNone/>
+              <a:defRPr sz="1200" b="1" i="0">
+                <a:solidFill>
+                  <a:srgbClr val="75530D"/>
+                </a:solidFill>
+                <a:latin typeface="Aptos"/>
+                <a:ea typeface="Aptos"/>
+                <a:cs typeface="Aptos"/>
+              </a:defRPr>
+            </a:pPr>
+            <a:r>
+              <a:rPr sz="1200" b="1" i="0">
+                <a:solidFill>
+                  <a:srgbClr val="75530D"/>
+                </a:solidFill>
+                <a:latin typeface="Aptos"/>
+                <a:ea typeface="Aptos"/>
+                <a:cs typeface="Aptos"/>
+              </a:rPr>
+              <a:t>BOUNDARY</a:t>
+            </a:r>
+          </a:p>
+        </p:txBody>
+      </p:sp>
+      <p:sp>
+        <p:nvSpPr>
+          <p:cNvPr id="13" name="">
+            <a:extLst xmlns:a="http://schemas.openxmlformats.org/drawingml/2006/main">
+              <a:ext uri="{FF2B5EF4-FFF2-40B4-BE49-F238E27FC236}">
+                <a16:creationId xmlns:a16="http://schemas.microsoft.com/office/drawing/2014/main" id="{88D135D2-941E-4B4C-8AA7-782A7EC29E49}"/>
+              </a:ext>
+            </a:extLst>
+          </p:cNvPr>
+          <p:cNvSpPr>
+            <a:spLocks xmlns:a="http://schemas.openxmlformats.org/drawingml/2006/main" noGrp="1"/>
+          </p:cNvSpPr>
+          <p:nvPr/>
+        </p:nvSpPr>
+        <p:spPr>
+          <a:xfrm xmlns:a="http://schemas.openxmlformats.org/drawingml/2006/main">
+            <a:off x="3686175" y="2857500"/>
+            <a:ext cx="2047875" cy="971550"/>
+          </a:xfrm>
+          <a:prstGeom xmlns:a="http://schemas.openxmlformats.org/drawingml/2006/main" prst="rect">
+            <a:avLst/>
+          </a:prstGeom>
+          <a:noFill xmlns:a="http://schemas.openxmlformats.org/drawingml/2006/main"/>
+          <a:ln xmlns:a="http://schemas.openxmlformats.org/drawingml/2006/main" w="0">
+            <a:noFill/>
+            <a:prstDash val="solid"/>
+          </a:ln>
+        </p:spPr>
+        <p:txBody>
+          <a:bodyPr xmlns:a="http://schemas.openxmlformats.org/drawingml/2006/main" lIns="0" tIns="0" rIns="0" bIns="0" anchor="ctr">
+            <a:normAutofit fontScale="100000"/>
+          </a:bodyPr>
+          <a:lstStyle xmlns:a="http://schemas.openxmlformats.org/drawingml/2006/main"/>
+          <a:p xmlns:a="http://schemas.openxmlformats.org/drawingml/2006/main">
+            <a:pPr algn="ctr">
+              <a:lnSpc>
+                <a:spcPct val="105000"/>
+              </a:lnSpc>
+              <a:buNone/>
+              <a:defRPr sz="1650" b="0" i="0">
+                <a:solidFill>
+                  <a:srgbClr val="17242D"/>
+                </a:solidFill>
+                <a:latin typeface="Aptos"/>
+                <a:ea typeface="Aptos"/>
+                <a:cs typeface="Aptos"/>
+              </a:defRPr>
+            </a:pPr>
+            <a:r>
+              <a:rPr sz="1650" b="0" i="0">
+                <a:solidFill>
+                  <a:srgbClr val="17242D"/>
+                </a:solidFill>
+                <a:latin typeface="Aptos"/>
+                <a:ea typeface="Aptos"/>
+                <a:cs typeface="Aptos"/>
+              </a:rPr>
+              <a:t>What conduct is controlled?</a:t>
+            </a:r>
+          </a:p>
+        </p:txBody>
+      </p:sp>
+      <p:sp>
+        <p:nvSpPr>
+          <p:cNvPr id="14" name="">
+            <a:extLst xmlns:a="http://schemas.openxmlformats.org/drawingml/2006/main">
+              <a:ext uri="{FF2B5EF4-FFF2-40B4-BE49-F238E27FC236}">
+                <a16:creationId xmlns:a16="http://schemas.microsoft.com/office/drawing/2014/main" id="{0A09B415-D876-41A0-88AC-E446F9DE0D19}"/>
+              </a:ext>
+            </a:extLst>
+          </p:cNvPr>
+          <p:cNvSpPr>
+            <a:spLocks xmlns:a="http://schemas.openxmlformats.org/drawingml/2006/main" noGrp="1"/>
+          </p:cNvSpPr>
+          <p:nvPr/>
+        </p:nvSpPr>
+        <p:spPr>
+          <a:xfrm xmlns:a="http://schemas.openxmlformats.org/drawingml/2006/main">
+            <a:off x="5886450" y="2857500"/>
+            <a:ext cx="419100" cy="457200"/>
+          </a:xfrm>
+          <a:prstGeom xmlns:a="http://schemas.openxmlformats.org/drawingml/2006/main" prst="rect">
+            <a:avLst/>
+          </a:prstGeom>
+          <a:noFill xmlns:a="http://schemas.openxmlformats.org/drawingml/2006/main"/>
+          <a:ln xmlns:a="http://schemas.openxmlformats.org/drawingml/2006/main" w="0">
+            <a:noFill/>
+            <a:prstDash val="solid"/>
+          </a:ln>
+        </p:spPr>
+        <p:txBody>
+          <a:bodyPr xmlns:a="http://schemas.openxmlformats.org/drawingml/2006/main" lIns="0" tIns="0" rIns="0" bIns="0" anchor="ctr">
+            <a:normAutofit fontScale="100000"/>
+          </a:bodyPr>
+          <a:lstStyle xmlns:a="http://schemas.openxmlformats.org/drawingml/2006/main"/>
+          <a:p xmlns:a="http://schemas.openxmlformats.org/drawingml/2006/main">
+            <a:pPr algn="ctr">
+              <a:lnSpc>
+                <a:spcPct val="105000"/>
+              </a:lnSpc>
+              <a:buNone/>
+              <a:defRPr sz="2550" b="1" i="0">
+                <a:solidFill>
+                  <a:srgbClr val="B88424"/>
+                </a:solidFill>
+                <a:latin typeface="Aptos"/>
+                <a:ea typeface="Aptos"/>
+                <a:cs typeface="Aptos"/>
+              </a:defRPr>
+            </a:pPr>
+            <a:r>
+              <a:rPr sz="2550" b="1" i="0">
+                <a:solidFill>
+                  <a:srgbClr val="B88424"/>
+                </a:solidFill>
+                <a:latin typeface="Aptos"/>
+                <a:ea typeface="Aptos"/>
+                <a:cs typeface="Aptos"/>
+              </a:rPr>
+              <a:t>→</a:t>
+            </a:r>
+          </a:p>
+        </p:txBody>
+      </p:sp>
+      <p:sp>
+        <p:nvSpPr>
+          <p:cNvPr id="15" name="">
+            <a:extLst xmlns:a="http://schemas.openxmlformats.org/drawingml/2006/main">
+              <a:ext uri="{FF2B5EF4-FFF2-40B4-BE49-F238E27FC236}">
+                <a16:creationId xmlns:a16="http://schemas.microsoft.com/office/drawing/2014/main" id="{AB40E291-21A6-4106-87D6-4C7B7CCCE6F0}"/>
+              </a:ext>
+            </a:extLst>
+          </p:cNvPr>
+          <p:cNvSpPr>
+            <a:spLocks xmlns:a="http://schemas.openxmlformats.org/drawingml/2006/main" noGrp="1"/>
+          </p:cNvSpPr>
+          <p:nvPr/>
+        </p:nvSpPr>
+        <p:spPr>
+          <a:xfrm xmlns:a="http://schemas.openxmlformats.org/drawingml/2006/main">
+            <a:off x="6305550" y="2171700"/>
+            <a:ext cx="2352675" cy="1809750"/>
+          </a:xfrm>
+          <a:prstGeom xmlns:a="http://schemas.openxmlformats.org/drawingml/2006/main" prst="rect">
+            <a:avLst/>
+          </a:prstGeom>
+          <a:solidFill xmlns:a="http://schemas.openxmlformats.org/drawingml/2006/main">
+            <a:srgbClr val="F5EAE6"/>
+          </a:solidFill>
+          <a:ln xmlns:a="http://schemas.openxmlformats.org/drawingml/2006/main" w="9525">
+            <a:solidFill>
+              <a:srgbClr val="CCD5D2"/>
+            </a:solidFill>
+            <a:prstDash val="solid"/>
+          </a:ln>
+        </p:spPr>
+      </p:sp>
+      <p:sp>
+        <p:nvSpPr>
+          <p:cNvPr id="16" name="">
+            <a:extLst xmlns:a="http://schemas.openxmlformats.org/drawingml/2006/main">
+              <a:ext uri="{FF2B5EF4-FFF2-40B4-BE49-F238E27FC236}">
+                <a16:creationId xmlns:a16="http://schemas.microsoft.com/office/drawing/2014/main" id="{77A26336-A3D6-454A-93EB-47EB3F98C4CD}"/>
+              </a:ext>
+            </a:extLst>
+          </p:cNvPr>
+          <p:cNvSpPr>
+            <a:spLocks xmlns:a="http://schemas.openxmlformats.org/drawingml/2006/main" noGrp="1"/>
+          </p:cNvSpPr>
+          <p:nvPr/>
+        </p:nvSpPr>
+        <p:spPr>
+          <a:xfrm xmlns:a="http://schemas.openxmlformats.org/drawingml/2006/main">
+            <a:off x="6419850" y="2400300"/>
+            <a:ext cx="2124075" cy="304800"/>
+          </a:xfrm>
+          <a:prstGeom xmlns:a="http://schemas.openxmlformats.org/drawingml/2006/main" prst="rect">
+            <a:avLst/>
+          </a:prstGeom>
+          <a:noFill xmlns:a="http://schemas.openxmlformats.org/drawingml/2006/main"/>
+          <a:ln xmlns:a="http://schemas.openxmlformats.org/drawingml/2006/main" w="0">
+            <a:noFill/>
+            <a:prstDash val="solid"/>
+          </a:ln>
+        </p:spPr>
+        <p:txBody>
+          <a:bodyPr xmlns:a="http://schemas.openxmlformats.org/drawingml/2006/main" lIns="0" tIns="0" rIns="0" bIns="0" anchor="t">
+            <a:normAutofit fontScale="100000"/>
+          </a:bodyPr>
+          <a:lstStyle xmlns:a="http://schemas.openxmlformats.org/drawingml/2006/main"/>
+          <a:p xmlns:a="http://schemas.openxmlformats.org/drawingml/2006/main">
+            <a:pPr algn="ctr">
+              <a:lnSpc>
+                <a:spcPct val="105000"/>
+              </a:lnSpc>
+              <a:buNone/>
+              <a:defRPr sz="1200" b="1" i="0">
+                <a:solidFill>
+                  <a:srgbClr val="9A462F"/>
+                </a:solidFill>
+                <a:latin typeface="Aptos"/>
+                <a:ea typeface="Aptos"/>
+                <a:cs typeface="Aptos"/>
+              </a:defRPr>
+            </a:pPr>
+            <a:r>
+              <a:rPr sz="1200" b="1" i="0">
+                <a:solidFill>
+                  <a:srgbClr val="9A462F"/>
+                </a:solidFill>
+                <a:latin typeface="Aptos"/>
+                <a:ea typeface="Aptos"/>
+                <a:cs typeface="Aptos"/>
+              </a:rPr>
+              <a:t>ACCESS</a:t>
+            </a:r>
+          </a:p>
+        </p:txBody>
+      </p:sp>
+      <p:sp>
+        <p:nvSpPr>
+          <p:cNvPr id="17" name="">
+            <a:extLst xmlns:a="http://schemas.openxmlformats.org/drawingml/2006/main">
+              <a:ext uri="{FF2B5EF4-FFF2-40B4-BE49-F238E27FC236}">
+                <a16:creationId xmlns:a16="http://schemas.microsoft.com/office/drawing/2014/main" id="{2012772E-073E-4799-A007-570629E41588}"/>
+              </a:ext>
+            </a:extLst>
+          </p:cNvPr>
+          <p:cNvSpPr>
+            <a:spLocks xmlns:a="http://schemas.openxmlformats.org/drawingml/2006/main" noGrp="1"/>
+          </p:cNvSpPr>
+          <p:nvPr/>
+        </p:nvSpPr>
+        <p:spPr>
+          <a:xfrm xmlns:a="http://schemas.openxmlformats.org/drawingml/2006/main">
+            <a:off x="6457950" y="2857500"/>
+            <a:ext cx="2047875" cy="971550"/>
+          </a:xfrm>
+          <a:prstGeom xmlns:a="http://schemas.openxmlformats.org/drawingml/2006/main" prst="rect">
+            <a:avLst/>
+          </a:prstGeom>
+          <a:noFill xmlns:a="http://schemas.openxmlformats.org/drawingml/2006/main"/>
+          <a:ln xmlns:a="http://schemas.openxmlformats.org/drawingml/2006/main" w="0">
+            <a:noFill/>
+            <a:prstDash val="solid"/>
+          </a:ln>
+        </p:spPr>
+        <p:txBody>
+          <a:bodyPr xmlns:a="http://schemas.openxmlformats.org/drawingml/2006/main" lIns="0" tIns="0" rIns="0" bIns="0" anchor="ctr">
+            <a:normAutofit fontScale="100000"/>
+          </a:bodyPr>
+          <a:lstStyle xmlns:a="http://schemas.openxmlformats.org/drawingml/2006/main"/>
+          <a:p xmlns:a="http://schemas.openxmlformats.org/drawingml/2006/main">
+            <a:pPr algn="ctr">
+              <a:lnSpc>
+                <a:spcPct val="105000"/>
+              </a:lnSpc>
+              <a:buNone/>
+              <a:defRPr sz="1650" b="0" i="0">
+                <a:solidFill>
+                  <a:srgbClr val="17242D"/>
+                </a:solidFill>
+                <a:latin typeface="Aptos"/>
+                <a:ea typeface="Aptos"/>
+                <a:cs typeface="Aptos"/>
+              </a:defRPr>
+            </a:pPr>
+            <a:r>
+              <a:rPr sz="1650" b="0" i="0">
+                <a:solidFill>
+                  <a:srgbClr val="17242D"/>
+                </a:solidFill>
+                <a:latin typeface="Aptos"/>
+                <a:ea typeface="Aptos"/>
+                <a:cs typeface="Aptos"/>
+              </a:rPr>
+              <a:t>Which reuse should remain cheap?</a:t>
+            </a:r>
+          </a:p>
+        </p:txBody>
+      </p:sp>
+      <p:sp>
+        <p:nvSpPr>
+          <p:cNvPr id="18" name="">
+            <a:extLst xmlns:a="http://schemas.openxmlformats.org/drawingml/2006/main">
+              <a:ext uri="{FF2B5EF4-FFF2-40B4-BE49-F238E27FC236}">
+                <a16:creationId xmlns:a16="http://schemas.microsoft.com/office/drawing/2014/main" id="{AC8C32B1-DC5D-47AB-9867-58F1A0058848}"/>
+              </a:ext>
+            </a:extLst>
+          </p:cNvPr>
+          <p:cNvSpPr>
+            <a:spLocks xmlns:a="http://schemas.openxmlformats.org/drawingml/2006/main" noGrp="1"/>
+          </p:cNvSpPr>
+          <p:nvPr/>
+        </p:nvSpPr>
+        <p:spPr>
+          <a:xfrm xmlns:a="http://schemas.openxmlformats.org/drawingml/2006/main">
+            <a:off x="8658225" y="2857500"/>
+            <a:ext cx="419100" cy="457200"/>
+          </a:xfrm>
+          <a:prstGeom xmlns:a="http://schemas.openxmlformats.org/drawingml/2006/main" prst="rect">
+            <a:avLst/>
+          </a:prstGeom>
+          <a:noFill xmlns:a="http://schemas.openxmlformats.org/drawingml/2006/main"/>
+          <a:ln xmlns:a="http://schemas.openxmlformats.org/drawingml/2006/main" w="0">
+            <a:noFill/>
+            <a:prstDash val="solid"/>
+          </a:ln>
+        </p:spPr>
+        <p:txBody>
+          <a:bodyPr xmlns:a="http://schemas.openxmlformats.org/drawingml/2006/main" lIns="0" tIns="0" rIns="0" bIns="0" anchor="ctr">
+            <a:normAutofit fontScale="100000"/>
+          </a:bodyPr>
+          <a:lstStyle xmlns:a="http://schemas.openxmlformats.org/drawingml/2006/main"/>
+          <a:p xmlns:a="http://schemas.openxmlformats.org/drawingml/2006/main">
+            <a:pPr algn="ctr">
+              <a:lnSpc>
+                <a:spcPct val="105000"/>
+              </a:lnSpc>
+              <a:buNone/>
+              <a:defRPr sz="2550" b="1" i="0">
+                <a:solidFill>
+                  <a:srgbClr val="B88424"/>
+                </a:solidFill>
+                <a:latin typeface="Aptos"/>
+                <a:ea typeface="Aptos"/>
+                <a:cs typeface="Aptos"/>
+              </a:defRPr>
+            </a:pPr>
+            <a:r>
+              <a:rPr sz="2550" b="1" i="0">
+                <a:solidFill>
+                  <a:srgbClr val="B88424"/>
+                </a:solidFill>
+                <a:latin typeface="Aptos"/>
+                <a:ea typeface="Aptos"/>
+                <a:cs typeface="Aptos"/>
+              </a:rPr>
+              <a:t>→</a:t>
+            </a:r>
+          </a:p>
+        </p:txBody>
+      </p:sp>
+      <p:sp>
+        <p:nvSpPr>
+          <p:cNvPr id="19" name="">
+            <a:extLst xmlns:a="http://schemas.openxmlformats.org/drawingml/2006/main">
+              <a:ext uri="{FF2B5EF4-FFF2-40B4-BE49-F238E27FC236}">
+                <a16:creationId xmlns:a16="http://schemas.microsoft.com/office/drawing/2014/main" id="{9A4C84A8-CD13-4AC4-B095-463A96F80628}"/>
+              </a:ext>
+            </a:extLst>
+          </p:cNvPr>
+          <p:cNvSpPr>
+            <a:spLocks xmlns:a="http://schemas.openxmlformats.org/drawingml/2006/main" noGrp="1"/>
+          </p:cNvSpPr>
+          <p:nvPr/>
+        </p:nvSpPr>
+        <p:spPr>
+          <a:xfrm xmlns:a="http://schemas.openxmlformats.org/drawingml/2006/main">
+            <a:off x="9077325" y="2171700"/>
+            <a:ext cx="2352675" cy="1809750"/>
+          </a:xfrm>
+          <a:prstGeom xmlns:a="http://schemas.openxmlformats.org/drawingml/2006/main" prst="rect">
+            <a:avLst/>
+          </a:prstGeom>
+          <a:solidFill xmlns:a="http://schemas.openxmlformats.org/drawingml/2006/main">
+            <a:srgbClr val="E9F1F5"/>
+          </a:solidFill>
+          <a:ln xmlns:a="http://schemas.openxmlformats.org/drawingml/2006/main" w="9525">
+            <a:solidFill>
+              <a:srgbClr val="CCD5D2"/>
+            </a:solidFill>
+            <a:prstDash val="solid"/>
+          </a:ln>
+        </p:spPr>
+      </p:sp>
+      <p:sp>
+        <p:nvSpPr>
+          <p:cNvPr id="20" name="">
+            <a:extLst xmlns:a="http://schemas.openxmlformats.org/drawingml/2006/main">
+              <a:ext uri="{FF2B5EF4-FFF2-40B4-BE49-F238E27FC236}">
+                <a16:creationId xmlns:a16="http://schemas.microsoft.com/office/drawing/2014/main" id="{CED073A7-C8D2-4981-8930-AB6B9DEB59B1}"/>
+              </a:ext>
+            </a:extLst>
+          </p:cNvPr>
+          <p:cNvSpPr>
+            <a:spLocks xmlns:a="http://schemas.openxmlformats.org/drawingml/2006/main" noGrp="1"/>
+          </p:cNvSpPr>
+          <p:nvPr/>
+        </p:nvSpPr>
+        <p:spPr>
+          <a:xfrm xmlns:a="http://schemas.openxmlformats.org/drawingml/2006/main">
+            <a:off x="9191625" y="2400300"/>
+            <a:ext cx="2124075" cy="304800"/>
+          </a:xfrm>
+          <a:prstGeom xmlns:a="http://schemas.openxmlformats.org/drawingml/2006/main" prst="rect">
+            <a:avLst/>
+          </a:prstGeom>
+          <a:noFill xmlns:a="http://schemas.openxmlformats.org/drawingml/2006/main"/>
+          <a:ln xmlns:a="http://schemas.openxmlformats.org/drawingml/2006/main" w="0">
+            <a:noFill/>
+            <a:prstDash val="solid"/>
+          </a:ln>
+        </p:spPr>
+        <p:txBody>
+          <a:bodyPr xmlns:a="http://schemas.openxmlformats.org/drawingml/2006/main" lIns="0" tIns="0" rIns="0" bIns="0" anchor="t">
+            <a:normAutofit fontScale="100000"/>
+          </a:bodyPr>
+          <a:lstStyle xmlns:a="http://schemas.openxmlformats.org/drawingml/2006/main"/>
+          <a:p xmlns:a="http://schemas.openxmlformats.org/drawingml/2006/main">
+            <a:pPr algn="ctr">
+              <a:lnSpc>
+                <a:spcPct val="105000"/>
+              </a:lnSpc>
+              <a:buNone/>
+              <a:defRPr sz="1200" b="1" i="0">
+                <a:solidFill>
+                  <a:srgbClr val="315F75"/>
+                </a:solidFill>
+                <a:latin typeface="Aptos"/>
+                <a:ea typeface="Aptos"/>
+                <a:cs typeface="Aptos"/>
+              </a:defRPr>
+            </a:pPr>
+            <a:r>
+              <a:rPr sz="1200" b="1" i="0">
+                <a:solidFill>
+                  <a:srgbClr val="315F75"/>
+                </a:solidFill>
+                <a:latin typeface="Aptos"/>
+                <a:ea typeface="Aptos"/>
+                <a:cs typeface="Aptos"/>
+              </a:rPr>
+              <a:t>GOVERNANCE</a:t>
+            </a:r>
+          </a:p>
+        </p:txBody>
+      </p:sp>
+      <p:sp>
+        <p:nvSpPr>
+          <p:cNvPr id="21" name="">
+            <a:extLst xmlns:a="http://schemas.openxmlformats.org/drawingml/2006/main">
+              <a:ext uri="{FF2B5EF4-FFF2-40B4-BE49-F238E27FC236}">
+                <a16:creationId xmlns:a16="http://schemas.microsoft.com/office/drawing/2014/main" id="{FC6CB828-3633-4D8B-B63C-BB7FFC7A64B8}"/>
+              </a:ext>
+            </a:extLst>
+          </p:cNvPr>
+          <p:cNvSpPr>
+            <a:spLocks xmlns:a="http://schemas.openxmlformats.org/drawingml/2006/main" noGrp="1"/>
+          </p:cNvSpPr>
+          <p:nvPr/>
+        </p:nvSpPr>
+        <p:spPr>
+          <a:xfrm xmlns:a="http://schemas.openxmlformats.org/drawingml/2006/main">
+            <a:off x="9229725" y="2857500"/>
+            <a:ext cx="2047875" cy="971550"/>
+          </a:xfrm>
+          <a:prstGeom xmlns:a="http://schemas.openxmlformats.org/drawingml/2006/main" prst="rect">
+            <a:avLst/>
+          </a:prstGeom>
+          <a:noFill xmlns:a="http://schemas.openxmlformats.org/drawingml/2006/main"/>
+          <a:ln xmlns:a="http://schemas.openxmlformats.org/drawingml/2006/main" w="0">
+            <a:noFill/>
+            <a:prstDash val="solid"/>
+          </a:ln>
+        </p:spPr>
+        <p:txBody>
+          <a:bodyPr xmlns:a="http://schemas.openxmlformats.org/drawingml/2006/main" lIns="0" tIns="0" rIns="0" bIns="0" anchor="ctr">
+            <a:normAutofit fontScale="100000"/>
+          </a:bodyPr>
+          <a:lstStyle xmlns:a="http://schemas.openxmlformats.org/drawingml/2006/main"/>
+          <a:p xmlns:a="http://schemas.openxmlformats.org/drawingml/2006/main">
+            <a:pPr algn="ctr">
+              <a:lnSpc>
+                <a:spcPct val="105000"/>
+              </a:lnSpc>
+              <a:buNone/>
+              <a:defRPr sz="1650" b="0" i="0">
+                <a:solidFill>
+                  <a:srgbClr val="17242D"/>
+                </a:solidFill>
+                <a:latin typeface="Aptos"/>
+                <a:ea typeface="Aptos"/>
+                <a:cs typeface="Aptos"/>
+              </a:defRPr>
+            </a:pPr>
+            <a:r>
+              <a:rPr sz="1650" b="0" i="0">
+                <a:solidFill>
+                  <a:srgbClr val="17242D"/>
+                </a:solidFill>
+                <a:latin typeface="Aptos"/>
+                <a:ea typeface="Aptos"/>
+                <a:cs typeface="Aptos"/>
+              </a:rPr>
+              <a:t>Who decides errors and remedies?</a:t>
+            </a:r>
+          </a:p>
+        </p:txBody>
+      </p:sp>
+      <p:sp>
+        <p:nvSpPr>
+          <p:cNvPr id="22" name="">
+            <a:extLst xmlns:a="http://schemas.openxmlformats.org/drawingml/2006/main">
+              <a:ext uri="{FF2B5EF4-FFF2-40B4-BE49-F238E27FC236}">
+                <a16:creationId xmlns:a16="http://schemas.microsoft.com/office/drawing/2014/main" id="{CD599E2B-B290-4848-96FC-704C8809F337}"/>
+              </a:ext>
+            </a:extLst>
+          </p:cNvPr>
+          <p:cNvSpPr>
+            <a:spLocks xmlns:a="http://schemas.openxmlformats.org/drawingml/2006/main" noGrp="1"/>
+          </p:cNvSpPr>
+          <p:nvPr/>
+        </p:nvSpPr>
+        <p:spPr>
+          <a:xfrm xmlns:a="http://schemas.openxmlformats.org/drawingml/2006/main">
+            <a:off x="1200150" y="4972050"/>
+            <a:ext cx="9791700" cy="533400"/>
+          </a:xfrm>
+          <a:prstGeom xmlns:a="http://schemas.openxmlformats.org/drawingml/2006/main" prst="rect">
+            <a:avLst/>
+          </a:prstGeom>
+          <a:noFill xmlns:a="http://schemas.openxmlformats.org/drawingml/2006/main"/>
+          <a:ln xmlns:a="http://schemas.openxmlformats.org/drawingml/2006/main" w="0">
+            <a:noFill/>
+            <a:prstDash val="solid"/>
+          </a:ln>
+        </p:spPr>
+        <p:txBody>
+          <a:bodyPr xmlns:a="http://schemas.openxmlformats.org/drawingml/2006/main" lIns="0" tIns="0" rIns="0" bIns="0" anchor="ctr">
+            <a:normAutofit fontScale="85879"/>
+          </a:bodyPr>
+          <a:lstStyle xmlns:a="http://schemas.openxmlformats.org/drawingml/2006/main"/>
+          <a:p xmlns:a="http://schemas.openxmlformats.org/drawingml/2006/main">
+            <a:pPr algn="ctr">
+              <a:lnSpc>
+                <a:spcPct val="105000"/>
+              </a:lnSpc>
+              <a:buNone/>
+              <a:defRPr sz="1950" b="1" i="0">
+                <a:solidFill>
+                  <a:srgbClr val="173F38"/>
+                </a:solidFill>
+                <a:latin typeface="Georgia"/>
+                <a:ea typeface="Georgia"/>
+                <a:cs typeface="Georgia"/>
+              </a:defRPr>
+            </a:pPr>
+            <a:r>
+              <a:rPr sz="1950" b="1" i="0">
+                <a:solidFill>
+                  <a:srgbClr val="173F38"/>
+                </a:solidFill>
+                <a:latin typeface="Georgia"/>
+                <a:ea typeface="Georgia"/>
+                <a:cs typeface="Georgia"/>
+              </a:rPr>
+              <a:t>Evaluate the full bundle, including licensing, notice, enforcement, and industry structure.</a:t>
+            </a:r>
+          </a:p>
+        </p:txBody>
+      </p:sp>
+    </p:spTree>
+    <p:extLst>
+      <p:ext uri="{BB962C8B-B14F-4D97-AF65-F5344CB8AC3E}">
+        <p14:creationId xmlns:p14="http://schemas.microsoft.com/office/powerpoint/2010/main" val="339648716"/>
+      </p:ext>
+    </p:extLst>
+  </p:cSld>
+</p:sld>
+</file>
+
+<file path=ppt/slides/slide25.xml><?xml version="1.0" encoding="utf-8"?>
+<p:sld xmlns:p="http://schemas.openxmlformats.org/presentationml/2006/main">
+  <p:cSld>
+    <p:bg>
+      <p:bgPr>
+        <a:solidFill xmlns:a="http://schemas.openxmlformats.org/drawingml/2006/main">
+          <a:srgbClr val="FBFCFA"/>
+        </a:solidFill>
+      </p:bgPr>
+    </p:bg>
+    <p:spTree>
+      <p:nvGrpSpPr>
+        <p:cNvPr id="1" name=""/>
+        <p:cNvGrpSpPr/>
+        <p:nvPr/>
+      </p:nvGrpSpPr>
+      <p:grpSpPr>
+        <a:xfrm xmlns:a="http://schemas.openxmlformats.org/drawingml/2006/main"/>
+      </p:grpSpPr>
+      <p:sp>
+        <p:nvSpPr>
+          <p:cNvPr id="16" name="">
+            <a:extLst xmlns:a="http://schemas.openxmlformats.org/drawingml/2006/main">
+              <a:ext uri="{FF2B5EF4-FFF2-40B4-BE49-F238E27FC236}">
+                <a16:creationId xmlns:a16="http://schemas.microsoft.com/office/drawing/2014/main" id="{AD03889B-11C0-4F0C-84A5-1FAB4EF7C82C}"/>
+              </a:ext>
+            </a:extLst>
+          </p:cNvPr>
+          <p:cNvSpPr>
+            <a:spLocks xmlns:a="http://schemas.openxmlformats.org/drawingml/2006/main" noGrp="1"/>
+          </p:cNvSpPr>
+          <p:nvPr/>
+        </p:nvSpPr>
+        <p:spPr>
+          <a:xfrm xmlns:a="http://schemas.openxmlformats.org/drawingml/2006/main">
+            <a:off x="514350" y="400050"/>
+            <a:ext cx="685800" cy="57150"/>
+          </a:xfrm>
+          <a:prstGeom xmlns:a="http://schemas.openxmlformats.org/drawingml/2006/main" prst="rect">
+            <a:avLst/>
+          </a:prstGeom>
+          <a:solidFill xmlns:a="http://schemas.openxmlformats.org/drawingml/2006/main">
+            <a:srgbClr val="9A462F"/>
+          </a:solidFill>
+          <a:ln xmlns:a="http://schemas.openxmlformats.org/drawingml/2006/main" w="0">
+            <a:noFill/>
+            <a:prstDash val="solid"/>
+          </a:ln>
+        </p:spPr>
+      </p:sp>
+      <p:sp>
+        <p:nvSpPr>
+          <p:cNvPr id="2" name="">
+            <a:extLst xmlns:a="http://schemas.openxmlformats.org/drawingml/2006/main">
+              <a:ext uri="{FF2B5EF4-FFF2-40B4-BE49-F238E27FC236}">
+                <a16:creationId xmlns:a16="http://schemas.microsoft.com/office/drawing/2014/main" id="{C9EB2C7E-B4F7-41E3-8613-FF2347B92079}"/>
+              </a:ext>
+            </a:extLst>
+          </p:cNvPr>
+          <p:cNvSpPr>
+            <a:spLocks xmlns:a="http://schemas.openxmlformats.org/drawingml/2006/main" noGrp="1"/>
+          </p:cNvSpPr>
+          <p:nvPr/>
+        </p:nvSpPr>
+        <p:spPr>
+          <a:xfrm xmlns:a="http://schemas.openxmlformats.org/drawingml/2006/main">
+            <a:off x="1390650" y="304800"/>
+            <a:ext cx="1619250" cy="228600"/>
+          </a:xfrm>
+          <a:prstGeom xmlns:a="http://schemas.openxmlformats.org/drawingml/2006/main" prst="rect">
+            <a:avLst/>
+          </a:prstGeom>
+          <a:noFill xmlns:a="http://schemas.openxmlformats.org/drawingml/2006/main"/>
+          <a:ln xmlns:a="http://schemas.openxmlformats.org/drawingml/2006/main" w="0">
+            <a:noFill/>
+            <a:prstDash val="solid"/>
+          </a:ln>
+        </p:spPr>
+        <p:txBody>
+          <a:bodyPr xmlns:a="http://schemas.openxmlformats.org/drawingml/2006/main" lIns="0" tIns="0" rIns="0" bIns="0" anchor="t">
+            <a:normAutofit fontScale="100000"/>
+          </a:bodyPr>
+          <a:lstStyle xmlns:a="http://schemas.openxmlformats.org/drawingml/2006/main"/>
+          <a:p xmlns:a="http://schemas.openxmlformats.org/drawingml/2006/main">
+            <a:pPr algn="l">
+              <a:lnSpc>
+                <a:spcPct val="105000"/>
+              </a:lnSpc>
+              <a:buNone/>
+              <a:defRPr sz="1050" b="1" i="0">
+                <a:solidFill>
+                  <a:srgbClr val="9A462F"/>
+                </a:solidFill>
+                <a:latin typeface="Aptos"/>
+                <a:ea typeface="Aptos"/>
+                <a:cs typeface="Aptos"/>
+              </a:defRPr>
+            </a:pPr>
+            <a:r>
+              <a:rPr sz="1050" b="1" i="0">
+                <a:solidFill>
+                  <a:srgbClr val="9A462F"/>
+                </a:solidFill>
+                <a:latin typeface="Aptos"/>
+                <a:ea typeface="Aptos"/>
+                <a:cs typeface="Aptos"/>
+              </a:rPr>
+              <a:t>CHAPTER 6</a:t>
+            </a:r>
+          </a:p>
+        </p:txBody>
+      </p:sp>
+      <p:sp>
+        <p:nvSpPr>
+          <p:cNvPr id="3" name="">
+            <a:extLst xmlns:a="http://schemas.openxmlformats.org/drawingml/2006/main">
+              <a:ext uri="{FF2B5EF4-FFF2-40B4-BE49-F238E27FC236}">
+                <a16:creationId xmlns:a16="http://schemas.microsoft.com/office/drawing/2014/main" id="{0881AEC3-2813-40B1-A416-87DEAD78FD8F}"/>
+              </a:ext>
+            </a:extLst>
+          </p:cNvPr>
+          <p:cNvSpPr>
+            <a:spLocks xmlns:a="http://schemas.openxmlformats.org/drawingml/2006/main" noGrp="1"/>
+          </p:cNvSpPr>
+          <p:nvPr/>
+        </p:nvSpPr>
+        <p:spPr>
+          <a:xfrm xmlns:a="http://schemas.openxmlformats.org/drawingml/2006/main">
+            <a:off x="609600" y="685800"/>
+            <a:ext cx="10972800" cy="628650"/>
+          </a:xfrm>
+          <a:prstGeom xmlns:a="http://schemas.openxmlformats.org/drawingml/2006/main" prst="rect">
+            <a:avLst/>
+          </a:prstGeom>
+          <a:noFill xmlns:a="http://schemas.openxmlformats.org/drawingml/2006/main"/>
+          <a:ln xmlns:a="http://schemas.openxmlformats.org/drawingml/2006/main" w="0">
+            <a:noFill/>
+            <a:prstDash val="solid"/>
+          </a:ln>
+        </p:spPr>
+        <p:txBody>
+          <a:bodyPr xmlns:a="http://schemas.openxmlformats.org/drawingml/2006/main" lIns="0" tIns="0" rIns="0" bIns="0" anchor="t">
+            <a:normAutofit fontScale="100000"/>
+          </a:bodyPr>
+          <a:lstStyle xmlns:a="http://schemas.openxmlformats.org/drawingml/2006/main"/>
+          <a:p xmlns:a="http://schemas.openxmlformats.org/drawingml/2006/main">
+            <a:pPr algn="l">
+              <a:lnSpc>
+                <a:spcPct val="105000"/>
+              </a:lnSpc>
+              <a:buNone/>
+              <a:defRPr sz="3000" b="1" i="0">
+                <a:solidFill>
+                  <a:srgbClr val="17242D"/>
+                </a:solidFill>
+                <a:latin typeface="Georgia"/>
+                <a:ea typeface="Georgia"/>
+                <a:cs typeface="Georgia"/>
+              </a:defRPr>
+            </a:pPr>
+            <a:r>
+              <a:rPr sz="3000" b="1" i="0">
+                <a:solidFill>
+                  <a:srgbClr val="17242D"/>
+                </a:solidFill>
+                <a:latin typeface="Georgia"/>
+                <a:ea typeface="Georgia"/>
+                <a:cs typeface="Georgia"/>
+              </a:rPr>
+              <a:t>Law and economics is unusually useful in this field</a:t>
+            </a:r>
+          </a:p>
+        </p:txBody>
+      </p:sp>
+      <p:sp>
+        <p:nvSpPr>
+          <p:cNvPr id="4" name="">
+            <a:extLst xmlns:a="http://schemas.openxmlformats.org/drawingml/2006/main">
+              <a:ext uri="{FF2B5EF4-FFF2-40B4-BE49-F238E27FC236}">
+                <a16:creationId xmlns:a16="http://schemas.microsoft.com/office/drawing/2014/main" id="{C5C1B931-B8C7-451D-9CAF-81F8BA4124EB}"/>
+              </a:ext>
+            </a:extLst>
+          </p:cNvPr>
+          <p:cNvSpPr>
+            <a:spLocks xmlns:a="http://schemas.openxmlformats.org/drawingml/2006/main" noGrp="1"/>
+          </p:cNvSpPr>
+          <p:nvPr/>
+        </p:nvSpPr>
+        <p:spPr>
+          <a:xfrm xmlns:a="http://schemas.openxmlformats.org/drawingml/2006/main">
+            <a:off x="609600" y="6419850"/>
+            <a:ext cx="10972800" cy="9525"/>
+          </a:xfrm>
+          <a:prstGeom xmlns:a="http://schemas.openxmlformats.org/drawingml/2006/main" prst="rect">
+            <a:avLst/>
+          </a:prstGeom>
+          <a:solidFill xmlns:a="http://schemas.openxmlformats.org/drawingml/2006/main">
+            <a:srgbClr val="CCD5D2"/>
+          </a:solidFill>
+          <a:ln xmlns:a="http://schemas.openxmlformats.org/drawingml/2006/main" w="0">
+            <a:noFill/>
+            <a:prstDash val="solid"/>
+          </a:ln>
+        </p:spPr>
+      </p:sp>
+      <p:sp>
+        <p:nvSpPr>
+          <p:cNvPr id="5" name="">
+            <a:extLst xmlns:a="http://schemas.openxmlformats.org/drawingml/2006/main">
+              <a:ext uri="{FF2B5EF4-FFF2-40B4-BE49-F238E27FC236}">
+                <a16:creationId xmlns:a16="http://schemas.microsoft.com/office/drawing/2014/main" id="{B8AFC123-28B9-44AF-A725-B998999DFCF5}"/>
+              </a:ext>
+            </a:extLst>
+          </p:cNvPr>
+          <p:cNvSpPr>
+            <a:spLocks xmlns:a="http://schemas.openxmlformats.org/drawingml/2006/main" noGrp="1"/>
+          </p:cNvSpPr>
+          <p:nvPr/>
+        </p:nvSpPr>
+        <p:spPr>
+          <a:xfrm xmlns:a="http://schemas.openxmlformats.org/drawingml/2006/main">
+            <a:off x="609600" y="6515100"/>
+            <a:ext cx="2857500" cy="171450"/>
+          </a:xfrm>
+          <a:prstGeom xmlns:a="http://schemas.openxmlformats.org/drawingml/2006/main" prst="rect">
+            <a:avLst/>
+          </a:prstGeom>
+          <a:noFill xmlns:a="http://schemas.openxmlformats.org/drawingml/2006/main"/>
+          <a:ln xmlns:a="http://schemas.openxmlformats.org/drawingml/2006/main" w="0">
+            <a:noFill/>
+            <a:prstDash val="solid"/>
+          </a:ln>
+        </p:spPr>
+        <p:txBody>
+          <a:bodyPr xmlns:a="http://schemas.openxmlformats.org/drawingml/2006/main" lIns="0" tIns="0" rIns="0" bIns="0" anchor="t">
+            <a:normAutofit fontScale="100000"/>
+          </a:bodyPr>
+          <a:lstStyle xmlns:a="http://schemas.openxmlformats.org/drawingml/2006/main"/>
+          <a:p xmlns:a="http://schemas.openxmlformats.org/drawingml/2006/main">
+            <a:pPr algn="l">
+              <a:lnSpc>
+                <a:spcPct val="105000"/>
+              </a:lnSpc>
+              <a:buNone/>
+              <a:defRPr sz="825" b="1" i="0">
+                <a:solidFill>
+                  <a:srgbClr val="586A73"/>
+                </a:solidFill>
+                <a:latin typeface="Aptos"/>
+                <a:ea typeface="Aptos"/>
+                <a:cs typeface="Aptos"/>
+              </a:defRPr>
+            </a:pPr>
+            <a:r>
+              <a:rPr sz="825" b="1" i="0">
+                <a:solidFill>
+                  <a:srgbClr val="586A73"/>
+                </a:solidFill>
+                <a:latin typeface="Aptos"/>
+                <a:ea typeface="Aptos"/>
+                <a:cs typeface="Aptos"/>
+              </a:rPr>
+              <a:t>RULES, RIGHTS, AND RUNTIMES</a:t>
+            </a:r>
+          </a:p>
+        </p:txBody>
+      </p:sp>
+      <p:sp>
+        <p:nvSpPr>
+          <p:cNvPr id="6" name="">
+            <a:extLst xmlns:a="http://schemas.openxmlformats.org/drawingml/2006/main">
+              <a:ext uri="{FF2B5EF4-FFF2-40B4-BE49-F238E27FC236}">
+                <a16:creationId xmlns:a16="http://schemas.microsoft.com/office/drawing/2014/main" id="{66A02E32-1ADA-435E-AABA-9EE95B55FFAD}"/>
+              </a:ext>
+            </a:extLst>
+          </p:cNvPr>
+          <p:cNvSpPr>
+            <a:spLocks xmlns:a="http://schemas.openxmlformats.org/drawingml/2006/main" noGrp="1"/>
+          </p:cNvSpPr>
+          <p:nvPr/>
+        </p:nvSpPr>
+        <p:spPr>
+          <a:xfrm xmlns:a="http://schemas.openxmlformats.org/drawingml/2006/main">
+            <a:off x="11049000" y="6496050"/>
+            <a:ext cx="533400" cy="171450"/>
+          </a:xfrm>
+          <a:prstGeom xmlns:a="http://schemas.openxmlformats.org/drawingml/2006/main" prst="rect">
+            <a:avLst/>
+          </a:prstGeom>
+          <a:noFill xmlns:a="http://schemas.openxmlformats.org/drawingml/2006/main"/>
+          <a:ln xmlns:a="http://schemas.openxmlformats.org/drawingml/2006/main" w="0">
+            <a:noFill/>
+            <a:prstDash val="solid"/>
+          </a:ln>
+        </p:spPr>
+        <p:txBody>
+          <a:bodyPr xmlns:a="http://schemas.openxmlformats.org/drawingml/2006/main" lIns="0" tIns="0" rIns="0" bIns="0" anchor="t">
+            <a:normAutofit fontScale="100000"/>
+          </a:bodyPr>
+          <a:lstStyle xmlns:a="http://schemas.openxmlformats.org/drawingml/2006/main"/>
+          <a:p xmlns:a="http://schemas.openxmlformats.org/drawingml/2006/main">
+            <a:pPr algn="r">
+              <a:lnSpc>
+                <a:spcPct val="105000"/>
+              </a:lnSpc>
+              <a:buNone/>
+              <a:defRPr sz="825" b="0" i="0">
+                <a:solidFill>
+                  <a:srgbClr val="586A73"/>
+                </a:solidFill>
+                <a:latin typeface="Aptos"/>
+                <a:ea typeface="Aptos"/>
+                <a:cs typeface="Aptos"/>
+              </a:defRPr>
+            </a:pPr>
+            <a:r>
+              <a:rPr sz="825" b="0" i="0">
+                <a:solidFill>
+                  <a:srgbClr val="586A73"/>
+                </a:solidFill>
+                <a:latin typeface="Aptos"/>
+                <a:ea typeface="Aptos"/>
+                <a:cs typeface="Aptos"/>
+              </a:rPr>
+              <a:t>25</a:t>
+            </a:r>
+          </a:p>
+        </p:txBody>
+      </p:sp>
+      <p:sp>
+        <p:nvSpPr>
+          <p:cNvPr id="7" name="">
+            <a:extLst xmlns:a="http://schemas.openxmlformats.org/drawingml/2006/main">
+              <a:ext uri="{FF2B5EF4-FFF2-40B4-BE49-F238E27FC236}">
+                <a16:creationId xmlns:a16="http://schemas.microsoft.com/office/drawing/2014/main" id="{6F377A97-8382-4F8D-BAFA-D0B39B55BF8E}"/>
+              </a:ext>
+            </a:extLst>
+          </p:cNvPr>
+          <p:cNvSpPr>
+            <a:spLocks xmlns:a="http://schemas.openxmlformats.org/drawingml/2006/main" noGrp="1"/>
+          </p:cNvSpPr>
+          <p:nvPr/>
+        </p:nvSpPr>
+        <p:spPr>
+          <a:xfrm xmlns:a="http://schemas.openxmlformats.org/drawingml/2006/main">
+            <a:off x="1257300" y="1990725"/>
+            <a:ext cx="228600" cy="457200"/>
+          </a:xfrm>
+          <a:prstGeom xmlns:a="http://schemas.openxmlformats.org/drawingml/2006/main" prst="rect">
+            <a:avLst/>
+          </a:prstGeom>
+          <a:noFill xmlns:a="http://schemas.openxmlformats.org/drawingml/2006/main"/>
+          <a:ln xmlns:a="http://schemas.openxmlformats.org/drawingml/2006/main" w="0">
+            <a:noFill/>
+            <a:prstDash val="solid"/>
+          </a:ln>
+        </p:spPr>
+        <p:txBody>
+          <a:bodyPr xmlns:a="http://schemas.openxmlformats.org/drawingml/2006/main" lIns="0" tIns="0" rIns="0" bIns="0" anchor="t">
+            <a:normAutofit fontScale="100000"/>
+          </a:bodyPr>
+          <a:lstStyle xmlns:a="http://schemas.openxmlformats.org/drawingml/2006/main"/>
+          <a:p xmlns:a="http://schemas.openxmlformats.org/drawingml/2006/main">
+            <a:pPr algn="l">
+              <a:lnSpc>
+                <a:spcPct val="105000"/>
+              </a:lnSpc>
+              <a:buNone/>
+              <a:defRPr sz="1875" b="1" i="0">
+                <a:solidFill>
+                  <a:srgbClr val="9A462F"/>
+                </a:solidFill>
+                <a:latin typeface="Aptos"/>
+                <a:ea typeface="Aptos"/>
+                <a:cs typeface="Aptos"/>
+              </a:defRPr>
+            </a:pPr>
+            <a:r>
+              <a:rPr sz="1875" b="1" i="0">
+                <a:solidFill>
+                  <a:srgbClr val="9A462F"/>
+                </a:solidFill>
+                <a:latin typeface="Aptos"/>
+                <a:ea typeface="Aptos"/>
+                <a:cs typeface="Aptos"/>
+              </a:rPr>
+              <a:t>•</a:t>
+            </a:r>
+          </a:p>
+        </p:txBody>
+      </p:sp>
+      <p:sp>
+        <p:nvSpPr>
+          <p:cNvPr id="8" name="">
+            <a:extLst xmlns:a="http://schemas.openxmlformats.org/drawingml/2006/main">
+              <a:ext uri="{FF2B5EF4-FFF2-40B4-BE49-F238E27FC236}">
+                <a16:creationId xmlns:a16="http://schemas.microsoft.com/office/drawing/2014/main" id="{CBD25A48-8FCC-400F-94BB-B85B529D1AD2}"/>
+              </a:ext>
+            </a:extLst>
+          </p:cNvPr>
+          <p:cNvSpPr>
+            <a:spLocks xmlns:a="http://schemas.openxmlformats.org/drawingml/2006/main" noGrp="1"/>
+          </p:cNvSpPr>
+          <p:nvPr/>
+        </p:nvSpPr>
+        <p:spPr>
+          <a:xfrm xmlns:a="http://schemas.openxmlformats.org/drawingml/2006/main">
+            <a:off x="1581150" y="2000250"/>
+            <a:ext cx="9353550" cy="457200"/>
+          </a:xfrm>
+          <a:prstGeom xmlns:a="http://schemas.openxmlformats.org/drawingml/2006/main" prst="rect">
+            <a:avLst/>
+          </a:prstGeom>
+          <a:noFill xmlns:a="http://schemas.openxmlformats.org/drawingml/2006/main"/>
+          <a:ln xmlns:a="http://schemas.openxmlformats.org/drawingml/2006/main" w="0">
+            <a:noFill/>
+            <a:prstDash val="solid"/>
+          </a:ln>
+        </p:spPr>
+        <p:txBody>
+          <a:bodyPr xmlns:a="http://schemas.openxmlformats.org/drawingml/2006/main" lIns="0" tIns="0" rIns="0" bIns="0" anchor="t">
+            <a:normAutofit fontScale="100000"/>
+          </a:bodyPr>
+          <a:lstStyle xmlns:a="http://schemas.openxmlformats.org/drawingml/2006/main"/>
+          <a:p xmlns:a="http://schemas.openxmlformats.org/drawingml/2006/main">
+            <a:pPr algn="l">
+              <a:lnSpc>
+                <a:spcPct val="105000"/>
+              </a:lnSpc>
+              <a:buNone/>
+              <a:defRPr sz="1875" b="0" i="0">
+                <a:solidFill>
+                  <a:srgbClr val="17242D"/>
+                </a:solidFill>
+                <a:latin typeface="Aptos"/>
+                <a:ea typeface="Aptos"/>
+                <a:cs typeface="Aptos"/>
+              </a:defRPr>
+            </a:pPr>
+            <a:r>
+              <a:rPr sz="1875" b="0" i="0">
+                <a:solidFill>
+                  <a:srgbClr val="17242D"/>
+                </a:solidFill>
+                <a:latin typeface="Aptos"/>
+                <a:ea typeface="Aptos"/>
+                <a:cs typeface="Aptos"/>
+              </a:rPr>
+              <a:t>Technology changes copying, search, verification, and bargaining costs.</a:t>
+            </a:r>
+          </a:p>
+        </p:txBody>
+      </p:sp>
+      <p:sp>
+        <p:nvSpPr>
+          <p:cNvPr id="9" name="">
+            <a:extLst xmlns:a="http://schemas.openxmlformats.org/drawingml/2006/main">
+              <a:ext uri="{FF2B5EF4-FFF2-40B4-BE49-F238E27FC236}">
+                <a16:creationId xmlns:a16="http://schemas.microsoft.com/office/drawing/2014/main" id="{656C43CC-81C0-4174-AF11-4FE6A90E09C0}"/>
+              </a:ext>
+            </a:extLst>
+          </p:cNvPr>
+          <p:cNvSpPr>
+            <a:spLocks xmlns:a="http://schemas.openxmlformats.org/drawingml/2006/main" noGrp="1"/>
+          </p:cNvSpPr>
+          <p:nvPr/>
+        </p:nvSpPr>
+        <p:spPr>
+          <a:xfrm xmlns:a="http://schemas.openxmlformats.org/drawingml/2006/main">
+            <a:off x="1257300" y="2562225"/>
+            <a:ext cx="228600" cy="457200"/>
+          </a:xfrm>
+          <a:prstGeom xmlns:a="http://schemas.openxmlformats.org/drawingml/2006/main" prst="rect">
+            <a:avLst/>
+          </a:prstGeom>
+          <a:noFill xmlns:a="http://schemas.openxmlformats.org/drawingml/2006/main"/>
+          <a:ln xmlns:a="http://schemas.openxmlformats.org/drawingml/2006/main" w="0">
+            <a:noFill/>
+            <a:prstDash val="solid"/>
+          </a:ln>
+        </p:spPr>
+        <p:txBody>
+          <a:bodyPr xmlns:a="http://schemas.openxmlformats.org/drawingml/2006/main" lIns="0" tIns="0" rIns="0" bIns="0" anchor="t">
+            <a:normAutofit fontScale="100000"/>
+          </a:bodyPr>
+          <a:lstStyle xmlns:a="http://schemas.openxmlformats.org/drawingml/2006/main"/>
+          <a:p xmlns:a="http://schemas.openxmlformats.org/drawingml/2006/main">
+            <a:pPr algn="l">
+              <a:lnSpc>
+                <a:spcPct val="105000"/>
+              </a:lnSpc>
+              <a:buNone/>
+              <a:defRPr sz="1875" b="1" i="0">
+                <a:solidFill>
+                  <a:srgbClr val="9A462F"/>
+                </a:solidFill>
+                <a:latin typeface="Aptos"/>
+                <a:ea typeface="Aptos"/>
+                <a:cs typeface="Aptos"/>
+              </a:defRPr>
+            </a:pPr>
+            <a:r>
+              <a:rPr sz="1875" b="1" i="0">
+                <a:solidFill>
+                  <a:srgbClr val="9A462F"/>
+                </a:solidFill>
+                <a:latin typeface="Aptos"/>
+                <a:ea typeface="Aptos"/>
+                <a:cs typeface="Aptos"/>
+              </a:rPr>
+              <a:t>•</a:t>
+            </a:r>
+          </a:p>
+        </p:txBody>
+      </p:sp>
+      <p:sp>
+        <p:nvSpPr>
+          <p:cNvPr id="10" name="">
+            <a:extLst xmlns:a="http://schemas.openxmlformats.org/drawingml/2006/main">
+              <a:ext uri="{FF2B5EF4-FFF2-40B4-BE49-F238E27FC236}">
+                <a16:creationId xmlns:a16="http://schemas.microsoft.com/office/drawing/2014/main" id="{B1CF0DCA-F767-41A5-96A3-8F9EE5CB099E}"/>
+              </a:ext>
+            </a:extLst>
+          </p:cNvPr>
+          <p:cNvSpPr>
+            <a:spLocks xmlns:a="http://schemas.openxmlformats.org/drawingml/2006/main" noGrp="1"/>
+          </p:cNvSpPr>
+          <p:nvPr/>
+        </p:nvSpPr>
+        <p:spPr>
+          <a:xfrm xmlns:a="http://schemas.openxmlformats.org/drawingml/2006/main">
+            <a:off x="1581150" y="2571750"/>
+            <a:ext cx="9353550" cy="457200"/>
+          </a:xfrm>
+          <a:prstGeom xmlns:a="http://schemas.openxmlformats.org/drawingml/2006/main" prst="rect">
+            <a:avLst/>
+          </a:prstGeom>
+          <a:noFill xmlns:a="http://schemas.openxmlformats.org/drawingml/2006/main"/>
+          <a:ln xmlns:a="http://schemas.openxmlformats.org/drawingml/2006/main" w="0">
+            <a:noFill/>
+            <a:prstDash val="solid"/>
+          </a:ln>
+        </p:spPr>
+        <p:txBody>
+          <a:bodyPr xmlns:a="http://schemas.openxmlformats.org/drawingml/2006/main" lIns="0" tIns="0" rIns="0" bIns="0" anchor="t">
+            <a:normAutofit fontScale="100000"/>
+          </a:bodyPr>
+          <a:lstStyle xmlns:a="http://schemas.openxmlformats.org/drawingml/2006/main"/>
+          <a:p xmlns:a="http://schemas.openxmlformats.org/drawingml/2006/main">
+            <a:pPr algn="l">
+              <a:lnSpc>
+                <a:spcPct val="105000"/>
+              </a:lnSpc>
+              <a:buNone/>
+              <a:defRPr sz="1875" b="0" i="0">
+                <a:solidFill>
+                  <a:srgbClr val="17242D"/>
+                </a:solidFill>
+                <a:latin typeface="Aptos"/>
+                <a:ea typeface="Aptos"/>
+                <a:cs typeface="Aptos"/>
+              </a:defRPr>
+            </a:pPr>
+            <a:r>
+              <a:rPr sz="1875" b="0" i="0">
+                <a:solidFill>
+                  <a:srgbClr val="17242D"/>
+                </a:solidFill>
+                <a:latin typeface="Aptos"/>
+                <a:ea typeface="Aptos"/>
+                <a:cs typeface="Aptos"/>
+              </a:rPr>
+              <a:t>Rights affect invention, access, entry, competition, and cumulative reuse.</a:t>
+            </a:r>
+          </a:p>
+        </p:txBody>
+      </p:sp>
+      <p:sp>
+        <p:nvSpPr>
+          <p:cNvPr id="11" name="">
+            <a:extLst xmlns:a="http://schemas.openxmlformats.org/drawingml/2006/main">
+              <a:ext uri="{FF2B5EF4-FFF2-40B4-BE49-F238E27FC236}">
+                <a16:creationId xmlns:a16="http://schemas.microsoft.com/office/drawing/2014/main" id="{45998B3A-A2C3-48B6-B161-F0BD14DAA908}"/>
+              </a:ext>
+            </a:extLst>
+          </p:cNvPr>
+          <p:cNvSpPr>
+            <a:spLocks xmlns:a="http://schemas.openxmlformats.org/drawingml/2006/main" noGrp="1"/>
+          </p:cNvSpPr>
+          <p:nvPr/>
+        </p:nvSpPr>
+        <p:spPr>
+          <a:xfrm xmlns:a="http://schemas.openxmlformats.org/drawingml/2006/main">
+            <a:off x="1257300" y="3133725"/>
+            <a:ext cx="228600" cy="457200"/>
+          </a:xfrm>
+          <a:prstGeom xmlns:a="http://schemas.openxmlformats.org/drawingml/2006/main" prst="rect">
+            <a:avLst/>
+          </a:prstGeom>
+          <a:noFill xmlns:a="http://schemas.openxmlformats.org/drawingml/2006/main"/>
+          <a:ln xmlns:a="http://schemas.openxmlformats.org/drawingml/2006/main" w="0">
+            <a:noFill/>
+            <a:prstDash val="solid"/>
+          </a:ln>
+        </p:spPr>
+        <p:txBody>
+          <a:bodyPr xmlns:a="http://schemas.openxmlformats.org/drawingml/2006/main" lIns="0" tIns="0" rIns="0" bIns="0" anchor="t">
+            <a:normAutofit fontScale="100000"/>
+          </a:bodyPr>
+          <a:lstStyle xmlns:a="http://schemas.openxmlformats.org/drawingml/2006/main"/>
+          <a:p xmlns:a="http://schemas.openxmlformats.org/drawingml/2006/main">
+            <a:pPr algn="l">
+              <a:lnSpc>
+                <a:spcPct val="105000"/>
+              </a:lnSpc>
+              <a:buNone/>
+              <a:defRPr sz="1875" b="1" i="0">
+                <a:solidFill>
+                  <a:srgbClr val="9A462F"/>
+                </a:solidFill>
+                <a:latin typeface="Aptos"/>
+                <a:ea typeface="Aptos"/>
+                <a:cs typeface="Aptos"/>
+              </a:defRPr>
+            </a:pPr>
+            <a:r>
+              <a:rPr sz="1875" b="1" i="0">
+                <a:solidFill>
+                  <a:srgbClr val="9A462F"/>
+                </a:solidFill>
+                <a:latin typeface="Aptos"/>
+                <a:ea typeface="Aptos"/>
+                <a:cs typeface="Aptos"/>
+              </a:rPr>
+              <a:t>•</a:t>
+            </a:r>
+          </a:p>
+        </p:txBody>
+      </p:sp>
+      <p:sp>
+        <p:nvSpPr>
+          <p:cNvPr id="12" name="">
+            <a:extLst xmlns:a="http://schemas.openxmlformats.org/drawingml/2006/main">
+              <a:ext uri="{FF2B5EF4-FFF2-40B4-BE49-F238E27FC236}">
+                <a16:creationId xmlns:a16="http://schemas.microsoft.com/office/drawing/2014/main" id="{75EEDA8C-7810-4D4A-A241-171DB08474A5}"/>
+              </a:ext>
+            </a:extLst>
+          </p:cNvPr>
+          <p:cNvSpPr>
+            <a:spLocks xmlns:a="http://schemas.openxmlformats.org/drawingml/2006/main" noGrp="1"/>
+          </p:cNvSpPr>
+          <p:nvPr/>
+        </p:nvSpPr>
+        <p:spPr>
+          <a:xfrm xmlns:a="http://schemas.openxmlformats.org/drawingml/2006/main">
+            <a:off x="1581150" y="3143250"/>
+            <a:ext cx="9353550" cy="457200"/>
+          </a:xfrm>
+          <a:prstGeom xmlns:a="http://schemas.openxmlformats.org/drawingml/2006/main" prst="rect">
+            <a:avLst/>
+          </a:prstGeom>
+          <a:noFill xmlns:a="http://schemas.openxmlformats.org/drawingml/2006/main"/>
+          <a:ln xmlns:a="http://schemas.openxmlformats.org/drawingml/2006/main" w="0">
+            <a:noFill/>
+            <a:prstDash val="solid"/>
+          </a:ln>
+        </p:spPr>
+        <p:txBody>
+          <a:bodyPr xmlns:a="http://schemas.openxmlformats.org/drawingml/2006/main" lIns="0" tIns="0" rIns="0" bIns="0" anchor="t">
+            <a:normAutofit fontScale="100000"/>
+          </a:bodyPr>
+          <a:lstStyle xmlns:a="http://schemas.openxmlformats.org/drawingml/2006/main"/>
+          <a:p xmlns:a="http://schemas.openxmlformats.org/drawingml/2006/main">
+            <a:pPr algn="l">
+              <a:lnSpc>
+                <a:spcPct val="105000"/>
+              </a:lnSpc>
+              <a:buNone/>
+              <a:defRPr sz="1875" b="0" i="0">
+                <a:solidFill>
+                  <a:srgbClr val="17242D"/>
+                </a:solidFill>
+                <a:latin typeface="Aptos"/>
+                <a:ea typeface="Aptos"/>
+                <a:cs typeface="Aptos"/>
+              </a:defRPr>
+            </a:pPr>
+            <a:r>
+              <a:rPr sz="1875" b="0" i="0">
+                <a:solidFill>
+                  <a:srgbClr val="17242D"/>
+                </a:solidFill>
+                <a:latin typeface="Aptos"/>
+                <a:ea typeface="Aptos"/>
+                <a:cs typeface="Aptos"/>
+              </a:rPr>
+              <a:t>Formal categories may lag the economic mechanisms they govern.</a:t>
+            </a:r>
+          </a:p>
+        </p:txBody>
+      </p:sp>
+      <p:sp>
+        <p:nvSpPr>
+          <p:cNvPr id="13" name="">
+            <a:extLst xmlns:a="http://schemas.openxmlformats.org/drawingml/2006/main">
+              <a:ext uri="{FF2B5EF4-FFF2-40B4-BE49-F238E27FC236}">
+                <a16:creationId xmlns:a16="http://schemas.microsoft.com/office/drawing/2014/main" id="{493DC077-7C4C-4EA1-9F23-DD84960019FC}"/>
+              </a:ext>
+            </a:extLst>
+          </p:cNvPr>
+          <p:cNvSpPr>
+            <a:spLocks xmlns:a="http://schemas.openxmlformats.org/drawingml/2006/main" noGrp="1"/>
+          </p:cNvSpPr>
+          <p:nvPr/>
+        </p:nvSpPr>
+        <p:spPr>
+          <a:xfrm xmlns:a="http://schemas.openxmlformats.org/drawingml/2006/main">
+            <a:off x="1257300" y="3705225"/>
+            <a:ext cx="228600" cy="457200"/>
+          </a:xfrm>
+          <a:prstGeom xmlns:a="http://schemas.openxmlformats.org/drawingml/2006/main" prst="rect">
+            <a:avLst/>
+          </a:prstGeom>
+          <a:noFill xmlns:a="http://schemas.openxmlformats.org/drawingml/2006/main"/>
+          <a:ln xmlns:a="http://schemas.openxmlformats.org/drawingml/2006/main" w="0">
+            <a:noFill/>
+            <a:prstDash val="solid"/>
+          </a:ln>
+        </p:spPr>
+        <p:txBody>
+          <a:bodyPr xmlns:a="http://schemas.openxmlformats.org/drawingml/2006/main" lIns="0" tIns="0" rIns="0" bIns="0" anchor="t">
+            <a:normAutofit fontScale="100000"/>
+          </a:bodyPr>
+          <a:lstStyle xmlns:a="http://schemas.openxmlformats.org/drawingml/2006/main"/>
+          <a:p xmlns:a="http://schemas.openxmlformats.org/drawingml/2006/main">
+            <a:pPr algn="l">
+              <a:lnSpc>
+                <a:spcPct val="105000"/>
+              </a:lnSpc>
+              <a:buNone/>
+              <a:defRPr sz="1875" b="1" i="0">
+                <a:solidFill>
+                  <a:srgbClr val="9A462F"/>
+                </a:solidFill>
+                <a:latin typeface="Aptos"/>
+                <a:ea typeface="Aptos"/>
+                <a:cs typeface="Aptos"/>
+              </a:defRPr>
+            </a:pPr>
+            <a:r>
+              <a:rPr sz="1875" b="1" i="0">
+                <a:solidFill>
+                  <a:srgbClr val="9A462F"/>
+                </a:solidFill>
+                <a:latin typeface="Aptos"/>
+                <a:ea typeface="Aptos"/>
+                <a:cs typeface="Aptos"/>
+              </a:rPr>
+              <a:t>•</a:t>
+            </a:r>
+          </a:p>
+        </p:txBody>
+      </p:sp>
+      <p:sp>
+        <p:nvSpPr>
+          <p:cNvPr id="14" name="">
+            <a:extLst xmlns:a="http://schemas.openxmlformats.org/drawingml/2006/main">
+              <a:ext uri="{FF2B5EF4-FFF2-40B4-BE49-F238E27FC236}">
+                <a16:creationId xmlns:a16="http://schemas.microsoft.com/office/drawing/2014/main" id="{584D5DBD-F96E-433A-8BD1-13826F12A07A}"/>
+              </a:ext>
+            </a:extLst>
+          </p:cNvPr>
+          <p:cNvSpPr>
+            <a:spLocks xmlns:a="http://schemas.openxmlformats.org/drawingml/2006/main" noGrp="1"/>
+          </p:cNvSpPr>
+          <p:nvPr/>
+        </p:nvSpPr>
+        <p:spPr>
+          <a:xfrm xmlns:a="http://schemas.openxmlformats.org/drawingml/2006/main">
+            <a:off x="1581150" y="3714750"/>
+            <a:ext cx="9353550" cy="457200"/>
+          </a:xfrm>
+          <a:prstGeom xmlns:a="http://schemas.openxmlformats.org/drawingml/2006/main" prst="rect">
+            <a:avLst/>
+          </a:prstGeom>
+          <a:noFill xmlns:a="http://schemas.openxmlformats.org/drawingml/2006/main"/>
+          <a:ln xmlns:a="http://schemas.openxmlformats.org/drawingml/2006/main" w="0">
+            <a:noFill/>
+            <a:prstDash val="solid"/>
+          </a:ln>
+        </p:spPr>
+        <p:txBody>
+          <a:bodyPr xmlns:a="http://schemas.openxmlformats.org/drawingml/2006/main" lIns="0" tIns="0" rIns="0" bIns="0" anchor="t">
+            <a:normAutofit fontScale="98866"/>
+          </a:bodyPr>
+          <a:lstStyle xmlns:a="http://schemas.openxmlformats.org/drawingml/2006/main"/>
+          <a:p xmlns:a="http://schemas.openxmlformats.org/drawingml/2006/main">
+            <a:pPr algn="l">
+              <a:lnSpc>
+                <a:spcPct val="105000"/>
+              </a:lnSpc>
+              <a:buNone/>
+              <a:defRPr sz="1875" b="0" i="0">
+                <a:solidFill>
+                  <a:srgbClr val="17242D"/>
+                </a:solidFill>
+                <a:latin typeface="Aptos"/>
+                <a:ea typeface="Aptos"/>
+                <a:cs typeface="Aptos"/>
+              </a:defRPr>
+            </a:pPr>
+            <a:r>
+              <a:rPr sz="1875" b="0" i="0">
+                <a:solidFill>
+                  <a:srgbClr val="17242D"/>
+                </a:solidFill>
+                <a:latin typeface="Aptos"/>
+                <a:ea typeface="Aptos"/>
+                <a:cs typeface="Aptos"/>
+              </a:rPr>
+              <a:t>Institutional alternatives can combine law, contract, code, markets, and open production.</a:t>
+            </a:r>
+          </a:p>
+        </p:txBody>
+      </p:sp>
+      <p:sp>
+        <p:nvSpPr>
+          <p:cNvPr id="15" name="">
+            <a:extLst xmlns:a="http://schemas.openxmlformats.org/drawingml/2006/main">
+              <a:ext uri="{FF2B5EF4-FFF2-40B4-BE49-F238E27FC236}">
+                <a16:creationId xmlns:a16="http://schemas.microsoft.com/office/drawing/2014/main" id="{E0340F81-AA58-4EF5-A3C0-823CC9E0EFE6}"/>
+              </a:ext>
+            </a:extLst>
+          </p:cNvPr>
+          <p:cNvSpPr>
+            <a:spLocks xmlns:a="http://schemas.openxmlformats.org/drawingml/2006/main" noGrp="1"/>
+          </p:cNvSpPr>
+          <p:nvPr/>
+        </p:nvSpPr>
+        <p:spPr>
+          <a:xfrm xmlns:a="http://schemas.openxmlformats.org/drawingml/2006/main">
+            <a:off x="1200150" y="5562600"/>
+            <a:ext cx="9791700" cy="533400"/>
+          </a:xfrm>
+          <a:prstGeom xmlns:a="http://schemas.openxmlformats.org/drawingml/2006/main" prst="rect">
+            <a:avLst/>
+          </a:prstGeom>
+          <a:noFill xmlns:a="http://schemas.openxmlformats.org/drawingml/2006/main"/>
+          <a:ln xmlns:a="http://schemas.openxmlformats.org/drawingml/2006/main" w="0">
+            <a:noFill/>
+            <a:prstDash val="solid"/>
+          </a:ln>
+        </p:spPr>
+        <p:txBody>
+          <a:bodyPr xmlns:a="http://schemas.openxmlformats.org/drawingml/2006/main" lIns="0" tIns="0" rIns="0" bIns="0" anchor="ctr">
+            <a:normAutofit fontScale="97175"/>
+          </a:bodyPr>
+          <a:lstStyle xmlns:a="http://schemas.openxmlformats.org/drawingml/2006/main"/>
+          <a:p xmlns:a="http://schemas.openxmlformats.org/drawingml/2006/main">
+            <a:pPr algn="ctr">
+              <a:lnSpc>
+                <a:spcPct val="105000"/>
+              </a:lnSpc>
+              <a:buNone/>
+              <a:defRPr sz="1950" b="1" i="0">
+                <a:solidFill>
+                  <a:srgbClr val="173F38"/>
+                </a:solidFill>
+                <a:latin typeface="Georgia"/>
+                <a:ea typeface="Georgia"/>
+                <a:cs typeface="Georgia"/>
+              </a:defRPr>
+            </a:pPr>
+            <a:r>
+              <a:rPr sz="1950" b="1" i="0">
+                <a:solidFill>
+                  <a:srgbClr val="173F38"/>
+                </a:solidFill>
+                <a:latin typeface="Georgia"/>
+                <a:ea typeface="Georgia"/>
+                <a:cs typeface="Georgia"/>
+              </a:rPr>
+              <a:t>Future lawyers need economic reasoning precisely where doctrine is unsettled.</a:t>
+            </a:r>
+          </a:p>
+        </p:txBody>
+      </p:sp>
+    </p:spTree>
+    <p:extLst>
+      <p:ext uri="{BB962C8B-B14F-4D97-AF65-F5344CB8AC3E}">
+        <p14:creationId xmlns:p14="http://schemas.microsoft.com/office/powerpoint/2010/main" val="841245092"/>
+      </p:ext>
+    </p:extLst>
+  </p:cSld>
+</p:sld>
+</file>
+
+<file path=ppt/slides/slide26.xml><?xml version="1.0" encoding="utf-8"?>
 <p:sld xmlns:p="http://schemas.openxmlformats.org/presentationml/2006/main">
   <p:cSld>
     <p:bg>
@@ -18362,7 +20913,7 @@
           <p:cNvPr id="20" name="">
             <a:extLst xmlns:a="http://schemas.openxmlformats.org/drawingml/2006/main">
               <a:ext uri="{FF2B5EF4-FFF2-40B4-BE49-F238E27FC236}">
-                <a16:creationId xmlns:a16="http://schemas.microsoft.com/office/drawing/2014/main" id="{27F2602B-3B65-4236-ABC3-01C0757AE0E3}"/>
+                <a16:creationId xmlns:a16="http://schemas.microsoft.com/office/drawing/2014/main" id="{27F65F8C-7251-409D-8F75-4075309EFCD7}"/>
               </a:ext>
             </a:extLst>
           </p:cNvPr>
@@ -18393,7 +20944,7 @@
           <p:cNvPr id="2" name="">
             <a:extLst xmlns:a="http://schemas.openxmlformats.org/drawingml/2006/main">
               <a:ext uri="{FF2B5EF4-FFF2-40B4-BE49-F238E27FC236}">
-                <a16:creationId xmlns:a16="http://schemas.microsoft.com/office/drawing/2014/main" id="{A2A7EEE6-DEFD-4728-BE94-B49E5E8CF1A0}"/>
+                <a16:creationId xmlns:a16="http://schemas.microsoft.com/office/drawing/2014/main" id="{75A9307A-6123-40FB-92E7-37F813357E24}"/>
               </a:ext>
             </a:extLst>
           </p:cNvPr>
@@ -18455,7 +21006,7 @@
           <p:cNvPr id="3" name="">
             <a:extLst xmlns:a="http://schemas.openxmlformats.org/drawingml/2006/main">
               <a:ext uri="{FF2B5EF4-FFF2-40B4-BE49-F238E27FC236}">
-                <a16:creationId xmlns:a16="http://schemas.microsoft.com/office/drawing/2014/main" id="{3A0DFAEF-EAD0-4F0E-A78D-C9A933FDC1AF}"/>
+                <a16:creationId xmlns:a16="http://schemas.microsoft.com/office/drawing/2014/main" id="{3ACBFA57-2EEA-4072-AE16-BCD9AE6FF555}"/>
               </a:ext>
             </a:extLst>
           </p:cNvPr>
@@ -18517,7 +21068,7 @@
           <p:cNvPr id="4" name="">
             <a:extLst xmlns:a="http://schemas.openxmlformats.org/drawingml/2006/main">
               <a:ext uri="{FF2B5EF4-FFF2-40B4-BE49-F238E27FC236}">
-                <a16:creationId xmlns:a16="http://schemas.microsoft.com/office/drawing/2014/main" id="{8FE05E1C-9BC9-4888-83E6-6419ECA4E957}"/>
+                <a16:creationId xmlns:a16="http://schemas.microsoft.com/office/drawing/2014/main" id="{7934DACD-A540-4F07-8FFD-1A769133B4C7}"/>
               </a:ext>
             </a:extLst>
           </p:cNvPr>
@@ -18548,7 +21099,7 @@
           <p:cNvPr id="5" name="">
             <a:extLst xmlns:a="http://schemas.openxmlformats.org/drawingml/2006/main">
               <a:ext uri="{FF2B5EF4-FFF2-40B4-BE49-F238E27FC236}">
-                <a16:creationId xmlns:a16="http://schemas.microsoft.com/office/drawing/2014/main" id="{50B6B98C-93E5-45CD-B02B-FC8B764F4B8C}"/>
+                <a16:creationId xmlns:a16="http://schemas.microsoft.com/office/drawing/2014/main" id="{296818B7-1F6A-4E29-84C9-202C8B7AB196}"/>
               </a:ext>
             </a:extLst>
           </p:cNvPr>
@@ -18610,7 +21161,7 @@
           <p:cNvPr id="6" name="">
             <a:extLst xmlns:a="http://schemas.openxmlformats.org/drawingml/2006/main">
               <a:ext uri="{FF2B5EF4-FFF2-40B4-BE49-F238E27FC236}">
-                <a16:creationId xmlns:a16="http://schemas.microsoft.com/office/drawing/2014/main" id="{E2CFD1D0-B981-4B8B-B45F-03EB95CA660B}"/>
+                <a16:creationId xmlns:a16="http://schemas.microsoft.com/office/drawing/2014/main" id="{9CB100BB-EE9F-4CA0-93F4-C61BCF2FF573}"/>
               </a:ext>
             </a:extLst>
           </p:cNvPr>
@@ -18662,7 +21213,7 @@
                 <a:ea typeface="Aptos"/>
                 <a:cs typeface="Aptos"/>
               </a:rPr>
-              <a:t>24</a:t>
+              <a:t>26</a:t>
             </a:r>
           </a:p>
         </p:txBody>
@@ -18672,7 +21223,7 @@
           <p:cNvPr id="7" name="">
             <a:extLst xmlns:a="http://schemas.openxmlformats.org/drawingml/2006/main">
               <a:ext uri="{FF2B5EF4-FFF2-40B4-BE49-F238E27FC236}">
-                <a16:creationId xmlns:a16="http://schemas.microsoft.com/office/drawing/2014/main" id="{79D52476-C987-4115-8E65-809B4C567EF3}"/>
+                <a16:creationId xmlns:a16="http://schemas.microsoft.com/office/drawing/2014/main" id="{7838F257-CBC3-4051-857D-8C4D8C1FA15A}"/>
               </a:ext>
             </a:extLst>
           </p:cNvPr>
@@ -18734,7 +21285,7 @@
           <p:cNvPr id="8" name="">
             <a:extLst xmlns:a="http://schemas.openxmlformats.org/drawingml/2006/main">
               <a:ext uri="{FF2B5EF4-FFF2-40B4-BE49-F238E27FC236}">
-                <a16:creationId xmlns:a16="http://schemas.microsoft.com/office/drawing/2014/main" id="{0F73B089-C976-4CB8-9A6B-589D5B447CC6}"/>
+                <a16:creationId xmlns:a16="http://schemas.microsoft.com/office/drawing/2014/main" id="{CD280FF4-4D0A-4B48-A636-9EC0918A1673}"/>
               </a:ext>
             </a:extLst>
           </p:cNvPr>
@@ -18796,7 +21347,7 @@
           <p:cNvPr id="9" name="">
             <a:extLst xmlns:a="http://schemas.openxmlformats.org/drawingml/2006/main">
               <a:ext uri="{FF2B5EF4-FFF2-40B4-BE49-F238E27FC236}">
-                <a16:creationId xmlns:a16="http://schemas.microsoft.com/office/drawing/2014/main" id="{235ED061-911D-4FDF-9B11-B428FC886B16}"/>
+                <a16:creationId xmlns:a16="http://schemas.microsoft.com/office/drawing/2014/main" id="{8BD33873-AD6F-49E3-B354-7A6FBC2446A9}"/>
               </a:ext>
             </a:extLst>
           </p:cNvPr>
@@ -18858,7 +21409,7 @@
           <p:cNvPr id="10" name="">
             <a:extLst xmlns:a="http://schemas.openxmlformats.org/drawingml/2006/main">
               <a:ext uri="{FF2B5EF4-FFF2-40B4-BE49-F238E27FC236}">
-                <a16:creationId xmlns:a16="http://schemas.microsoft.com/office/drawing/2014/main" id="{931B86E8-942F-4116-B0A6-6634B1F1CDC6}"/>
+                <a16:creationId xmlns:a16="http://schemas.microsoft.com/office/drawing/2014/main" id="{EC0C36FE-79DE-4092-AF8C-EB66F7C7EF6C}"/>
               </a:ext>
             </a:extLst>
           </p:cNvPr>
@@ -18920,7 +21471,7 @@
           <p:cNvPr id="11" name="">
             <a:extLst xmlns:a="http://schemas.openxmlformats.org/drawingml/2006/main">
               <a:ext uri="{FF2B5EF4-FFF2-40B4-BE49-F238E27FC236}">
-                <a16:creationId xmlns:a16="http://schemas.microsoft.com/office/drawing/2014/main" id="{30656F60-56EE-4419-B273-39586E37C2DC}"/>
+                <a16:creationId xmlns:a16="http://schemas.microsoft.com/office/drawing/2014/main" id="{5AD4DD81-5712-45B6-B61B-B1374B3E3D1C}"/>
               </a:ext>
             </a:extLst>
           </p:cNvPr>
@@ -18982,7 +21533,7 @@
           <p:cNvPr id="12" name="">
             <a:extLst xmlns:a="http://schemas.openxmlformats.org/drawingml/2006/main">
               <a:ext uri="{FF2B5EF4-FFF2-40B4-BE49-F238E27FC236}">
-                <a16:creationId xmlns:a16="http://schemas.microsoft.com/office/drawing/2014/main" id="{CDDE2D64-6B0E-4A16-B340-F47D181E8180}"/>
+                <a16:creationId xmlns:a16="http://schemas.microsoft.com/office/drawing/2014/main" id="{242244D8-FBEA-4C3E-9A56-A47F2DF43086}"/>
               </a:ext>
             </a:extLst>
           </p:cNvPr>
@@ -19044,7 +21595,7 @@
           <p:cNvPr id="13" name="">
             <a:extLst xmlns:a="http://schemas.openxmlformats.org/drawingml/2006/main">
               <a:ext uri="{FF2B5EF4-FFF2-40B4-BE49-F238E27FC236}">
-                <a16:creationId xmlns:a16="http://schemas.microsoft.com/office/drawing/2014/main" id="{353240C5-CA8D-4CCF-9E67-03E0A723C9D2}"/>
+                <a16:creationId xmlns:a16="http://schemas.microsoft.com/office/drawing/2014/main" id="{C013C021-DD48-4779-9DF6-6A3C30593E99}"/>
               </a:ext>
             </a:extLst>
           </p:cNvPr>
@@ -19106,7 +21657,7 @@
           <p:cNvPr id="14" name="">
             <a:extLst xmlns:a="http://schemas.openxmlformats.org/drawingml/2006/main">
               <a:ext uri="{FF2B5EF4-FFF2-40B4-BE49-F238E27FC236}">
-                <a16:creationId xmlns:a16="http://schemas.microsoft.com/office/drawing/2014/main" id="{3131F6D0-07DB-408C-8AEC-986FCF50DF50}"/>
+                <a16:creationId xmlns:a16="http://schemas.microsoft.com/office/drawing/2014/main" id="{588C27B7-E52E-414F-95CD-83A671CD1E5E}"/>
               </a:ext>
             </a:extLst>
           </p:cNvPr>
@@ -19168,7 +21719,7 @@
           <p:cNvPr id="15" name="">
             <a:extLst xmlns:a="http://schemas.openxmlformats.org/drawingml/2006/main">
               <a:ext uri="{FF2B5EF4-FFF2-40B4-BE49-F238E27FC236}">
-                <a16:creationId xmlns:a16="http://schemas.microsoft.com/office/drawing/2014/main" id="{F41A98D5-F8B5-49B4-B68E-7AACEE5F3008}"/>
+                <a16:creationId xmlns:a16="http://schemas.microsoft.com/office/drawing/2014/main" id="{B3F518E6-7543-450A-A82B-9909CEEF04DA}"/>
               </a:ext>
             </a:extLst>
           </p:cNvPr>
@@ -19230,7 +21781,7 @@
           <p:cNvPr id="16" name="">
             <a:extLst xmlns:a="http://schemas.openxmlformats.org/drawingml/2006/main">
               <a:ext uri="{FF2B5EF4-FFF2-40B4-BE49-F238E27FC236}">
-                <a16:creationId xmlns:a16="http://schemas.microsoft.com/office/drawing/2014/main" id="{7213068A-8B37-4957-A827-735BA66713A9}"/>
+                <a16:creationId xmlns:a16="http://schemas.microsoft.com/office/drawing/2014/main" id="{26716EDD-2BBB-4351-BA1C-049C9300F173}"/>
               </a:ext>
             </a:extLst>
           </p:cNvPr>
@@ -19292,7 +21843,7 @@
           <p:cNvPr id="17" name="">
             <a:extLst xmlns:a="http://schemas.openxmlformats.org/drawingml/2006/main">
               <a:ext uri="{FF2B5EF4-FFF2-40B4-BE49-F238E27FC236}">
-                <a16:creationId xmlns:a16="http://schemas.microsoft.com/office/drawing/2014/main" id="{D010D55F-0D60-4FF8-BC93-890620B1ABF4}"/>
+                <a16:creationId xmlns:a16="http://schemas.microsoft.com/office/drawing/2014/main" id="{6F2DEFA2-E1B2-406C-BFE5-01954101CB62}"/>
               </a:ext>
             </a:extLst>
           </p:cNvPr>
@@ -19354,7 +21905,7 @@
           <p:cNvPr id="18" name="">
             <a:extLst xmlns:a="http://schemas.openxmlformats.org/drawingml/2006/main">
               <a:ext uri="{FF2B5EF4-FFF2-40B4-BE49-F238E27FC236}">
-                <a16:creationId xmlns:a16="http://schemas.microsoft.com/office/drawing/2014/main" id="{D0836B6C-721C-4DAA-BD7C-E513F8A6BB77}"/>
+                <a16:creationId xmlns:a16="http://schemas.microsoft.com/office/drawing/2014/main" id="{151502F0-23F9-4B24-A646-9A5574FBFCDE}"/>
               </a:ext>
             </a:extLst>
           </p:cNvPr>
@@ -19416,7 +21967,7 @@
           <p:cNvPr id="19" name="">
             <a:extLst xmlns:a="http://schemas.openxmlformats.org/drawingml/2006/main">
               <a:ext uri="{FF2B5EF4-FFF2-40B4-BE49-F238E27FC236}">
-                <a16:creationId xmlns:a16="http://schemas.microsoft.com/office/drawing/2014/main" id="{96EC3DFF-05ED-40F0-9FAF-6E64C03F42CE}"/>
+                <a16:creationId xmlns:a16="http://schemas.microsoft.com/office/drawing/2014/main" id="{3E1D266E-9E9D-469D-AFEE-FDAA3F4F6E01}"/>
               </a:ext>
             </a:extLst>
           </p:cNvPr>
@@ -19476,7 +22027,7 @@
     </p:spTree>
     <p:extLst>
       <p:ext uri="{BB962C8B-B14F-4D97-AF65-F5344CB8AC3E}">
-        <p14:creationId xmlns:p14="http://schemas.microsoft.com/office/powerpoint/2010/main" val="2094781731"/>
+        <p14:creationId xmlns:p14="http://schemas.microsoft.com/office/powerpoint/2010/main" val="234874455"/>
       </p:ext>
     </p:extLst>
   </p:cSld>
@@ -19507,7 +22058,7 @@
           <p:cNvPr id="15" name="">
             <a:extLst xmlns:a="http://schemas.openxmlformats.org/drawingml/2006/main">
               <a:ext uri="{FF2B5EF4-FFF2-40B4-BE49-F238E27FC236}">
-                <a16:creationId xmlns:a16="http://schemas.microsoft.com/office/drawing/2014/main" id="{1D24DD28-D160-4D3B-B940-5382E8B7DD0A}"/>
+                <a16:creationId xmlns:a16="http://schemas.microsoft.com/office/drawing/2014/main" id="{4BA4ED7A-42CE-42B9-87F4-0CF04C788AED}"/>
               </a:ext>
             </a:extLst>
           </p:cNvPr>
@@ -19538,7 +22089,7 @@
           <p:cNvPr id="2" name="">
             <a:extLst xmlns:a="http://schemas.openxmlformats.org/drawingml/2006/main">
               <a:ext uri="{FF2B5EF4-FFF2-40B4-BE49-F238E27FC236}">
-                <a16:creationId xmlns:a16="http://schemas.microsoft.com/office/drawing/2014/main" id="{6376440A-9240-4719-A47B-B3270E7C02E0}"/>
+                <a16:creationId xmlns:a16="http://schemas.microsoft.com/office/drawing/2014/main" id="{66CB97FF-725E-44D6-B909-036BCA362B96}"/>
               </a:ext>
             </a:extLst>
           </p:cNvPr>
@@ -19600,7 +22151,7 @@
           <p:cNvPr id="3" name="">
             <a:extLst xmlns:a="http://schemas.openxmlformats.org/drawingml/2006/main">
               <a:ext uri="{FF2B5EF4-FFF2-40B4-BE49-F238E27FC236}">
-                <a16:creationId xmlns:a16="http://schemas.microsoft.com/office/drawing/2014/main" id="{2299A13E-FB30-4A46-95BB-B906AD5BBC65}"/>
+                <a16:creationId xmlns:a16="http://schemas.microsoft.com/office/drawing/2014/main" id="{6C92A39B-F895-4B97-8D8C-5A8DF0F9F500}"/>
               </a:ext>
             </a:extLst>
           </p:cNvPr>
@@ -19662,7 +22213,7 @@
           <p:cNvPr id="4" name="">
             <a:extLst xmlns:a="http://schemas.openxmlformats.org/drawingml/2006/main">
               <a:ext uri="{FF2B5EF4-FFF2-40B4-BE49-F238E27FC236}">
-                <a16:creationId xmlns:a16="http://schemas.microsoft.com/office/drawing/2014/main" id="{BB981000-CEA2-4753-AEC0-2E1767427853}"/>
+                <a16:creationId xmlns:a16="http://schemas.microsoft.com/office/drawing/2014/main" id="{AE6AD522-1A96-4DF0-9DC9-D4C717728E37}"/>
               </a:ext>
             </a:extLst>
           </p:cNvPr>
@@ -19693,7 +22244,7 @@
           <p:cNvPr id="5" name="">
             <a:extLst xmlns:a="http://schemas.openxmlformats.org/drawingml/2006/main">
               <a:ext uri="{FF2B5EF4-FFF2-40B4-BE49-F238E27FC236}">
-                <a16:creationId xmlns:a16="http://schemas.microsoft.com/office/drawing/2014/main" id="{BD55A689-DA58-4A32-AD43-9AFFC2EA0DCF}"/>
+                <a16:creationId xmlns:a16="http://schemas.microsoft.com/office/drawing/2014/main" id="{7C3B3CF1-8A1B-436B-8E37-74B8829B8F77}"/>
               </a:ext>
             </a:extLst>
           </p:cNvPr>
@@ -19755,7 +22306,7 @@
           <p:cNvPr id="6" name="">
             <a:extLst xmlns:a="http://schemas.openxmlformats.org/drawingml/2006/main">
               <a:ext uri="{FF2B5EF4-FFF2-40B4-BE49-F238E27FC236}">
-                <a16:creationId xmlns:a16="http://schemas.microsoft.com/office/drawing/2014/main" id="{EA196CB9-A546-4E6C-AE2F-A0FEEF067736}"/>
+                <a16:creationId xmlns:a16="http://schemas.microsoft.com/office/drawing/2014/main" id="{2664BACC-FDE3-44BE-8631-C3A7F8509C15}"/>
               </a:ext>
             </a:extLst>
           </p:cNvPr>
@@ -19817,7 +22368,7 @@
           <p:cNvPr id="7" name="">
             <a:extLst xmlns:a="http://schemas.openxmlformats.org/drawingml/2006/main">
               <a:ext uri="{FF2B5EF4-FFF2-40B4-BE49-F238E27FC236}">
-                <a16:creationId xmlns:a16="http://schemas.microsoft.com/office/drawing/2014/main" id="{02369416-94FD-4F13-BAAD-E33BB224ADF8}"/>
+                <a16:creationId xmlns:a16="http://schemas.microsoft.com/office/drawing/2014/main" id="{BD34FC20-C73E-4059-B69B-BCEA65F0CC6C}"/>
               </a:ext>
             </a:extLst>
           </p:cNvPr>
@@ -19879,7 +22430,7 @@
           <p:cNvPr id="8" name="">
             <a:extLst xmlns:a="http://schemas.openxmlformats.org/drawingml/2006/main">
               <a:ext uri="{FF2B5EF4-FFF2-40B4-BE49-F238E27FC236}">
-                <a16:creationId xmlns:a16="http://schemas.microsoft.com/office/drawing/2014/main" id="{7DB5ADC3-27C2-4FB5-991C-DEE3EDB85CF8}"/>
+                <a16:creationId xmlns:a16="http://schemas.microsoft.com/office/drawing/2014/main" id="{5097DE78-F839-4352-AA55-1833CAD211D9}"/>
               </a:ext>
             </a:extLst>
           </p:cNvPr>
@@ -19941,7 +22492,7 @@
           <p:cNvPr id="9" name="">
             <a:extLst xmlns:a="http://schemas.openxmlformats.org/drawingml/2006/main">
               <a:ext uri="{FF2B5EF4-FFF2-40B4-BE49-F238E27FC236}">
-                <a16:creationId xmlns:a16="http://schemas.microsoft.com/office/drawing/2014/main" id="{7D882977-BBEA-4DF5-A273-BDF8ECE40772}"/>
+                <a16:creationId xmlns:a16="http://schemas.microsoft.com/office/drawing/2014/main" id="{CAE3B6FA-B409-454D-9032-C63A3CDEA32E}"/>
               </a:ext>
             </a:extLst>
           </p:cNvPr>
@@ -19974,7 +22525,7 @@
           <p:cNvPr id="10" name="">
             <a:extLst xmlns:a="http://schemas.openxmlformats.org/drawingml/2006/main">
               <a:ext uri="{FF2B5EF4-FFF2-40B4-BE49-F238E27FC236}">
-                <a16:creationId xmlns:a16="http://schemas.microsoft.com/office/drawing/2014/main" id="{1B88864B-6D07-421B-9E20-D097BAF6CD1A}"/>
+                <a16:creationId xmlns:a16="http://schemas.microsoft.com/office/drawing/2014/main" id="{745CF87E-5FE8-49F3-B5BA-3C6D3D39EC22}"/>
               </a:ext>
             </a:extLst>
           </p:cNvPr>
@@ -20036,7 +22587,7 @@
           <p:cNvPr id="11" name="">
             <a:extLst xmlns:a="http://schemas.openxmlformats.org/drawingml/2006/main">
               <a:ext uri="{FF2B5EF4-FFF2-40B4-BE49-F238E27FC236}">
-                <a16:creationId xmlns:a16="http://schemas.microsoft.com/office/drawing/2014/main" id="{60E6C794-0929-4750-A805-68C95EC9C9E7}"/>
+                <a16:creationId xmlns:a16="http://schemas.microsoft.com/office/drawing/2014/main" id="{3997E1D9-8818-4864-AE35-4355BBD35B45}"/>
               </a:ext>
             </a:extLst>
           </p:cNvPr>
@@ -20098,7 +22649,7 @@
           <p:cNvPr id="12" name="">
             <a:extLst xmlns:a="http://schemas.openxmlformats.org/drawingml/2006/main">
               <a:ext uri="{FF2B5EF4-FFF2-40B4-BE49-F238E27FC236}">
-                <a16:creationId xmlns:a16="http://schemas.microsoft.com/office/drawing/2014/main" id="{B39E2169-5E4C-4923-AB5D-E4E7D56AE775}"/>
+                <a16:creationId xmlns:a16="http://schemas.microsoft.com/office/drawing/2014/main" id="{CAEA4406-E43B-41A1-ABD7-D81DDB76AB23}"/>
               </a:ext>
             </a:extLst>
           </p:cNvPr>
@@ -20131,7 +22682,7 @@
           <p:cNvPr id="13" name="">
             <a:extLst xmlns:a="http://schemas.openxmlformats.org/drawingml/2006/main">
               <a:ext uri="{FF2B5EF4-FFF2-40B4-BE49-F238E27FC236}">
-                <a16:creationId xmlns:a16="http://schemas.microsoft.com/office/drawing/2014/main" id="{60FE2994-72C7-423A-BF39-5D3DB7E8D18E}"/>
+                <a16:creationId xmlns:a16="http://schemas.microsoft.com/office/drawing/2014/main" id="{FFB5C26C-4A1B-460C-A3FB-FEDFC8278B21}"/>
               </a:ext>
             </a:extLst>
           </p:cNvPr>
@@ -20193,7 +22744,7 @@
           <p:cNvPr id="14" name="">
             <a:extLst xmlns:a="http://schemas.openxmlformats.org/drawingml/2006/main">
               <a:ext uri="{FF2B5EF4-FFF2-40B4-BE49-F238E27FC236}">
-                <a16:creationId xmlns:a16="http://schemas.microsoft.com/office/drawing/2014/main" id="{9065B29A-3284-416E-9B8C-1A98D5FDCCDE}"/>
+                <a16:creationId xmlns:a16="http://schemas.microsoft.com/office/drawing/2014/main" id="{B50E82F5-11F6-4C97-A406-4114211DC2CD}"/>
               </a:ext>
             </a:extLst>
           </p:cNvPr>
@@ -20253,7 +22804,7 @@
     </p:spTree>
     <p:extLst>
       <p:ext uri="{BB962C8B-B14F-4D97-AF65-F5344CB8AC3E}">
-        <p14:creationId xmlns:p14="http://schemas.microsoft.com/office/powerpoint/2010/main" val="554431888"/>
+        <p14:creationId xmlns:p14="http://schemas.microsoft.com/office/powerpoint/2010/main" val="1178499174"/>
       </p:ext>
     </p:extLst>
   </p:cSld>
@@ -20284,7 +22835,7 @@
           <p:cNvPr id="17" name="">
             <a:extLst xmlns:a="http://schemas.openxmlformats.org/drawingml/2006/main">
               <a:ext uri="{FF2B5EF4-FFF2-40B4-BE49-F238E27FC236}">
-                <a16:creationId xmlns:a16="http://schemas.microsoft.com/office/drawing/2014/main" id="{B4F0DD7A-FB1A-405A-A383-DA84E8EE865C}"/>
+                <a16:creationId xmlns:a16="http://schemas.microsoft.com/office/drawing/2014/main" id="{245C4B22-6293-4740-84C3-EFFD394955F6}"/>
               </a:ext>
             </a:extLst>
           </p:cNvPr>
@@ -20315,7 +22866,7 @@
           <p:cNvPr id="2" name="">
             <a:extLst xmlns:a="http://schemas.openxmlformats.org/drawingml/2006/main">
               <a:ext uri="{FF2B5EF4-FFF2-40B4-BE49-F238E27FC236}">
-                <a16:creationId xmlns:a16="http://schemas.microsoft.com/office/drawing/2014/main" id="{1C0C1D35-479A-4CA1-B00F-F7ADC08EDEF0}"/>
+                <a16:creationId xmlns:a16="http://schemas.microsoft.com/office/drawing/2014/main" id="{BD9D5438-2F95-4D67-853A-FDEF2EBADF25}"/>
               </a:ext>
             </a:extLst>
           </p:cNvPr>
@@ -20377,7 +22928,7 @@
           <p:cNvPr id="3" name="">
             <a:extLst xmlns:a="http://schemas.openxmlformats.org/drawingml/2006/main">
               <a:ext uri="{FF2B5EF4-FFF2-40B4-BE49-F238E27FC236}">
-                <a16:creationId xmlns:a16="http://schemas.microsoft.com/office/drawing/2014/main" id="{51C42D4A-0E3C-4450-808E-163029778EAB}"/>
+                <a16:creationId xmlns:a16="http://schemas.microsoft.com/office/drawing/2014/main" id="{FDD0E9D0-15A5-44E2-B7EE-452C37252D8C}"/>
               </a:ext>
             </a:extLst>
           </p:cNvPr>
@@ -20439,7 +22990,7 @@
           <p:cNvPr id="4" name="">
             <a:extLst xmlns:a="http://schemas.openxmlformats.org/drawingml/2006/main">
               <a:ext uri="{FF2B5EF4-FFF2-40B4-BE49-F238E27FC236}">
-                <a16:creationId xmlns:a16="http://schemas.microsoft.com/office/drawing/2014/main" id="{EB7C0162-67F2-4C32-A72A-1A335CCA617D}"/>
+                <a16:creationId xmlns:a16="http://schemas.microsoft.com/office/drawing/2014/main" id="{794526A2-31E8-4BA3-BA4E-A0903B79E1CB}"/>
               </a:ext>
             </a:extLst>
           </p:cNvPr>
@@ -20470,7 +23021,7 @@
           <p:cNvPr id="5" name="">
             <a:extLst xmlns:a="http://schemas.openxmlformats.org/drawingml/2006/main">
               <a:ext uri="{FF2B5EF4-FFF2-40B4-BE49-F238E27FC236}">
-                <a16:creationId xmlns:a16="http://schemas.microsoft.com/office/drawing/2014/main" id="{70E52C26-14DF-4E77-819B-43161B399AF1}"/>
+                <a16:creationId xmlns:a16="http://schemas.microsoft.com/office/drawing/2014/main" id="{21300EA1-74C9-4ACC-B886-E411DB13E6A1}"/>
               </a:ext>
             </a:extLst>
           </p:cNvPr>
@@ -20532,7 +23083,7 @@
           <p:cNvPr id="6" name="">
             <a:extLst xmlns:a="http://schemas.openxmlformats.org/drawingml/2006/main">
               <a:ext uri="{FF2B5EF4-FFF2-40B4-BE49-F238E27FC236}">
-                <a16:creationId xmlns:a16="http://schemas.microsoft.com/office/drawing/2014/main" id="{9D21E807-8950-4D8A-AD6C-CF2F32CE3F58}"/>
+                <a16:creationId xmlns:a16="http://schemas.microsoft.com/office/drawing/2014/main" id="{67DAA8BB-1401-416A-BF80-766F03305E14}"/>
               </a:ext>
             </a:extLst>
           </p:cNvPr>
@@ -20594,7 +23145,7 @@
           <p:cNvPr id="7" name="">
             <a:extLst xmlns:a="http://schemas.openxmlformats.org/drawingml/2006/main">
               <a:ext uri="{FF2B5EF4-FFF2-40B4-BE49-F238E27FC236}">
-                <a16:creationId xmlns:a16="http://schemas.microsoft.com/office/drawing/2014/main" id="{27296B46-F12D-4D63-90D1-8FCB5D29DC35}"/>
+                <a16:creationId xmlns:a16="http://schemas.microsoft.com/office/drawing/2014/main" id="{0EC494FE-BFE1-478B-BB74-9180FCBB7787}"/>
               </a:ext>
             </a:extLst>
           </p:cNvPr>
@@ -20656,7 +23207,7 @@
           <p:cNvPr id="8" name="">
             <a:extLst xmlns:a="http://schemas.openxmlformats.org/drawingml/2006/main">
               <a:ext uri="{FF2B5EF4-FFF2-40B4-BE49-F238E27FC236}">
-                <a16:creationId xmlns:a16="http://schemas.microsoft.com/office/drawing/2014/main" id="{9380C2F5-05B4-4388-A77A-061F42F3331E}"/>
+                <a16:creationId xmlns:a16="http://schemas.microsoft.com/office/drawing/2014/main" id="{2EA1ECDE-752D-4988-84B9-FCFA0ED646F4}"/>
               </a:ext>
             </a:extLst>
           </p:cNvPr>
@@ -20689,7 +23240,7 @@
           <p:cNvPr id="9" name="">
             <a:extLst xmlns:a="http://schemas.openxmlformats.org/drawingml/2006/main">
               <a:ext uri="{FF2B5EF4-FFF2-40B4-BE49-F238E27FC236}">
-                <a16:creationId xmlns:a16="http://schemas.microsoft.com/office/drawing/2014/main" id="{A7AFEE36-CB85-4CAE-9B28-1ADE854B0903}"/>
+                <a16:creationId xmlns:a16="http://schemas.microsoft.com/office/drawing/2014/main" id="{0A22533D-C153-4CB7-89BD-4037C71B69C6}"/>
               </a:ext>
             </a:extLst>
           </p:cNvPr>
@@ -20751,7 +23302,7 @@
           <p:cNvPr id="10" name="">
             <a:extLst xmlns:a="http://schemas.openxmlformats.org/drawingml/2006/main">
               <a:ext uri="{FF2B5EF4-FFF2-40B4-BE49-F238E27FC236}">
-                <a16:creationId xmlns:a16="http://schemas.microsoft.com/office/drawing/2014/main" id="{8DF72284-52DF-4DE4-982B-900AE7FC73DD}"/>
+                <a16:creationId xmlns:a16="http://schemas.microsoft.com/office/drawing/2014/main" id="{55B17836-4F89-4C45-ADEE-17FDD7729938}"/>
               </a:ext>
             </a:extLst>
           </p:cNvPr>
@@ -20813,7 +23364,7 @@
           <p:cNvPr id="11" name="">
             <a:extLst xmlns:a="http://schemas.openxmlformats.org/drawingml/2006/main">
               <a:ext uri="{FF2B5EF4-FFF2-40B4-BE49-F238E27FC236}">
-                <a16:creationId xmlns:a16="http://schemas.microsoft.com/office/drawing/2014/main" id="{6A319520-7F50-44AB-B1B6-F04445129129}"/>
+                <a16:creationId xmlns:a16="http://schemas.microsoft.com/office/drawing/2014/main" id="{6CE13D81-210F-45DD-9741-E271573ED844}"/>
               </a:ext>
             </a:extLst>
           </p:cNvPr>
@@ -20846,7 +23397,7 @@
           <p:cNvPr id="12" name="">
             <a:extLst xmlns:a="http://schemas.openxmlformats.org/drawingml/2006/main">
               <a:ext uri="{FF2B5EF4-FFF2-40B4-BE49-F238E27FC236}">
-                <a16:creationId xmlns:a16="http://schemas.microsoft.com/office/drawing/2014/main" id="{8FE7A227-A215-4CB1-A12C-0B334DAD28FF}"/>
+                <a16:creationId xmlns:a16="http://schemas.microsoft.com/office/drawing/2014/main" id="{3EAB9172-1391-4F3A-AB4D-4BC86F58E087}"/>
               </a:ext>
             </a:extLst>
           </p:cNvPr>
@@ -20908,7 +23459,7 @@
           <p:cNvPr id="13" name="">
             <a:extLst xmlns:a="http://schemas.openxmlformats.org/drawingml/2006/main">
               <a:ext uri="{FF2B5EF4-FFF2-40B4-BE49-F238E27FC236}">
-                <a16:creationId xmlns:a16="http://schemas.microsoft.com/office/drawing/2014/main" id="{88A428BC-EA2F-4DD4-98B7-3988EE0FD8D7}"/>
+                <a16:creationId xmlns:a16="http://schemas.microsoft.com/office/drawing/2014/main" id="{AF35DB3F-71D0-420D-B709-B9E0D47E896A}"/>
               </a:ext>
             </a:extLst>
           </p:cNvPr>
@@ -20970,7 +23521,7 @@
           <p:cNvPr id="14" name="">
             <a:extLst xmlns:a="http://schemas.openxmlformats.org/drawingml/2006/main">
               <a:ext uri="{FF2B5EF4-FFF2-40B4-BE49-F238E27FC236}">
-                <a16:creationId xmlns:a16="http://schemas.microsoft.com/office/drawing/2014/main" id="{98C88C08-B94C-4EDA-9F57-63C755223B1B}"/>
+                <a16:creationId xmlns:a16="http://schemas.microsoft.com/office/drawing/2014/main" id="{76E0D5C6-DF9D-4EF5-A077-4EA50AB83867}"/>
               </a:ext>
             </a:extLst>
           </p:cNvPr>
@@ -21003,7 +23554,7 @@
           <p:cNvPr id="15" name="">
             <a:extLst xmlns:a="http://schemas.openxmlformats.org/drawingml/2006/main">
               <a:ext uri="{FF2B5EF4-FFF2-40B4-BE49-F238E27FC236}">
-                <a16:creationId xmlns:a16="http://schemas.microsoft.com/office/drawing/2014/main" id="{5694BBD7-8990-4973-950E-20724BA24A7F}"/>
+                <a16:creationId xmlns:a16="http://schemas.microsoft.com/office/drawing/2014/main" id="{FF6619B4-0F7A-4892-B576-CA870C19D866}"/>
               </a:ext>
             </a:extLst>
           </p:cNvPr>
@@ -21065,7 +23616,7 @@
           <p:cNvPr id="16" name="">
             <a:extLst xmlns:a="http://schemas.openxmlformats.org/drawingml/2006/main">
               <a:ext uri="{FF2B5EF4-FFF2-40B4-BE49-F238E27FC236}">
-                <a16:creationId xmlns:a16="http://schemas.microsoft.com/office/drawing/2014/main" id="{BCC37A6F-28EA-4C84-942B-BA596BD3E0BE}"/>
+                <a16:creationId xmlns:a16="http://schemas.microsoft.com/office/drawing/2014/main" id="{462B44FB-5F4C-4EDC-9072-F9FCBE33D802}"/>
               </a:ext>
             </a:extLst>
           </p:cNvPr>
@@ -21125,7 +23676,7 @@
     </p:spTree>
     <p:extLst>
       <p:ext uri="{BB962C8B-B14F-4D97-AF65-F5344CB8AC3E}">
-        <p14:creationId xmlns:p14="http://schemas.microsoft.com/office/powerpoint/2010/main" val="1749495946"/>
+        <p14:creationId xmlns:p14="http://schemas.microsoft.com/office/powerpoint/2010/main" val="535213129"/>
       </p:ext>
     </p:extLst>
   </p:cSld>
@@ -21156,7 +23707,7 @@
           <p:cNvPr id="23" name="">
             <a:extLst xmlns:a="http://schemas.openxmlformats.org/drawingml/2006/main">
               <a:ext uri="{FF2B5EF4-FFF2-40B4-BE49-F238E27FC236}">
-                <a16:creationId xmlns:a16="http://schemas.microsoft.com/office/drawing/2014/main" id="{7392DE6C-5A62-4DDA-BDDC-9B7525D647D2}"/>
+                <a16:creationId xmlns:a16="http://schemas.microsoft.com/office/drawing/2014/main" id="{CC3982A9-1202-4078-9776-C2B66E86CA3F}"/>
               </a:ext>
             </a:extLst>
           </p:cNvPr>
@@ -21187,7 +23738,7 @@
           <p:cNvPr id="2" name="">
             <a:extLst xmlns:a="http://schemas.openxmlformats.org/drawingml/2006/main">
               <a:ext uri="{FF2B5EF4-FFF2-40B4-BE49-F238E27FC236}">
-                <a16:creationId xmlns:a16="http://schemas.microsoft.com/office/drawing/2014/main" id="{91120F92-1C39-429C-8EB6-B218B126B36D}"/>
+                <a16:creationId xmlns:a16="http://schemas.microsoft.com/office/drawing/2014/main" id="{E9B4B4D0-27E0-42AB-9AD6-3490BF6DD8E1}"/>
               </a:ext>
             </a:extLst>
           </p:cNvPr>
@@ -21249,7 +23800,7 @@
           <p:cNvPr id="3" name="">
             <a:extLst xmlns:a="http://schemas.openxmlformats.org/drawingml/2006/main">
               <a:ext uri="{FF2B5EF4-FFF2-40B4-BE49-F238E27FC236}">
-                <a16:creationId xmlns:a16="http://schemas.microsoft.com/office/drawing/2014/main" id="{3570BE34-69A4-40F7-B84E-7C9BEC388BA1}"/>
+                <a16:creationId xmlns:a16="http://schemas.microsoft.com/office/drawing/2014/main" id="{8EC7CCCC-E433-407C-AF59-4CE6D0F77E7C}"/>
               </a:ext>
             </a:extLst>
           </p:cNvPr>
@@ -21311,7 +23862,7 @@
           <p:cNvPr id="4" name="">
             <a:extLst xmlns:a="http://schemas.openxmlformats.org/drawingml/2006/main">
               <a:ext uri="{FF2B5EF4-FFF2-40B4-BE49-F238E27FC236}">
-                <a16:creationId xmlns:a16="http://schemas.microsoft.com/office/drawing/2014/main" id="{3B26A997-6B7E-496D-82CE-CBF499A224A0}"/>
+                <a16:creationId xmlns:a16="http://schemas.microsoft.com/office/drawing/2014/main" id="{7CFC3751-C456-480C-AF9E-0FF1CCDE3580}"/>
               </a:ext>
             </a:extLst>
           </p:cNvPr>
@@ -21342,7 +23893,7 @@
           <p:cNvPr id="5" name="">
             <a:extLst xmlns:a="http://schemas.openxmlformats.org/drawingml/2006/main">
               <a:ext uri="{FF2B5EF4-FFF2-40B4-BE49-F238E27FC236}">
-                <a16:creationId xmlns:a16="http://schemas.microsoft.com/office/drawing/2014/main" id="{7DBBA09D-BCFE-4DB0-8074-E5D36F0773E8}"/>
+                <a16:creationId xmlns:a16="http://schemas.microsoft.com/office/drawing/2014/main" id="{DA7B668C-BDDF-4086-B9B4-F51FC2E924A7}"/>
               </a:ext>
             </a:extLst>
           </p:cNvPr>
@@ -21404,7 +23955,7 @@
           <p:cNvPr id="6" name="">
             <a:extLst xmlns:a="http://schemas.openxmlformats.org/drawingml/2006/main">
               <a:ext uri="{FF2B5EF4-FFF2-40B4-BE49-F238E27FC236}">
-                <a16:creationId xmlns:a16="http://schemas.microsoft.com/office/drawing/2014/main" id="{AFA2CEC2-0310-462E-A276-8AFE6DB6ABC3}"/>
+                <a16:creationId xmlns:a16="http://schemas.microsoft.com/office/drawing/2014/main" id="{9101E197-7643-4F6C-B5E2-4F65674BB8BE}"/>
               </a:ext>
             </a:extLst>
           </p:cNvPr>
@@ -21466,7 +24017,7 @@
           <p:cNvPr id="7" name="">
             <a:extLst xmlns:a="http://schemas.openxmlformats.org/drawingml/2006/main">
               <a:ext uri="{FF2B5EF4-FFF2-40B4-BE49-F238E27FC236}">
-                <a16:creationId xmlns:a16="http://schemas.microsoft.com/office/drawing/2014/main" id="{AF45E055-2203-4D68-B08F-9D40A2831DCC}"/>
+                <a16:creationId xmlns:a16="http://schemas.microsoft.com/office/drawing/2014/main" id="{A6F0411B-9241-4B71-B9C6-8FA6AE330B88}"/>
               </a:ext>
             </a:extLst>
           </p:cNvPr>
@@ -21528,7 +24079,7 @@
           <p:cNvPr id="8" name="">
             <a:extLst xmlns:a="http://schemas.openxmlformats.org/drawingml/2006/main">
               <a:ext uri="{FF2B5EF4-FFF2-40B4-BE49-F238E27FC236}">
-                <a16:creationId xmlns:a16="http://schemas.microsoft.com/office/drawing/2014/main" id="{73541E9D-558D-4F1D-8004-14F32B260F41}"/>
+                <a16:creationId xmlns:a16="http://schemas.microsoft.com/office/drawing/2014/main" id="{B455F1AD-875E-4743-8229-DD1F03986EF7}"/>
               </a:ext>
             </a:extLst>
           </p:cNvPr>
@@ -21590,7 +24141,7 @@
           <p:cNvPr id="9" name="">
             <a:extLst xmlns:a="http://schemas.openxmlformats.org/drawingml/2006/main">
               <a:ext uri="{FF2B5EF4-FFF2-40B4-BE49-F238E27FC236}">
-                <a16:creationId xmlns:a16="http://schemas.microsoft.com/office/drawing/2014/main" id="{6949B7E6-585D-41F9-A5EF-6674F62C704F}"/>
+                <a16:creationId xmlns:a16="http://schemas.microsoft.com/office/drawing/2014/main" id="{43064D7C-EFE3-4605-BA08-462145B1EA4D}"/>
               </a:ext>
             </a:extLst>
           </p:cNvPr>
@@ -21652,7 +24203,7 @@
           <p:cNvPr id="10" name="">
             <a:extLst xmlns:a="http://schemas.openxmlformats.org/drawingml/2006/main">
               <a:ext uri="{FF2B5EF4-FFF2-40B4-BE49-F238E27FC236}">
-                <a16:creationId xmlns:a16="http://schemas.microsoft.com/office/drawing/2014/main" id="{36243FC6-A6F5-4867-962F-6595D5359381}"/>
+                <a16:creationId xmlns:a16="http://schemas.microsoft.com/office/drawing/2014/main" id="{D3B76CAE-96A1-4202-976A-9637779889A4}"/>
               </a:ext>
             </a:extLst>
           </p:cNvPr>
@@ -21714,7 +24265,7 @@
           <p:cNvPr id="11" name="">
             <a:extLst xmlns:a="http://schemas.openxmlformats.org/drawingml/2006/main">
               <a:ext uri="{FF2B5EF4-FFF2-40B4-BE49-F238E27FC236}">
-                <a16:creationId xmlns:a16="http://schemas.microsoft.com/office/drawing/2014/main" id="{908E45A6-4746-4241-998B-B7DAFB4673CB}"/>
+                <a16:creationId xmlns:a16="http://schemas.microsoft.com/office/drawing/2014/main" id="{915E130D-DAC8-430A-976D-DCBC0CBC9AB6}"/>
               </a:ext>
             </a:extLst>
           </p:cNvPr>
@@ -21776,7 +24327,7 @@
           <p:cNvPr id="12" name="">
             <a:extLst xmlns:a="http://schemas.openxmlformats.org/drawingml/2006/main">
               <a:ext uri="{FF2B5EF4-FFF2-40B4-BE49-F238E27FC236}">
-                <a16:creationId xmlns:a16="http://schemas.microsoft.com/office/drawing/2014/main" id="{8FBE8AA0-A375-4216-8E42-0F86467EBA23}"/>
+                <a16:creationId xmlns:a16="http://schemas.microsoft.com/office/drawing/2014/main" id="{635FF491-87F1-4A87-8487-1385FC82E4B6}"/>
               </a:ext>
             </a:extLst>
           </p:cNvPr>
@@ -21838,7 +24389,7 @@
           <p:cNvPr id="13" name="">
             <a:extLst xmlns:a="http://schemas.openxmlformats.org/drawingml/2006/main">
               <a:ext uri="{FF2B5EF4-FFF2-40B4-BE49-F238E27FC236}">
-                <a16:creationId xmlns:a16="http://schemas.microsoft.com/office/drawing/2014/main" id="{AB999CED-BC87-477C-8BE0-2087660A8F68}"/>
+                <a16:creationId xmlns:a16="http://schemas.microsoft.com/office/drawing/2014/main" id="{09BBC67B-6A6A-4DC0-88CF-A1450E1DDB6E}"/>
               </a:ext>
             </a:extLst>
           </p:cNvPr>
@@ -21900,7 +24451,7 @@
           <p:cNvPr id="14" name="">
             <a:extLst xmlns:a="http://schemas.openxmlformats.org/drawingml/2006/main">
               <a:ext uri="{FF2B5EF4-FFF2-40B4-BE49-F238E27FC236}">
-                <a16:creationId xmlns:a16="http://schemas.microsoft.com/office/drawing/2014/main" id="{6C155468-B1BE-432C-BDF5-4F60C725F61A}"/>
+                <a16:creationId xmlns:a16="http://schemas.microsoft.com/office/drawing/2014/main" id="{5C263E85-C475-4304-9163-FB3685AC186B}"/>
               </a:ext>
             </a:extLst>
           </p:cNvPr>
@@ -21931,7 +24482,7 @@
           <p:cNvPr id="15" name="">
             <a:extLst xmlns:a="http://schemas.openxmlformats.org/drawingml/2006/main">
               <a:ext uri="{FF2B5EF4-FFF2-40B4-BE49-F238E27FC236}">
-                <a16:creationId xmlns:a16="http://schemas.microsoft.com/office/drawing/2014/main" id="{B06F1030-B74B-4A43-9A3E-1988646BB353}"/>
+                <a16:creationId xmlns:a16="http://schemas.microsoft.com/office/drawing/2014/main" id="{B9EE2C4E-8AF1-4653-97DA-329906E53068}"/>
               </a:ext>
             </a:extLst>
           </p:cNvPr>
@@ -21993,7 +24544,7 @@
           <p:cNvPr id="16" name="">
             <a:extLst xmlns:a="http://schemas.openxmlformats.org/drawingml/2006/main">
               <a:ext uri="{FF2B5EF4-FFF2-40B4-BE49-F238E27FC236}">
-                <a16:creationId xmlns:a16="http://schemas.microsoft.com/office/drawing/2014/main" id="{91ABF1D0-BF10-42C0-8C87-1618C48D1C0B}"/>
+                <a16:creationId xmlns:a16="http://schemas.microsoft.com/office/drawing/2014/main" id="{029A1456-CB4C-47C8-8927-93BA2DE25994}"/>
               </a:ext>
             </a:extLst>
           </p:cNvPr>
@@ -22055,7 +24606,7 @@
           <p:cNvPr id="17" name="">
             <a:extLst xmlns:a="http://schemas.openxmlformats.org/drawingml/2006/main">
               <a:ext uri="{FF2B5EF4-FFF2-40B4-BE49-F238E27FC236}">
-                <a16:creationId xmlns:a16="http://schemas.microsoft.com/office/drawing/2014/main" id="{6EFDA44A-A3FD-4511-8CE5-B22F8D9FE3FC}"/>
+                <a16:creationId xmlns:a16="http://schemas.microsoft.com/office/drawing/2014/main" id="{6A563102-B676-40E3-9615-E7B5245F6555}"/>
               </a:ext>
             </a:extLst>
           </p:cNvPr>
@@ -22117,7 +24668,7 @@
           <p:cNvPr id="18" name="">
             <a:extLst xmlns:a="http://schemas.openxmlformats.org/drawingml/2006/main">
               <a:ext uri="{FF2B5EF4-FFF2-40B4-BE49-F238E27FC236}">
-                <a16:creationId xmlns:a16="http://schemas.microsoft.com/office/drawing/2014/main" id="{F5D53B1A-F2CA-4495-86C8-274DA284C132}"/>
+                <a16:creationId xmlns:a16="http://schemas.microsoft.com/office/drawing/2014/main" id="{3408D83D-3B89-4FB3-A42A-A16E0A24D910}"/>
               </a:ext>
             </a:extLst>
           </p:cNvPr>
@@ -22179,7 +24730,7 @@
           <p:cNvPr id="19" name="">
             <a:extLst xmlns:a="http://schemas.openxmlformats.org/drawingml/2006/main">
               <a:ext uri="{FF2B5EF4-FFF2-40B4-BE49-F238E27FC236}">
-                <a16:creationId xmlns:a16="http://schemas.microsoft.com/office/drawing/2014/main" id="{EF09BFEA-EFA5-4BF8-8528-25250C837C3D}"/>
+                <a16:creationId xmlns:a16="http://schemas.microsoft.com/office/drawing/2014/main" id="{206BE97A-FF16-498D-883B-688973178D28}"/>
               </a:ext>
             </a:extLst>
           </p:cNvPr>
@@ -22241,7 +24792,7 @@
           <p:cNvPr id="20" name="">
             <a:extLst xmlns:a="http://schemas.openxmlformats.org/drawingml/2006/main">
               <a:ext uri="{FF2B5EF4-FFF2-40B4-BE49-F238E27FC236}">
-                <a16:creationId xmlns:a16="http://schemas.microsoft.com/office/drawing/2014/main" id="{CFBDFC1C-F675-4315-8C04-6654FECAF0A5}"/>
+                <a16:creationId xmlns:a16="http://schemas.microsoft.com/office/drawing/2014/main" id="{12369343-ACE9-44C7-BF86-DDE089FF4A23}"/>
               </a:ext>
             </a:extLst>
           </p:cNvPr>
@@ -22303,7 +24854,7 @@
           <p:cNvPr id="21" name="">
             <a:extLst xmlns:a="http://schemas.openxmlformats.org/drawingml/2006/main">
               <a:ext uri="{FF2B5EF4-FFF2-40B4-BE49-F238E27FC236}">
-                <a16:creationId xmlns:a16="http://schemas.microsoft.com/office/drawing/2014/main" id="{EB04F2BA-4E94-4E4B-AC2F-B22E62DA93D5}"/>
+                <a16:creationId xmlns:a16="http://schemas.microsoft.com/office/drawing/2014/main" id="{DACFCEDA-0C09-46BA-AFB5-DFDD3943BCDE}"/>
               </a:ext>
             </a:extLst>
           </p:cNvPr>
@@ -22365,7 +24916,7 @@
           <p:cNvPr id="22" name="">
             <a:extLst xmlns:a="http://schemas.openxmlformats.org/drawingml/2006/main">
               <a:ext uri="{FF2B5EF4-FFF2-40B4-BE49-F238E27FC236}">
-                <a16:creationId xmlns:a16="http://schemas.microsoft.com/office/drawing/2014/main" id="{3A97F37D-FD01-4BBA-B5A5-FEB823AB8A74}"/>
+                <a16:creationId xmlns:a16="http://schemas.microsoft.com/office/drawing/2014/main" id="{04141FE5-8C62-4C24-8239-98DEB222C8C3}"/>
               </a:ext>
             </a:extLst>
           </p:cNvPr>
@@ -22425,7 +24976,7 @@
     </p:spTree>
     <p:extLst>
       <p:ext uri="{BB962C8B-B14F-4D97-AF65-F5344CB8AC3E}">
-        <p14:creationId xmlns:p14="http://schemas.microsoft.com/office/powerpoint/2010/main" val="1468224572"/>
+        <p14:creationId xmlns:p14="http://schemas.microsoft.com/office/powerpoint/2010/main" val="343007643"/>
       </p:ext>
     </p:extLst>
   </p:cSld>
@@ -22456,7 +25007,7 @@
           <p:cNvPr id="9" name="">
             <a:extLst xmlns:a="http://schemas.openxmlformats.org/drawingml/2006/main">
               <a:ext uri="{FF2B5EF4-FFF2-40B4-BE49-F238E27FC236}">
-                <a16:creationId xmlns:a16="http://schemas.microsoft.com/office/drawing/2014/main" id="{8A96B78C-608C-4E7C-A0C3-4A08FA322402}"/>
+                <a16:creationId xmlns:a16="http://schemas.microsoft.com/office/drawing/2014/main" id="{30648A17-1A4A-41BB-8223-A189C6B9EC1D}"/>
               </a:ext>
             </a:extLst>
           </p:cNvPr>
@@ -22487,7 +25038,7 @@
           <p:cNvPr id="2" name="">
             <a:extLst xmlns:a="http://schemas.openxmlformats.org/drawingml/2006/main">
               <a:ext uri="{FF2B5EF4-FFF2-40B4-BE49-F238E27FC236}">
-                <a16:creationId xmlns:a16="http://schemas.microsoft.com/office/drawing/2014/main" id="{58FB6794-FDCA-43B8-A0FB-40E4144DCC48}"/>
+                <a16:creationId xmlns:a16="http://schemas.microsoft.com/office/drawing/2014/main" id="{0DE1D534-5313-4BAF-9A6A-26AFE4961A40}"/>
               </a:ext>
             </a:extLst>
           </p:cNvPr>
@@ -22549,7 +25100,7 @@
           <p:cNvPr id="3" name="">
             <a:extLst xmlns:a="http://schemas.openxmlformats.org/drawingml/2006/main">
               <a:ext uri="{FF2B5EF4-FFF2-40B4-BE49-F238E27FC236}">
-                <a16:creationId xmlns:a16="http://schemas.microsoft.com/office/drawing/2014/main" id="{200DD762-AD93-49E1-B952-A7ECF8CF7360}"/>
+                <a16:creationId xmlns:a16="http://schemas.microsoft.com/office/drawing/2014/main" id="{2ED4E04C-9D32-44D7-BFAC-252E9D1ABAEB}"/>
               </a:ext>
             </a:extLst>
           </p:cNvPr>
@@ -22611,7 +25162,7 @@
           <p:cNvPr id="4" name="">
             <a:extLst xmlns:a="http://schemas.openxmlformats.org/drawingml/2006/main">
               <a:ext uri="{FF2B5EF4-FFF2-40B4-BE49-F238E27FC236}">
-                <a16:creationId xmlns:a16="http://schemas.microsoft.com/office/drawing/2014/main" id="{E0E7B424-A30E-4914-806F-E198ABE91061}"/>
+                <a16:creationId xmlns:a16="http://schemas.microsoft.com/office/drawing/2014/main" id="{6C339961-4D43-4087-BDED-ECC852379A4E}"/>
               </a:ext>
             </a:extLst>
           </p:cNvPr>
@@ -22642,7 +25193,7 @@
           <p:cNvPr id="5" name="">
             <a:extLst xmlns:a="http://schemas.openxmlformats.org/drawingml/2006/main">
               <a:ext uri="{FF2B5EF4-FFF2-40B4-BE49-F238E27FC236}">
-                <a16:creationId xmlns:a16="http://schemas.microsoft.com/office/drawing/2014/main" id="{235F149A-8A7E-4EC3-814E-18C01A9CC0F6}"/>
+                <a16:creationId xmlns:a16="http://schemas.microsoft.com/office/drawing/2014/main" id="{16E69B56-2151-428E-8490-4686324E2077}"/>
               </a:ext>
             </a:extLst>
           </p:cNvPr>
@@ -22704,7 +25255,7 @@
           <p:cNvPr id="6" name="">
             <a:extLst xmlns:a="http://schemas.openxmlformats.org/drawingml/2006/main">
               <a:ext uri="{FF2B5EF4-FFF2-40B4-BE49-F238E27FC236}">
-                <a16:creationId xmlns:a16="http://schemas.microsoft.com/office/drawing/2014/main" id="{373FAFAA-1523-4D51-BB73-829352D88429}"/>
+                <a16:creationId xmlns:a16="http://schemas.microsoft.com/office/drawing/2014/main" id="{4523C37F-835B-4218-BDDF-EE48A04CBB18}"/>
               </a:ext>
             </a:extLst>
           </p:cNvPr>
@@ -22766,7 +25317,7 @@
           <p:cNvPr id="7" name="">
             <a:extLst xmlns:a="http://schemas.openxmlformats.org/drawingml/2006/main">
               <a:ext uri="{FF2B5EF4-FFF2-40B4-BE49-F238E27FC236}">
-                <a16:creationId xmlns:a16="http://schemas.microsoft.com/office/drawing/2014/main" id="{D08A0FD7-CC8D-4356-B4C2-ECD575560884}"/>
+                <a16:creationId xmlns:a16="http://schemas.microsoft.com/office/drawing/2014/main" id="{6B547845-3E1E-4CAE-BAF1-67D240081B44}"/>
               </a:ext>
             </a:extLst>
           </p:cNvPr>
@@ -22828,7 +25379,7 @@
           <p:cNvPr id="8" name="">
             <a:extLst xmlns:a="http://schemas.openxmlformats.org/drawingml/2006/main">
               <a:ext uri="{FF2B5EF4-FFF2-40B4-BE49-F238E27FC236}">
-                <a16:creationId xmlns:a16="http://schemas.microsoft.com/office/drawing/2014/main" id="{3051250E-1E59-4E7D-9755-90984DB7C76B}"/>
+                <a16:creationId xmlns:a16="http://schemas.microsoft.com/office/drawing/2014/main" id="{280DE352-AABC-4057-A1CC-4B88D4E18209}"/>
               </a:ext>
             </a:extLst>
           </p:cNvPr>
@@ -22888,7 +25439,7 @@
     </p:spTree>
     <p:extLst>
       <p:ext uri="{BB962C8B-B14F-4D97-AF65-F5344CB8AC3E}">
-        <p14:creationId xmlns:p14="http://schemas.microsoft.com/office/powerpoint/2010/main" val="1617742526"/>
+        <p14:creationId xmlns:p14="http://schemas.microsoft.com/office/powerpoint/2010/main" val="1514623906"/>
       </p:ext>
     </p:extLst>
   </p:cSld>
@@ -22919,7 +25470,7 @@
           <p:cNvPr id="9" name="">
             <a:extLst xmlns:a="http://schemas.openxmlformats.org/drawingml/2006/main">
               <a:ext uri="{FF2B5EF4-FFF2-40B4-BE49-F238E27FC236}">
-                <a16:creationId xmlns:a16="http://schemas.microsoft.com/office/drawing/2014/main" id="{30202277-2836-4A24-8E8D-09BA80BA9217}"/>
+                <a16:creationId xmlns:a16="http://schemas.microsoft.com/office/drawing/2014/main" id="{BF697922-A8D4-420F-9105-AD1F33E9277F}"/>
               </a:ext>
             </a:extLst>
           </p:cNvPr>
@@ -22950,7 +25501,7 @@
           <p:cNvPr id="2" name="">
             <a:extLst xmlns:a="http://schemas.openxmlformats.org/drawingml/2006/main">
               <a:ext uri="{FF2B5EF4-FFF2-40B4-BE49-F238E27FC236}">
-                <a16:creationId xmlns:a16="http://schemas.microsoft.com/office/drawing/2014/main" id="{849CEEE4-DC99-47DD-B024-8D26D6233D2A}"/>
+                <a16:creationId xmlns:a16="http://schemas.microsoft.com/office/drawing/2014/main" id="{9B6175D8-3ABB-4591-B72B-61B8FBCB7D89}"/>
               </a:ext>
             </a:extLst>
           </p:cNvPr>
@@ -23012,7 +25563,7 @@
           <p:cNvPr id="3" name="">
             <a:extLst xmlns:a="http://schemas.openxmlformats.org/drawingml/2006/main">
               <a:ext uri="{FF2B5EF4-FFF2-40B4-BE49-F238E27FC236}">
-                <a16:creationId xmlns:a16="http://schemas.microsoft.com/office/drawing/2014/main" id="{4AE1563B-58A0-4430-9CD1-03C94861C5E5}"/>
+                <a16:creationId xmlns:a16="http://schemas.microsoft.com/office/drawing/2014/main" id="{E00D8A78-2344-4B9A-BC72-82151C80468B}"/>
               </a:ext>
             </a:extLst>
           </p:cNvPr>
@@ -23074,7 +25625,7 @@
           <p:cNvPr id="4" name="">
             <a:extLst xmlns:a="http://schemas.openxmlformats.org/drawingml/2006/main">
               <a:ext uri="{FF2B5EF4-FFF2-40B4-BE49-F238E27FC236}">
-                <a16:creationId xmlns:a16="http://schemas.microsoft.com/office/drawing/2014/main" id="{65EAE9CF-5ECD-43DE-83C7-82C70F6F2DA1}"/>
+                <a16:creationId xmlns:a16="http://schemas.microsoft.com/office/drawing/2014/main" id="{AC5A5C71-B7C8-44F5-BCCF-51468272D7FE}"/>
               </a:ext>
             </a:extLst>
           </p:cNvPr>
@@ -23105,7 +25656,7 @@
           <p:cNvPr id="5" name="">
             <a:extLst xmlns:a="http://schemas.openxmlformats.org/drawingml/2006/main">
               <a:ext uri="{FF2B5EF4-FFF2-40B4-BE49-F238E27FC236}">
-                <a16:creationId xmlns:a16="http://schemas.microsoft.com/office/drawing/2014/main" id="{BE49F797-F9C4-481A-AD0F-0B79B042385B}"/>
+                <a16:creationId xmlns:a16="http://schemas.microsoft.com/office/drawing/2014/main" id="{A5488CEC-459D-4256-B4E4-DA99DEDA24A8}"/>
               </a:ext>
             </a:extLst>
           </p:cNvPr>
@@ -23167,7 +25718,7 @@
           <p:cNvPr id="6" name="">
             <a:extLst xmlns:a="http://schemas.openxmlformats.org/drawingml/2006/main">
               <a:ext uri="{FF2B5EF4-FFF2-40B4-BE49-F238E27FC236}">
-                <a16:creationId xmlns:a16="http://schemas.microsoft.com/office/drawing/2014/main" id="{354542E2-4BB7-4173-B122-1E111943E797}"/>
+                <a16:creationId xmlns:a16="http://schemas.microsoft.com/office/drawing/2014/main" id="{FEAD82DF-E0FD-46F8-98ED-2A928F8D2218}"/>
               </a:ext>
             </a:extLst>
           </p:cNvPr>
@@ -23229,7 +25780,7 @@
           <p:cNvPr id="7" name="">
             <a:extLst xmlns:a="http://schemas.openxmlformats.org/drawingml/2006/main">
               <a:ext uri="{FF2B5EF4-FFF2-40B4-BE49-F238E27FC236}">
-                <a16:creationId xmlns:a16="http://schemas.microsoft.com/office/drawing/2014/main" id="{B58996B9-D4F3-4711-9D81-2FEA25F81DF8}"/>
+                <a16:creationId xmlns:a16="http://schemas.microsoft.com/office/drawing/2014/main" id="{18BA0DE2-4FCC-4DF6-B871-EC8B0FF6CBD6}"/>
               </a:ext>
             </a:extLst>
           </p:cNvPr>
@@ -23291,7 +25842,7 @@
           <p:cNvPr id="8" name="">
             <a:extLst xmlns:a="http://schemas.openxmlformats.org/drawingml/2006/main">
               <a:ext uri="{FF2B5EF4-FFF2-40B4-BE49-F238E27FC236}">
-                <a16:creationId xmlns:a16="http://schemas.microsoft.com/office/drawing/2014/main" id="{3F198B1D-A238-4279-A395-6AB4B74A398B}"/>
+                <a16:creationId xmlns:a16="http://schemas.microsoft.com/office/drawing/2014/main" id="{354F8883-5ED9-4387-8834-8668FEEB7CD9}"/>
               </a:ext>
             </a:extLst>
           </p:cNvPr>
@@ -23351,7 +25902,7 @@
     </p:spTree>
     <p:extLst>
       <p:ext uri="{BB962C8B-B14F-4D97-AF65-F5344CB8AC3E}">
-        <p14:creationId xmlns:p14="http://schemas.microsoft.com/office/powerpoint/2010/main" val="976954139"/>
+        <p14:creationId xmlns:p14="http://schemas.microsoft.com/office/powerpoint/2010/main" val="995053802"/>
       </p:ext>
     </p:extLst>
   </p:cSld>
@@ -23382,7 +25933,7 @@
           <p:cNvPr id="38" name="">
             <a:extLst xmlns:a="http://schemas.openxmlformats.org/drawingml/2006/main">
               <a:ext uri="{FF2B5EF4-FFF2-40B4-BE49-F238E27FC236}">
-                <a16:creationId xmlns:a16="http://schemas.microsoft.com/office/drawing/2014/main" id="{79958318-E603-4D23-81E0-0A54B4B946F5}"/>
+                <a16:creationId xmlns:a16="http://schemas.microsoft.com/office/drawing/2014/main" id="{37524C33-441A-47EB-8C6D-9787953B6104}"/>
               </a:ext>
             </a:extLst>
           </p:cNvPr>
@@ -23413,7 +25964,7 @@
           <p:cNvPr id="2" name="">
             <a:extLst xmlns:a="http://schemas.openxmlformats.org/drawingml/2006/main">
               <a:ext uri="{FF2B5EF4-FFF2-40B4-BE49-F238E27FC236}">
-                <a16:creationId xmlns:a16="http://schemas.microsoft.com/office/drawing/2014/main" id="{7DF8A820-95E8-4054-9205-E71FF2DACD48}"/>
+                <a16:creationId xmlns:a16="http://schemas.microsoft.com/office/drawing/2014/main" id="{C8F14098-3275-4078-8BEB-9106F8882E66}"/>
               </a:ext>
             </a:extLst>
           </p:cNvPr>
@@ -23475,7 +26026,7 @@
           <p:cNvPr id="3" name="">
             <a:extLst xmlns:a="http://schemas.openxmlformats.org/drawingml/2006/main">
               <a:ext uri="{FF2B5EF4-FFF2-40B4-BE49-F238E27FC236}">
-                <a16:creationId xmlns:a16="http://schemas.microsoft.com/office/drawing/2014/main" id="{B284BA15-AE92-47FD-9372-EE00823A3989}"/>
+                <a16:creationId xmlns:a16="http://schemas.microsoft.com/office/drawing/2014/main" id="{DD4B52FE-9770-494A-9BBA-923B8DCC7EBB}"/>
               </a:ext>
             </a:extLst>
           </p:cNvPr>
@@ -23537,7 +26088,7 @@
           <p:cNvPr id="4" name="">
             <a:extLst xmlns:a="http://schemas.openxmlformats.org/drawingml/2006/main">
               <a:ext uri="{FF2B5EF4-FFF2-40B4-BE49-F238E27FC236}">
-                <a16:creationId xmlns:a16="http://schemas.microsoft.com/office/drawing/2014/main" id="{527CFC67-EFC6-4890-92D5-773A563732E4}"/>
+                <a16:creationId xmlns:a16="http://schemas.microsoft.com/office/drawing/2014/main" id="{ECF30B69-C1CD-4F3B-8949-D359B6B8F851}"/>
               </a:ext>
             </a:extLst>
           </p:cNvPr>
@@ -23568,7 +26119,7 @@
           <p:cNvPr id="5" name="">
             <a:extLst xmlns:a="http://schemas.openxmlformats.org/drawingml/2006/main">
               <a:ext uri="{FF2B5EF4-FFF2-40B4-BE49-F238E27FC236}">
-                <a16:creationId xmlns:a16="http://schemas.microsoft.com/office/drawing/2014/main" id="{1861A5FB-DCCE-45AB-93EA-A0AFFCBC31B8}"/>
+                <a16:creationId xmlns:a16="http://schemas.microsoft.com/office/drawing/2014/main" id="{1102A6CF-EA52-4869-8F6F-05FB62D6587D}"/>
               </a:ext>
             </a:extLst>
           </p:cNvPr>
@@ -23630,7 +26181,7 @@
           <p:cNvPr id="6" name="">
             <a:extLst xmlns:a="http://schemas.openxmlformats.org/drawingml/2006/main">
               <a:ext uri="{FF2B5EF4-FFF2-40B4-BE49-F238E27FC236}">
-                <a16:creationId xmlns:a16="http://schemas.microsoft.com/office/drawing/2014/main" id="{777D5FE6-79B5-4FEE-AF7F-F7AE3A7B521C}"/>
+                <a16:creationId xmlns:a16="http://schemas.microsoft.com/office/drawing/2014/main" id="{123FD182-196A-42EF-82C6-1BF129131B13}"/>
               </a:ext>
             </a:extLst>
           </p:cNvPr>
@@ -23692,7 +26243,7 @@
           <p:cNvPr id="7" name="">
             <a:extLst xmlns:a="http://schemas.openxmlformats.org/drawingml/2006/main">
               <a:ext uri="{FF2B5EF4-FFF2-40B4-BE49-F238E27FC236}">
-                <a16:creationId xmlns:a16="http://schemas.microsoft.com/office/drawing/2014/main" id="{9DE16FBE-98CF-46DD-86DE-6E025CB4DF0E}"/>
+                <a16:creationId xmlns:a16="http://schemas.microsoft.com/office/drawing/2014/main" id="{CE3BCA4F-EB12-4C2D-B75D-77535C337A68}"/>
               </a:ext>
             </a:extLst>
           </p:cNvPr>
@@ -23725,7 +26276,7 @@
           <p:cNvPr id="8" name="">
             <a:extLst xmlns:a="http://schemas.openxmlformats.org/drawingml/2006/main">
               <a:ext uri="{FF2B5EF4-FFF2-40B4-BE49-F238E27FC236}">
-                <a16:creationId xmlns:a16="http://schemas.microsoft.com/office/drawing/2014/main" id="{94FC20C4-CD49-4530-94AF-22694C9D2817}"/>
+                <a16:creationId xmlns:a16="http://schemas.microsoft.com/office/drawing/2014/main" id="{596B1193-3B5B-474C-931D-38367F4F6C83}"/>
               </a:ext>
             </a:extLst>
           </p:cNvPr>
@@ -23787,7 +26338,7 @@
           <p:cNvPr id="9" name="">
             <a:extLst xmlns:a="http://schemas.openxmlformats.org/drawingml/2006/main">
               <a:ext uri="{FF2B5EF4-FFF2-40B4-BE49-F238E27FC236}">
-                <a16:creationId xmlns:a16="http://schemas.microsoft.com/office/drawing/2014/main" id="{5984B6D2-AC3F-4471-9273-9DF354627DE6}"/>
+                <a16:creationId xmlns:a16="http://schemas.microsoft.com/office/drawing/2014/main" id="{CF101843-889A-4E95-AFCF-1429F6C52E89}"/>
               </a:ext>
             </a:extLst>
           </p:cNvPr>
@@ -23820,7 +26371,7 @@
           <p:cNvPr id="10" name="">
             <a:extLst xmlns:a="http://schemas.openxmlformats.org/drawingml/2006/main">
               <a:ext uri="{FF2B5EF4-FFF2-40B4-BE49-F238E27FC236}">
-                <a16:creationId xmlns:a16="http://schemas.microsoft.com/office/drawing/2014/main" id="{BA4FF6B4-1D5A-4695-988B-270B8BC9201C}"/>
+                <a16:creationId xmlns:a16="http://schemas.microsoft.com/office/drawing/2014/main" id="{19DD9742-9B5B-4872-8A8B-D792D375E0F8}"/>
               </a:ext>
             </a:extLst>
           </p:cNvPr>
@@ -23882,7 +26433,7 @@
           <p:cNvPr id="11" name="">
             <a:extLst xmlns:a="http://schemas.openxmlformats.org/drawingml/2006/main">
               <a:ext uri="{FF2B5EF4-FFF2-40B4-BE49-F238E27FC236}">
-                <a16:creationId xmlns:a16="http://schemas.microsoft.com/office/drawing/2014/main" id="{9AAFCF56-F53E-4992-A3AF-672171EA9D2A}"/>
+                <a16:creationId xmlns:a16="http://schemas.microsoft.com/office/drawing/2014/main" id="{1225C430-5634-4382-9F47-298EA6B83ACC}"/>
               </a:ext>
             </a:extLst>
           </p:cNvPr>
@@ -23915,7 +26466,7 @@
           <p:cNvPr id="12" name="">
             <a:extLst xmlns:a="http://schemas.openxmlformats.org/drawingml/2006/main">
               <a:ext uri="{FF2B5EF4-FFF2-40B4-BE49-F238E27FC236}">
-                <a16:creationId xmlns:a16="http://schemas.microsoft.com/office/drawing/2014/main" id="{84E8AA93-B944-48DA-9CD9-0409361EDDF5}"/>
+                <a16:creationId xmlns:a16="http://schemas.microsoft.com/office/drawing/2014/main" id="{68C9F862-EE01-40F8-916D-DD101EFF8DD8}"/>
               </a:ext>
             </a:extLst>
           </p:cNvPr>
@@ -23977,7 +26528,7 @@
           <p:cNvPr id="13" name="">
             <a:extLst xmlns:a="http://schemas.openxmlformats.org/drawingml/2006/main">
               <a:ext uri="{FF2B5EF4-FFF2-40B4-BE49-F238E27FC236}">
-                <a16:creationId xmlns:a16="http://schemas.microsoft.com/office/drawing/2014/main" id="{DF010301-5117-442E-92E1-02BAE9ED6AF7}"/>
+                <a16:creationId xmlns:a16="http://schemas.microsoft.com/office/drawing/2014/main" id="{3AC6F438-9E0C-4594-BA48-7D976914AEE8}"/>
               </a:ext>
             </a:extLst>
           </p:cNvPr>
@@ -24010,7 +26561,7 @@
           <p:cNvPr id="14" name="">
             <a:extLst xmlns:a="http://schemas.openxmlformats.org/drawingml/2006/main">
               <a:ext uri="{FF2B5EF4-FFF2-40B4-BE49-F238E27FC236}">
-                <a16:creationId xmlns:a16="http://schemas.microsoft.com/office/drawing/2014/main" id="{FFBCA749-6AF4-4437-A323-D9E7220312B2}"/>
+                <a16:creationId xmlns:a16="http://schemas.microsoft.com/office/drawing/2014/main" id="{462C474F-D02F-4841-94F3-581F60B6007E}"/>
               </a:ext>
             </a:extLst>
           </p:cNvPr>
@@ -24072,7 +26623,7 @@
           <p:cNvPr id="15" name="">
             <a:extLst xmlns:a="http://schemas.openxmlformats.org/drawingml/2006/main">
               <a:ext uri="{FF2B5EF4-FFF2-40B4-BE49-F238E27FC236}">
-                <a16:creationId xmlns:a16="http://schemas.microsoft.com/office/drawing/2014/main" id="{4345A38B-09F4-44D5-9C3C-D5D30CC5183F}"/>
+                <a16:creationId xmlns:a16="http://schemas.microsoft.com/office/drawing/2014/main" id="{6E83B11F-C86C-42D5-B156-A2FB3CDA04AF}"/>
               </a:ext>
             </a:extLst>
           </p:cNvPr>
@@ -24105,7 +26656,7 @@
           <p:cNvPr id="16" name="">
             <a:extLst xmlns:a="http://schemas.openxmlformats.org/drawingml/2006/main">
               <a:ext uri="{FF2B5EF4-FFF2-40B4-BE49-F238E27FC236}">
-                <a16:creationId xmlns:a16="http://schemas.microsoft.com/office/drawing/2014/main" id="{BFB3F92C-85A3-4256-BD00-C51112CFDE63}"/>
+                <a16:creationId xmlns:a16="http://schemas.microsoft.com/office/drawing/2014/main" id="{14447EC7-20A2-4FB9-AC4D-C56D02117B33}"/>
               </a:ext>
             </a:extLst>
           </p:cNvPr>
@@ -24167,7 +26718,7 @@
           <p:cNvPr id="17" name="">
             <a:extLst xmlns:a="http://schemas.openxmlformats.org/drawingml/2006/main">
               <a:ext uri="{FF2B5EF4-FFF2-40B4-BE49-F238E27FC236}">
-                <a16:creationId xmlns:a16="http://schemas.microsoft.com/office/drawing/2014/main" id="{22F10AF4-A6AD-4B6D-9F4A-D533E0F7E521}"/>
+                <a16:creationId xmlns:a16="http://schemas.microsoft.com/office/drawing/2014/main" id="{625863FB-3782-4D50-B286-68D305316B40}"/>
               </a:ext>
             </a:extLst>
           </p:cNvPr>
@@ -24200,7 +26751,7 @@
           <p:cNvPr id="18" name="">
             <a:extLst xmlns:a="http://schemas.openxmlformats.org/drawingml/2006/main">
               <a:ext uri="{FF2B5EF4-FFF2-40B4-BE49-F238E27FC236}">
-                <a16:creationId xmlns:a16="http://schemas.microsoft.com/office/drawing/2014/main" id="{B1DA7447-F997-4556-8B1A-3D1A238C8B90}"/>
+                <a16:creationId xmlns:a16="http://schemas.microsoft.com/office/drawing/2014/main" id="{D5611036-AC3C-4C7F-9273-A7AA861C48A5}"/>
               </a:ext>
             </a:extLst>
           </p:cNvPr>
@@ -24262,7 +26813,7 @@
           <p:cNvPr id="19" name="">
             <a:extLst xmlns:a="http://schemas.openxmlformats.org/drawingml/2006/main">
               <a:ext uri="{FF2B5EF4-FFF2-40B4-BE49-F238E27FC236}">
-                <a16:creationId xmlns:a16="http://schemas.microsoft.com/office/drawing/2014/main" id="{1CC28D8C-4C45-4B61-9D6C-43048F6A6515}"/>
+                <a16:creationId xmlns:a16="http://schemas.microsoft.com/office/drawing/2014/main" id="{F522C6C0-5774-45C1-BAA4-58249B287C2D}"/>
               </a:ext>
             </a:extLst>
           </p:cNvPr>
@@ -24295,7 +26846,7 @@
           <p:cNvPr id="20" name="">
             <a:extLst xmlns:a="http://schemas.openxmlformats.org/drawingml/2006/main">
               <a:ext uri="{FF2B5EF4-FFF2-40B4-BE49-F238E27FC236}">
-                <a16:creationId xmlns:a16="http://schemas.microsoft.com/office/drawing/2014/main" id="{C7D9E02A-0EF5-4A42-B260-D454E06CCE82}"/>
+                <a16:creationId xmlns:a16="http://schemas.microsoft.com/office/drawing/2014/main" id="{C3479176-D6FD-4AB6-9A84-92D0CF5897BE}"/>
               </a:ext>
             </a:extLst>
           </p:cNvPr>
@@ -24357,7 +26908,7 @@
           <p:cNvPr id="21" name="">
             <a:extLst xmlns:a="http://schemas.openxmlformats.org/drawingml/2006/main">
               <a:ext uri="{FF2B5EF4-FFF2-40B4-BE49-F238E27FC236}">
-                <a16:creationId xmlns:a16="http://schemas.microsoft.com/office/drawing/2014/main" id="{749001C3-54A4-44D6-ADB0-F8585D7D2654}"/>
+                <a16:creationId xmlns:a16="http://schemas.microsoft.com/office/drawing/2014/main" id="{25F7103A-20E1-4B88-B876-B73D8EB13C12}"/>
               </a:ext>
             </a:extLst>
           </p:cNvPr>
@@ -24390,7 +26941,7 @@
           <p:cNvPr id="22" name="">
             <a:extLst xmlns:a="http://schemas.openxmlformats.org/drawingml/2006/main">
               <a:ext uri="{FF2B5EF4-FFF2-40B4-BE49-F238E27FC236}">
-                <a16:creationId xmlns:a16="http://schemas.microsoft.com/office/drawing/2014/main" id="{BDB84F72-AC94-443A-8403-400F1273ECBB}"/>
+                <a16:creationId xmlns:a16="http://schemas.microsoft.com/office/drawing/2014/main" id="{EE583CA4-5A95-484D-BDD1-F3C6FD6DF6DC}"/>
               </a:ext>
             </a:extLst>
           </p:cNvPr>
@@ -24452,7 +27003,7 @@
           <p:cNvPr id="23" name="">
             <a:extLst xmlns:a="http://schemas.openxmlformats.org/drawingml/2006/main">
               <a:ext uri="{FF2B5EF4-FFF2-40B4-BE49-F238E27FC236}">
-                <a16:creationId xmlns:a16="http://schemas.microsoft.com/office/drawing/2014/main" id="{7B31F53B-EB33-43A1-A8C6-42D2813100E5}"/>
+                <a16:creationId xmlns:a16="http://schemas.microsoft.com/office/drawing/2014/main" id="{12025D78-BAF2-45D7-A101-05617EF86892}"/>
               </a:ext>
             </a:extLst>
           </p:cNvPr>
@@ -24485,7 +27036,7 @@
           <p:cNvPr id="24" name="">
             <a:extLst xmlns:a="http://schemas.openxmlformats.org/drawingml/2006/main">
               <a:ext uri="{FF2B5EF4-FFF2-40B4-BE49-F238E27FC236}">
-                <a16:creationId xmlns:a16="http://schemas.microsoft.com/office/drawing/2014/main" id="{AEAFF4A0-EDDF-4221-829F-C40CD700F585}"/>
+                <a16:creationId xmlns:a16="http://schemas.microsoft.com/office/drawing/2014/main" id="{DB1FA54A-717E-4AD7-94D2-FC3BA60036E0}"/>
               </a:ext>
             </a:extLst>
           </p:cNvPr>
@@ -24547,7 +27098,7 @@
           <p:cNvPr id="25" name="">
             <a:extLst xmlns:a="http://schemas.openxmlformats.org/drawingml/2006/main">
               <a:ext uri="{FF2B5EF4-FFF2-40B4-BE49-F238E27FC236}">
-                <a16:creationId xmlns:a16="http://schemas.microsoft.com/office/drawing/2014/main" id="{3607422C-C5BF-42AE-8D99-DEA31FAC9499}"/>
+                <a16:creationId xmlns:a16="http://schemas.microsoft.com/office/drawing/2014/main" id="{7C07CA54-D1ED-48FC-AD2C-9AA17DBFD503}"/>
               </a:ext>
             </a:extLst>
           </p:cNvPr>
@@ -24580,7 +27131,7 @@
           <p:cNvPr id="26" name="">
             <a:extLst xmlns:a="http://schemas.openxmlformats.org/drawingml/2006/main">
               <a:ext uri="{FF2B5EF4-FFF2-40B4-BE49-F238E27FC236}">
-                <a16:creationId xmlns:a16="http://schemas.microsoft.com/office/drawing/2014/main" id="{9A1597D7-2051-4920-9229-D50F1ACE54BF}"/>
+                <a16:creationId xmlns:a16="http://schemas.microsoft.com/office/drawing/2014/main" id="{7A1D19D9-1CD8-4963-9DDA-F1956E7BD030}"/>
               </a:ext>
             </a:extLst>
           </p:cNvPr>
@@ -24642,7 +27193,7 @@
           <p:cNvPr id="27" name="">
             <a:extLst xmlns:a="http://schemas.openxmlformats.org/drawingml/2006/main">
               <a:ext uri="{FF2B5EF4-FFF2-40B4-BE49-F238E27FC236}">
-                <a16:creationId xmlns:a16="http://schemas.microsoft.com/office/drawing/2014/main" id="{8005518E-94B8-4A00-A0A4-A246AE8A28A4}"/>
+                <a16:creationId xmlns:a16="http://schemas.microsoft.com/office/drawing/2014/main" id="{F631E1C4-5B41-456D-8A53-7A34B3BC7959}"/>
               </a:ext>
             </a:extLst>
           </p:cNvPr>
@@ -24675,7 +27226,7 @@
           <p:cNvPr id="28" name="">
             <a:extLst xmlns:a="http://schemas.openxmlformats.org/drawingml/2006/main">
               <a:ext uri="{FF2B5EF4-FFF2-40B4-BE49-F238E27FC236}">
-                <a16:creationId xmlns:a16="http://schemas.microsoft.com/office/drawing/2014/main" id="{FA9C8EC1-5198-4CBB-A15C-10BF373495D0}"/>
+                <a16:creationId xmlns:a16="http://schemas.microsoft.com/office/drawing/2014/main" id="{DA9B4F3F-2447-4503-8074-C0340A389917}"/>
               </a:ext>
             </a:extLst>
           </p:cNvPr>
@@ -24737,7 +27288,7 @@
           <p:cNvPr id="29" name="">
             <a:extLst xmlns:a="http://schemas.openxmlformats.org/drawingml/2006/main">
               <a:ext uri="{FF2B5EF4-FFF2-40B4-BE49-F238E27FC236}">
-                <a16:creationId xmlns:a16="http://schemas.microsoft.com/office/drawing/2014/main" id="{9757D3F3-D812-4642-A8F9-2DECAFF9EC45}"/>
+                <a16:creationId xmlns:a16="http://schemas.microsoft.com/office/drawing/2014/main" id="{C4C340BF-1DD8-43D2-A5BD-26C8575380F7}"/>
               </a:ext>
             </a:extLst>
           </p:cNvPr>
@@ -24770,7 +27321,7 @@
           <p:cNvPr id="30" name="">
             <a:extLst xmlns:a="http://schemas.openxmlformats.org/drawingml/2006/main">
               <a:ext uri="{FF2B5EF4-FFF2-40B4-BE49-F238E27FC236}">
-                <a16:creationId xmlns:a16="http://schemas.microsoft.com/office/drawing/2014/main" id="{E3050192-68DB-4486-8755-49431E9FA0F4}"/>
+                <a16:creationId xmlns:a16="http://schemas.microsoft.com/office/drawing/2014/main" id="{6D1A4D19-F950-4A65-9EB0-83F7CECD09C4}"/>
               </a:ext>
             </a:extLst>
           </p:cNvPr>
@@ -24832,7 +27383,7 @@
           <p:cNvPr id="31" name="">
             <a:extLst xmlns:a="http://schemas.openxmlformats.org/drawingml/2006/main">
               <a:ext uri="{FF2B5EF4-FFF2-40B4-BE49-F238E27FC236}">
-                <a16:creationId xmlns:a16="http://schemas.microsoft.com/office/drawing/2014/main" id="{C2341CF6-BDDC-4B00-9297-A2CA7D3CE994}"/>
+                <a16:creationId xmlns:a16="http://schemas.microsoft.com/office/drawing/2014/main" id="{3E4AEE8D-5404-4C1D-BAC7-208A8B479018}"/>
               </a:ext>
             </a:extLst>
           </p:cNvPr>
@@ -24865,7 +27416,7 @@
           <p:cNvPr id="32" name="">
             <a:extLst xmlns:a="http://schemas.openxmlformats.org/drawingml/2006/main">
               <a:ext uri="{FF2B5EF4-FFF2-40B4-BE49-F238E27FC236}">
-                <a16:creationId xmlns:a16="http://schemas.microsoft.com/office/drawing/2014/main" id="{399DF8B8-D306-4ADB-818E-71C0310AD97A}"/>
+                <a16:creationId xmlns:a16="http://schemas.microsoft.com/office/drawing/2014/main" id="{1C4C5574-EFE5-478C-B73F-1AE4872E76EF}"/>
               </a:ext>
             </a:extLst>
           </p:cNvPr>
@@ -24927,7 +27478,7 @@
           <p:cNvPr id="33" name="">
             <a:extLst xmlns:a="http://schemas.openxmlformats.org/drawingml/2006/main">
               <a:ext uri="{FF2B5EF4-FFF2-40B4-BE49-F238E27FC236}">
-                <a16:creationId xmlns:a16="http://schemas.microsoft.com/office/drawing/2014/main" id="{40FF1E53-6C3C-4947-9747-FF2FCE95FACA}"/>
+                <a16:creationId xmlns:a16="http://schemas.microsoft.com/office/drawing/2014/main" id="{24B6139F-3344-4191-9A45-F6628D613376}"/>
               </a:ext>
             </a:extLst>
           </p:cNvPr>
@@ -24960,7 +27511,7 @@
           <p:cNvPr id="34" name="">
             <a:extLst xmlns:a="http://schemas.openxmlformats.org/drawingml/2006/main">
               <a:ext uri="{FF2B5EF4-FFF2-40B4-BE49-F238E27FC236}">
-                <a16:creationId xmlns:a16="http://schemas.microsoft.com/office/drawing/2014/main" id="{F17BE9E7-4083-4C51-810A-088A86C12F4A}"/>
+                <a16:creationId xmlns:a16="http://schemas.microsoft.com/office/drawing/2014/main" id="{A53D16B0-3F75-48F8-99EE-625483394EE2}"/>
               </a:ext>
             </a:extLst>
           </p:cNvPr>
@@ -25022,7 +27573,7 @@
           <p:cNvPr id="35" name="">
             <a:extLst xmlns:a="http://schemas.openxmlformats.org/drawingml/2006/main">
               <a:ext uri="{FF2B5EF4-FFF2-40B4-BE49-F238E27FC236}">
-                <a16:creationId xmlns:a16="http://schemas.microsoft.com/office/drawing/2014/main" id="{5D9B1D32-242E-424B-AF86-E8DFDA8EE722}"/>
+                <a16:creationId xmlns:a16="http://schemas.microsoft.com/office/drawing/2014/main" id="{196B82FD-EDC9-49F3-8FAB-EC90953ECB0E}"/>
               </a:ext>
             </a:extLst>
           </p:cNvPr>
@@ -25055,7 +27606,7 @@
           <p:cNvPr id="36" name="">
             <a:extLst xmlns:a="http://schemas.openxmlformats.org/drawingml/2006/main">
               <a:ext uri="{FF2B5EF4-FFF2-40B4-BE49-F238E27FC236}">
-                <a16:creationId xmlns:a16="http://schemas.microsoft.com/office/drawing/2014/main" id="{7C1EC0BA-5CED-4D62-B06E-B4257B28817B}"/>
+                <a16:creationId xmlns:a16="http://schemas.microsoft.com/office/drawing/2014/main" id="{578BAC35-C9DE-4D4C-ABBE-C2983D9F0F3A}"/>
               </a:ext>
             </a:extLst>
           </p:cNvPr>
@@ -25117,7 +27668,7 @@
           <p:cNvPr id="37" name="">
             <a:extLst xmlns:a="http://schemas.openxmlformats.org/drawingml/2006/main">
               <a:ext uri="{FF2B5EF4-FFF2-40B4-BE49-F238E27FC236}">
-                <a16:creationId xmlns:a16="http://schemas.microsoft.com/office/drawing/2014/main" id="{DD41FEA6-2CFF-4128-9B9D-30CE0A4CDA52}"/>
+                <a16:creationId xmlns:a16="http://schemas.microsoft.com/office/drawing/2014/main" id="{EF5DC4A3-D9A5-4CCA-B97B-084E242379D4}"/>
               </a:ext>
             </a:extLst>
           </p:cNvPr>
@@ -25177,7 +27728,7 @@
     </p:spTree>
     <p:extLst>
       <p:ext uri="{BB962C8B-B14F-4D97-AF65-F5344CB8AC3E}">
-        <p14:creationId xmlns:p14="http://schemas.microsoft.com/office/powerpoint/2010/main" val="1575155470"/>
+        <p14:creationId xmlns:p14="http://schemas.microsoft.com/office/powerpoint/2010/main" val="1285369690"/>
       </p:ext>
     </p:extLst>
   </p:cSld>
@@ -25208,7 +27759,7 @@
           <p:cNvPr id="17" name="">
             <a:extLst xmlns:a="http://schemas.openxmlformats.org/drawingml/2006/main">
               <a:ext uri="{FF2B5EF4-FFF2-40B4-BE49-F238E27FC236}">
-                <a16:creationId xmlns:a16="http://schemas.microsoft.com/office/drawing/2014/main" id="{EB70218A-B61D-4C49-9B5E-35C865F04DF4}"/>
+                <a16:creationId xmlns:a16="http://schemas.microsoft.com/office/drawing/2014/main" id="{21D77B45-0866-4B72-B724-1BE7553AAB29}"/>
               </a:ext>
             </a:extLst>
           </p:cNvPr>
@@ -25239,7 +27790,7 @@
           <p:cNvPr id="2" name="">
             <a:extLst xmlns:a="http://schemas.openxmlformats.org/drawingml/2006/main">
               <a:ext uri="{FF2B5EF4-FFF2-40B4-BE49-F238E27FC236}">
-                <a16:creationId xmlns:a16="http://schemas.microsoft.com/office/drawing/2014/main" id="{E4609C02-84F9-4739-B1DE-53744D7F5A49}"/>
+                <a16:creationId xmlns:a16="http://schemas.microsoft.com/office/drawing/2014/main" id="{4F0277D6-2341-4A47-BF48-C0DA19C81D9C}"/>
               </a:ext>
             </a:extLst>
           </p:cNvPr>
@@ -25301,7 +27852,7 @@
           <p:cNvPr id="3" name="">
             <a:extLst xmlns:a="http://schemas.openxmlformats.org/drawingml/2006/main">
               <a:ext uri="{FF2B5EF4-FFF2-40B4-BE49-F238E27FC236}">
-                <a16:creationId xmlns:a16="http://schemas.microsoft.com/office/drawing/2014/main" id="{F9FE4997-A889-4B93-AE12-EE8CD9A3ED37}"/>
+                <a16:creationId xmlns:a16="http://schemas.microsoft.com/office/drawing/2014/main" id="{22D12703-8AF9-4F56-974B-FBBB2678A6C4}"/>
               </a:ext>
             </a:extLst>
           </p:cNvPr>
@@ -25363,7 +27914,7 @@
           <p:cNvPr id="4" name="">
             <a:extLst xmlns:a="http://schemas.openxmlformats.org/drawingml/2006/main">
               <a:ext uri="{FF2B5EF4-FFF2-40B4-BE49-F238E27FC236}">
-                <a16:creationId xmlns:a16="http://schemas.microsoft.com/office/drawing/2014/main" id="{A9E5C5A5-0FA5-4950-A085-7E60A85EEA20}"/>
+                <a16:creationId xmlns:a16="http://schemas.microsoft.com/office/drawing/2014/main" id="{E2FA767A-A5D0-4A5C-84C7-4FA9D6BCB9FD}"/>
               </a:ext>
             </a:extLst>
           </p:cNvPr>
@@ -25394,7 +27945,7 @@
           <p:cNvPr id="5" name="">
             <a:extLst xmlns:a="http://schemas.openxmlformats.org/drawingml/2006/main">
               <a:ext uri="{FF2B5EF4-FFF2-40B4-BE49-F238E27FC236}">
-                <a16:creationId xmlns:a16="http://schemas.microsoft.com/office/drawing/2014/main" id="{A6B77709-DFDF-4879-9698-0821606B9F8C}"/>
+                <a16:creationId xmlns:a16="http://schemas.microsoft.com/office/drawing/2014/main" id="{D9203932-F646-4A31-BC68-BF53859331D7}"/>
               </a:ext>
             </a:extLst>
           </p:cNvPr>
@@ -25456,7 +28007,7 @@
           <p:cNvPr id="6" name="">
             <a:extLst xmlns:a="http://schemas.openxmlformats.org/drawingml/2006/main">
               <a:ext uri="{FF2B5EF4-FFF2-40B4-BE49-F238E27FC236}">
-                <a16:creationId xmlns:a16="http://schemas.microsoft.com/office/drawing/2014/main" id="{3CE4F1DF-E2D0-4DB6-8AE7-ECEC43144E64}"/>
+                <a16:creationId xmlns:a16="http://schemas.microsoft.com/office/drawing/2014/main" id="{50EB2CF6-826F-4FD1-9A8D-9BE087904DAF}"/>
               </a:ext>
             </a:extLst>
           </p:cNvPr>
@@ -25518,7 +28069,7 @@
           <p:cNvPr id="7" name="">
             <a:extLst xmlns:a="http://schemas.openxmlformats.org/drawingml/2006/main">
               <a:ext uri="{FF2B5EF4-FFF2-40B4-BE49-F238E27FC236}">
-                <a16:creationId xmlns:a16="http://schemas.microsoft.com/office/drawing/2014/main" id="{56BECDF7-02D5-4195-86C3-100A85192C03}"/>
+                <a16:creationId xmlns:a16="http://schemas.microsoft.com/office/drawing/2014/main" id="{CB13E452-07F1-4A40-B59A-E18D70BFB712}"/>
               </a:ext>
             </a:extLst>
           </p:cNvPr>
@@ -25580,7 +28131,7 @@
           <p:cNvPr id="8" name="">
             <a:extLst xmlns:a="http://schemas.openxmlformats.org/drawingml/2006/main">
               <a:ext uri="{FF2B5EF4-FFF2-40B4-BE49-F238E27FC236}">
-                <a16:creationId xmlns:a16="http://schemas.microsoft.com/office/drawing/2014/main" id="{375F44E0-8340-42F5-966D-2D90C2CF9F2A}"/>
+                <a16:creationId xmlns:a16="http://schemas.microsoft.com/office/drawing/2014/main" id="{28D8C9C7-C7FE-4B85-ABDD-302DA5BFF6CE}"/>
               </a:ext>
             </a:extLst>
           </p:cNvPr>
@@ -25613,7 +28164,7 @@
           <p:cNvPr id="9" name="">
             <a:extLst xmlns:a="http://schemas.openxmlformats.org/drawingml/2006/main">
               <a:ext uri="{FF2B5EF4-FFF2-40B4-BE49-F238E27FC236}">
-                <a16:creationId xmlns:a16="http://schemas.microsoft.com/office/drawing/2014/main" id="{F120380E-2FAF-4F80-A8EA-2111682F3E87}"/>
+                <a16:creationId xmlns:a16="http://schemas.microsoft.com/office/drawing/2014/main" id="{D9EE25AF-80F2-4AA9-AB48-F7E69B916BF1}"/>
               </a:ext>
             </a:extLst>
           </p:cNvPr>
@@ -25675,7 +28226,7 @@
           <p:cNvPr id="10" name="">
             <a:extLst xmlns:a="http://schemas.openxmlformats.org/drawingml/2006/main">
               <a:ext uri="{FF2B5EF4-FFF2-40B4-BE49-F238E27FC236}">
-                <a16:creationId xmlns:a16="http://schemas.microsoft.com/office/drawing/2014/main" id="{91914806-7B56-453D-8E96-837144624285}"/>
+                <a16:creationId xmlns:a16="http://schemas.microsoft.com/office/drawing/2014/main" id="{BAE33A9E-D512-4BD5-ACF4-AA2D1C48BD97}"/>
               </a:ext>
             </a:extLst>
           </p:cNvPr>
@@ -25737,7 +28288,7 @@
           <p:cNvPr id="11" name="">
             <a:extLst xmlns:a="http://schemas.openxmlformats.org/drawingml/2006/main">
               <a:ext uri="{FF2B5EF4-FFF2-40B4-BE49-F238E27FC236}">
-                <a16:creationId xmlns:a16="http://schemas.microsoft.com/office/drawing/2014/main" id="{590CB296-035E-4AE4-8DD2-57281166D7A6}"/>
+                <a16:creationId xmlns:a16="http://schemas.microsoft.com/office/drawing/2014/main" id="{F7595434-4604-4309-86CC-68084000FACC}"/>
               </a:ext>
             </a:extLst>
           </p:cNvPr>
@@ -25770,7 +28321,7 @@
           <p:cNvPr id="12" name="">
             <a:extLst xmlns:a="http://schemas.openxmlformats.org/drawingml/2006/main">
               <a:ext uri="{FF2B5EF4-FFF2-40B4-BE49-F238E27FC236}">
-                <a16:creationId xmlns:a16="http://schemas.microsoft.com/office/drawing/2014/main" id="{5EADEFD6-3B7C-471A-AA89-75521A51C822}"/>
+                <a16:creationId xmlns:a16="http://schemas.microsoft.com/office/drawing/2014/main" id="{3B663E56-E070-4EF5-B667-C9A1F7073AE0}"/>
               </a:ext>
             </a:extLst>
           </p:cNvPr>
@@ -25832,7 +28383,7 @@
           <p:cNvPr id="13" name="">
             <a:extLst xmlns:a="http://schemas.openxmlformats.org/drawingml/2006/main">
               <a:ext uri="{FF2B5EF4-FFF2-40B4-BE49-F238E27FC236}">
-                <a16:creationId xmlns:a16="http://schemas.microsoft.com/office/drawing/2014/main" id="{813EE49E-4E60-465B-B14E-A5A7007D51AE}"/>
+                <a16:creationId xmlns:a16="http://schemas.microsoft.com/office/drawing/2014/main" id="{75E88C6E-78CA-40B2-98D3-B1B0E1D50096}"/>
               </a:ext>
             </a:extLst>
           </p:cNvPr>
@@ -25894,7 +28445,7 @@
           <p:cNvPr id="14" name="">
             <a:extLst xmlns:a="http://schemas.openxmlformats.org/drawingml/2006/main">
               <a:ext uri="{FF2B5EF4-FFF2-40B4-BE49-F238E27FC236}">
-                <a16:creationId xmlns:a16="http://schemas.microsoft.com/office/drawing/2014/main" id="{A00B5C3D-7309-419C-99FC-7D65B0078CC5}"/>
+                <a16:creationId xmlns:a16="http://schemas.microsoft.com/office/drawing/2014/main" id="{8882DC25-5B2A-418B-8CD8-44CF62F209CA}"/>
               </a:ext>
             </a:extLst>
           </p:cNvPr>
@@ -25927,7 +28478,7 @@
           <p:cNvPr id="15" name="">
             <a:extLst xmlns:a="http://schemas.openxmlformats.org/drawingml/2006/main">
               <a:ext uri="{FF2B5EF4-FFF2-40B4-BE49-F238E27FC236}">
-                <a16:creationId xmlns:a16="http://schemas.microsoft.com/office/drawing/2014/main" id="{587C7BC2-181C-4D16-994F-2F0F37AD26C0}"/>
+                <a16:creationId xmlns:a16="http://schemas.microsoft.com/office/drawing/2014/main" id="{C61BC5AC-0493-42CA-9DE6-63F84BAC38F3}"/>
               </a:ext>
             </a:extLst>
           </p:cNvPr>
@@ -25989,7 +28540,7 @@
           <p:cNvPr id="16" name="">
             <a:extLst xmlns:a="http://schemas.openxmlformats.org/drawingml/2006/main">
               <a:ext uri="{FF2B5EF4-FFF2-40B4-BE49-F238E27FC236}">
-                <a16:creationId xmlns:a16="http://schemas.microsoft.com/office/drawing/2014/main" id="{7849B4E4-8641-4B2D-9B94-2108518BAC54}"/>
+                <a16:creationId xmlns:a16="http://schemas.microsoft.com/office/drawing/2014/main" id="{4BEFC139-9BB7-473E-88EE-C6BE98FDDF0F}"/>
               </a:ext>
             </a:extLst>
           </p:cNvPr>
@@ -26049,7 +28600,7 @@
     </p:spTree>
     <p:extLst>
       <p:ext uri="{BB962C8B-B14F-4D97-AF65-F5344CB8AC3E}">
-        <p14:creationId xmlns:p14="http://schemas.microsoft.com/office/powerpoint/2010/main" val="1973901092"/>
+        <p14:creationId xmlns:p14="http://schemas.microsoft.com/office/powerpoint/2010/main" val="2141301263"/>
       </p:ext>
     </p:extLst>
   </p:cSld>
